--- a/lecons/USA/Population Geography/14_USA_POP_L10_Factors_of_Population_Growth.pptx
+++ b/lecons/USA/Population Geography/14_USA_POP_L10_Factors_of_Population_Growth.pptx
@@ -67,12 +67,9 @@
     <p:sldId id="315" r:id="rId61"/>
     <p:sldId id="316" r:id="rId62"/>
     <p:sldId id="317" r:id="rId63"/>
-    <p:sldId id="318" r:id="rId64"/>
-    <p:sldId id="319" r:id="rId65"/>
-    <p:sldId id="320" r:id="rId66"/>
   </p:sldIdLst>
   <p:notesMasterIdLst>
-    <p:notesMasterId r:id="rId67"/>
+    <p:notesMasterId r:id="rId64"/>
   </p:notesMasterIdLst>
   <p:sldSz cx="12192000" cy="6858000"/>
   <p:notesSz cx="6858000" cy="12192000"/>
@@ -3206,7 +3203,7 @@
           <a:p>
             <a:r>
               <a:rPr lang="en-US" dirty="0"/>
-              <a:t>We continue with the definitions. On this slide we have Non-demographic factors. Write each point on a new line, with the key term first, and explain it in your own words when we revise. When you finish, we go to the next slide.</a:t>
+              <a:t>We continue with the definitions. On this slide we have Non-demographic factors and Demographic explosion. Write each point on a new line, with the key term first, and explain it in your own words when we revise. When you finish, we go to the next slide.</a:t>
             </a:r>
             <a:endParaRPr lang="en-US" dirty="0"/>
           </a:p>
@@ -3382,7 +3379,7 @@
           <a:p>
             <a:r>
               <a:rPr lang="en-US" dirty="0"/>
-              <a:t>Let us copy Demographic Factors. The demographic factors of population growth are the following. Copy the point on Birth rate on the left, then draw the diagram on the right: two groups of factors. Give it a title and label it clearly.</a:t>
+              <a:t>Let us copy Demographic Factors. Population growth is influenced by the following demographic factors. Copy the point on Birth rate on the left, then draw the diagram on the right: demographic and non-demographic factors. Give it a title and label it clearly.</a:t>
             </a:r>
             <a:endParaRPr lang="en-US" dirty="0"/>
           </a:p>
@@ -3558,7 +3555,7 @@
           <a:p>
             <a:r>
               <a:rPr lang="en-US" dirty="0"/>
-              <a:t>We continue with Demographic Factors. On this slide we have Death rate. Write each point on a new line, with the key term first, and explain it in your own words when we revise. When you finish, we go to the next slide.</a:t>
+              <a:t>We continue with Demographic Factors. Copy the point on Death rate: write the key term first, then its explanation.</a:t>
             </a:r>
             <a:endParaRPr lang="en-US" dirty="0"/>
           </a:p>
@@ -3646,7 +3643,7 @@
           <a:p>
             <a:r>
               <a:rPr lang="en-US" dirty="0"/>
-              <a:t>We continue with Demographic Factors. On this slide we have Migration. Write each point on a new line, with the key term first, and explain it in your own words when we revise.</a:t>
+              <a:t>We continue with Demographic Factors. Copy the point on Migration: write the key term first, then its explanation.</a:t>
             </a:r>
             <a:endParaRPr lang="en-US" dirty="0"/>
           </a:p>
@@ -3734,7 +3731,7 @@
           <a:p>
             <a:r>
               <a:rPr lang="en-US" dirty="0"/>
-              <a:t>Copy the point on Population structure on the left, then draw the diagram on the right: young and old populations. Give it a title and label it clearly.</a:t>
+              <a:t>Copy the point on Structure and marital behaviour on the left, then draw the diagram on the right: youthful and ageing populations. Give it a title and label it clearly.</a:t>
             </a:r>
             <a:endParaRPr lang="en-US" dirty="0"/>
           </a:p>
@@ -3822,7 +3819,7 @@
           <a:p>
             <a:r>
               <a:rPr lang="en-US" dirty="0"/>
-              <a:t>We continue with Demographic Factors. On this slide we have Marital behaviour. Write each point on a new line, with the key term first, and explain it in your own words when we revise.</a:t>
+              <a:t>Let us copy Non-Demographic Factors. Population growth is also influenced by the following non-demographic factors. Copy the point on Wars and natural disasters on the left, then draw the diagram on the right: refugees. Give it a title and label it clearly.</a:t>
             </a:r>
             <a:endParaRPr lang="en-US" dirty="0"/>
           </a:p>
@@ -3910,7 +3907,7 @@
           <a:p>
             <a:r>
               <a:rPr lang="en-US" dirty="0"/>
-              <a:t>Let us copy Non-Demographic Factors. The non-demographic factors of population growth are the following. Copy the point on Wars and conflicts on the left, then draw the diagram on the right: refugees. Give it a title and label it clearly.</a:t>
+              <a:t>We continue with Non-Demographic Factors. Copy the point on Epidemics and medical services: write the key term first, then its explanation.</a:t>
             </a:r>
             <a:endParaRPr lang="en-US" dirty="0"/>
           </a:p>
@@ -3998,7 +3995,7 @@
           <a:p>
             <a:r>
               <a:rPr lang="en-US" dirty="0"/>
-              <a:t>We continue with Non-Demographic Factors. On this slide we have Epidemics. Write each point on a new line, with the key term first, and explain it in your own words when we revise.</a:t>
+              <a:t>Copy the point on Government policies on the left, then draw the diagram on the right: the one-child policy. Give it a title and label it clearly.</a:t>
             </a:r>
             <a:endParaRPr lang="en-US" dirty="0"/>
           </a:p>
@@ -4086,7 +4083,7 @@
           <a:p>
             <a:r>
               <a:rPr lang="en-US" dirty="0"/>
-              <a:t>Copy the point on Natural disasters on the left, then draw the diagram on the right: a flood. Give it a title and label it clearly.</a:t>
+              <a:t>We continue with Non-Demographic Factors. Copy the point on Economic conditions: write the key term first, then its explanation.</a:t>
             </a:r>
             <a:endParaRPr lang="en-US" dirty="0"/>
           </a:p>
@@ -4174,7 +4171,7 @@
           <a:p>
             <a:r>
               <a:rPr lang="en-US" dirty="0"/>
-              <a:t>We continue with Non-Demographic Factors. On this slide we have Medical services. Write each point on a new line, with the key term first, and explain it in your own words when we revise.</a:t>
+              <a:t>Let us copy How the Factors Influence Growth in Various Regions. The factors produce the following growth patterns in different regions. Copy the point on Developing regions on the left, then draw the diagram on the right: growth by region. Give it a title and label it clearly.</a:t>
             </a:r>
             <a:endParaRPr lang="en-US" dirty="0"/>
           </a:p>
@@ -4262,7 +4259,7 @@
           <a:p>
             <a:r>
               <a:rPr lang="en-US" dirty="0"/>
-              <a:t>Copy the point on Government policies on the left, then draw the diagram on the right: a family policy poster. Give it a title and label it clearly.</a:t>
+              <a:t>We continue with How the Factors Influence Growth in Various Regions. Copy the point on Developed regions: write the key term first, then its explanation.</a:t>
             </a:r>
             <a:endParaRPr lang="en-US" dirty="0"/>
           </a:p>
@@ -4350,7 +4347,7 @@
           <a:p>
             <a:r>
               <a:rPr lang="en-US" dirty="0"/>
-              <a:t>We continue with Non-Demographic Factors. On this slide we have Economic conditions. Write each point on a new line, with the key term first, and explain it in your own words when we revise.</a:t>
+              <a:t>We continue with How the Factors Influence Growth in Various Regions. Copy the point on Emerging economies: write the key term first, then its explanation.</a:t>
             </a:r>
             <a:endParaRPr lang="en-US" dirty="0"/>
           </a:p>
@@ -4526,7 +4523,7 @@
           <a:p>
             <a:r>
               <a:rPr lang="en-US" dirty="0"/>
-              <a:t>Let us copy How the Factors Act in Various Regions. The factors produce the following growth patterns. Copy the point on Developing regions on the left, then draw the diagram on the right: growth patterns by region. Give it a title and label it clearly.</a:t>
+              <a:t>We continue with How the Factors Influence Growth in Various Regions. Copy the point on Unstable regions: write the key term first, then its explanation.</a:t>
             </a:r>
             <a:endParaRPr lang="en-US" dirty="0"/>
           </a:p>
@@ -4614,7 +4611,7 @@
           <a:p>
             <a:r>
               <a:rPr lang="en-US" dirty="0"/>
-              <a:t>We continue with How the Factors Act in Various Regions. On this slide we have Developed regions. Write each point on a new line, with the key term first, and explain it in your own words when we revise. When you finish, we go to the next slide.</a:t>
+              <a:t>Now let us check what you have understood. Question 1: Distinguish between demographic and non-demographic factors with one example each. Answer in your exercise book.</a:t>
             </a:r>
             <a:endParaRPr lang="en-US" dirty="0"/>
           </a:p>
@@ -4702,7 +4699,7 @@
           <a:p>
             <a:r>
               <a:rPr lang="en-US" dirty="0"/>
-              <a:t>We continue with How the Factors Act in Various Regions. On this slide we have Emerging economies. Write each point on a new line, with the key term first, and explain it in your own words when we revise. When you finish, we go to the next slide.</a:t>
+              <a:t>The expected answer is: demographic factors belong to the population itself, e.g. the birth rate; non-demographic factors are external, e.g. wars. If you got it right, well done.</a:t>
             </a:r>
             <a:endParaRPr lang="en-US" dirty="0"/>
           </a:p>
@@ -4790,7 +4787,7 @@
           <a:p>
             <a:r>
               <a:rPr lang="en-US" dirty="0"/>
-              <a:t>We continue with How the Factors Act in Various Regions. On this slide we have Unstable regions. Write each point on a new line, with the key term first, and explain it in your own words when we revise.</a:t>
+              <a:t>Now let us check what you have understood. Question 2: Why do developed countries often depend on immigration? Answer in your exercise book.</a:t>
             </a:r>
             <a:endParaRPr lang="en-US" dirty="0"/>
           </a:p>
@@ -4878,7 +4875,7 @@
           <a:p>
             <a:r>
               <a:rPr lang="en-US" dirty="0"/>
-              <a:t>Now let us check what you have understood. Question 1: Distinguish between demographic and non-demographic factors with one example each. Answer in your exercise book.</a:t>
+              <a:t>The expected answer is: their low birth rates and ageing populations cause shortages of workers. If you got it right, well done.</a:t>
             </a:r>
             <a:endParaRPr lang="en-US" dirty="0"/>
           </a:p>
@@ -4966,7 +4963,7 @@
           <a:p>
             <a:r>
               <a:rPr lang="en-US" dirty="0"/>
-              <a:t>The expected answer is: demographic factors belong to the population itself, e.g. the birth rate; non-demographic factors are external, e.g. wars. If you got it right, well done.</a:t>
+              <a:t>For those who need more practice, fill in the blanks in your exercise book. The answers are: number 1, non-demographic; number 2, anti; number 3, dividend.</a:t>
             </a:r>
             <a:endParaRPr lang="en-US" dirty="0"/>
           </a:p>
@@ -5054,7 +5051,7 @@
           <a:p>
             <a:r>
               <a:rPr lang="en-US" dirty="0"/>
-              <a:t>Now let us check what you have understood. Question 2: Why do developed countries often depend on immigration? Answer in your exercise book.</a:t>
+              <a:t>For your homework: Define a pro-natalist policy. We shall correct it at the beginning of our next lesson.</a:t>
             </a:r>
             <a:endParaRPr lang="en-US" dirty="0"/>
           </a:p>
@@ -5142,7 +5139,7 @@
           <a:p>
             <a:r>
               <a:rPr lang="en-US" dirty="0"/>
-              <a:t>The expected answer is: their low birth rates and ageing populations cause shortages of workers. If you got it right, well done.</a:t>
+              <a:t>Our next lesson will be on Lesson 11: The Modern Demographic Explosion and Population Policies. Thank you for your attention, and see you next time.</a:t>
             </a:r>
             <a:endParaRPr lang="en-US" dirty="0"/>
           </a:p>
@@ -5230,7 +5227,7 @@
           <a:p>
             <a:r>
               <a:rPr lang="en-US" dirty="0"/>
-              <a:t>For those who need more practice, fill in the blanks in your exercise book. The answers are: number 1, non-demographic; number 2, anti; number 3, dividend.</a:t>
+              <a:t>Let us play the bilingual game. I say a word in English, and you give me the French word. Then we do the reverse.</a:t>
             </a:r>
             <a:endParaRPr lang="en-US" dirty="0"/>
           </a:p>
@@ -5318,7 +5315,7 @@
           <a:p>
             <a:r>
               <a:rPr lang="en-US" dirty="0"/>
-              <a:t>For your homework: Define a pro-natalist policy. We shall correct it at the beginning of our next lesson.</a:t>
+              <a:t>I record this information in the official logbook of the class after the lesson.</a:t>
             </a:r>
             <a:endParaRPr lang="en-US" dirty="0"/>
           </a:p>
@@ -5494,7 +5491,7 @@
           <a:p>
             <a:r>
               <a:rPr lang="en-US" dirty="0"/>
-              <a:t>Our next lesson will be on Lesson 11: The Modern Demographic Explosion and Population Policies. Thank you for your attention, and see you next time.</a:t>
+              <a:t>I complete the second page of the logbook: the matter taught, the evaluation, the homework and the attendance.</a:t>
             </a:r>
             <a:endParaRPr lang="en-US" dirty="0"/>
           </a:p>
@@ -5582,7 +5579,7 @@
           <a:p>
             <a:r>
               <a:rPr lang="en-US" dirty="0"/>
-              <a:t>Let us play the bilingual game. I say a word in English, and you give me the French word. Then we do the reverse.</a:t>
+              <a:t>This slide is for me, the teacher: it gives the timing of the lesson and what to do if the projector is not available.</a:t>
             </a:r>
             <a:endParaRPr lang="en-US" dirty="0"/>
           </a:p>
@@ -5670,7 +5667,7 @@
           <a:p>
             <a:r>
               <a:rPr lang="en-US" dirty="0"/>
-              <a:t>I record this information in the official logbook of the class after the lesson.</a:t>
+              <a:t>These are the references and picture credits used to prepare this lesson.</a:t>
             </a:r>
             <a:endParaRPr lang="en-US" dirty="0"/>
           </a:p>
@@ -5694,270 +5691,6 @@
             <a:fld id="{F7021451-1387-4CA6-816F-3879F97B5CBC}" type="slidenum">
               <a:rPr lang="en-US"/>
               <a:t>62</a:t>
-            </a:fld>
-            <a:endParaRPr lang="en-US"/>
-          </a:p>
-        </p:txBody>
-      </p:sp>
-    </p:spTree>
-    <p:extLst>
-      <p:ext uri="{BB962C8B-B14F-4D97-AF65-F5344CB8AC3E}">
-        <p14:creationId xmlns:p14="http://schemas.microsoft.com/office/powerpoint/2010/main" val="1024086991"/>
-      </p:ext>
-    </p:extLst>
-  </p:cSld>
-  <p:clrMapOvr>
-    <a:masterClrMapping/>
-  </p:clrMapOvr>
-</p:notes>
-</file>
-
-<file path=ppt/notesSlides/notesSlide63.xml><?xml version="1.0" encoding="utf-8"?>
-<p:notes xmlns:a="http://schemas.openxmlformats.org/drawingml/2006/main" xmlns:r="http://schemas.openxmlformats.org/officeDocument/2006/relationships" xmlns:p="http://schemas.openxmlformats.org/presentationml/2006/main">
-  <p:cSld>
-    <p:spTree>
-      <p:nvGrpSpPr>
-        <p:cNvPr id="1" name=""/>
-        <p:cNvGrpSpPr/>
-        <p:nvPr/>
-      </p:nvGrpSpPr>
-      <p:grpSpPr>
-        <a:xfrm>
-          <a:off x="0" y="0"/>
-          <a:ext cx="0" cy="0"/>
-          <a:chOff x="0" y="0"/>
-          <a:chExt cx="0" cy="0"/>
-        </a:xfrm>
-      </p:grpSpPr>
-      <p:sp>
-        <p:nvSpPr>
-          <p:cNvPr id="2" name="Slide Image Placeholder 1"/>
-          <p:cNvSpPr>
-            <a:spLocks noGrp="1" noRot="1" noChangeAspect="1"/>
-          </p:cNvSpPr>
-          <p:nvPr>
-            <p:ph type="sldImg"/>
-          </p:nvPr>
-        </p:nvSpPr>
-        <p:spPr/>
-      </p:sp>
-      <p:sp>
-        <p:nvSpPr>
-          <p:cNvPr id="3" name="Notes Placeholder 2"/>
-          <p:cNvSpPr>
-            <a:spLocks noGrp="1"/>
-          </p:cNvSpPr>
-          <p:nvPr>
-            <p:ph type="body" idx="1"/>
-          </p:nvPr>
-        </p:nvSpPr>
-        <p:spPr/>
-        <p:txBody>
-          <a:bodyPr/>
-          <a:lstStyle/>
-          <a:p>
-            <a:r>
-              <a:rPr lang="en-US" dirty="0"/>
-              <a:t>I complete the second page of the logbook: the matter taught, the evaluation, the homework and the attendance.</a:t>
-            </a:r>
-            <a:endParaRPr lang="en-US" dirty="0"/>
-          </a:p>
-        </p:txBody>
-      </p:sp>
-      <p:sp>
-        <p:nvSpPr>
-          <p:cNvPr id="4" name="Slide Number Placeholder 3"/>
-          <p:cNvSpPr>
-            <a:spLocks noGrp="1"/>
-          </p:cNvSpPr>
-          <p:nvPr>
-            <p:ph type="sldNum" sz="quarter" idx="10"/>
-          </p:nvPr>
-        </p:nvSpPr>
-        <p:spPr/>
-        <p:txBody>
-          <a:bodyPr/>
-          <a:lstStyle/>
-          <a:p>
-            <a:fld id="{F7021451-1387-4CA6-816F-3879F97B5CBC}" type="slidenum">
-              <a:rPr lang="en-US"/>
-              <a:t>63</a:t>
-            </a:fld>
-            <a:endParaRPr lang="en-US"/>
-          </a:p>
-        </p:txBody>
-      </p:sp>
-    </p:spTree>
-    <p:extLst>
-      <p:ext uri="{BB962C8B-B14F-4D97-AF65-F5344CB8AC3E}">
-        <p14:creationId xmlns:p14="http://schemas.microsoft.com/office/powerpoint/2010/main" val="1024086991"/>
-      </p:ext>
-    </p:extLst>
-  </p:cSld>
-  <p:clrMapOvr>
-    <a:masterClrMapping/>
-  </p:clrMapOvr>
-</p:notes>
-</file>
-
-<file path=ppt/notesSlides/notesSlide64.xml><?xml version="1.0" encoding="utf-8"?>
-<p:notes xmlns:a="http://schemas.openxmlformats.org/drawingml/2006/main" xmlns:r="http://schemas.openxmlformats.org/officeDocument/2006/relationships" xmlns:p="http://schemas.openxmlformats.org/presentationml/2006/main">
-  <p:cSld>
-    <p:spTree>
-      <p:nvGrpSpPr>
-        <p:cNvPr id="1" name=""/>
-        <p:cNvGrpSpPr/>
-        <p:nvPr/>
-      </p:nvGrpSpPr>
-      <p:grpSpPr>
-        <a:xfrm>
-          <a:off x="0" y="0"/>
-          <a:ext cx="0" cy="0"/>
-          <a:chOff x="0" y="0"/>
-          <a:chExt cx="0" cy="0"/>
-        </a:xfrm>
-      </p:grpSpPr>
-      <p:sp>
-        <p:nvSpPr>
-          <p:cNvPr id="2" name="Slide Image Placeholder 1"/>
-          <p:cNvSpPr>
-            <a:spLocks noGrp="1" noRot="1" noChangeAspect="1"/>
-          </p:cNvSpPr>
-          <p:nvPr>
-            <p:ph type="sldImg"/>
-          </p:nvPr>
-        </p:nvSpPr>
-        <p:spPr/>
-      </p:sp>
-      <p:sp>
-        <p:nvSpPr>
-          <p:cNvPr id="3" name="Notes Placeholder 2"/>
-          <p:cNvSpPr>
-            <a:spLocks noGrp="1"/>
-          </p:cNvSpPr>
-          <p:nvPr>
-            <p:ph type="body" idx="1"/>
-          </p:nvPr>
-        </p:nvSpPr>
-        <p:spPr/>
-        <p:txBody>
-          <a:bodyPr/>
-          <a:lstStyle/>
-          <a:p>
-            <a:r>
-              <a:rPr lang="en-US" dirty="0"/>
-              <a:t>This slide is for me, the teacher: it gives the timing of the lesson and what to do if the projector is not available.</a:t>
-            </a:r>
-            <a:endParaRPr lang="en-US" dirty="0"/>
-          </a:p>
-        </p:txBody>
-      </p:sp>
-      <p:sp>
-        <p:nvSpPr>
-          <p:cNvPr id="4" name="Slide Number Placeholder 3"/>
-          <p:cNvSpPr>
-            <a:spLocks noGrp="1"/>
-          </p:cNvSpPr>
-          <p:nvPr>
-            <p:ph type="sldNum" sz="quarter" idx="10"/>
-          </p:nvPr>
-        </p:nvSpPr>
-        <p:spPr/>
-        <p:txBody>
-          <a:bodyPr/>
-          <a:lstStyle/>
-          <a:p>
-            <a:fld id="{F7021451-1387-4CA6-816F-3879F97B5CBC}" type="slidenum">
-              <a:rPr lang="en-US"/>
-              <a:t>64</a:t>
-            </a:fld>
-            <a:endParaRPr lang="en-US"/>
-          </a:p>
-        </p:txBody>
-      </p:sp>
-    </p:spTree>
-    <p:extLst>
-      <p:ext uri="{BB962C8B-B14F-4D97-AF65-F5344CB8AC3E}">
-        <p14:creationId xmlns:p14="http://schemas.microsoft.com/office/powerpoint/2010/main" val="1024086991"/>
-      </p:ext>
-    </p:extLst>
-  </p:cSld>
-  <p:clrMapOvr>
-    <a:masterClrMapping/>
-  </p:clrMapOvr>
-</p:notes>
-</file>
-
-<file path=ppt/notesSlides/notesSlide65.xml><?xml version="1.0" encoding="utf-8"?>
-<p:notes xmlns:a="http://schemas.openxmlformats.org/drawingml/2006/main" xmlns:r="http://schemas.openxmlformats.org/officeDocument/2006/relationships" xmlns:p="http://schemas.openxmlformats.org/presentationml/2006/main">
-  <p:cSld>
-    <p:spTree>
-      <p:nvGrpSpPr>
-        <p:cNvPr id="1" name=""/>
-        <p:cNvGrpSpPr/>
-        <p:nvPr/>
-      </p:nvGrpSpPr>
-      <p:grpSpPr>
-        <a:xfrm>
-          <a:off x="0" y="0"/>
-          <a:ext cx="0" cy="0"/>
-          <a:chOff x="0" y="0"/>
-          <a:chExt cx="0" cy="0"/>
-        </a:xfrm>
-      </p:grpSpPr>
-      <p:sp>
-        <p:nvSpPr>
-          <p:cNvPr id="2" name="Slide Image Placeholder 1"/>
-          <p:cNvSpPr>
-            <a:spLocks noGrp="1" noRot="1" noChangeAspect="1"/>
-          </p:cNvSpPr>
-          <p:nvPr>
-            <p:ph type="sldImg"/>
-          </p:nvPr>
-        </p:nvSpPr>
-        <p:spPr/>
-      </p:sp>
-      <p:sp>
-        <p:nvSpPr>
-          <p:cNvPr id="3" name="Notes Placeholder 2"/>
-          <p:cNvSpPr>
-            <a:spLocks noGrp="1"/>
-          </p:cNvSpPr>
-          <p:nvPr>
-            <p:ph type="body" idx="1"/>
-          </p:nvPr>
-        </p:nvSpPr>
-        <p:spPr/>
-        <p:txBody>
-          <a:bodyPr/>
-          <a:lstStyle/>
-          <a:p>
-            <a:r>
-              <a:rPr lang="en-US" dirty="0"/>
-              <a:t>These are the references and picture credits used to prepare this lesson.</a:t>
-            </a:r>
-            <a:endParaRPr lang="en-US" dirty="0"/>
-          </a:p>
-        </p:txBody>
-      </p:sp>
-      <p:sp>
-        <p:nvSpPr>
-          <p:cNvPr id="4" name="Slide Number Placeholder 3"/>
-          <p:cNvSpPr>
-            <a:spLocks noGrp="1"/>
-          </p:cNvSpPr>
-          <p:nvPr>
-            <p:ph type="sldNum" sz="quarter" idx="10"/>
-          </p:nvPr>
-        </p:nvSpPr>
-        <p:spPr/>
-        <p:txBody>
-          <a:bodyPr/>
-          <a:lstStyle/>
-          <a:p>
-            <a:fld id="{F7021451-1387-4CA6-816F-3879F97B5CBC}" type="slidenum">
-              <a:rPr lang="en-US"/>
-              <a:t>65</a:t>
             </a:fld>
             <a:endParaRPr lang="en-US"/>
           </a:p>
@@ -15187,7 +14920,7 @@
         <p:spPr>
           <a:xfrm>
             <a:off x="0" y="658368"/>
-            <a:ext cx="5120640" cy="5833872"/>
+            <a:ext cx="3840480" cy="5833872"/>
           </a:xfrm>
           <a:prstGeom prst="rect">
             <a:avLst/>
@@ -15202,8 +14935,8 @@
         </p:nvSpPr>
         <p:spPr>
           <a:xfrm>
-            <a:off x="5349240" y="1005840"/>
-            <a:ext cx="6522415" cy="731520"/>
+            <a:off x="4069080" y="1005840"/>
+            <a:ext cx="7802575" cy="731520"/>
           </a:xfrm>
           <a:prstGeom prst="rect">
             <a:avLst/>
@@ -15243,8 +14976,8 @@
         </p:nvSpPr>
         <p:spPr>
           <a:xfrm>
-            <a:off x="5349240" y="1783080"/>
-            <a:ext cx="6522415" cy="4663440"/>
+            <a:off x="4069080" y="1783080"/>
+            <a:ext cx="7802575" cy="4663440"/>
           </a:xfrm>
           <a:prstGeom prst="rect">
             <a:avLst/>
@@ -15289,6 +15022,43 @@
                 <a:cs typeface="Times New Roman" pitchFamily="34" charset="-120"/>
               </a:rPr>
               <a:t>They are external events and conditions that affect population, such as wars, epidemics and policies.</a:t>
+            </a:r>
+            <a:endParaRPr lang="en-US" sz="4000" dirty="0"/>
+          </a:p>
+          <a:p>
+            <a:pPr algn="l" indent="0" marL="0">
+              <a:spcAft>
+                <a:spcPts val="800"/>
+              </a:spcAft>
+              <a:buNone/>
+            </a:pPr>
+            <a:r>
+              <a:rPr lang="en-US" sz="4000" b="1" dirty="0">
+                <a:solidFill>
+                  <a:srgbClr val="111111"/>
+                </a:solidFill>
+                <a:latin typeface="Times New Roman" pitchFamily="34" charset="0"/>
+                <a:ea typeface="Times New Roman" pitchFamily="34" charset="-122"/>
+                <a:cs typeface="Times New Roman" pitchFamily="34" charset="-120"/>
+              </a:rPr>
+              <a:t>Demographic explosion: </a:t>
+            </a:r>
+            <a:pPr algn="l" indent="0" marL="0">
+              <a:spcAft>
+                <a:spcPts val="800"/>
+              </a:spcAft>
+              <a:buNone/>
+            </a:pPr>
+            <a:r>
+              <a:rPr lang="en-US" sz="4000" dirty="0">
+                <a:solidFill>
+                  <a:srgbClr val="111111"/>
+                </a:solidFill>
+                <a:latin typeface="Times New Roman" pitchFamily="34" charset="0"/>
+                <a:ea typeface="Times New Roman" pitchFamily="34" charset="-122"/>
+                <a:cs typeface="Times New Roman" pitchFamily="34" charset="-120"/>
+              </a:rPr>
+              <a:t>It is a very rapid and sudden growth of population.</a:t>
             </a:r>
             <a:endParaRPr lang="en-US" sz="4000" dirty="0"/>
           </a:p>
@@ -15677,7 +15447,7 @@
                 <a:ea typeface="Times New Roman" pitchFamily="34" charset="-122"/>
                 <a:cs typeface="Times New Roman" pitchFamily="34" charset="-120"/>
               </a:rPr>
-              <a:t>1. Factors of Population Growth</a:t>
+              <a:t>1. The Factors of Population Growth</a:t>
             </a:r>
             <a:endParaRPr lang="en-US" sz="3600" dirty="0"/>
           </a:p>
@@ -15692,7 +15462,7 @@
         <p:spPr>
           <a:xfrm>
             <a:off x="365760" y="1737360"/>
-            <a:ext cx="5120640" cy="457200"/>
+            <a:ext cx="6035040" cy="457200"/>
           </a:xfrm>
           <a:prstGeom prst="rect">
             <a:avLst/>
@@ -15733,7 +15503,7 @@
         <p:spPr>
           <a:xfrm>
             <a:off x="365760" y="2240280"/>
-            <a:ext cx="4846320" cy="4160520"/>
+            <a:ext cx="6035040" cy="4160520"/>
           </a:xfrm>
           <a:prstGeom prst="rect">
             <a:avLst/>
@@ -15752,7 +15522,7 @@
               <a:buNone/>
             </a:pPr>
             <a:r>
-              <a:rPr lang="en-US" sz="2800" i="1" dirty="0">
+              <a:rPr lang="en-US" sz="3200" i="1" dirty="0">
                 <a:solidFill>
                   <a:srgbClr val="111111"/>
                 </a:solidFill>
@@ -15760,9 +15530,9 @@
                 <a:ea typeface="Times New Roman" pitchFamily="34" charset="-122"/>
                 <a:cs typeface="Times New Roman" pitchFamily="34" charset="-120"/>
               </a:rPr>
-              <a:t>The demographic factors of population growth are the following:</a:t>
-            </a:r>
-            <a:endParaRPr lang="en-US" sz="2800" dirty="0"/>
+              <a:t>Population growth is influenced by the following demographic factors:</a:t>
+            </a:r>
+            <a:endParaRPr lang="en-US" sz="3200" dirty="0"/>
           </a:p>
           <a:p>
             <a:pPr algn="l" indent="0" marL="0">
@@ -15772,7 +15542,7 @@
               <a:buNone/>
             </a:pPr>
             <a:r>
-              <a:rPr lang="en-US" sz="2800" b="1" dirty="0">
+              <a:rPr lang="en-US" sz="3200" b="1" dirty="0">
                 <a:solidFill>
                   <a:srgbClr val="111111"/>
                 </a:solidFill>
@@ -15789,7 +15559,7 @@
               <a:buNone/>
             </a:pPr>
             <a:r>
-              <a:rPr lang="en-US" sz="2800" dirty="0">
+              <a:rPr lang="en-US" sz="3200" dirty="0">
                 <a:solidFill>
                   <a:srgbClr val="111111"/>
                 </a:solidFill>
@@ -15797,9 +15567,9 @@
                 <a:ea typeface="Times New Roman" pitchFamily="34" charset="-122"/>
                 <a:cs typeface="Times New Roman" pitchFamily="34" charset="-120"/>
               </a:rPr>
-              <a:t>High birth rates, common in rural areas, cause rapid growth, while low birth rates in cities and rich countries slow it down.</a:t>
-            </a:r>
-            <a:endParaRPr lang="en-US" sz="2800" dirty="0"/>
+              <a:t>High birth rates, common in rural areas, cause rapid growth. Low birth rates in cities and rich countries slow it down.</a:t>
+            </a:r>
+            <a:endParaRPr lang="en-US" sz="3200" dirty="0"/>
           </a:p>
         </p:txBody>
       </p:sp>
@@ -15819,8 +15589,8 @@
         </p:blipFill>
         <p:spPr>
           <a:xfrm>
-            <a:off x="5349240" y="2617506"/>
-            <a:ext cx="6659575" cy="2601397"/>
+            <a:off x="6537960" y="2849678"/>
+            <a:ext cx="5470855" cy="2137053"/>
           </a:xfrm>
           <a:prstGeom prst="rect">
             <a:avLst/>
@@ -15835,8 +15605,8 @@
         </p:nvSpPr>
         <p:spPr>
           <a:xfrm>
-            <a:off x="5349240" y="6089904"/>
-            <a:ext cx="6659575" cy="347472"/>
+            <a:off x="6537960" y="6089904"/>
+            <a:ext cx="5470855" cy="347472"/>
           </a:xfrm>
           <a:prstGeom prst="rect">
             <a:avLst/>
@@ -15860,7 +15630,7 @@
                 <a:ea typeface="Times New Roman" pitchFamily="34" charset="-122"/>
                 <a:cs typeface="Times New Roman" pitchFamily="34" charset="-120"/>
               </a:rPr>
-              <a:t>Illustration: two groups of factors</a:t>
+              <a:t>Illustration: demographic and non-demographic factors</a:t>
             </a:r>
             <a:endParaRPr lang="en-US" sz="1600" dirty="0"/>
           </a:p>
@@ -16276,7 +16046,7 @@
                 <a:ea typeface="Times New Roman" pitchFamily="34" charset="-122"/>
                 <a:cs typeface="Times New Roman" pitchFamily="34" charset="-120"/>
               </a:rPr>
-              <a:t>1. Factors of Population Growth</a:t>
+              <a:t>1. The Factors of Population Growth</a:t>
             </a:r>
             <a:endParaRPr lang="en-US" sz="3600" dirty="0"/>
           </a:p>
@@ -16374,7 +16144,7 @@
                 <a:ea typeface="Times New Roman" pitchFamily="34" charset="-122"/>
                 <a:cs typeface="Times New Roman" pitchFamily="34" charset="-120"/>
               </a:rPr>
-              <a:t>Better health care and sanitation lower death rates, which increases growth.</a:t>
+              <a:t>Better health care and sanitation lower death rates. When deaths fall while births stay high, growth increases.</a:t>
             </a:r>
             <a:endParaRPr lang="en-US" sz="4000" dirty="0"/>
           </a:p>
@@ -16551,7 +16321,7 @@
                 <a:ea typeface="Times New Roman" pitchFamily="34" charset="-122"/>
                 <a:cs typeface="Times New Roman" pitchFamily="34" charset="-120"/>
               </a:rPr>
-              <a:t>1. Factors of Population Growth</a:t>
+              <a:t>1. The Factors of Population Growth</a:t>
             </a:r>
             <a:endParaRPr lang="en-US" sz="3600" dirty="0"/>
           </a:p>
@@ -16582,7 +16352,7 @@
               <a:buNone/>
             </a:pPr>
             <a:r>
-              <a:rPr lang="en-US" sz="3000" b="1" dirty="0">
+              <a:rPr lang="en-US" sz="3200" b="1" dirty="0">
                 <a:solidFill>
                   <a:srgbClr val="990011"/>
                 </a:solidFill>
@@ -16590,9 +16360,9 @@
                 <a:ea typeface="Times New Roman" pitchFamily="34" charset="-122"/>
                 <a:cs typeface="Times New Roman" pitchFamily="34" charset="-120"/>
               </a:rPr>
-              <a:t>A) Demographic Factors (continued)</a:t>
-            </a:r>
-            <a:endParaRPr lang="en-US" sz="3000" dirty="0"/>
+              <a:t>A) Demographic Factors</a:t>
+            </a:r>
+            <a:endParaRPr lang="en-US" sz="3200" dirty="0"/>
           </a:p>
         </p:txBody>
       </p:sp>
@@ -16649,7 +16419,7 @@
                 <a:ea typeface="Times New Roman" pitchFamily="34" charset="-122"/>
                 <a:cs typeface="Times New Roman" pitchFamily="34" charset="-120"/>
               </a:rPr>
-              <a:t>Positive net migration makes the population grow, as in strong economies, while negative net migration makes it shrink.</a:t>
+              <a:t>Positive net migration makes the population grow, as in strong economies. Negative net migration makes it shrink.</a:t>
             </a:r>
             <a:endParaRPr lang="en-US" sz="4000" dirty="0"/>
           </a:p>
@@ -16802,7 +16572,7 @@
                 <a:ea typeface="Times New Roman" pitchFamily="34" charset="-122"/>
                 <a:cs typeface="Times New Roman" pitchFamily="34" charset="-120"/>
               </a:rPr>
-              <a:t>1. Factors of Population Growth</a:t>
+              <a:t>1. The Factors of Population Growth</a:t>
             </a:r>
             <a:endParaRPr lang="en-US" sz="3600" dirty="0"/>
           </a:p>
@@ -16817,7 +16587,7 @@
         <p:spPr>
           <a:xfrm>
             <a:off x="365760" y="1737360"/>
-            <a:ext cx="5120640" cy="457200"/>
+            <a:ext cx="6035040" cy="457200"/>
           </a:xfrm>
           <a:prstGeom prst="rect">
             <a:avLst/>
@@ -16858,7 +16628,7 @@
         <p:spPr>
           <a:xfrm>
             <a:off x="365760" y="2240280"/>
-            <a:ext cx="4846320" cy="4160520"/>
+            <a:ext cx="6035040" cy="4160520"/>
           </a:xfrm>
           <a:prstGeom prst="rect">
             <a:avLst/>
@@ -16877,7 +16647,7 @@
               <a:buNone/>
             </a:pPr>
             <a:r>
-              <a:rPr lang="en-US" sz="3600" b="1" dirty="0">
+              <a:rPr lang="en-US" sz="3200" b="1" dirty="0">
                 <a:solidFill>
                   <a:srgbClr val="111111"/>
                 </a:solidFill>
@@ -16885,7 +16655,7 @@
                 <a:ea typeface="Times New Roman" pitchFamily="34" charset="-122"/>
                 <a:cs typeface="Times New Roman" pitchFamily="34" charset="-120"/>
               </a:rPr>
-              <a:t>Population structure: </a:t>
+              <a:t>Structure and marital behaviour: </a:t>
             </a:r>
             <a:pPr algn="l" indent="0" marL="0">
               <a:spcAft>
@@ -16894,7 +16664,7 @@
               <a:buNone/>
             </a:pPr>
             <a:r>
-              <a:rPr lang="en-US" sz="3600" dirty="0">
+              <a:rPr lang="en-US" sz="3200" dirty="0">
                 <a:solidFill>
                   <a:srgbClr val="111111"/>
                 </a:solidFill>
@@ -16902,9 +16672,9 @@
                 <a:ea typeface="Times New Roman" pitchFamily="34" charset="-122"/>
                 <a:cs typeface="Times New Roman" pitchFamily="34" charset="-120"/>
               </a:rPr>
-              <a:t>A youthful population grows quickly, while an ageing population grows slowly or shrinks.</a:t>
-            </a:r>
-            <a:endParaRPr lang="en-US" sz="3600" dirty="0"/>
+              <a:t>A youthful population grows quickly because many people are of child-bearing age, while an ageing population grows slowly or shrinks. Societies where people marry young and value large families have higher birth rates.</a:t>
+            </a:r>
+            <a:endParaRPr lang="en-US" sz="3200" dirty="0"/>
           </a:p>
         </p:txBody>
       </p:sp>
@@ -16924,8 +16694,8 @@
         </p:blipFill>
         <p:spPr>
           <a:xfrm>
-            <a:off x="5349240" y="2461422"/>
-            <a:ext cx="6659575" cy="2913564"/>
+            <a:off x="6537960" y="2721454"/>
+            <a:ext cx="5470855" cy="2393499"/>
           </a:xfrm>
           <a:prstGeom prst="rect">
             <a:avLst/>
@@ -16940,8 +16710,8 @@
         </p:nvSpPr>
         <p:spPr>
           <a:xfrm>
-            <a:off x="5349240" y="6089904"/>
-            <a:ext cx="6659575" cy="347472"/>
+            <a:off x="6537960" y="6089904"/>
+            <a:ext cx="5470855" cy="347472"/>
           </a:xfrm>
           <a:prstGeom prst="rect">
             <a:avLst/>
@@ -16965,7 +16735,7 @@
                 <a:ea typeface="Times New Roman" pitchFamily="34" charset="-122"/>
                 <a:cs typeface="Times New Roman" pitchFamily="34" charset="-120"/>
               </a:rPr>
-              <a:t>Illustration: young and old populations</a:t>
+              <a:t>Illustration: youthful and ageing populations</a:t>
             </a:r>
             <a:endParaRPr lang="en-US" sz="1600" dirty="0"/>
           </a:p>
@@ -17083,9 +16853,170 @@
           </a:p>
         </p:txBody>
       </p:sp>
+      <p:sp>
+        <p:nvSpPr>
+          <p:cNvPr id="3" name="Text 1"/>
+          <p:cNvSpPr/>
+          <p:nvPr/>
+        </p:nvSpPr>
+        <p:spPr>
+          <a:xfrm>
+            <a:off x="365760" y="1005840"/>
+            <a:ext cx="11460175" cy="731520"/>
+          </a:xfrm>
+          <a:prstGeom prst="rect">
+            <a:avLst/>
+          </a:prstGeom>
+          <a:noFill/>
+          <a:ln/>
+        </p:spPr>
+        <p:txBody>
+          <a:bodyPr wrap="square" lIns="0" tIns="0" rIns="0" bIns="0" rtlCol="0" anchor="ctr">
+            <a:normAutofit/>
+          </a:bodyPr>
+          <a:lstStyle/>
+          <a:p>
+            <a:pPr algn="ctr" indent="0" marL="0">
+              <a:buNone/>
+            </a:pPr>
+            <a:r>
+              <a:rPr lang="en-US" sz="3600" b="1" dirty="0">
+                <a:solidFill>
+                  <a:srgbClr val="990011"/>
+                </a:solidFill>
+                <a:latin typeface="Times New Roman" pitchFamily="34" charset="0"/>
+                <a:ea typeface="Times New Roman" pitchFamily="34" charset="-122"/>
+                <a:cs typeface="Times New Roman" pitchFamily="34" charset="-120"/>
+              </a:rPr>
+              <a:t>1. The Factors of Population Growth</a:t>
+            </a:r>
+            <a:endParaRPr lang="en-US" sz="3600" dirty="0"/>
+          </a:p>
+        </p:txBody>
+      </p:sp>
+      <p:sp>
+        <p:nvSpPr>
+          <p:cNvPr id="4" name="Text 2"/>
+          <p:cNvSpPr/>
+          <p:nvPr/>
+        </p:nvSpPr>
+        <p:spPr>
+          <a:xfrm>
+            <a:off x="365760" y="1737360"/>
+            <a:ext cx="6035040" cy="457200"/>
+          </a:xfrm>
+          <a:prstGeom prst="rect">
+            <a:avLst/>
+          </a:prstGeom>
+          <a:noFill/>
+          <a:ln/>
+        </p:spPr>
+        <p:txBody>
+          <a:bodyPr wrap="square" lIns="0" tIns="0" rIns="0" bIns="0" rtlCol="0" anchor="ctr">
+            <a:normAutofit/>
+          </a:bodyPr>
+          <a:lstStyle/>
+          <a:p>
+            <a:pPr algn="l" indent="0" marL="0">
+              <a:buNone/>
+            </a:pPr>
+            <a:r>
+              <a:rPr lang="en-US" sz="3000" b="1" dirty="0">
+                <a:solidFill>
+                  <a:srgbClr val="990011"/>
+                </a:solidFill>
+                <a:latin typeface="Times New Roman" pitchFamily="34" charset="0"/>
+                <a:ea typeface="Times New Roman" pitchFamily="34" charset="-122"/>
+                <a:cs typeface="Times New Roman" pitchFamily="34" charset="-120"/>
+              </a:rPr>
+              <a:t>B) Non-Demographic Factors</a:t>
+            </a:r>
+            <a:endParaRPr lang="en-US" sz="3000" dirty="0"/>
+          </a:p>
+        </p:txBody>
+      </p:sp>
+      <p:sp>
+        <p:nvSpPr>
+          <p:cNvPr id="5" name="Text 3"/>
+          <p:cNvSpPr/>
+          <p:nvPr/>
+        </p:nvSpPr>
+        <p:spPr>
+          <a:xfrm>
+            <a:off x="365760" y="2240280"/>
+            <a:ext cx="6035040" cy="4160520"/>
+          </a:xfrm>
+          <a:prstGeom prst="rect">
+            <a:avLst/>
+          </a:prstGeom>
+          <a:noFill/>
+          <a:ln/>
+        </p:spPr>
+        <p:txBody>
+          <a:bodyPr wrap="square" lIns="0" tIns="0" rIns="0" bIns="0" rtlCol="0" anchor="t"/>
+          <a:lstStyle/>
+          <a:p>
+            <a:pPr algn="l" indent="0" marL="0">
+              <a:spcAft>
+                <a:spcPts val="800"/>
+              </a:spcAft>
+              <a:buNone/>
+            </a:pPr>
+            <a:r>
+              <a:rPr lang="en-US" sz="2800" i="1" dirty="0">
+                <a:solidFill>
+                  <a:srgbClr val="111111"/>
+                </a:solidFill>
+                <a:latin typeface="Times New Roman" pitchFamily="34" charset="0"/>
+                <a:ea typeface="Times New Roman" pitchFamily="34" charset="-122"/>
+                <a:cs typeface="Times New Roman" pitchFamily="34" charset="-120"/>
+              </a:rPr>
+              <a:t>Population growth is also influenced by the following non-demographic factors:</a:t>
+            </a:r>
+            <a:endParaRPr lang="en-US" sz="2800" dirty="0"/>
+          </a:p>
+          <a:p>
+            <a:pPr algn="l" indent="0" marL="0">
+              <a:spcAft>
+                <a:spcPts val="800"/>
+              </a:spcAft>
+              <a:buNone/>
+            </a:pPr>
+            <a:r>
+              <a:rPr lang="en-US" sz="2800" b="1" dirty="0">
+                <a:solidFill>
+                  <a:srgbClr val="111111"/>
+                </a:solidFill>
+                <a:latin typeface="Times New Roman" pitchFamily="34" charset="0"/>
+                <a:ea typeface="Times New Roman" pitchFamily="34" charset="-122"/>
+                <a:cs typeface="Times New Roman" pitchFamily="34" charset="-120"/>
+              </a:rPr>
+              <a:t>Wars and natural disasters: </a:t>
+            </a:r>
+            <a:pPr algn="l" indent="0" marL="0">
+              <a:spcAft>
+                <a:spcPts val="800"/>
+              </a:spcAft>
+              <a:buNone/>
+            </a:pPr>
+            <a:r>
+              <a:rPr lang="en-US" sz="2800" dirty="0">
+                <a:solidFill>
+                  <a:srgbClr val="111111"/>
+                </a:solidFill>
+                <a:latin typeface="Times New Roman" pitchFamily="34" charset="0"/>
+                <a:ea typeface="Times New Roman" pitchFamily="34" charset="-122"/>
+                <a:cs typeface="Times New Roman" pitchFamily="34" charset="-120"/>
+              </a:rPr>
+              <a:t>Wars raise death rates and force people to flee, which reduces the population. Floods of the Benue or droughts in the Sahel also cause deaths and displacement.</a:t>
+            </a:r>
+            <a:endParaRPr lang="en-US" sz="2800" dirty="0"/>
+          </a:p>
+        </p:txBody>
+      </p:sp>
       <p:pic>
         <p:nvPicPr>
-          <p:cNvPr id="3" name="Image 0" descr="/home/claude/f4/img/minesec_sheet.png">    </p:cNvPr>
+          <p:cNvPr id="6" name="Image 0" descr="/home/claude/f4/img/v2/usa_refugee.jpg">    </p:cNvPr>
           <p:cNvPicPr>
             <a:picLocks noChangeAspect="1"/>
           </p:cNvPicPr>
@@ -17099,8 +17030,8 @@
         </p:blipFill>
         <p:spPr>
           <a:xfrm>
-            <a:off x="0" y="658368"/>
-            <a:ext cx="5120640" cy="5833872"/>
+            <a:off x="6537960" y="2400897"/>
+            <a:ext cx="5470855" cy="3034615"/>
           </a:xfrm>
           <a:prstGeom prst="rect">
             <a:avLst/>
@@ -17109,14 +17040,14 @@
       </p:pic>
       <p:sp>
         <p:nvSpPr>
-          <p:cNvPr id="4" name="Text 1"/>
+          <p:cNvPr id="7" name="Text 4"/>
           <p:cNvSpPr/>
           <p:nvPr/>
         </p:nvSpPr>
         <p:spPr>
           <a:xfrm>
-            <a:off x="5349240" y="1005840"/>
-            <a:ext cx="6522415" cy="731520"/>
+            <a:off x="6537960" y="6089904"/>
+            <a:ext cx="5470855" cy="347472"/>
           </a:xfrm>
           <a:prstGeom prst="rect">
             <a:avLst/>
@@ -17125,124 +17056,24 @@
           <a:ln/>
         </p:spPr>
         <p:txBody>
-          <a:bodyPr wrap="square" lIns="0" tIns="0" rIns="0" bIns="0" rtlCol="0" anchor="ctr">
-            <a:normAutofit/>
-          </a:bodyPr>
+          <a:bodyPr wrap="square" lIns="0" tIns="0" rIns="0" bIns="0" rtlCol="0" anchor="ctr"/>
           <a:lstStyle/>
           <a:p>
             <a:pPr algn="ctr" indent="0" marL="0">
               <a:buNone/>
             </a:pPr>
             <a:r>
-              <a:rPr lang="en-US" sz="3600" b="1" dirty="0">
-                <a:solidFill>
-                  <a:srgbClr val="990011"/>
+              <a:rPr lang="en-US" sz="1600" i="1" dirty="0">
+                <a:solidFill>
+                  <a:srgbClr val="555555"/>
                 </a:solidFill>
                 <a:latin typeface="Times New Roman" pitchFamily="34" charset="0"/>
                 <a:ea typeface="Times New Roman" pitchFamily="34" charset="-122"/>
                 <a:cs typeface="Times New Roman" pitchFamily="34" charset="-120"/>
               </a:rPr>
-              <a:t>1. Factors of Population Growth</a:t>
-            </a:r>
-            <a:endParaRPr lang="en-US" sz="3600" dirty="0"/>
-          </a:p>
-        </p:txBody>
-      </p:sp>
-      <p:sp>
-        <p:nvSpPr>
-          <p:cNvPr id="5" name="Text 2"/>
-          <p:cNvSpPr/>
-          <p:nvPr/>
-        </p:nvSpPr>
-        <p:spPr>
-          <a:xfrm>
-            <a:off x="5349240" y="1737360"/>
-            <a:ext cx="6522415" cy="457200"/>
-          </a:xfrm>
-          <a:prstGeom prst="rect">
-            <a:avLst/>
-          </a:prstGeom>
-          <a:noFill/>
-          <a:ln/>
-        </p:spPr>
-        <p:txBody>
-          <a:bodyPr wrap="square" lIns="0" tIns="0" rIns="0" bIns="0" rtlCol="0" anchor="ctr"/>
-          <a:lstStyle/>
-          <a:p>
-            <a:pPr algn="l" indent="0" marL="0">
-              <a:buNone/>
-            </a:pPr>
-            <a:r>
-              <a:rPr lang="en-US" sz="3200" b="1" dirty="0">
-                <a:solidFill>
-                  <a:srgbClr val="990011"/>
-                </a:solidFill>
-                <a:latin typeface="Times New Roman" pitchFamily="34" charset="0"/>
-                <a:ea typeface="Times New Roman" pitchFamily="34" charset="-122"/>
-                <a:cs typeface="Times New Roman" pitchFamily="34" charset="-120"/>
-              </a:rPr>
-              <a:t>A) Demographic Factors</a:t>
-            </a:r>
-            <a:endParaRPr lang="en-US" sz="3200" dirty="0"/>
-          </a:p>
-        </p:txBody>
-      </p:sp>
-      <p:sp>
-        <p:nvSpPr>
-          <p:cNvPr id="6" name="Text 3"/>
-          <p:cNvSpPr/>
-          <p:nvPr/>
-        </p:nvSpPr>
-        <p:spPr>
-          <a:xfrm>
-            <a:off x="5349240" y="2240280"/>
-            <a:ext cx="6522415" cy="4206240"/>
-          </a:xfrm>
-          <a:prstGeom prst="rect">
-            <a:avLst/>
-          </a:prstGeom>
-          <a:noFill/>
-          <a:ln/>
-        </p:spPr>
-        <p:txBody>
-          <a:bodyPr wrap="square" lIns="0" tIns="0" rIns="0" bIns="0" rtlCol="0" anchor="t"/>
-          <a:lstStyle/>
-          <a:p>
-            <a:pPr algn="l" indent="0" marL="0">
-              <a:spcAft>
-                <a:spcPts val="800"/>
-              </a:spcAft>
-              <a:buNone/>
-            </a:pPr>
-            <a:r>
-              <a:rPr lang="en-US" sz="4000" b="1" dirty="0">
-                <a:solidFill>
-                  <a:srgbClr val="111111"/>
-                </a:solidFill>
-                <a:latin typeface="Times New Roman" pitchFamily="34" charset="0"/>
-                <a:ea typeface="Times New Roman" pitchFamily="34" charset="-122"/>
-                <a:cs typeface="Times New Roman" pitchFamily="34" charset="-120"/>
-              </a:rPr>
-              <a:t>Marital behaviour: </a:t>
-            </a:r>
-            <a:pPr algn="l" indent="0" marL="0">
-              <a:spcAft>
-                <a:spcPts val="800"/>
-              </a:spcAft>
-              <a:buNone/>
-            </a:pPr>
-            <a:r>
-              <a:rPr lang="en-US" sz="4000" dirty="0">
-                <a:solidFill>
-                  <a:srgbClr val="111111"/>
-                </a:solidFill>
-                <a:latin typeface="Times New Roman" pitchFamily="34" charset="0"/>
-                <a:ea typeface="Times New Roman" pitchFamily="34" charset="-122"/>
-                <a:cs typeface="Times New Roman" pitchFamily="34" charset="-120"/>
-              </a:rPr>
-              <a:t>Societies where people marry young and value large families have higher birth rates.</a:t>
-            </a:r>
-            <a:endParaRPr lang="en-US" sz="4000" dirty="0"/>
+              <a:t>Illustration: refugees</a:t>
+            </a:r>
+            <a:endParaRPr lang="en-US" sz="1600" dirty="0"/>
           </a:p>
         </p:txBody>
       </p:sp>
@@ -17358,170 +17189,9 @@
           </a:p>
         </p:txBody>
       </p:sp>
-      <p:sp>
-        <p:nvSpPr>
-          <p:cNvPr id="3" name="Text 1"/>
-          <p:cNvSpPr/>
-          <p:nvPr/>
-        </p:nvSpPr>
-        <p:spPr>
-          <a:xfrm>
-            <a:off x="365760" y="1005840"/>
-            <a:ext cx="11460175" cy="731520"/>
-          </a:xfrm>
-          <a:prstGeom prst="rect">
-            <a:avLst/>
-          </a:prstGeom>
-          <a:noFill/>
-          <a:ln/>
-        </p:spPr>
-        <p:txBody>
-          <a:bodyPr wrap="square" lIns="0" tIns="0" rIns="0" bIns="0" rtlCol="0" anchor="ctr">
-            <a:normAutofit/>
-          </a:bodyPr>
-          <a:lstStyle/>
-          <a:p>
-            <a:pPr algn="ctr" indent="0" marL="0">
-              <a:buNone/>
-            </a:pPr>
-            <a:r>
-              <a:rPr lang="en-US" sz="3600" b="1" dirty="0">
-                <a:solidFill>
-                  <a:srgbClr val="990011"/>
-                </a:solidFill>
-                <a:latin typeface="Times New Roman" pitchFamily="34" charset="0"/>
-                <a:ea typeface="Times New Roman" pitchFamily="34" charset="-122"/>
-                <a:cs typeface="Times New Roman" pitchFamily="34" charset="-120"/>
-              </a:rPr>
-              <a:t>1. Factors of Population Growth</a:t>
-            </a:r>
-            <a:endParaRPr lang="en-US" sz="3600" dirty="0"/>
-          </a:p>
-        </p:txBody>
-      </p:sp>
-      <p:sp>
-        <p:nvSpPr>
-          <p:cNvPr id="4" name="Text 2"/>
-          <p:cNvSpPr/>
-          <p:nvPr/>
-        </p:nvSpPr>
-        <p:spPr>
-          <a:xfrm>
-            <a:off x="365760" y="1737360"/>
-            <a:ext cx="5120640" cy="457200"/>
-          </a:xfrm>
-          <a:prstGeom prst="rect">
-            <a:avLst/>
-          </a:prstGeom>
-          <a:noFill/>
-          <a:ln/>
-        </p:spPr>
-        <p:txBody>
-          <a:bodyPr wrap="square" lIns="0" tIns="0" rIns="0" bIns="0" rtlCol="0" anchor="ctr">
-            <a:normAutofit/>
-          </a:bodyPr>
-          <a:lstStyle/>
-          <a:p>
-            <a:pPr algn="l" indent="0" marL="0">
-              <a:buNone/>
-            </a:pPr>
-            <a:r>
-              <a:rPr lang="en-US" sz="3000" b="1" dirty="0">
-                <a:solidFill>
-                  <a:srgbClr val="990011"/>
-                </a:solidFill>
-                <a:latin typeface="Times New Roman" pitchFamily="34" charset="0"/>
-                <a:ea typeface="Times New Roman" pitchFamily="34" charset="-122"/>
-                <a:cs typeface="Times New Roman" pitchFamily="34" charset="-120"/>
-              </a:rPr>
-              <a:t>B) Non-Demographic Factors</a:t>
-            </a:r>
-            <a:endParaRPr lang="en-US" sz="3000" dirty="0"/>
-          </a:p>
-        </p:txBody>
-      </p:sp>
-      <p:sp>
-        <p:nvSpPr>
-          <p:cNvPr id="5" name="Text 3"/>
-          <p:cNvSpPr/>
-          <p:nvPr/>
-        </p:nvSpPr>
-        <p:spPr>
-          <a:xfrm>
-            <a:off x="365760" y="2240280"/>
-            <a:ext cx="4846320" cy="4160520"/>
-          </a:xfrm>
-          <a:prstGeom prst="rect">
-            <a:avLst/>
-          </a:prstGeom>
-          <a:noFill/>
-          <a:ln/>
-        </p:spPr>
-        <p:txBody>
-          <a:bodyPr wrap="square" lIns="0" tIns="0" rIns="0" bIns="0" rtlCol="0" anchor="t"/>
-          <a:lstStyle/>
-          <a:p>
-            <a:pPr algn="l" indent="0" marL="0">
-              <a:spcAft>
-                <a:spcPts val="800"/>
-              </a:spcAft>
-              <a:buNone/>
-            </a:pPr>
-            <a:r>
-              <a:rPr lang="en-US" sz="3200" i="1" dirty="0">
-                <a:solidFill>
-                  <a:srgbClr val="111111"/>
-                </a:solidFill>
-                <a:latin typeface="Times New Roman" pitchFamily="34" charset="0"/>
-                <a:ea typeface="Times New Roman" pitchFamily="34" charset="-122"/>
-                <a:cs typeface="Times New Roman" pitchFamily="34" charset="-120"/>
-              </a:rPr>
-              <a:t>The non-demographic factors of population growth are the following:</a:t>
-            </a:r>
-            <a:endParaRPr lang="en-US" sz="3200" dirty="0"/>
-          </a:p>
-          <a:p>
-            <a:pPr algn="l" indent="0" marL="0">
-              <a:spcAft>
-                <a:spcPts val="800"/>
-              </a:spcAft>
-              <a:buNone/>
-            </a:pPr>
-            <a:r>
-              <a:rPr lang="en-US" sz="3200" b="1" dirty="0">
-                <a:solidFill>
-                  <a:srgbClr val="111111"/>
-                </a:solidFill>
-                <a:latin typeface="Times New Roman" pitchFamily="34" charset="0"/>
-                <a:ea typeface="Times New Roman" pitchFamily="34" charset="-122"/>
-                <a:cs typeface="Times New Roman" pitchFamily="34" charset="-120"/>
-              </a:rPr>
-              <a:t>Wars and conflicts: </a:t>
-            </a:r>
-            <a:pPr algn="l" indent="0" marL="0">
-              <a:spcAft>
-                <a:spcPts val="800"/>
-              </a:spcAft>
-              <a:buNone/>
-            </a:pPr>
-            <a:r>
-              <a:rPr lang="en-US" sz="3200" dirty="0">
-                <a:solidFill>
-                  <a:srgbClr val="111111"/>
-                </a:solidFill>
-                <a:latin typeface="Times New Roman" pitchFamily="34" charset="0"/>
-                <a:ea typeface="Times New Roman" pitchFamily="34" charset="-122"/>
-                <a:cs typeface="Times New Roman" pitchFamily="34" charset="-120"/>
-              </a:rPr>
-              <a:t>They raise death rates and force people to flee, reducing the population.</a:t>
-            </a:r>
-            <a:endParaRPr lang="en-US" sz="3200" dirty="0"/>
-          </a:p>
-        </p:txBody>
-      </p:sp>
       <p:pic>
         <p:nvPicPr>
-          <p:cNvPr id="6" name="Image 0" descr="/home/claude/f4/img/v2/usa_refugee.jpg">    </p:cNvPr>
+          <p:cNvPr id="3" name="Image 0" descr="/home/claude/f4/img/minesec_sheet.png">    </p:cNvPr>
           <p:cNvPicPr>
             <a:picLocks noChangeAspect="1"/>
           </p:cNvPicPr>
@@ -17535,8 +17205,8 @@
         </p:blipFill>
         <p:spPr>
           <a:xfrm>
-            <a:off x="5349240" y="2071212"/>
-            <a:ext cx="6659575" cy="3693983"/>
+            <a:off x="0" y="658368"/>
+            <a:ext cx="3840480" cy="5833872"/>
           </a:xfrm>
           <a:prstGeom prst="rect">
             <a:avLst/>
@@ -17545,14 +17215,14 @@
       </p:pic>
       <p:sp>
         <p:nvSpPr>
-          <p:cNvPr id="7" name="Text 4"/>
+          <p:cNvPr id="4" name="Text 1"/>
           <p:cNvSpPr/>
           <p:nvPr/>
         </p:nvSpPr>
         <p:spPr>
           <a:xfrm>
-            <a:off x="5349240" y="6089904"/>
-            <a:ext cx="6659575" cy="347472"/>
+            <a:off x="4069080" y="1005840"/>
+            <a:ext cx="7802575" cy="731520"/>
           </a:xfrm>
           <a:prstGeom prst="rect">
             <a:avLst/>
@@ -17561,24 +17231,124 @@
           <a:ln/>
         </p:spPr>
         <p:txBody>
-          <a:bodyPr wrap="square" lIns="0" tIns="0" rIns="0" bIns="0" rtlCol="0" anchor="ctr"/>
+          <a:bodyPr wrap="square" lIns="0" tIns="0" rIns="0" bIns="0" rtlCol="0" anchor="ctr">
+            <a:normAutofit/>
+          </a:bodyPr>
           <a:lstStyle/>
           <a:p>
             <a:pPr algn="ctr" indent="0" marL="0">
               <a:buNone/>
             </a:pPr>
             <a:r>
-              <a:rPr lang="en-US" sz="1600" i="1" dirty="0">
-                <a:solidFill>
-                  <a:srgbClr val="555555"/>
+              <a:rPr lang="en-US" sz="3600" b="1" dirty="0">
+                <a:solidFill>
+                  <a:srgbClr val="990011"/>
                 </a:solidFill>
                 <a:latin typeface="Times New Roman" pitchFamily="34" charset="0"/>
                 <a:ea typeface="Times New Roman" pitchFamily="34" charset="-122"/>
                 <a:cs typeface="Times New Roman" pitchFamily="34" charset="-120"/>
               </a:rPr>
-              <a:t>Illustration: refugees</a:t>
-            </a:r>
-            <a:endParaRPr lang="en-US" sz="1600" dirty="0"/>
+              <a:t>1. The Factors of Population Growth</a:t>
+            </a:r>
+            <a:endParaRPr lang="en-US" sz="3600" dirty="0"/>
+          </a:p>
+        </p:txBody>
+      </p:sp>
+      <p:sp>
+        <p:nvSpPr>
+          <p:cNvPr id="5" name="Text 2"/>
+          <p:cNvSpPr/>
+          <p:nvPr/>
+        </p:nvSpPr>
+        <p:spPr>
+          <a:xfrm>
+            <a:off x="4069080" y="1737360"/>
+            <a:ext cx="7802575" cy="457200"/>
+          </a:xfrm>
+          <a:prstGeom prst="rect">
+            <a:avLst/>
+          </a:prstGeom>
+          <a:noFill/>
+          <a:ln/>
+        </p:spPr>
+        <p:txBody>
+          <a:bodyPr wrap="square" lIns="0" tIns="0" rIns="0" bIns="0" rtlCol="0" anchor="ctr"/>
+          <a:lstStyle/>
+          <a:p>
+            <a:pPr algn="l" indent="0" marL="0">
+              <a:buNone/>
+            </a:pPr>
+            <a:r>
+              <a:rPr lang="en-US" sz="3200" b="1" dirty="0">
+                <a:solidFill>
+                  <a:srgbClr val="990011"/>
+                </a:solidFill>
+                <a:latin typeface="Times New Roman" pitchFamily="34" charset="0"/>
+                <a:ea typeface="Times New Roman" pitchFamily="34" charset="-122"/>
+                <a:cs typeface="Times New Roman" pitchFamily="34" charset="-120"/>
+              </a:rPr>
+              <a:t>B) Non-Demographic Factors</a:t>
+            </a:r>
+            <a:endParaRPr lang="en-US" sz="3200" dirty="0"/>
+          </a:p>
+        </p:txBody>
+      </p:sp>
+      <p:sp>
+        <p:nvSpPr>
+          <p:cNvPr id="6" name="Text 3"/>
+          <p:cNvSpPr/>
+          <p:nvPr/>
+        </p:nvSpPr>
+        <p:spPr>
+          <a:xfrm>
+            <a:off x="4069080" y="2240280"/>
+            <a:ext cx="7802575" cy="4206240"/>
+          </a:xfrm>
+          <a:prstGeom prst="rect">
+            <a:avLst/>
+          </a:prstGeom>
+          <a:noFill/>
+          <a:ln/>
+        </p:spPr>
+        <p:txBody>
+          <a:bodyPr wrap="square" lIns="0" tIns="0" rIns="0" bIns="0" rtlCol="0" anchor="t"/>
+          <a:lstStyle/>
+          <a:p>
+            <a:pPr algn="l" indent="0" marL="0">
+              <a:spcAft>
+                <a:spcPts val="800"/>
+              </a:spcAft>
+              <a:buNone/>
+            </a:pPr>
+            <a:r>
+              <a:rPr lang="en-US" sz="4000" b="1" dirty="0">
+                <a:solidFill>
+                  <a:srgbClr val="111111"/>
+                </a:solidFill>
+                <a:latin typeface="Times New Roman" pitchFamily="34" charset="0"/>
+                <a:ea typeface="Times New Roman" pitchFamily="34" charset="-122"/>
+                <a:cs typeface="Times New Roman" pitchFamily="34" charset="-120"/>
+              </a:rPr>
+              <a:t>Epidemics and medical services: </a:t>
+            </a:r>
+            <a:pPr algn="l" indent="0" marL="0">
+              <a:spcAft>
+                <a:spcPts val="800"/>
+              </a:spcAft>
+              <a:buNone/>
+            </a:pPr>
+            <a:r>
+              <a:rPr lang="en-US" sz="4000" dirty="0">
+                <a:solidFill>
+                  <a:srgbClr val="111111"/>
+                </a:solidFill>
+                <a:latin typeface="Times New Roman" pitchFamily="34" charset="0"/>
+                <a:ea typeface="Times New Roman" pitchFamily="34" charset="-122"/>
+                <a:cs typeface="Times New Roman" pitchFamily="34" charset="-120"/>
+              </a:rPr>
+              <a:t>Epidemics such as HIV/AIDS, Ebola and COVID-19 increase death rates. On the other hand, hospitals, clinics and vaccines lower death rates and raise life expectancy.</a:t>
+            </a:r>
+            <a:endParaRPr lang="en-US" sz="4000" dirty="0"/>
           </a:p>
         </p:txBody>
       </p:sp>
@@ -17694,9 +17464,150 @@
           </a:p>
         </p:txBody>
       </p:sp>
+      <p:sp>
+        <p:nvSpPr>
+          <p:cNvPr id="3" name="Text 1"/>
+          <p:cNvSpPr/>
+          <p:nvPr/>
+        </p:nvSpPr>
+        <p:spPr>
+          <a:xfrm>
+            <a:off x="365760" y="1005840"/>
+            <a:ext cx="11460175" cy="731520"/>
+          </a:xfrm>
+          <a:prstGeom prst="rect">
+            <a:avLst/>
+          </a:prstGeom>
+          <a:noFill/>
+          <a:ln/>
+        </p:spPr>
+        <p:txBody>
+          <a:bodyPr wrap="square" lIns="0" tIns="0" rIns="0" bIns="0" rtlCol="0" anchor="ctr">
+            <a:normAutofit/>
+          </a:bodyPr>
+          <a:lstStyle/>
+          <a:p>
+            <a:pPr algn="ctr" indent="0" marL="0">
+              <a:buNone/>
+            </a:pPr>
+            <a:r>
+              <a:rPr lang="en-US" sz="3600" b="1" dirty="0">
+                <a:solidFill>
+                  <a:srgbClr val="990011"/>
+                </a:solidFill>
+                <a:latin typeface="Times New Roman" pitchFamily="34" charset="0"/>
+                <a:ea typeface="Times New Roman" pitchFamily="34" charset="-122"/>
+                <a:cs typeface="Times New Roman" pitchFamily="34" charset="-120"/>
+              </a:rPr>
+              <a:t>1. The Factors of Population Growth</a:t>
+            </a:r>
+            <a:endParaRPr lang="en-US" sz="3600" dirty="0"/>
+          </a:p>
+        </p:txBody>
+      </p:sp>
+      <p:sp>
+        <p:nvSpPr>
+          <p:cNvPr id="4" name="Text 2"/>
+          <p:cNvSpPr/>
+          <p:nvPr/>
+        </p:nvSpPr>
+        <p:spPr>
+          <a:xfrm>
+            <a:off x="365760" y="1737360"/>
+            <a:ext cx="6035040" cy="457200"/>
+          </a:xfrm>
+          <a:prstGeom prst="rect">
+            <a:avLst/>
+          </a:prstGeom>
+          <a:noFill/>
+          <a:ln/>
+        </p:spPr>
+        <p:txBody>
+          <a:bodyPr wrap="square" lIns="0" tIns="0" rIns="0" bIns="0" rtlCol="0" anchor="ctr">
+            <a:normAutofit/>
+          </a:bodyPr>
+          <a:lstStyle/>
+          <a:p>
+            <a:pPr algn="l" indent="0" marL="0">
+              <a:buNone/>
+            </a:pPr>
+            <a:r>
+              <a:rPr lang="en-US" sz="3000" b="1" dirty="0">
+                <a:solidFill>
+                  <a:srgbClr val="990011"/>
+                </a:solidFill>
+                <a:latin typeface="Times New Roman" pitchFamily="34" charset="0"/>
+                <a:ea typeface="Times New Roman" pitchFamily="34" charset="-122"/>
+                <a:cs typeface="Times New Roman" pitchFamily="34" charset="-120"/>
+              </a:rPr>
+              <a:t>B) Non-Demographic Factors</a:t>
+            </a:r>
+            <a:endParaRPr lang="en-US" sz="3000" dirty="0"/>
+          </a:p>
+        </p:txBody>
+      </p:sp>
+      <p:sp>
+        <p:nvSpPr>
+          <p:cNvPr id="5" name="Text 3"/>
+          <p:cNvSpPr/>
+          <p:nvPr/>
+        </p:nvSpPr>
+        <p:spPr>
+          <a:xfrm>
+            <a:off x="365760" y="2240280"/>
+            <a:ext cx="6035040" cy="4160520"/>
+          </a:xfrm>
+          <a:prstGeom prst="rect">
+            <a:avLst/>
+          </a:prstGeom>
+          <a:noFill/>
+          <a:ln/>
+        </p:spPr>
+        <p:txBody>
+          <a:bodyPr wrap="square" lIns="0" tIns="0" rIns="0" bIns="0" rtlCol="0" anchor="t"/>
+          <a:lstStyle/>
+          <a:p>
+            <a:pPr algn="l" indent="0" marL="0">
+              <a:spcAft>
+                <a:spcPts val="800"/>
+              </a:spcAft>
+              <a:buNone/>
+            </a:pPr>
+            <a:r>
+              <a:rPr lang="en-US" sz="3600" b="1" dirty="0">
+                <a:solidFill>
+                  <a:srgbClr val="111111"/>
+                </a:solidFill>
+                <a:latin typeface="Times New Roman" pitchFamily="34" charset="0"/>
+                <a:ea typeface="Times New Roman" pitchFamily="34" charset="-122"/>
+                <a:cs typeface="Times New Roman" pitchFamily="34" charset="-120"/>
+              </a:rPr>
+              <a:t>Government policies: </a:t>
+            </a:r>
+            <a:pPr algn="l" indent="0" marL="0">
+              <a:spcAft>
+                <a:spcPts val="800"/>
+              </a:spcAft>
+              <a:buNone/>
+            </a:pPr>
+            <a:r>
+              <a:rPr lang="en-US" sz="3600" dirty="0">
+                <a:solidFill>
+                  <a:srgbClr val="111111"/>
+                </a:solidFill>
+                <a:latin typeface="Times New Roman" pitchFamily="34" charset="0"/>
+                <a:ea typeface="Times New Roman" pitchFamily="34" charset="-122"/>
+                <a:cs typeface="Times New Roman" pitchFamily="34" charset="-120"/>
+              </a:rPr>
+              <a:t>Pro-natalist policies encourage births with allowances and leave. Anti-natalist policies, like the former one-child policy of China, limit them.</a:t>
+            </a:r>
+            <a:endParaRPr lang="en-US" sz="3600" dirty="0"/>
+          </a:p>
+        </p:txBody>
+      </p:sp>
       <p:pic>
         <p:nvPicPr>
-          <p:cNvPr id="3" name="Image 0" descr="/home/claude/f4/img/minesec_sheet.png">    </p:cNvPr>
+          <p:cNvPr id="6" name="Image 0" descr="/home/claude/f4/img/v2/usa_onechild.jpg">    </p:cNvPr>
           <p:cNvPicPr>
             <a:picLocks noChangeAspect="1"/>
           </p:cNvPicPr>
@@ -17710,8 +17621,8 @@
         </p:blipFill>
         <p:spPr>
           <a:xfrm>
-            <a:off x="0" y="658368"/>
-            <a:ext cx="5120640" cy="5833872"/>
+            <a:off x="6537960" y="2400897"/>
+            <a:ext cx="5470855" cy="3034615"/>
           </a:xfrm>
           <a:prstGeom prst="rect">
             <a:avLst/>
@@ -17720,14 +17631,14 @@
       </p:pic>
       <p:sp>
         <p:nvSpPr>
-          <p:cNvPr id="4" name="Text 1"/>
+          <p:cNvPr id="7" name="Text 4"/>
           <p:cNvSpPr/>
           <p:nvPr/>
         </p:nvSpPr>
         <p:spPr>
           <a:xfrm>
-            <a:off x="5349240" y="1005840"/>
-            <a:ext cx="6522415" cy="731520"/>
+            <a:off x="6537960" y="6089904"/>
+            <a:ext cx="5470855" cy="347472"/>
           </a:xfrm>
           <a:prstGeom prst="rect">
             <a:avLst/>
@@ -17736,124 +17647,24 @@
           <a:ln/>
         </p:spPr>
         <p:txBody>
-          <a:bodyPr wrap="square" lIns="0" tIns="0" rIns="0" bIns="0" rtlCol="0" anchor="ctr">
-            <a:normAutofit/>
-          </a:bodyPr>
+          <a:bodyPr wrap="square" lIns="0" tIns="0" rIns="0" bIns="0" rtlCol="0" anchor="ctr"/>
           <a:lstStyle/>
           <a:p>
             <a:pPr algn="ctr" indent="0" marL="0">
               <a:buNone/>
             </a:pPr>
             <a:r>
-              <a:rPr lang="en-US" sz="3600" b="1" dirty="0">
-                <a:solidFill>
-                  <a:srgbClr val="990011"/>
+              <a:rPr lang="en-US" sz="1600" i="1" dirty="0">
+                <a:solidFill>
+                  <a:srgbClr val="555555"/>
                 </a:solidFill>
                 <a:latin typeface="Times New Roman" pitchFamily="34" charset="0"/>
                 <a:ea typeface="Times New Roman" pitchFamily="34" charset="-122"/>
                 <a:cs typeface="Times New Roman" pitchFamily="34" charset="-120"/>
               </a:rPr>
-              <a:t>1. Factors of Population Growth</a:t>
-            </a:r>
-            <a:endParaRPr lang="en-US" sz="3600" dirty="0"/>
-          </a:p>
-        </p:txBody>
-      </p:sp>
-      <p:sp>
-        <p:nvSpPr>
-          <p:cNvPr id="5" name="Text 2"/>
-          <p:cNvSpPr/>
-          <p:nvPr/>
-        </p:nvSpPr>
-        <p:spPr>
-          <a:xfrm>
-            <a:off x="5349240" y="1737360"/>
-            <a:ext cx="6522415" cy="457200"/>
-          </a:xfrm>
-          <a:prstGeom prst="rect">
-            <a:avLst/>
-          </a:prstGeom>
-          <a:noFill/>
-          <a:ln/>
-        </p:spPr>
-        <p:txBody>
-          <a:bodyPr wrap="square" lIns="0" tIns="0" rIns="0" bIns="0" rtlCol="0" anchor="ctr"/>
-          <a:lstStyle/>
-          <a:p>
-            <a:pPr algn="l" indent="0" marL="0">
-              <a:buNone/>
-            </a:pPr>
-            <a:r>
-              <a:rPr lang="en-US" sz="3200" b="1" dirty="0">
-                <a:solidFill>
-                  <a:srgbClr val="990011"/>
-                </a:solidFill>
-                <a:latin typeface="Times New Roman" pitchFamily="34" charset="0"/>
-                <a:ea typeface="Times New Roman" pitchFamily="34" charset="-122"/>
-                <a:cs typeface="Times New Roman" pitchFamily="34" charset="-120"/>
-              </a:rPr>
-              <a:t>B) Non-Demographic Factors</a:t>
-            </a:r>
-            <a:endParaRPr lang="en-US" sz="3200" dirty="0"/>
-          </a:p>
-        </p:txBody>
-      </p:sp>
-      <p:sp>
-        <p:nvSpPr>
-          <p:cNvPr id="6" name="Text 3"/>
-          <p:cNvSpPr/>
-          <p:nvPr/>
-        </p:nvSpPr>
-        <p:spPr>
-          <a:xfrm>
-            <a:off x="5349240" y="2240280"/>
-            <a:ext cx="6522415" cy="4206240"/>
-          </a:xfrm>
-          <a:prstGeom prst="rect">
-            <a:avLst/>
-          </a:prstGeom>
-          <a:noFill/>
-          <a:ln/>
-        </p:spPr>
-        <p:txBody>
-          <a:bodyPr wrap="square" lIns="0" tIns="0" rIns="0" bIns="0" rtlCol="0" anchor="t"/>
-          <a:lstStyle/>
-          <a:p>
-            <a:pPr algn="l" indent="0" marL="0">
-              <a:spcAft>
-                <a:spcPts val="800"/>
-              </a:spcAft>
-              <a:buNone/>
-            </a:pPr>
-            <a:r>
-              <a:rPr lang="en-US" sz="4000" b="1" dirty="0">
-                <a:solidFill>
-                  <a:srgbClr val="111111"/>
-                </a:solidFill>
-                <a:latin typeface="Times New Roman" pitchFamily="34" charset="0"/>
-                <a:ea typeface="Times New Roman" pitchFamily="34" charset="-122"/>
-                <a:cs typeface="Times New Roman" pitchFamily="34" charset="-120"/>
-              </a:rPr>
-              <a:t>Epidemics: </a:t>
-            </a:r>
-            <a:pPr algn="l" indent="0" marL="0">
-              <a:spcAft>
-                <a:spcPts val="800"/>
-              </a:spcAft>
-              <a:buNone/>
-            </a:pPr>
-            <a:r>
-              <a:rPr lang="en-US" sz="4000" dirty="0">
-                <a:solidFill>
-                  <a:srgbClr val="111111"/>
-                </a:solidFill>
-                <a:latin typeface="Times New Roman" pitchFamily="34" charset="0"/>
-                <a:ea typeface="Times New Roman" pitchFamily="34" charset="-122"/>
-                <a:cs typeface="Times New Roman" pitchFamily="34" charset="-120"/>
-              </a:rPr>
-              <a:t>HIV/AIDS, Ebola and COVID-19 increase death rates.</a:t>
-            </a:r>
-            <a:endParaRPr lang="en-US" sz="4000" dirty="0"/>
+              <a:t>Illustration: the one-child policy</a:t>
+            </a:r>
+            <a:endParaRPr lang="en-US" sz="1600" dirty="0"/>
           </a:p>
         </p:txBody>
       </p:sp>
@@ -17969,150 +17780,9 @@
           </a:p>
         </p:txBody>
       </p:sp>
-      <p:sp>
-        <p:nvSpPr>
-          <p:cNvPr id="3" name="Text 1"/>
-          <p:cNvSpPr/>
-          <p:nvPr/>
-        </p:nvSpPr>
-        <p:spPr>
-          <a:xfrm>
-            <a:off x="365760" y="1005840"/>
-            <a:ext cx="11460175" cy="731520"/>
-          </a:xfrm>
-          <a:prstGeom prst="rect">
-            <a:avLst/>
-          </a:prstGeom>
-          <a:noFill/>
-          <a:ln/>
-        </p:spPr>
-        <p:txBody>
-          <a:bodyPr wrap="square" lIns="0" tIns="0" rIns="0" bIns="0" rtlCol="0" anchor="ctr">
-            <a:normAutofit/>
-          </a:bodyPr>
-          <a:lstStyle/>
-          <a:p>
-            <a:pPr algn="ctr" indent="0" marL="0">
-              <a:buNone/>
-            </a:pPr>
-            <a:r>
-              <a:rPr lang="en-US" sz="3600" b="1" dirty="0">
-                <a:solidFill>
-                  <a:srgbClr val="990011"/>
-                </a:solidFill>
-                <a:latin typeface="Times New Roman" pitchFamily="34" charset="0"/>
-                <a:ea typeface="Times New Roman" pitchFamily="34" charset="-122"/>
-                <a:cs typeface="Times New Roman" pitchFamily="34" charset="-120"/>
-              </a:rPr>
-              <a:t>1. Factors of Population Growth</a:t>
-            </a:r>
-            <a:endParaRPr lang="en-US" sz="3600" dirty="0"/>
-          </a:p>
-        </p:txBody>
-      </p:sp>
-      <p:sp>
-        <p:nvSpPr>
-          <p:cNvPr id="4" name="Text 2"/>
-          <p:cNvSpPr/>
-          <p:nvPr/>
-        </p:nvSpPr>
-        <p:spPr>
-          <a:xfrm>
-            <a:off x="365760" y="1737360"/>
-            <a:ext cx="5120640" cy="457200"/>
-          </a:xfrm>
-          <a:prstGeom prst="rect">
-            <a:avLst/>
-          </a:prstGeom>
-          <a:noFill/>
-          <a:ln/>
-        </p:spPr>
-        <p:txBody>
-          <a:bodyPr wrap="square" lIns="0" tIns="0" rIns="0" bIns="0" rtlCol="0" anchor="ctr">
-            <a:normAutofit/>
-          </a:bodyPr>
-          <a:lstStyle/>
-          <a:p>
-            <a:pPr algn="l" indent="0" marL="0">
-              <a:buNone/>
-            </a:pPr>
-            <a:r>
-              <a:rPr lang="en-US" sz="3000" b="1" dirty="0">
-                <a:solidFill>
-                  <a:srgbClr val="990011"/>
-                </a:solidFill>
-                <a:latin typeface="Times New Roman" pitchFamily="34" charset="0"/>
-                <a:ea typeface="Times New Roman" pitchFamily="34" charset="-122"/>
-                <a:cs typeface="Times New Roman" pitchFamily="34" charset="-120"/>
-              </a:rPr>
-              <a:t>B) Non-Demographic Factors</a:t>
-            </a:r>
-            <a:endParaRPr lang="en-US" sz="3000" dirty="0"/>
-          </a:p>
-        </p:txBody>
-      </p:sp>
-      <p:sp>
-        <p:nvSpPr>
-          <p:cNvPr id="5" name="Text 3"/>
-          <p:cNvSpPr/>
-          <p:nvPr/>
-        </p:nvSpPr>
-        <p:spPr>
-          <a:xfrm>
-            <a:off x="365760" y="2240280"/>
-            <a:ext cx="4846320" cy="4160520"/>
-          </a:xfrm>
-          <a:prstGeom prst="rect">
-            <a:avLst/>
-          </a:prstGeom>
-          <a:noFill/>
-          <a:ln/>
-        </p:spPr>
-        <p:txBody>
-          <a:bodyPr wrap="square" lIns="0" tIns="0" rIns="0" bIns="0" rtlCol="0" anchor="t"/>
-          <a:lstStyle/>
-          <a:p>
-            <a:pPr algn="l" indent="0" marL="0">
-              <a:spcAft>
-                <a:spcPts val="800"/>
-              </a:spcAft>
-              <a:buNone/>
-            </a:pPr>
-            <a:r>
-              <a:rPr lang="en-US" sz="3600" b="1" dirty="0">
-                <a:solidFill>
-                  <a:srgbClr val="111111"/>
-                </a:solidFill>
-                <a:latin typeface="Times New Roman" pitchFamily="34" charset="0"/>
-                <a:ea typeface="Times New Roman" pitchFamily="34" charset="-122"/>
-                <a:cs typeface="Times New Roman" pitchFamily="34" charset="-120"/>
-              </a:rPr>
-              <a:t>Natural disasters: </a:t>
-            </a:r>
-            <a:pPr algn="l" indent="0" marL="0">
-              <a:spcAft>
-                <a:spcPts val="800"/>
-              </a:spcAft>
-              <a:buNone/>
-            </a:pPr>
-            <a:r>
-              <a:rPr lang="en-US" sz="3600" dirty="0">
-                <a:solidFill>
-                  <a:srgbClr val="111111"/>
-                </a:solidFill>
-                <a:latin typeface="Times New Roman" pitchFamily="34" charset="0"/>
-                <a:ea typeface="Times New Roman" pitchFamily="34" charset="-122"/>
-                <a:cs typeface="Times New Roman" pitchFamily="34" charset="-120"/>
-              </a:rPr>
-              <a:t>Floods of the Benue or droughts in the Sahel cause deaths and displacement.</a:t>
-            </a:r>
-            <a:endParaRPr lang="en-US" sz="3600" dirty="0"/>
-          </a:p>
-        </p:txBody>
-      </p:sp>
       <p:pic>
         <p:nvPicPr>
-          <p:cNvPr id="6" name="Image 0" descr="/home/claude/f4/img/v2/f4_flood.jpg">    </p:cNvPr>
+          <p:cNvPr id="3" name="Image 0" descr="/home/claude/f4/img/minesec_sheet.png">    </p:cNvPr>
           <p:cNvPicPr>
             <a:picLocks noChangeAspect="1"/>
           </p:cNvPicPr>
@@ -18126,8 +17796,8 @@
         </p:blipFill>
         <p:spPr>
           <a:xfrm>
-            <a:off x="5349240" y="2071212"/>
-            <a:ext cx="6659575" cy="3693983"/>
+            <a:off x="0" y="658368"/>
+            <a:ext cx="3840480" cy="5833872"/>
           </a:xfrm>
           <a:prstGeom prst="rect">
             <a:avLst/>
@@ -18136,14 +17806,14 @@
       </p:pic>
       <p:sp>
         <p:nvSpPr>
-          <p:cNvPr id="7" name="Text 4"/>
+          <p:cNvPr id="4" name="Text 1"/>
           <p:cNvSpPr/>
           <p:nvPr/>
         </p:nvSpPr>
         <p:spPr>
           <a:xfrm>
-            <a:off x="5349240" y="6089904"/>
-            <a:ext cx="6659575" cy="347472"/>
+            <a:off x="4069080" y="1005840"/>
+            <a:ext cx="7802575" cy="731520"/>
           </a:xfrm>
           <a:prstGeom prst="rect">
             <a:avLst/>
@@ -18152,24 +17822,124 @@
           <a:ln/>
         </p:spPr>
         <p:txBody>
-          <a:bodyPr wrap="square" lIns="0" tIns="0" rIns="0" bIns="0" rtlCol="0" anchor="ctr"/>
+          <a:bodyPr wrap="square" lIns="0" tIns="0" rIns="0" bIns="0" rtlCol="0" anchor="ctr">
+            <a:normAutofit/>
+          </a:bodyPr>
           <a:lstStyle/>
           <a:p>
             <a:pPr algn="ctr" indent="0" marL="0">
               <a:buNone/>
             </a:pPr>
             <a:r>
-              <a:rPr lang="en-US" sz="1600" i="1" dirty="0">
-                <a:solidFill>
-                  <a:srgbClr val="555555"/>
+              <a:rPr lang="en-US" sz="3600" b="1" dirty="0">
+                <a:solidFill>
+                  <a:srgbClr val="990011"/>
                 </a:solidFill>
                 <a:latin typeface="Times New Roman" pitchFamily="34" charset="0"/>
                 <a:ea typeface="Times New Roman" pitchFamily="34" charset="-122"/>
                 <a:cs typeface="Times New Roman" pitchFamily="34" charset="-120"/>
               </a:rPr>
-              <a:t>Illustration: a flood</a:t>
-            </a:r>
-            <a:endParaRPr lang="en-US" sz="1600" dirty="0"/>
+              <a:t>1. The Factors of Population Growth</a:t>
+            </a:r>
+            <a:endParaRPr lang="en-US" sz="3600" dirty="0"/>
+          </a:p>
+        </p:txBody>
+      </p:sp>
+      <p:sp>
+        <p:nvSpPr>
+          <p:cNvPr id="5" name="Text 2"/>
+          <p:cNvSpPr/>
+          <p:nvPr/>
+        </p:nvSpPr>
+        <p:spPr>
+          <a:xfrm>
+            <a:off x="4069080" y="1737360"/>
+            <a:ext cx="7802575" cy="457200"/>
+          </a:xfrm>
+          <a:prstGeom prst="rect">
+            <a:avLst/>
+          </a:prstGeom>
+          <a:noFill/>
+          <a:ln/>
+        </p:spPr>
+        <p:txBody>
+          <a:bodyPr wrap="square" lIns="0" tIns="0" rIns="0" bIns="0" rtlCol="0" anchor="ctr"/>
+          <a:lstStyle/>
+          <a:p>
+            <a:pPr algn="l" indent="0" marL="0">
+              <a:buNone/>
+            </a:pPr>
+            <a:r>
+              <a:rPr lang="en-US" sz="3200" b="1" dirty="0">
+                <a:solidFill>
+                  <a:srgbClr val="990011"/>
+                </a:solidFill>
+                <a:latin typeface="Times New Roman" pitchFamily="34" charset="0"/>
+                <a:ea typeface="Times New Roman" pitchFamily="34" charset="-122"/>
+                <a:cs typeface="Times New Roman" pitchFamily="34" charset="-120"/>
+              </a:rPr>
+              <a:t>B) Non-Demographic Factors</a:t>
+            </a:r>
+            <a:endParaRPr lang="en-US" sz="3200" dirty="0"/>
+          </a:p>
+        </p:txBody>
+      </p:sp>
+      <p:sp>
+        <p:nvSpPr>
+          <p:cNvPr id="6" name="Text 3"/>
+          <p:cNvSpPr/>
+          <p:nvPr/>
+        </p:nvSpPr>
+        <p:spPr>
+          <a:xfrm>
+            <a:off x="4069080" y="2240280"/>
+            <a:ext cx="7802575" cy="4206240"/>
+          </a:xfrm>
+          <a:prstGeom prst="rect">
+            <a:avLst/>
+          </a:prstGeom>
+          <a:noFill/>
+          <a:ln/>
+        </p:spPr>
+        <p:txBody>
+          <a:bodyPr wrap="square" lIns="0" tIns="0" rIns="0" bIns="0" rtlCol="0" anchor="t"/>
+          <a:lstStyle/>
+          <a:p>
+            <a:pPr algn="l" indent="0" marL="0">
+              <a:spcAft>
+                <a:spcPts val="800"/>
+              </a:spcAft>
+              <a:buNone/>
+            </a:pPr>
+            <a:r>
+              <a:rPr lang="en-US" sz="4000" b="1" dirty="0">
+                <a:solidFill>
+                  <a:srgbClr val="111111"/>
+                </a:solidFill>
+                <a:latin typeface="Times New Roman" pitchFamily="34" charset="0"/>
+                <a:ea typeface="Times New Roman" pitchFamily="34" charset="-122"/>
+                <a:cs typeface="Times New Roman" pitchFamily="34" charset="-120"/>
+              </a:rPr>
+              <a:t>Economic conditions: </a:t>
+            </a:r>
+            <a:pPr algn="l" indent="0" marL="0">
+              <a:spcAft>
+                <a:spcPts val="800"/>
+              </a:spcAft>
+              <a:buNone/>
+            </a:pPr>
+            <a:r>
+              <a:rPr lang="en-US" sz="4000" dirty="0">
+                <a:solidFill>
+                  <a:srgbClr val="111111"/>
+                </a:solidFill>
+                <a:latin typeface="Times New Roman" pitchFamily="34" charset="0"/>
+                <a:ea typeface="Times New Roman" pitchFamily="34" charset="-122"/>
+                <a:cs typeface="Times New Roman" pitchFamily="34" charset="-120"/>
+              </a:rPr>
+              <a:t>In poor countries, better food and income first reduce deaths and increase growth. In rich countries, economic crises make people delay marriage and births.</a:t>
+            </a:r>
+            <a:endParaRPr lang="en-US" sz="4000" dirty="0"/>
           </a:p>
         </p:txBody>
       </p:sp>
@@ -18285,9 +18055,129 @@
           </a:p>
         </p:txBody>
       </p:sp>
+      <p:sp>
+        <p:nvSpPr>
+          <p:cNvPr id="3" name="Text 1"/>
+          <p:cNvSpPr/>
+          <p:nvPr/>
+        </p:nvSpPr>
+        <p:spPr>
+          <a:xfrm>
+            <a:off x="365760" y="1005840"/>
+            <a:ext cx="11460175" cy="731520"/>
+          </a:xfrm>
+          <a:prstGeom prst="rect">
+            <a:avLst/>
+          </a:prstGeom>
+          <a:noFill/>
+          <a:ln/>
+        </p:spPr>
+        <p:txBody>
+          <a:bodyPr wrap="square" lIns="0" tIns="0" rIns="0" bIns="0" rtlCol="0" anchor="ctr">
+            <a:normAutofit/>
+          </a:bodyPr>
+          <a:lstStyle/>
+          <a:p>
+            <a:pPr algn="ctr" indent="0" marL="0">
+              <a:buNone/>
+            </a:pPr>
+            <a:r>
+              <a:rPr lang="en-US" sz="3600" b="1" dirty="0">
+                <a:solidFill>
+                  <a:srgbClr val="990011"/>
+                </a:solidFill>
+                <a:latin typeface="Times New Roman" pitchFamily="34" charset="0"/>
+                <a:ea typeface="Times New Roman" pitchFamily="34" charset="-122"/>
+                <a:cs typeface="Times New Roman" pitchFamily="34" charset="-120"/>
+              </a:rPr>
+              <a:t>2. How the Factors Influence Growth in Various Regions</a:t>
+            </a:r>
+            <a:endParaRPr lang="en-US" sz="3600" dirty="0"/>
+          </a:p>
+        </p:txBody>
+      </p:sp>
+      <p:sp>
+        <p:nvSpPr>
+          <p:cNvPr id="4" name="Text 2"/>
+          <p:cNvSpPr/>
+          <p:nvPr/>
+        </p:nvSpPr>
+        <p:spPr>
+          <a:xfrm>
+            <a:off x="365760" y="1783080"/>
+            <a:ext cx="6035040" cy="4617720"/>
+          </a:xfrm>
+          <a:prstGeom prst="rect">
+            <a:avLst/>
+          </a:prstGeom>
+          <a:noFill/>
+          <a:ln/>
+        </p:spPr>
+        <p:txBody>
+          <a:bodyPr wrap="square" lIns="0" tIns="0" rIns="0" bIns="0" rtlCol="0" anchor="t"/>
+          <a:lstStyle/>
+          <a:p>
+            <a:pPr algn="l" indent="0" marL="0">
+              <a:spcAft>
+                <a:spcPts val="800"/>
+              </a:spcAft>
+              <a:buNone/>
+            </a:pPr>
+            <a:r>
+              <a:rPr lang="en-US" sz="3000" i="1" dirty="0">
+                <a:solidFill>
+                  <a:srgbClr val="111111"/>
+                </a:solidFill>
+                <a:latin typeface="Times New Roman" pitchFamily="34" charset="0"/>
+                <a:ea typeface="Times New Roman" pitchFamily="34" charset="-122"/>
+                <a:cs typeface="Times New Roman" pitchFamily="34" charset="-120"/>
+              </a:rPr>
+              <a:t>The factors produce the following growth patterns in different regions:</a:t>
+            </a:r>
+            <a:endParaRPr lang="en-US" sz="3000" dirty="0"/>
+          </a:p>
+          <a:p>
+            <a:pPr algn="l" indent="0" marL="0">
+              <a:spcAft>
+                <a:spcPts val="800"/>
+              </a:spcAft>
+              <a:buNone/>
+            </a:pPr>
+            <a:r>
+              <a:rPr lang="en-US" sz="3000" b="1" dirty="0">
+                <a:solidFill>
+                  <a:srgbClr val="111111"/>
+                </a:solidFill>
+                <a:latin typeface="Times New Roman" pitchFamily="34" charset="0"/>
+                <a:ea typeface="Times New Roman" pitchFamily="34" charset="-122"/>
+                <a:cs typeface="Times New Roman" pitchFamily="34" charset="-120"/>
+              </a:rPr>
+              <a:t>Developing regions: </a:t>
+            </a:r>
+            <a:pPr algn="l" indent="0" marL="0">
+              <a:spcAft>
+                <a:spcPts val="800"/>
+              </a:spcAft>
+              <a:buNone/>
+            </a:pPr>
+            <a:r>
+              <a:rPr lang="en-US" sz="3000" dirty="0">
+                <a:solidFill>
+                  <a:srgbClr val="111111"/>
+                </a:solidFill>
+                <a:latin typeface="Times New Roman" pitchFamily="34" charset="0"/>
+                <a:ea typeface="Times New Roman" pitchFamily="34" charset="-122"/>
+                <a:cs typeface="Times New Roman" pitchFamily="34" charset="-120"/>
+              </a:rPr>
+              <a:t>In sub-Saharan Africa, high birth rates and falling death rates give rapid growth and a youthful population. Many young people also migrate from villages to towns.</a:t>
+            </a:r>
+            <a:endParaRPr lang="en-US" sz="3000" dirty="0"/>
+          </a:p>
+        </p:txBody>
+      </p:sp>
       <p:pic>
         <p:nvPicPr>
-          <p:cNvPr id="3" name="Image 0" descr="/home/claude/f4/img/minesec_sheet.png">    </p:cNvPr>
+          <p:cNvPr id="5" name="Image 0" descr="/home/claude/f4/img/v2/pop2_region_growth.png">    </p:cNvPr>
           <p:cNvPicPr>
             <a:picLocks noChangeAspect="1"/>
           </p:cNvPicPr>
@@ -18301,8 +18191,8 @@
         </p:blipFill>
         <p:spPr>
           <a:xfrm>
-            <a:off x="0" y="658368"/>
-            <a:ext cx="5120640" cy="5833872"/>
+            <a:off x="6537960" y="2849678"/>
+            <a:ext cx="5470855" cy="2137053"/>
           </a:xfrm>
           <a:prstGeom prst="rect">
             <a:avLst/>
@@ -18311,14 +18201,14 @@
       </p:pic>
       <p:sp>
         <p:nvSpPr>
-          <p:cNvPr id="4" name="Text 1"/>
+          <p:cNvPr id="6" name="Text 3"/>
           <p:cNvSpPr/>
           <p:nvPr/>
         </p:nvSpPr>
         <p:spPr>
           <a:xfrm>
-            <a:off x="5349240" y="1005840"/>
-            <a:ext cx="6522415" cy="731520"/>
+            <a:off x="6537960" y="6089904"/>
+            <a:ext cx="5470855" cy="347472"/>
           </a:xfrm>
           <a:prstGeom prst="rect">
             <a:avLst/>
@@ -18327,124 +18217,24 @@
           <a:ln/>
         </p:spPr>
         <p:txBody>
-          <a:bodyPr wrap="square" lIns="0" tIns="0" rIns="0" bIns="0" rtlCol="0" anchor="ctr">
-            <a:normAutofit/>
-          </a:bodyPr>
+          <a:bodyPr wrap="square" lIns="0" tIns="0" rIns="0" bIns="0" rtlCol="0" anchor="ctr"/>
           <a:lstStyle/>
           <a:p>
             <a:pPr algn="ctr" indent="0" marL="0">
               <a:buNone/>
             </a:pPr>
             <a:r>
-              <a:rPr lang="en-US" sz="3600" b="1" dirty="0">
-                <a:solidFill>
-                  <a:srgbClr val="990011"/>
+              <a:rPr lang="en-US" sz="1600" i="1" dirty="0">
+                <a:solidFill>
+                  <a:srgbClr val="555555"/>
                 </a:solidFill>
                 <a:latin typeface="Times New Roman" pitchFamily="34" charset="0"/>
                 <a:ea typeface="Times New Roman" pitchFamily="34" charset="-122"/>
                 <a:cs typeface="Times New Roman" pitchFamily="34" charset="-120"/>
               </a:rPr>
-              <a:t>1. Factors of Population Growth</a:t>
-            </a:r>
-            <a:endParaRPr lang="en-US" sz="3600" dirty="0"/>
-          </a:p>
-        </p:txBody>
-      </p:sp>
-      <p:sp>
-        <p:nvSpPr>
-          <p:cNvPr id="5" name="Text 2"/>
-          <p:cNvSpPr/>
-          <p:nvPr/>
-        </p:nvSpPr>
-        <p:spPr>
-          <a:xfrm>
-            <a:off x="5349240" y="1737360"/>
-            <a:ext cx="6522415" cy="457200"/>
-          </a:xfrm>
-          <a:prstGeom prst="rect">
-            <a:avLst/>
-          </a:prstGeom>
-          <a:noFill/>
-          <a:ln/>
-        </p:spPr>
-        <p:txBody>
-          <a:bodyPr wrap="square" lIns="0" tIns="0" rIns="0" bIns="0" rtlCol="0" anchor="ctr"/>
-          <a:lstStyle/>
-          <a:p>
-            <a:pPr algn="l" indent="0" marL="0">
-              <a:buNone/>
-            </a:pPr>
-            <a:r>
-              <a:rPr lang="en-US" sz="3200" b="1" dirty="0">
-                <a:solidFill>
-                  <a:srgbClr val="990011"/>
-                </a:solidFill>
-                <a:latin typeface="Times New Roman" pitchFamily="34" charset="0"/>
-                <a:ea typeface="Times New Roman" pitchFamily="34" charset="-122"/>
-                <a:cs typeface="Times New Roman" pitchFamily="34" charset="-120"/>
-              </a:rPr>
-              <a:t>B) Non-Demographic Factors</a:t>
-            </a:r>
-            <a:endParaRPr lang="en-US" sz="3200" dirty="0"/>
-          </a:p>
-        </p:txBody>
-      </p:sp>
-      <p:sp>
-        <p:nvSpPr>
-          <p:cNvPr id="6" name="Text 3"/>
-          <p:cNvSpPr/>
-          <p:nvPr/>
-        </p:nvSpPr>
-        <p:spPr>
-          <a:xfrm>
-            <a:off x="5349240" y="2240280"/>
-            <a:ext cx="6522415" cy="4206240"/>
-          </a:xfrm>
-          <a:prstGeom prst="rect">
-            <a:avLst/>
-          </a:prstGeom>
-          <a:noFill/>
-          <a:ln/>
-        </p:spPr>
-        <p:txBody>
-          <a:bodyPr wrap="square" lIns="0" tIns="0" rIns="0" bIns="0" rtlCol="0" anchor="t"/>
-          <a:lstStyle/>
-          <a:p>
-            <a:pPr algn="l" indent="0" marL="0">
-              <a:spcAft>
-                <a:spcPts val="800"/>
-              </a:spcAft>
-              <a:buNone/>
-            </a:pPr>
-            <a:r>
-              <a:rPr lang="en-US" sz="4000" b="1" dirty="0">
-                <a:solidFill>
-                  <a:srgbClr val="111111"/>
-                </a:solidFill>
-                <a:latin typeface="Times New Roman" pitchFamily="34" charset="0"/>
-                <a:ea typeface="Times New Roman" pitchFamily="34" charset="-122"/>
-                <a:cs typeface="Times New Roman" pitchFamily="34" charset="-120"/>
-              </a:rPr>
-              <a:t>Medical services: </a:t>
-            </a:r>
-            <a:pPr algn="l" indent="0" marL="0">
-              <a:spcAft>
-                <a:spcPts val="800"/>
-              </a:spcAft>
-              <a:buNone/>
-            </a:pPr>
-            <a:r>
-              <a:rPr lang="en-US" sz="4000" dirty="0">
-                <a:solidFill>
-                  <a:srgbClr val="111111"/>
-                </a:solidFill>
-                <a:latin typeface="Times New Roman" pitchFamily="34" charset="0"/>
-                <a:ea typeface="Times New Roman" pitchFamily="34" charset="-122"/>
-                <a:cs typeface="Times New Roman" pitchFamily="34" charset="-120"/>
-              </a:rPr>
-              <a:t>Hospitals, clinics and vaccines lower death rates and raise life expectancy.</a:t>
-            </a:r>
-            <a:endParaRPr lang="en-US" sz="4000" dirty="0"/>
+              <a:t>Illustration: growth by region</a:t>
+            </a:r>
+            <a:endParaRPr lang="en-US" sz="1600" dirty="0"/>
           </a:p>
         </p:txBody>
       </p:sp>
@@ -18560,150 +18350,9 @@
           </a:p>
         </p:txBody>
       </p:sp>
-      <p:sp>
-        <p:nvSpPr>
-          <p:cNvPr id="3" name="Text 1"/>
-          <p:cNvSpPr/>
-          <p:nvPr/>
-        </p:nvSpPr>
-        <p:spPr>
-          <a:xfrm>
-            <a:off x="365760" y="1005840"/>
-            <a:ext cx="11460175" cy="731520"/>
-          </a:xfrm>
-          <a:prstGeom prst="rect">
-            <a:avLst/>
-          </a:prstGeom>
-          <a:noFill/>
-          <a:ln/>
-        </p:spPr>
-        <p:txBody>
-          <a:bodyPr wrap="square" lIns="0" tIns="0" rIns="0" bIns="0" rtlCol="0" anchor="ctr">
-            <a:normAutofit/>
-          </a:bodyPr>
-          <a:lstStyle/>
-          <a:p>
-            <a:pPr algn="ctr" indent="0" marL="0">
-              <a:buNone/>
-            </a:pPr>
-            <a:r>
-              <a:rPr lang="en-US" sz="3600" b="1" dirty="0">
-                <a:solidFill>
-                  <a:srgbClr val="990011"/>
-                </a:solidFill>
-                <a:latin typeface="Times New Roman" pitchFamily="34" charset="0"/>
-                <a:ea typeface="Times New Roman" pitchFamily="34" charset="-122"/>
-                <a:cs typeface="Times New Roman" pitchFamily="34" charset="-120"/>
-              </a:rPr>
-              <a:t>1. Factors of Population Growth</a:t>
-            </a:r>
-            <a:endParaRPr lang="en-US" sz="3600" dirty="0"/>
-          </a:p>
-        </p:txBody>
-      </p:sp>
-      <p:sp>
-        <p:nvSpPr>
-          <p:cNvPr id="4" name="Text 2"/>
-          <p:cNvSpPr/>
-          <p:nvPr/>
-        </p:nvSpPr>
-        <p:spPr>
-          <a:xfrm>
-            <a:off x="365760" y="1737360"/>
-            <a:ext cx="5120640" cy="457200"/>
-          </a:xfrm>
-          <a:prstGeom prst="rect">
-            <a:avLst/>
-          </a:prstGeom>
-          <a:noFill/>
-          <a:ln/>
-        </p:spPr>
-        <p:txBody>
-          <a:bodyPr wrap="square" lIns="0" tIns="0" rIns="0" bIns="0" rtlCol="0" anchor="ctr">
-            <a:normAutofit/>
-          </a:bodyPr>
-          <a:lstStyle/>
-          <a:p>
-            <a:pPr algn="l" indent="0" marL="0">
-              <a:buNone/>
-            </a:pPr>
-            <a:r>
-              <a:rPr lang="en-US" sz="3000" b="1" dirty="0">
-                <a:solidFill>
-                  <a:srgbClr val="990011"/>
-                </a:solidFill>
-                <a:latin typeface="Times New Roman" pitchFamily="34" charset="0"/>
-                <a:ea typeface="Times New Roman" pitchFamily="34" charset="-122"/>
-                <a:cs typeface="Times New Roman" pitchFamily="34" charset="-120"/>
-              </a:rPr>
-              <a:t>B) Non-Demographic Factors</a:t>
-            </a:r>
-            <a:endParaRPr lang="en-US" sz="3000" dirty="0"/>
-          </a:p>
-        </p:txBody>
-      </p:sp>
-      <p:sp>
-        <p:nvSpPr>
-          <p:cNvPr id="5" name="Text 3"/>
-          <p:cNvSpPr/>
-          <p:nvPr/>
-        </p:nvSpPr>
-        <p:spPr>
-          <a:xfrm>
-            <a:off x="365760" y="2240280"/>
-            <a:ext cx="4846320" cy="4160520"/>
-          </a:xfrm>
-          <a:prstGeom prst="rect">
-            <a:avLst/>
-          </a:prstGeom>
-          <a:noFill/>
-          <a:ln/>
-        </p:spPr>
-        <p:txBody>
-          <a:bodyPr wrap="square" lIns="0" tIns="0" rIns="0" bIns="0" rtlCol="0" anchor="t"/>
-          <a:lstStyle/>
-          <a:p>
-            <a:pPr algn="l" indent="0" marL="0">
-              <a:spcAft>
-                <a:spcPts val="800"/>
-              </a:spcAft>
-              <a:buNone/>
-            </a:pPr>
-            <a:r>
-              <a:rPr lang="en-US" sz="3600" b="1" dirty="0">
-                <a:solidFill>
-                  <a:srgbClr val="111111"/>
-                </a:solidFill>
-                <a:latin typeface="Times New Roman" pitchFamily="34" charset="0"/>
-                <a:ea typeface="Times New Roman" pitchFamily="34" charset="-122"/>
-                <a:cs typeface="Times New Roman" pitchFamily="34" charset="-120"/>
-              </a:rPr>
-              <a:t>Government policies: </a:t>
-            </a:r>
-            <a:pPr algn="l" indent="0" marL="0">
-              <a:spcAft>
-                <a:spcPts val="800"/>
-              </a:spcAft>
-              <a:buNone/>
-            </a:pPr>
-            <a:r>
-              <a:rPr lang="en-US" sz="3600" dirty="0">
-                <a:solidFill>
-                  <a:srgbClr val="111111"/>
-                </a:solidFill>
-                <a:latin typeface="Times New Roman" pitchFamily="34" charset="0"/>
-                <a:ea typeface="Times New Roman" pitchFamily="34" charset="-122"/>
-                <a:cs typeface="Times New Roman" pitchFamily="34" charset="-120"/>
-              </a:rPr>
-              <a:t>Pro-natalist policies encourage births, while anti-natalist policies, like China's former one-child policy, limit them.</a:t>
-            </a:r>
-            <a:endParaRPr lang="en-US" sz="3600" dirty="0"/>
-          </a:p>
-        </p:txBody>
-      </p:sp>
       <p:pic>
         <p:nvPicPr>
-          <p:cNvPr id="6" name="Image 0" descr="/home/claude/f4/img/v2/usa_onechild.jpg">    </p:cNvPr>
+          <p:cNvPr id="3" name="Image 0" descr="/home/claude/f4/img/minesec_sheet.png">    </p:cNvPr>
           <p:cNvPicPr>
             <a:picLocks noChangeAspect="1"/>
           </p:cNvPicPr>
@@ -18717,8 +18366,8 @@
         </p:blipFill>
         <p:spPr>
           <a:xfrm>
-            <a:off x="5349240" y="2071212"/>
-            <a:ext cx="6659575" cy="3693983"/>
+            <a:off x="0" y="658368"/>
+            <a:ext cx="3840480" cy="5833872"/>
           </a:xfrm>
           <a:prstGeom prst="rect">
             <a:avLst/>
@@ -18727,14 +18376,14 @@
       </p:pic>
       <p:sp>
         <p:nvSpPr>
-          <p:cNvPr id="7" name="Text 4"/>
+          <p:cNvPr id="4" name="Text 1"/>
           <p:cNvSpPr/>
           <p:nvPr/>
         </p:nvSpPr>
         <p:spPr>
           <a:xfrm>
-            <a:off x="5349240" y="6089904"/>
-            <a:ext cx="6659575" cy="347472"/>
+            <a:off x="4069080" y="1005840"/>
+            <a:ext cx="7802575" cy="731520"/>
           </a:xfrm>
           <a:prstGeom prst="rect">
             <a:avLst/>
@@ -18743,24 +18392,85 @@
           <a:ln/>
         </p:spPr>
         <p:txBody>
-          <a:bodyPr wrap="square" lIns="0" tIns="0" rIns="0" bIns="0" rtlCol="0" anchor="ctr"/>
+          <a:bodyPr wrap="square" lIns="0" tIns="0" rIns="0" bIns="0" rtlCol="0" anchor="ctr">
+            <a:normAutofit/>
+          </a:bodyPr>
           <a:lstStyle/>
           <a:p>
             <a:pPr algn="ctr" indent="0" marL="0">
               <a:buNone/>
             </a:pPr>
             <a:r>
-              <a:rPr lang="en-US" sz="1600" i="1" dirty="0">
-                <a:solidFill>
-                  <a:srgbClr val="555555"/>
+              <a:rPr lang="en-US" sz="3600" b="1" dirty="0">
+                <a:solidFill>
+                  <a:srgbClr val="990011"/>
                 </a:solidFill>
                 <a:latin typeface="Times New Roman" pitchFamily="34" charset="0"/>
                 <a:ea typeface="Times New Roman" pitchFamily="34" charset="-122"/>
                 <a:cs typeface="Times New Roman" pitchFamily="34" charset="-120"/>
               </a:rPr>
-              <a:t>Illustration: a family policy poster</a:t>
-            </a:r>
-            <a:endParaRPr lang="en-US" sz="1600" dirty="0"/>
+              <a:t>2. How the Factors Influence Growth in Various Regions</a:t>
+            </a:r>
+            <a:endParaRPr lang="en-US" sz="3600" dirty="0"/>
+          </a:p>
+        </p:txBody>
+      </p:sp>
+      <p:sp>
+        <p:nvSpPr>
+          <p:cNvPr id="5" name="Text 2"/>
+          <p:cNvSpPr/>
+          <p:nvPr/>
+        </p:nvSpPr>
+        <p:spPr>
+          <a:xfrm>
+            <a:off x="4069080" y="1783080"/>
+            <a:ext cx="7802575" cy="4663440"/>
+          </a:xfrm>
+          <a:prstGeom prst="rect">
+            <a:avLst/>
+          </a:prstGeom>
+          <a:noFill/>
+          <a:ln/>
+        </p:spPr>
+        <p:txBody>
+          <a:bodyPr wrap="square" lIns="0" tIns="0" rIns="0" bIns="0" rtlCol="0" anchor="t"/>
+          <a:lstStyle/>
+          <a:p>
+            <a:pPr algn="l" indent="0" marL="0">
+              <a:spcAft>
+                <a:spcPts val="800"/>
+              </a:spcAft>
+              <a:buNone/>
+            </a:pPr>
+            <a:r>
+              <a:rPr lang="en-US" sz="4000" b="1" dirty="0">
+                <a:solidFill>
+                  <a:srgbClr val="111111"/>
+                </a:solidFill>
+                <a:latin typeface="Times New Roman" pitchFamily="34" charset="0"/>
+                <a:ea typeface="Times New Roman" pitchFamily="34" charset="-122"/>
+                <a:cs typeface="Times New Roman" pitchFamily="34" charset="-120"/>
+              </a:rPr>
+              <a:t>Developed regions: </a:t>
+            </a:r>
+            <a:pPr algn="l" indent="0" marL="0">
+              <a:spcAft>
+                <a:spcPts val="800"/>
+              </a:spcAft>
+              <a:buNone/>
+            </a:pPr>
+            <a:r>
+              <a:rPr lang="en-US" sz="4000" dirty="0">
+                <a:solidFill>
+                  <a:srgbClr val="111111"/>
+                </a:solidFill>
+                <a:latin typeface="Times New Roman" pitchFamily="34" charset="0"/>
+                <a:ea typeface="Times New Roman" pitchFamily="34" charset="-122"/>
+                <a:cs typeface="Times New Roman" pitchFamily="34" charset="-120"/>
+              </a:rPr>
+              <a:t>In Western Europe and Japan, low birth and death rates give slow or negative growth and an ageing population. These countries need immigrants to fill labour shortages.</a:t>
+            </a:r>
+            <a:endParaRPr lang="en-US" sz="4000" dirty="0"/>
           </a:p>
         </p:txBody>
       </p:sp>
@@ -18935,7 +18645,7 @@
                 <a:ea typeface="Times New Roman" pitchFamily="34" charset="-122"/>
                 <a:cs typeface="Times New Roman" pitchFamily="34" charset="-120"/>
               </a:rPr>
-              <a:t>1. Factors of Population Growth</a:t>
+              <a:t>2. How the Factors Influence Growth in Various Regions</a:t>
             </a:r>
             <a:endParaRPr lang="en-US" sz="3600" dirty="0"/>
           </a:p>
@@ -18949,47 +18659,8 @@
         </p:nvSpPr>
         <p:spPr>
           <a:xfrm>
-            <a:off x="5349240" y="1737360"/>
-            <a:ext cx="6522415" cy="457200"/>
-          </a:xfrm>
-          <a:prstGeom prst="rect">
-            <a:avLst/>
-          </a:prstGeom>
-          <a:noFill/>
-          <a:ln/>
-        </p:spPr>
-        <p:txBody>
-          <a:bodyPr wrap="square" lIns="0" tIns="0" rIns="0" bIns="0" rtlCol="0" anchor="ctr"/>
-          <a:lstStyle/>
-          <a:p>
-            <a:pPr algn="l" indent="0" marL="0">
-              <a:buNone/>
-            </a:pPr>
-            <a:r>
-              <a:rPr lang="en-US" sz="3200" b="1" dirty="0">
-                <a:solidFill>
-                  <a:srgbClr val="990011"/>
-                </a:solidFill>
-                <a:latin typeface="Times New Roman" pitchFamily="34" charset="0"/>
-                <a:ea typeface="Times New Roman" pitchFamily="34" charset="-122"/>
-                <a:cs typeface="Times New Roman" pitchFamily="34" charset="-120"/>
-              </a:rPr>
-              <a:t>B) Non-Demographic Factors</a:t>
-            </a:r>
-            <a:endParaRPr lang="en-US" sz="3200" dirty="0"/>
-          </a:p>
-        </p:txBody>
-      </p:sp>
-      <p:sp>
-        <p:nvSpPr>
-          <p:cNvPr id="6" name="Text 3"/>
-          <p:cNvSpPr/>
-          <p:nvPr/>
-        </p:nvSpPr>
-        <p:spPr>
-          <a:xfrm>
-            <a:off x="5349240" y="2240280"/>
-            <a:ext cx="6522415" cy="4206240"/>
+            <a:off x="5349240" y="1783080"/>
+            <a:ext cx="6522415" cy="4663440"/>
           </a:xfrm>
           <a:prstGeom prst="rect">
             <a:avLst/>
@@ -19016,7 +18687,7 @@
                 <a:ea typeface="Times New Roman" pitchFamily="34" charset="-122"/>
                 <a:cs typeface="Times New Roman" pitchFamily="34" charset="-120"/>
               </a:rPr>
-              <a:t>Economic conditions: </a:t>
+              <a:t>Emerging economies: </a:t>
             </a:r>
             <a:pPr algn="l" indent="0" marL="0">
               <a:spcAft>
@@ -19033,7 +18704,7 @@
                 <a:ea typeface="Times New Roman" pitchFamily="34" charset="-122"/>
                 <a:cs typeface="Times New Roman" pitchFamily="34" charset="-120"/>
               </a:rPr>
-              <a:t>Prosperity first increases growth in poor countries, while crises make people in rich countries delay marriage and births.</a:t>
+              <a:t>Brazil and Mexico have falling births and low deaths, so their growth is moderate. Their large workforce can bring a demographic dividend.</a:t>
             </a:r>
             <a:endParaRPr lang="en-US" sz="4000" dirty="0"/>
           </a:p>
@@ -19370,129 +19041,9 @@
           </a:p>
         </p:txBody>
       </p:sp>
-      <p:sp>
-        <p:nvSpPr>
-          <p:cNvPr id="3" name="Text 1"/>
-          <p:cNvSpPr/>
-          <p:nvPr/>
-        </p:nvSpPr>
-        <p:spPr>
-          <a:xfrm>
-            <a:off x="365760" y="1005840"/>
-            <a:ext cx="11460175" cy="731520"/>
-          </a:xfrm>
-          <a:prstGeom prst="rect">
-            <a:avLst/>
-          </a:prstGeom>
-          <a:noFill/>
-          <a:ln/>
-        </p:spPr>
-        <p:txBody>
-          <a:bodyPr wrap="square" lIns="0" tIns="0" rIns="0" bIns="0" rtlCol="0" anchor="ctr">
-            <a:normAutofit/>
-          </a:bodyPr>
-          <a:lstStyle/>
-          <a:p>
-            <a:pPr algn="ctr" indent="0" marL="0">
-              <a:buNone/>
-            </a:pPr>
-            <a:r>
-              <a:rPr lang="en-US" sz="3600" b="1" dirty="0">
-                <a:solidFill>
-                  <a:srgbClr val="990011"/>
-                </a:solidFill>
-                <a:latin typeface="Times New Roman" pitchFamily="34" charset="0"/>
-                <a:ea typeface="Times New Roman" pitchFamily="34" charset="-122"/>
-                <a:cs typeface="Times New Roman" pitchFamily="34" charset="-120"/>
-              </a:rPr>
-              <a:t>2. How the Factors Act in Various Regions</a:t>
-            </a:r>
-            <a:endParaRPr lang="en-US" sz="3600" dirty="0"/>
-          </a:p>
-        </p:txBody>
-      </p:sp>
-      <p:sp>
-        <p:nvSpPr>
-          <p:cNvPr id="4" name="Text 2"/>
-          <p:cNvSpPr/>
-          <p:nvPr/>
-        </p:nvSpPr>
-        <p:spPr>
-          <a:xfrm>
-            <a:off x="365760" y="1783080"/>
-            <a:ext cx="4846320" cy="4617720"/>
-          </a:xfrm>
-          <a:prstGeom prst="rect">
-            <a:avLst/>
-          </a:prstGeom>
-          <a:noFill/>
-          <a:ln/>
-        </p:spPr>
-        <p:txBody>
-          <a:bodyPr wrap="square" lIns="0" tIns="0" rIns="0" bIns="0" rtlCol="0" anchor="t"/>
-          <a:lstStyle/>
-          <a:p>
-            <a:pPr algn="l" indent="0" marL="0">
-              <a:spcAft>
-                <a:spcPts val="800"/>
-              </a:spcAft>
-              <a:buNone/>
-            </a:pPr>
-            <a:r>
-              <a:rPr lang="en-US" sz="3200" i="1" dirty="0">
-                <a:solidFill>
-                  <a:srgbClr val="111111"/>
-                </a:solidFill>
-                <a:latin typeface="Times New Roman" pitchFamily="34" charset="0"/>
-                <a:ea typeface="Times New Roman" pitchFamily="34" charset="-122"/>
-                <a:cs typeface="Times New Roman" pitchFamily="34" charset="-120"/>
-              </a:rPr>
-              <a:t>The factors produce the following growth patterns:</a:t>
-            </a:r>
-            <a:endParaRPr lang="en-US" sz="3200" dirty="0"/>
-          </a:p>
-          <a:p>
-            <a:pPr algn="l" indent="0" marL="0">
-              <a:spcAft>
-                <a:spcPts val="800"/>
-              </a:spcAft>
-              <a:buNone/>
-            </a:pPr>
-            <a:r>
-              <a:rPr lang="en-US" sz="3200" b="1" dirty="0">
-                <a:solidFill>
-                  <a:srgbClr val="111111"/>
-                </a:solidFill>
-                <a:latin typeface="Times New Roman" pitchFamily="34" charset="0"/>
-                <a:ea typeface="Times New Roman" pitchFamily="34" charset="-122"/>
-                <a:cs typeface="Times New Roman" pitchFamily="34" charset="-120"/>
-              </a:rPr>
-              <a:t>Developing regions: </a:t>
-            </a:r>
-            <a:pPr algn="l" indent="0" marL="0">
-              <a:spcAft>
-                <a:spcPts val="800"/>
-              </a:spcAft>
-              <a:buNone/>
-            </a:pPr>
-            <a:r>
-              <a:rPr lang="en-US" sz="3200" dirty="0">
-                <a:solidFill>
-                  <a:srgbClr val="111111"/>
-                </a:solidFill>
-                <a:latin typeface="Times New Roman" pitchFamily="34" charset="0"/>
-                <a:ea typeface="Times New Roman" pitchFamily="34" charset="-122"/>
-                <a:cs typeface="Times New Roman" pitchFamily="34" charset="-120"/>
-              </a:rPr>
-              <a:t>In sub-Saharan Africa, high births and falling deaths give rapid growth, a youthful population and rural exodus.</a:t>
-            </a:r>
-            <a:endParaRPr lang="en-US" sz="3200" dirty="0"/>
-          </a:p>
-        </p:txBody>
-      </p:sp>
       <p:pic>
         <p:nvPicPr>
-          <p:cNvPr id="5" name="Image 0" descr="/home/claude/f4/img/v2/pop2_region_growth.png">    </p:cNvPr>
+          <p:cNvPr id="3" name="Image 0" descr="/home/claude/f4/img/minesec_sheet.png">    </p:cNvPr>
           <p:cNvPicPr>
             <a:picLocks noChangeAspect="1"/>
           </p:cNvPicPr>
@@ -19506,8 +19057,8 @@
         </p:blipFill>
         <p:spPr>
           <a:xfrm>
-            <a:off x="5349240" y="2617506"/>
-            <a:ext cx="6659575" cy="2601397"/>
+            <a:off x="0" y="658368"/>
+            <a:ext cx="5120640" cy="5833872"/>
           </a:xfrm>
           <a:prstGeom prst="rect">
             <a:avLst/>
@@ -19516,14 +19067,14 @@
       </p:pic>
       <p:sp>
         <p:nvSpPr>
-          <p:cNvPr id="6" name="Text 3"/>
+          <p:cNvPr id="4" name="Text 1"/>
           <p:cNvSpPr/>
           <p:nvPr/>
         </p:nvSpPr>
         <p:spPr>
           <a:xfrm>
-            <a:off x="5349240" y="6089904"/>
-            <a:ext cx="6659575" cy="347472"/>
+            <a:off x="5349240" y="1005840"/>
+            <a:ext cx="6522415" cy="731520"/>
           </a:xfrm>
           <a:prstGeom prst="rect">
             <a:avLst/>
@@ -19532,24 +19083,85 @@
           <a:ln/>
         </p:spPr>
         <p:txBody>
-          <a:bodyPr wrap="square" lIns="0" tIns="0" rIns="0" bIns="0" rtlCol="0" anchor="ctr"/>
+          <a:bodyPr wrap="square" lIns="0" tIns="0" rIns="0" bIns="0" rtlCol="0" anchor="ctr">
+            <a:normAutofit/>
+          </a:bodyPr>
           <a:lstStyle/>
           <a:p>
             <a:pPr algn="ctr" indent="0" marL="0">
               <a:buNone/>
             </a:pPr>
             <a:r>
-              <a:rPr lang="en-US" sz="1600" i="1" dirty="0">
-                <a:solidFill>
-                  <a:srgbClr val="555555"/>
+              <a:rPr lang="en-US" sz="3600" b="1" dirty="0">
+                <a:solidFill>
+                  <a:srgbClr val="990011"/>
                 </a:solidFill>
                 <a:latin typeface="Times New Roman" pitchFamily="34" charset="0"/>
                 <a:ea typeface="Times New Roman" pitchFamily="34" charset="-122"/>
                 <a:cs typeface="Times New Roman" pitchFamily="34" charset="-120"/>
               </a:rPr>
-              <a:t>Illustration: growth patterns by region</a:t>
-            </a:r>
-            <a:endParaRPr lang="en-US" sz="1600" dirty="0"/>
+              <a:t>2. How the Factors Influence Growth in Various Regions</a:t>
+            </a:r>
+            <a:endParaRPr lang="en-US" sz="3600" dirty="0"/>
+          </a:p>
+        </p:txBody>
+      </p:sp>
+      <p:sp>
+        <p:nvSpPr>
+          <p:cNvPr id="5" name="Text 2"/>
+          <p:cNvSpPr/>
+          <p:nvPr/>
+        </p:nvSpPr>
+        <p:spPr>
+          <a:xfrm>
+            <a:off x="5349240" y="1783080"/>
+            <a:ext cx="6522415" cy="4663440"/>
+          </a:xfrm>
+          <a:prstGeom prst="rect">
+            <a:avLst/>
+          </a:prstGeom>
+          <a:noFill/>
+          <a:ln/>
+        </p:spPr>
+        <p:txBody>
+          <a:bodyPr wrap="square" lIns="0" tIns="0" rIns="0" bIns="0" rtlCol="0" anchor="t"/>
+          <a:lstStyle/>
+          <a:p>
+            <a:pPr algn="l" indent="0" marL="0">
+              <a:spcAft>
+                <a:spcPts val="800"/>
+              </a:spcAft>
+              <a:buNone/>
+            </a:pPr>
+            <a:r>
+              <a:rPr lang="en-US" sz="4000" b="1" dirty="0">
+                <a:solidFill>
+                  <a:srgbClr val="111111"/>
+                </a:solidFill>
+                <a:latin typeface="Times New Roman" pitchFamily="34" charset="0"/>
+                <a:ea typeface="Times New Roman" pitchFamily="34" charset="-122"/>
+                <a:cs typeface="Times New Roman" pitchFamily="34" charset="-120"/>
+              </a:rPr>
+              <a:t>Unstable regions: </a:t>
+            </a:r>
+            <a:pPr algn="l" indent="0" marL="0">
+              <a:spcAft>
+                <a:spcPts val="800"/>
+              </a:spcAft>
+              <a:buNone/>
+            </a:pPr>
+            <a:r>
+              <a:rPr lang="en-US" sz="4000" dirty="0">
+                <a:solidFill>
+                  <a:srgbClr val="111111"/>
+                </a:solidFill>
+                <a:latin typeface="Times New Roman" pitchFamily="34" charset="0"/>
+                <a:ea typeface="Times New Roman" pitchFamily="34" charset="-122"/>
+                <a:cs typeface="Times New Roman" pitchFamily="34" charset="-120"/>
+              </a:rPr>
+              <a:t>In war zones, deaths rise suddenly and health services collapse. Waves of refugees move into neighbouring countries.</a:t>
+            </a:r>
+            <a:endParaRPr lang="en-US" sz="4000" dirty="0"/>
           </a:p>
         </p:txBody>
       </p:sp>
@@ -19659,7 +19271,7 @@
                 <a:ea typeface="Calibri" pitchFamily="34" charset="-122"/>
                 <a:cs typeface="Calibri" pitchFamily="34" charset="-120"/>
               </a:rPr>
-              <a:t>BOARD SUMMARY</a:t>
+              <a:t>FORMATIVE EVALUATION</a:t>
             </a:r>
             <a:endParaRPr lang="en-US" sz="1400" dirty="0"/>
           </a:p>
@@ -19724,7 +19336,7 @@
                 <a:ea typeface="Times New Roman" pitchFamily="34" charset="-122"/>
                 <a:cs typeface="Times New Roman" pitchFamily="34" charset="-120"/>
               </a:rPr>
-              <a:t>2. How the Factors Act in Various Regions</a:t>
+              <a:t>Evaluation 1</a:t>
             </a:r>
             <a:endParaRPr lang="en-US" sz="3600" dirty="0"/>
           </a:p>
@@ -19758,7 +19370,7 @@
               <a:buNone/>
             </a:pPr>
             <a:r>
-              <a:rPr lang="en-US" sz="4000" b="1" dirty="0">
+              <a:rPr lang="en-US" sz="4000" dirty="0">
                 <a:solidFill>
                   <a:srgbClr val="111111"/>
                 </a:solidFill>
@@ -19766,24 +19378,7 @@
                 <a:ea typeface="Times New Roman" pitchFamily="34" charset="-122"/>
                 <a:cs typeface="Times New Roman" pitchFamily="34" charset="-120"/>
               </a:rPr>
-              <a:t>Developed regions: </a:t>
-            </a:r>
-            <a:pPr algn="l" indent="0" marL="0">
-              <a:spcAft>
-                <a:spcPts val="800"/>
-              </a:spcAft>
-              <a:buNone/>
-            </a:pPr>
-            <a:r>
-              <a:rPr lang="en-US" sz="4000" dirty="0">
-                <a:solidFill>
-                  <a:srgbClr val="111111"/>
-                </a:solidFill>
-                <a:latin typeface="Times New Roman" pitchFamily="34" charset="0"/>
-                <a:ea typeface="Times New Roman" pitchFamily="34" charset="-122"/>
-                <a:cs typeface="Times New Roman" pitchFamily="34" charset="-120"/>
-              </a:rPr>
-              <a:t>In Western Europe and Japan, low births and low deaths give slow or negative growth, ageing and a need for immigrants.</a:t>
+              <a:t>Distinguish between demographic and non-demographic factors with one example each.</a:t>
             </a:r>
             <a:endParaRPr lang="en-US" sz="4000" dirty="0"/>
           </a:p>
@@ -19895,7 +19490,7 @@
                 <a:ea typeface="Calibri" pitchFamily="34" charset="-122"/>
                 <a:cs typeface="Calibri" pitchFamily="34" charset="-120"/>
               </a:rPr>
-              <a:t>BOARD SUMMARY</a:t>
+              <a:t>FORMATIVE EVALUATION</a:t>
             </a:r>
             <a:endParaRPr lang="en-US" sz="1400" dirty="0"/>
           </a:p>
@@ -19960,7 +19555,7 @@
                 <a:ea typeface="Times New Roman" pitchFamily="34" charset="-122"/>
                 <a:cs typeface="Times New Roman" pitchFamily="34" charset="-120"/>
               </a:rPr>
-              <a:t>2. How the Factors Act in Various Regions (continued)</a:t>
+              <a:t>Expected Answer</a:t>
             </a:r>
             <a:endParaRPr lang="en-US" sz="3600" dirty="0"/>
           </a:p>
@@ -19994,7 +19589,7 @@
               <a:buNone/>
             </a:pPr>
             <a:r>
-              <a:rPr lang="en-US" sz="4000" b="1" dirty="0">
+              <a:rPr lang="en-US" sz="4000" dirty="0">
                 <a:solidFill>
                   <a:srgbClr val="111111"/>
                 </a:solidFill>
@@ -20002,24 +19597,7 @@
                 <a:ea typeface="Times New Roman" pitchFamily="34" charset="-122"/>
                 <a:cs typeface="Times New Roman" pitchFamily="34" charset="-120"/>
               </a:rPr>
-              <a:t>Emerging economies: </a:t>
-            </a:r>
-            <a:pPr algn="l" indent="0" marL="0">
-              <a:spcAft>
-                <a:spcPts val="800"/>
-              </a:spcAft>
-              <a:buNone/>
-            </a:pPr>
-            <a:r>
-              <a:rPr lang="en-US" sz="4000" dirty="0">
-                <a:solidFill>
-                  <a:srgbClr val="111111"/>
-                </a:solidFill>
-                <a:latin typeface="Times New Roman" pitchFamily="34" charset="0"/>
-                <a:ea typeface="Times New Roman" pitchFamily="34" charset="-122"/>
-                <a:cs typeface="Times New Roman" pitchFamily="34" charset="-120"/>
-              </a:rPr>
-              <a:t>Brazil and Mexico have falling births and low deaths, moderate growth and a large workforce that can bring a demographic dividend.</a:t>
+              <a:t>Demographic factors belong to the population itself, e.g. the birth rate; non-demographic factors are external, e.g. wars.</a:t>
             </a:r>
             <a:endParaRPr lang="en-US" sz="4000" dirty="0"/>
           </a:p>
@@ -20131,7 +19709,7 @@
                 <a:ea typeface="Calibri" pitchFamily="34" charset="-122"/>
                 <a:cs typeface="Calibri" pitchFamily="34" charset="-120"/>
               </a:rPr>
-              <a:t>BOARD SUMMARY</a:t>
+              <a:t>FORMATIVE EVALUATION</a:t>
             </a:r>
             <a:endParaRPr lang="en-US" sz="1400" dirty="0"/>
           </a:p>
@@ -20196,7 +19774,7 @@
                 <a:ea typeface="Times New Roman" pitchFamily="34" charset="-122"/>
                 <a:cs typeface="Times New Roman" pitchFamily="34" charset="-120"/>
               </a:rPr>
-              <a:t>2. How the Factors Act in Various Regions (continued)</a:t>
+              <a:t>Evaluation 2</a:t>
             </a:r>
             <a:endParaRPr lang="en-US" sz="3600" dirty="0"/>
           </a:p>
@@ -20230,7 +19808,7 @@
               <a:buNone/>
             </a:pPr>
             <a:r>
-              <a:rPr lang="en-US" sz="4000" b="1" dirty="0">
+              <a:rPr lang="en-US" sz="4000" dirty="0">
                 <a:solidFill>
                   <a:srgbClr val="111111"/>
                 </a:solidFill>
@@ -20238,24 +19816,7 @@
                 <a:ea typeface="Times New Roman" pitchFamily="34" charset="-122"/>
                 <a:cs typeface="Times New Roman" pitchFamily="34" charset="-120"/>
               </a:rPr>
-              <a:t>Unstable regions: </a:t>
-            </a:r>
-            <a:pPr algn="l" indent="0" marL="0">
-              <a:spcAft>
-                <a:spcPts val="800"/>
-              </a:spcAft>
-              <a:buNone/>
-            </a:pPr>
-            <a:r>
-              <a:rPr lang="en-US" sz="4000" dirty="0">
-                <a:solidFill>
-                  <a:srgbClr val="111111"/>
-                </a:solidFill>
-                <a:latin typeface="Times New Roman" pitchFamily="34" charset="0"/>
-                <a:ea typeface="Times New Roman" pitchFamily="34" charset="-122"/>
-                <a:cs typeface="Times New Roman" pitchFamily="34" charset="-120"/>
-              </a:rPr>
-              <a:t>War zones suffer sudden decline, collapse of health services and waves of refugees into neighbouring countries.</a:t>
+              <a:t>Why do developed countries often depend on immigration?</a:t>
             </a:r>
             <a:endParaRPr lang="en-US" sz="4000" dirty="0"/>
           </a:p>
@@ -20432,7 +19993,7 @@
                 <a:ea typeface="Times New Roman" pitchFamily="34" charset="-122"/>
                 <a:cs typeface="Times New Roman" pitchFamily="34" charset="-120"/>
               </a:rPr>
-              <a:t>Evaluation 1</a:t>
+              <a:t>Expected Answer</a:t>
             </a:r>
             <a:endParaRPr lang="en-US" sz="3600" dirty="0"/>
           </a:p>
@@ -20474,7 +20035,7 @@
                 <a:ea typeface="Times New Roman" pitchFamily="34" charset="-122"/>
                 <a:cs typeface="Times New Roman" pitchFamily="34" charset="-120"/>
               </a:rPr>
-              <a:t>Distinguish between demographic and non-demographic factors with one example each.</a:t>
+              <a:t>Their low birth rates and ageing populations cause shortages of workers.</a:t>
             </a:r>
             <a:endParaRPr lang="en-US" sz="4000" dirty="0"/>
           </a:p>
@@ -20586,7 +20147,7 @@
                 <a:ea typeface="Calibri" pitchFamily="34" charset="-122"/>
                 <a:cs typeface="Calibri" pitchFamily="34" charset="-120"/>
               </a:rPr>
-              <a:t>FORMATIVE EVALUATION</a:t>
+              <a:t>REMEDIATION</a:t>
             </a:r>
             <a:endParaRPr lang="en-US" sz="1400" dirty="0"/>
           </a:p>
@@ -20609,7 +20170,7 @@
         <p:spPr>
           <a:xfrm>
             <a:off x="0" y="658368"/>
-            <a:ext cx="5120640" cy="5833872"/>
+            <a:ext cx="2468880" cy="5833872"/>
           </a:xfrm>
           <a:prstGeom prst="rect">
             <a:avLst/>
@@ -20624,8 +20185,8 @@
         </p:nvSpPr>
         <p:spPr>
           <a:xfrm>
-            <a:off x="5349240" y="1005840"/>
-            <a:ext cx="6522415" cy="731520"/>
+            <a:off x="2697480" y="1005840"/>
+            <a:ext cx="9174175" cy="731520"/>
           </a:xfrm>
           <a:prstGeom prst="rect">
             <a:avLst/>
@@ -20651,7 +20212,7 @@
                 <a:ea typeface="Times New Roman" pitchFamily="34" charset="-122"/>
                 <a:cs typeface="Times New Roman" pitchFamily="34" charset="-120"/>
               </a:rPr>
-              <a:t>Expected Answer</a:t>
+              <a:t>Remediation</a:t>
             </a:r>
             <a:endParaRPr lang="en-US" sz="3600" dirty="0"/>
           </a:p>
@@ -20665,8 +20226,8 @@
         </p:nvSpPr>
         <p:spPr>
           <a:xfrm>
-            <a:off x="5349240" y="1783080"/>
-            <a:ext cx="6522415" cy="4663440"/>
+            <a:off x="2697480" y="1783080"/>
+            <a:ext cx="9174175" cy="4663440"/>
           </a:xfrm>
           <a:prstGeom prst="rect">
             <a:avLst/>
@@ -20685,7 +20246,7 @@
               <a:buNone/>
             </a:pPr>
             <a:r>
-              <a:rPr lang="en-US" sz="4000" dirty="0">
+              <a:rPr lang="en-US" sz="4000" b="1" dirty="0">
                 <a:solidFill>
                   <a:srgbClr val="111111"/>
                 </a:solidFill>
@@ -20693,7 +20254,73 @@
                 <a:ea typeface="Times New Roman" pitchFamily="34" charset="-122"/>
                 <a:cs typeface="Times New Roman" pitchFamily="34" charset="-120"/>
               </a:rPr>
-              <a:t>Demographic factors belong to the population itself, e.g. the birth rate; non-demographic factors are external, e.g. wars.</a:t>
+              <a:t>Fill in the blanks:</a:t>
+            </a:r>
+            <a:endParaRPr lang="en-US" sz="4000" dirty="0"/>
+          </a:p>
+          <a:p>
+            <a:pPr algn="l" marL="342900" indent="-342900">
+              <a:spcAft>
+                <a:spcPts val="800"/>
+              </a:spcAft>
+              <a:buSzPct val="100000"/>
+              <a:buFont typeface="+mj-lt"/>
+              <a:buAutoNum type="arabicPeriod" startAt="1"/>
+            </a:pPr>
+            <a:r>
+              <a:rPr lang="en-US" sz="4000" dirty="0">
+                <a:solidFill>
+                  <a:srgbClr val="111111"/>
+                </a:solidFill>
+                <a:latin typeface="Times New Roman" pitchFamily="34" charset="0"/>
+                <a:ea typeface="Times New Roman" pitchFamily="34" charset="-122"/>
+                <a:cs typeface="Times New Roman" pitchFamily="34" charset="-120"/>
+              </a:rPr>
+              <a:t>An epidemic is a ______ factor.</a:t>
+            </a:r>
+            <a:endParaRPr lang="en-US" sz="4000" dirty="0"/>
+          </a:p>
+          <a:p>
+            <a:pPr algn="l" marL="342900" indent="-342900">
+              <a:spcAft>
+                <a:spcPts val="800"/>
+              </a:spcAft>
+              <a:buSzPct val="100000"/>
+              <a:buFont typeface="+mj-lt"/>
+              <a:buAutoNum type="arabicPeriod" startAt="1"/>
+            </a:pPr>
+            <a:r>
+              <a:rPr lang="en-US" sz="4000" dirty="0">
+                <a:solidFill>
+                  <a:srgbClr val="111111"/>
+                </a:solidFill>
+                <a:latin typeface="Times New Roman" pitchFamily="34" charset="0"/>
+                <a:ea typeface="Times New Roman" pitchFamily="34" charset="-122"/>
+                <a:cs typeface="Times New Roman" pitchFamily="34" charset="-120"/>
+              </a:rPr>
+              <a:t>China's one-child policy was ______-natalist.</a:t>
+            </a:r>
+            <a:endParaRPr lang="en-US" sz="4000" dirty="0"/>
+          </a:p>
+          <a:p>
+            <a:pPr algn="l" marL="342900" indent="-342900">
+              <a:spcAft>
+                <a:spcPts val="800"/>
+              </a:spcAft>
+              <a:buSzPct val="100000"/>
+              <a:buFont typeface="+mj-lt"/>
+              <a:buAutoNum type="arabicPeriod" startAt="1"/>
+            </a:pPr>
+            <a:r>
+              <a:rPr lang="en-US" sz="4000" dirty="0">
+                <a:solidFill>
+                  <a:srgbClr val="111111"/>
+                </a:solidFill>
+                <a:latin typeface="Times New Roman" pitchFamily="34" charset="0"/>
+                <a:ea typeface="Times New Roman" pitchFamily="34" charset="-122"/>
+                <a:cs typeface="Times New Roman" pitchFamily="34" charset="-120"/>
+              </a:rPr>
+              <a:t>Growth brought by a large workforce is the demographic ______.</a:t>
             </a:r>
             <a:endParaRPr lang="en-US" sz="4000" dirty="0"/>
           </a:p>
@@ -20805,7 +20432,7 @@
                 <a:ea typeface="Calibri" pitchFamily="34" charset="-122"/>
                 <a:cs typeface="Calibri" pitchFamily="34" charset="-120"/>
               </a:rPr>
-              <a:t>FORMATIVE EVALUATION</a:t>
+              <a:t>HOMEWORK</a:t>
             </a:r>
             <a:endParaRPr lang="en-US" sz="1400" dirty="0"/>
           </a:p>
@@ -20870,7 +20497,7 @@
                 <a:ea typeface="Times New Roman" pitchFamily="34" charset="-122"/>
                 <a:cs typeface="Times New Roman" pitchFamily="34" charset="-120"/>
               </a:rPr>
-              <a:t>Evaluation 2</a:t>
+              <a:t>Homework</a:t>
             </a:r>
             <a:endParaRPr lang="en-US" sz="3600" dirty="0"/>
           </a:p>
@@ -20912,7 +20539,7 @@
                 <a:ea typeface="Times New Roman" pitchFamily="34" charset="-122"/>
                 <a:cs typeface="Times New Roman" pitchFamily="34" charset="-120"/>
               </a:rPr>
-              <a:t>Why do developed countries often depend on immigration?</a:t>
+              <a:t>Define a pro-natalist policy.</a:t>
             </a:r>
             <a:endParaRPr lang="en-US" sz="4000" dirty="0"/>
           </a:p>
@@ -21024,7 +20651,7 @@
                 <a:ea typeface="Calibri" pitchFamily="34" charset="-122"/>
                 <a:cs typeface="Calibri" pitchFamily="34" charset="-120"/>
               </a:rPr>
-              <a:t>FORMATIVE EVALUATION</a:t>
+              <a:t>NEXT LESSON</a:t>
             </a:r>
             <a:endParaRPr lang="en-US" sz="1400" dirty="0"/>
           </a:p>
@@ -21089,7 +20716,7 @@
                 <a:ea typeface="Times New Roman" pitchFamily="34" charset="-122"/>
                 <a:cs typeface="Times New Roman" pitchFamily="34" charset="-120"/>
               </a:rPr>
-              <a:t>Expected Answer</a:t>
+              <a:t>Next Lesson</a:t>
             </a:r>
             <a:endParaRPr lang="en-US" sz="3600" dirty="0"/>
           </a:p>
@@ -21113,17 +20740,17 @@
           <a:ln/>
         </p:spPr>
         <p:txBody>
-          <a:bodyPr wrap="square" lIns="0" tIns="0" rIns="0" bIns="0" rtlCol="0" anchor="t"/>
-          <a:lstStyle/>
-          <a:p>
-            <a:pPr algn="l" indent="0" marL="0">
+          <a:bodyPr wrap="square" lIns="0" tIns="0" rIns="0" bIns="0" rtlCol="0" anchor="ctr"/>
+          <a:lstStyle/>
+          <a:p>
+            <a:pPr algn="ctr" indent="0" marL="0">
               <a:spcAft>
                 <a:spcPts val="800"/>
               </a:spcAft>
               <a:buNone/>
             </a:pPr>
             <a:r>
-              <a:rPr lang="en-US" sz="4000" dirty="0">
+              <a:rPr lang="en-US" sz="4000" b="1" dirty="0">
                 <a:solidFill>
                   <a:srgbClr val="111111"/>
                 </a:solidFill>
@@ -21131,7 +20758,27 @@
                 <a:ea typeface="Times New Roman" pitchFamily="34" charset="-122"/>
                 <a:cs typeface="Times New Roman" pitchFamily="34" charset="-120"/>
               </a:rPr>
-              <a:t>Their low birth rates and ageing populations cause shortages of workers.</a:t>
+              <a:t>Our next lesson will be on:</a:t>
+            </a:r>
+            <a:endParaRPr lang="en-US" sz="4000" dirty="0"/>
+          </a:p>
+          <a:p>
+            <a:pPr algn="ctr" indent="0" marL="0">
+              <a:spcAft>
+                <a:spcPts val="800"/>
+              </a:spcAft>
+              <a:buNone/>
+            </a:pPr>
+            <a:r>
+              <a:rPr lang="en-US" sz="4000" b="1" dirty="0">
+                <a:solidFill>
+                  <a:srgbClr val="990011"/>
+                </a:solidFill>
+                <a:latin typeface="Times New Roman" pitchFamily="34" charset="0"/>
+                <a:ea typeface="Times New Roman" pitchFamily="34" charset="-122"/>
+                <a:cs typeface="Times New Roman" pitchFamily="34" charset="-120"/>
+              </a:rPr>
+              <a:t>Lesson 11: The Modern Demographic Explosion and Population Policies</a:t>
             </a:r>
             <a:endParaRPr lang="en-US" sz="4000" dirty="0"/>
           </a:p>
@@ -21243,46 +20890,22 @@
                 <a:ea typeface="Calibri" pitchFamily="34" charset="-122"/>
                 <a:cs typeface="Calibri" pitchFamily="34" charset="-120"/>
               </a:rPr>
-              <a:t>REMEDIATION</a:t>
+              <a:t>BILINGUAL GAME</a:t>
             </a:r>
             <a:endParaRPr lang="en-US" sz="1400" dirty="0"/>
           </a:p>
         </p:txBody>
       </p:sp>
-      <p:pic>
-        <p:nvPicPr>
-          <p:cNvPr id="3" name="Image 0" descr="/home/claude/f4/img/minesec_sheet.png">    </p:cNvPr>
-          <p:cNvPicPr>
-            <a:picLocks noChangeAspect="1"/>
-          </p:cNvPicPr>
-          <p:nvPr/>
-        </p:nvPicPr>
-        <p:blipFill>
-          <a:blip r:embed="rId1"/>
-          <a:stretch>
-            <a:fillRect/>
-          </a:stretch>
-        </p:blipFill>
-        <p:spPr>
-          <a:xfrm>
-            <a:off x="0" y="658368"/>
-            <a:ext cx="2468880" cy="5833872"/>
-          </a:xfrm>
-          <a:prstGeom prst="rect">
-            <a:avLst/>
-          </a:prstGeom>
-        </p:spPr>
-      </p:pic>
-      <p:sp>
-        <p:nvSpPr>
-          <p:cNvPr id="4" name="Text 1"/>
+      <p:sp>
+        <p:nvSpPr>
+          <p:cNvPr id="3" name="Text 1"/>
           <p:cNvSpPr/>
           <p:nvPr/>
         </p:nvSpPr>
         <p:spPr>
           <a:xfrm>
-            <a:off x="2697480" y="1005840"/>
-            <a:ext cx="9174175" cy="731520"/>
+            <a:off x="457200" y="1005840"/>
+            <a:ext cx="11277295" cy="731520"/>
           </a:xfrm>
           <a:prstGeom prst="rect">
             <a:avLst/>
@@ -21291,9 +20914,7 @@
           <a:ln/>
         </p:spPr>
         <p:txBody>
-          <a:bodyPr wrap="square" lIns="0" tIns="0" rIns="0" bIns="0" rtlCol="0" anchor="ctr">
-            <a:normAutofit/>
-          </a:bodyPr>
+          <a:bodyPr wrap="square" lIns="0" tIns="0" rIns="0" bIns="0" rtlCol="0" anchor="ctr"/>
           <a:lstStyle/>
           <a:p>
             <a:pPr algn="ctr" indent="0" marL="0">
@@ -21308,1054 +20929,6 @@
                 <a:ea typeface="Times New Roman" pitchFamily="34" charset="-122"/>
                 <a:cs typeface="Times New Roman" pitchFamily="34" charset="-120"/>
               </a:rPr>
-              <a:t>Remediation</a:t>
-            </a:r>
-            <a:endParaRPr lang="en-US" sz="3600" dirty="0"/>
-          </a:p>
-        </p:txBody>
-      </p:sp>
-      <p:sp>
-        <p:nvSpPr>
-          <p:cNvPr id="5" name="Text 2"/>
-          <p:cNvSpPr/>
-          <p:nvPr/>
-        </p:nvSpPr>
-        <p:spPr>
-          <a:xfrm>
-            <a:off x="2697480" y="1783080"/>
-            <a:ext cx="9174175" cy="4663440"/>
-          </a:xfrm>
-          <a:prstGeom prst="rect">
-            <a:avLst/>
-          </a:prstGeom>
-          <a:noFill/>
-          <a:ln/>
-        </p:spPr>
-        <p:txBody>
-          <a:bodyPr wrap="square" lIns="0" tIns="0" rIns="0" bIns="0" rtlCol="0" anchor="t"/>
-          <a:lstStyle/>
-          <a:p>
-            <a:pPr algn="l" indent="0" marL="0">
-              <a:spcAft>
-                <a:spcPts val="800"/>
-              </a:spcAft>
-              <a:buNone/>
-            </a:pPr>
-            <a:r>
-              <a:rPr lang="en-US" sz="4000" b="1" dirty="0">
-                <a:solidFill>
-                  <a:srgbClr val="111111"/>
-                </a:solidFill>
-                <a:latin typeface="Times New Roman" pitchFamily="34" charset="0"/>
-                <a:ea typeface="Times New Roman" pitchFamily="34" charset="-122"/>
-                <a:cs typeface="Times New Roman" pitchFamily="34" charset="-120"/>
-              </a:rPr>
-              <a:t>Fill in the blanks:</a:t>
-            </a:r>
-            <a:endParaRPr lang="en-US" sz="4000" dirty="0"/>
-          </a:p>
-          <a:p>
-            <a:pPr algn="l" marL="342900" indent="-342900">
-              <a:spcAft>
-                <a:spcPts val="800"/>
-              </a:spcAft>
-              <a:buSzPct val="100000"/>
-              <a:buFont typeface="+mj-lt"/>
-              <a:buAutoNum type="arabicPeriod" startAt="1"/>
-            </a:pPr>
-            <a:r>
-              <a:rPr lang="en-US" sz="4000" dirty="0">
-                <a:solidFill>
-                  <a:srgbClr val="111111"/>
-                </a:solidFill>
-                <a:latin typeface="Times New Roman" pitchFamily="34" charset="0"/>
-                <a:ea typeface="Times New Roman" pitchFamily="34" charset="-122"/>
-                <a:cs typeface="Times New Roman" pitchFamily="34" charset="-120"/>
-              </a:rPr>
-              <a:t>An epidemic is a ______ factor.</a:t>
-            </a:r>
-            <a:endParaRPr lang="en-US" sz="4000" dirty="0"/>
-          </a:p>
-          <a:p>
-            <a:pPr algn="l" marL="342900" indent="-342900">
-              <a:spcAft>
-                <a:spcPts val="800"/>
-              </a:spcAft>
-              <a:buSzPct val="100000"/>
-              <a:buFont typeface="+mj-lt"/>
-              <a:buAutoNum type="arabicPeriod" startAt="1"/>
-            </a:pPr>
-            <a:r>
-              <a:rPr lang="en-US" sz="4000" dirty="0">
-                <a:solidFill>
-                  <a:srgbClr val="111111"/>
-                </a:solidFill>
-                <a:latin typeface="Times New Roman" pitchFamily="34" charset="0"/>
-                <a:ea typeface="Times New Roman" pitchFamily="34" charset="-122"/>
-                <a:cs typeface="Times New Roman" pitchFamily="34" charset="-120"/>
-              </a:rPr>
-              <a:t>China's one-child policy was ______-natalist.</a:t>
-            </a:r>
-            <a:endParaRPr lang="en-US" sz="4000" dirty="0"/>
-          </a:p>
-          <a:p>
-            <a:pPr algn="l" marL="342900" indent="-342900">
-              <a:spcAft>
-                <a:spcPts val="800"/>
-              </a:spcAft>
-              <a:buSzPct val="100000"/>
-              <a:buFont typeface="+mj-lt"/>
-              <a:buAutoNum type="arabicPeriod" startAt="1"/>
-            </a:pPr>
-            <a:r>
-              <a:rPr lang="en-US" sz="4000" dirty="0">
-                <a:solidFill>
-                  <a:srgbClr val="111111"/>
-                </a:solidFill>
-                <a:latin typeface="Times New Roman" pitchFamily="34" charset="0"/>
-                <a:ea typeface="Times New Roman" pitchFamily="34" charset="-122"/>
-                <a:cs typeface="Times New Roman" pitchFamily="34" charset="-120"/>
-              </a:rPr>
-              <a:t>Growth brought by a large workforce is the demographic ______.</a:t>
-            </a:r>
-            <a:endParaRPr lang="en-US" sz="4000" dirty="0"/>
-          </a:p>
-        </p:txBody>
-      </p:sp>
-      <p:sp>
-        <p:nvSpPr>
-          <p:cNvPr id="25" name="Slide Number Placeholder 0"/>
-          <p:cNvSpPr>
-            <a:spLocks noGrp="1"/>
-          </p:cNvSpPr>
-          <p:nvPr>
-            <p:ph type="sldNum" sz="quarter" idx="4294967295"/>
-          </p:nvPr>
-        </p:nvSpPr>
-        <p:spPr>
-          <a:xfrm>
-            <a:off x="27432" y="91440"/>
-            <a:ext cx="585216" cy="475488"/>
-          </a:xfrm>
-          <a:prstGeom prst="rect">
-            <a:avLst/>
-          </a:prstGeom>
-          <a:extLst>
-            <a:ext uri="{C572A759-6A51-4108-AA02-DFA0A04FC94B}">
-              <ma14:wrappingTextBoxFlag xmlns:ma14="http://schemas.microsoft.com/office/mac/drawingml/2011/main" val="0"/>
-            </a:ext>
-          </a:extLst>
-        </p:spPr>
-        <p:txBody>
-          <a:bodyPr/>
-          <a:lstStyle>
-            <a:lvl1pPr>
-              <a:defRPr sz="2000">
-                <a:solidFill>
-                  <a:srgbClr val="FFFFFF"/>
-                </a:solidFill>
-                <a:latin typeface="Calibri"/>
-                <a:ea typeface="Calibri"/>
-                <a:cs typeface="Calibri"/>
-              </a:defRPr>
-            </a:lvl1pPr>
-          </a:lstStyle>
-          <a:p>
-            <a:pPr algn="ctr"/>
-            <a:fld id="{F7021451-1387-4CA6-816F-3879F97B5CBC}" type="slidenum">
-              <a:rPr b="1" lang="en-US"/>
-              <a:t>58</a:t>
-            </a:fld>
-            <a:endParaRPr lang="en-US"/>
-          </a:p>
-        </p:txBody>
-      </p:sp>
-    </p:spTree>
-  </p:cSld>
-  <p:clrMapOvr>
-    <a:masterClrMapping/>
-  </p:clrMapOvr>
-</p:sld>
-</file>
-
-<file path=ppt/slides/slide59.xml><?xml version="1.0" encoding="utf-8"?>
-<p:sld xmlns:a="http://schemas.openxmlformats.org/drawingml/2006/main" xmlns:r="http://schemas.openxmlformats.org/officeDocument/2006/relationships" xmlns:p="http://schemas.openxmlformats.org/presentationml/2006/main">
-  <p:cSld name="Slide 59">
-    <p:spTree>
-      <p:nvGrpSpPr>
-        <p:cNvPr id="1" name=""/>
-        <p:cNvGrpSpPr/>
-        <p:nvPr/>
-      </p:nvGrpSpPr>
-      <p:grpSpPr>
-        <a:xfrm>
-          <a:off x="0" y="0"/>
-          <a:ext cx="0" cy="0"/>
-          <a:chOff x="0" y="0"/>
-          <a:chExt cx="0" cy="0"/>
-        </a:xfrm>
-      </p:grpSpPr>
-      <p:sp>
-        <p:nvSpPr>
-          <p:cNvPr id="2" name="Text 0"/>
-          <p:cNvSpPr/>
-          <p:nvPr/>
-        </p:nvSpPr>
-        <p:spPr>
-          <a:xfrm>
-            <a:off x="457200" y="713232"/>
-            <a:ext cx="11368735" cy="274320"/>
-          </a:xfrm>
-          <a:prstGeom prst="rect">
-            <a:avLst/>
-          </a:prstGeom>
-          <a:noFill/>
-          <a:ln/>
-        </p:spPr>
-        <p:txBody>
-          <a:bodyPr wrap="square" lIns="0" tIns="0" rIns="0" bIns="0" rtlCol="0" anchor="ctr"/>
-          <a:lstStyle/>
-          <a:p>
-            <a:pPr algn="r" indent="0" marL="0">
-              <a:buNone/>
-            </a:pPr>
-            <a:r>
-              <a:rPr lang="en-US" sz="1400" b="1" dirty="0">
-                <a:solidFill>
-                  <a:srgbClr val="1C3F6E"/>
-                </a:solidFill>
-                <a:latin typeface="Calibri" pitchFamily="34" charset="0"/>
-                <a:ea typeface="Calibri" pitchFamily="34" charset="-122"/>
-                <a:cs typeface="Calibri" pitchFamily="34" charset="-120"/>
-              </a:rPr>
-              <a:t>HOMEWORK</a:t>
-            </a:r>
-            <a:endParaRPr lang="en-US" sz="1400" dirty="0"/>
-          </a:p>
-        </p:txBody>
-      </p:sp>
-      <p:pic>
-        <p:nvPicPr>
-          <p:cNvPr id="3" name="Image 0" descr="/home/claude/f4/img/minesec_sheet.png">    </p:cNvPr>
-          <p:cNvPicPr>
-            <a:picLocks noChangeAspect="1"/>
-          </p:cNvPicPr>
-          <p:nvPr/>
-        </p:nvPicPr>
-        <p:blipFill>
-          <a:blip r:embed="rId1"/>
-          <a:stretch>
-            <a:fillRect/>
-          </a:stretch>
-        </p:blipFill>
-        <p:spPr>
-          <a:xfrm>
-            <a:off x="0" y="658368"/>
-            <a:ext cx="5120640" cy="5833872"/>
-          </a:xfrm>
-          <a:prstGeom prst="rect">
-            <a:avLst/>
-          </a:prstGeom>
-        </p:spPr>
-      </p:pic>
-      <p:sp>
-        <p:nvSpPr>
-          <p:cNvPr id="4" name="Text 1"/>
-          <p:cNvSpPr/>
-          <p:nvPr/>
-        </p:nvSpPr>
-        <p:spPr>
-          <a:xfrm>
-            <a:off x="5349240" y="1005840"/>
-            <a:ext cx="6522415" cy="731520"/>
-          </a:xfrm>
-          <a:prstGeom prst="rect">
-            <a:avLst/>
-          </a:prstGeom>
-          <a:noFill/>
-          <a:ln/>
-        </p:spPr>
-        <p:txBody>
-          <a:bodyPr wrap="square" lIns="0" tIns="0" rIns="0" bIns="0" rtlCol="0" anchor="ctr">
-            <a:normAutofit/>
-          </a:bodyPr>
-          <a:lstStyle/>
-          <a:p>
-            <a:pPr algn="ctr" indent="0" marL="0">
-              <a:buNone/>
-            </a:pPr>
-            <a:r>
-              <a:rPr lang="en-US" sz="3600" b="1" dirty="0">
-                <a:solidFill>
-                  <a:srgbClr val="990011"/>
-                </a:solidFill>
-                <a:latin typeface="Times New Roman" pitchFamily="34" charset="0"/>
-                <a:ea typeface="Times New Roman" pitchFamily="34" charset="-122"/>
-                <a:cs typeface="Times New Roman" pitchFamily="34" charset="-120"/>
-              </a:rPr>
-              <a:t>Homework</a:t>
-            </a:r>
-            <a:endParaRPr lang="en-US" sz="3600" dirty="0"/>
-          </a:p>
-        </p:txBody>
-      </p:sp>
-      <p:sp>
-        <p:nvSpPr>
-          <p:cNvPr id="5" name="Text 2"/>
-          <p:cNvSpPr/>
-          <p:nvPr/>
-        </p:nvSpPr>
-        <p:spPr>
-          <a:xfrm>
-            <a:off x="5349240" y="1783080"/>
-            <a:ext cx="6522415" cy="4663440"/>
-          </a:xfrm>
-          <a:prstGeom prst="rect">
-            <a:avLst/>
-          </a:prstGeom>
-          <a:noFill/>
-          <a:ln/>
-        </p:spPr>
-        <p:txBody>
-          <a:bodyPr wrap="square" lIns="0" tIns="0" rIns="0" bIns="0" rtlCol="0" anchor="t"/>
-          <a:lstStyle/>
-          <a:p>
-            <a:pPr algn="l" indent="0" marL="0">
-              <a:spcAft>
-                <a:spcPts val="800"/>
-              </a:spcAft>
-              <a:buNone/>
-            </a:pPr>
-            <a:r>
-              <a:rPr lang="en-US" sz="4000" dirty="0">
-                <a:solidFill>
-                  <a:srgbClr val="111111"/>
-                </a:solidFill>
-                <a:latin typeface="Times New Roman" pitchFamily="34" charset="0"/>
-                <a:ea typeface="Times New Roman" pitchFamily="34" charset="-122"/>
-                <a:cs typeface="Times New Roman" pitchFamily="34" charset="-120"/>
-              </a:rPr>
-              <a:t>Define a pro-natalist policy.</a:t>
-            </a:r>
-            <a:endParaRPr lang="en-US" sz="4000" dirty="0"/>
-          </a:p>
-        </p:txBody>
-      </p:sp>
-      <p:sp>
-        <p:nvSpPr>
-          <p:cNvPr id="25" name="Slide Number Placeholder 0"/>
-          <p:cNvSpPr>
-            <a:spLocks noGrp="1"/>
-          </p:cNvSpPr>
-          <p:nvPr>
-            <p:ph type="sldNum" sz="quarter" idx="4294967295"/>
-          </p:nvPr>
-        </p:nvSpPr>
-        <p:spPr>
-          <a:xfrm>
-            <a:off x="27432" y="91440"/>
-            <a:ext cx="585216" cy="475488"/>
-          </a:xfrm>
-          <a:prstGeom prst="rect">
-            <a:avLst/>
-          </a:prstGeom>
-          <a:extLst>
-            <a:ext uri="{C572A759-6A51-4108-AA02-DFA0A04FC94B}">
-              <ma14:wrappingTextBoxFlag xmlns:ma14="http://schemas.microsoft.com/office/mac/drawingml/2011/main" val="0"/>
-            </a:ext>
-          </a:extLst>
-        </p:spPr>
-        <p:txBody>
-          <a:bodyPr/>
-          <a:lstStyle>
-            <a:lvl1pPr>
-              <a:defRPr sz="2000">
-                <a:solidFill>
-                  <a:srgbClr val="FFFFFF"/>
-                </a:solidFill>
-                <a:latin typeface="Calibri"/>
-                <a:ea typeface="Calibri"/>
-                <a:cs typeface="Calibri"/>
-              </a:defRPr>
-            </a:lvl1pPr>
-          </a:lstStyle>
-          <a:p>
-            <a:pPr algn="ctr"/>
-            <a:fld id="{F7021451-1387-4CA6-816F-3879F97B5CBC}" type="slidenum">
-              <a:rPr b="1" lang="en-US"/>
-              <a:t>59</a:t>
-            </a:fld>
-            <a:endParaRPr lang="en-US"/>
-          </a:p>
-        </p:txBody>
-      </p:sp>
-    </p:spTree>
-  </p:cSld>
-  <p:clrMapOvr>
-    <a:masterClrMapping/>
-  </p:clrMapOvr>
-</p:sld>
-</file>
-
-<file path=ppt/slides/slide6.xml><?xml version="1.0" encoding="utf-8"?>
-<p:sld xmlns:a="http://schemas.openxmlformats.org/drawingml/2006/main" xmlns:r="http://schemas.openxmlformats.org/officeDocument/2006/relationships" xmlns:p="http://schemas.openxmlformats.org/presentationml/2006/main">
-  <p:cSld name="Slide 6">
-    <p:spTree>
-      <p:nvGrpSpPr>
-        <p:cNvPr id="1" name=""/>
-        <p:cNvGrpSpPr/>
-        <p:nvPr/>
-      </p:nvGrpSpPr>
-      <p:grpSpPr>
-        <a:xfrm>
-          <a:off x="0" y="0"/>
-          <a:ext cx="0" cy="0"/>
-          <a:chOff x="0" y="0"/>
-          <a:chExt cx="0" cy="0"/>
-        </a:xfrm>
-      </p:grpSpPr>
-      <p:sp>
-        <p:nvSpPr>
-          <p:cNvPr id="2" name="Text 0"/>
-          <p:cNvSpPr/>
-          <p:nvPr/>
-        </p:nvSpPr>
-        <p:spPr>
-          <a:xfrm>
-            <a:off x="457200" y="713232"/>
-            <a:ext cx="11368735" cy="274320"/>
-          </a:xfrm>
-          <a:prstGeom prst="rect">
-            <a:avLst/>
-          </a:prstGeom>
-          <a:noFill/>
-          <a:ln/>
-        </p:spPr>
-        <p:txBody>
-          <a:bodyPr wrap="square" lIns="0" tIns="0" rIns="0" bIns="0" rtlCol="0" anchor="ctr"/>
-          <a:lstStyle/>
-          <a:p>
-            <a:pPr algn="r" indent="0" marL="0">
-              <a:buNone/>
-            </a:pPr>
-            <a:r>
-              <a:rPr lang="en-US" sz="1400" b="1" dirty="0">
-                <a:solidFill>
-                  <a:srgbClr val="1C3F6E"/>
-                </a:solidFill>
-                <a:latin typeface="Calibri" pitchFamily="34" charset="0"/>
-                <a:ea typeface="Calibri" pitchFamily="34" charset="-122"/>
-                <a:cs typeface="Calibri" pitchFamily="34" charset="-120"/>
-              </a:rPr>
-              <a:t>LESSON PLAN</a:t>
-            </a:r>
-            <a:endParaRPr lang="en-US" sz="1400" dirty="0"/>
-          </a:p>
-        </p:txBody>
-      </p:sp>
-      <p:pic>
-        <p:nvPicPr>
-          <p:cNvPr id="3" name="Image 0" descr="/home/claude/f4/img/minesec_sheet.png">    </p:cNvPr>
-          <p:cNvPicPr>
-            <a:picLocks noChangeAspect="1"/>
-          </p:cNvPicPr>
-          <p:nvPr/>
-        </p:nvPicPr>
-        <p:blipFill>
-          <a:blip r:embed="rId1"/>
-          <a:stretch>
-            <a:fillRect/>
-          </a:stretch>
-        </p:blipFill>
-        <p:spPr>
-          <a:xfrm>
-            <a:off x="0" y="658368"/>
-            <a:ext cx="2468880" cy="5833872"/>
-          </a:xfrm>
-          <a:prstGeom prst="rect">
-            <a:avLst/>
-          </a:prstGeom>
-        </p:spPr>
-      </p:pic>
-      <p:sp>
-        <p:nvSpPr>
-          <p:cNvPr id="4" name="Text 1"/>
-          <p:cNvSpPr/>
-          <p:nvPr/>
-        </p:nvSpPr>
-        <p:spPr>
-          <a:xfrm>
-            <a:off x="2697480" y="1005840"/>
-            <a:ext cx="9174175" cy="731520"/>
-          </a:xfrm>
-          <a:prstGeom prst="rect">
-            <a:avLst/>
-          </a:prstGeom>
-          <a:noFill/>
-          <a:ln/>
-        </p:spPr>
-        <p:txBody>
-          <a:bodyPr wrap="square" lIns="0" tIns="0" rIns="0" bIns="0" rtlCol="0" anchor="ctr">
-            <a:normAutofit/>
-          </a:bodyPr>
-          <a:lstStyle/>
-          <a:p>
-            <a:pPr algn="ctr" indent="0" marL="0">
-              <a:buNone/>
-            </a:pPr>
-            <a:r>
-              <a:rPr lang="en-US" sz="3600" b="1" dirty="0">
-                <a:solidFill>
-                  <a:srgbClr val="990011"/>
-                </a:solidFill>
-                <a:latin typeface="Times New Roman" pitchFamily="34" charset="0"/>
-                <a:ea typeface="Times New Roman" pitchFamily="34" charset="-122"/>
-                <a:cs typeface="Times New Roman" pitchFamily="34" charset="-120"/>
-              </a:rPr>
-              <a:t>Lesson Plan</a:t>
-            </a:r>
-            <a:endParaRPr lang="en-US" sz="3600" dirty="0"/>
-          </a:p>
-        </p:txBody>
-      </p:sp>
-      <p:sp>
-        <p:nvSpPr>
-          <p:cNvPr id="5" name="Text 2"/>
-          <p:cNvSpPr/>
-          <p:nvPr/>
-        </p:nvSpPr>
-        <p:spPr>
-          <a:xfrm>
-            <a:off x="2697480" y="1783080"/>
-            <a:ext cx="9174175" cy="4663440"/>
-          </a:xfrm>
-          <a:prstGeom prst="rect">
-            <a:avLst/>
-          </a:prstGeom>
-          <a:noFill/>
-          <a:ln/>
-        </p:spPr>
-        <p:txBody>
-          <a:bodyPr wrap="square" lIns="0" tIns="0" rIns="0" bIns="0" rtlCol="0" anchor="t"/>
-          <a:lstStyle/>
-          <a:p>
-            <a:pPr algn="l" marL="342900" indent="-342900">
-              <a:spcAft>
-                <a:spcPts val="800"/>
-              </a:spcAft>
-              <a:buSzPct val="100000"/>
-              <a:buFont typeface="+mj-lt"/>
-              <a:buAutoNum type="arabicPeriod" startAt="1"/>
-            </a:pPr>
-            <a:r>
-              <a:rPr lang="en-US" sz="4000" dirty="0">
-                <a:solidFill>
-                  <a:srgbClr val="111111"/>
-                </a:solidFill>
-                <a:latin typeface="Times New Roman" pitchFamily="34" charset="0"/>
-                <a:ea typeface="Times New Roman" pitchFamily="34" charset="-122"/>
-                <a:cs typeface="Times New Roman" pitchFamily="34" charset="-120"/>
-              </a:rPr>
-              <a:t>Correction of the homework</a:t>
-            </a:r>
-            <a:endParaRPr lang="en-US" sz="4000" dirty="0"/>
-          </a:p>
-          <a:p>
-            <a:pPr algn="l" marL="342900" indent="-342900">
-              <a:spcAft>
-                <a:spcPts val="800"/>
-              </a:spcAft>
-              <a:buSzPct val="100000"/>
-              <a:buFont typeface="+mj-lt"/>
-              <a:buAutoNum type="arabicPeriod" startAt="1"/>
-            </a:pPr>
-            <a:r>
-              <a:rPr lang="en-US" sz="4000" dirty="0">
-                <a:solidFill>
-                  <a:srgbClr val="111111"/>
-                </a:solidFill>
-                <a:latin typeface="Times New Roman" pitchFamily="34" charset="0"/>
-                <a:ea typeface="Times New Roman" pitchFamily="34" charset="-122"/>
-                <a:cs typeface="Times New Roman" pitchFamily="34" charset="-120"/>
-              </a:rPr>
-              <a:t>Objectives and recall</a:t>
-            </a:r>
-            <a:endParaRPr lang="en-US" sz="4000" dirty="0"/>
-          </a:p>
-          <a:p>
-            <a:pPr algn="l" marL="342900" indent="-342900">
-              <a:spcAft>
-                <a:spcPts val="800"/>
-              </a:spcAft>
-              <a:buSzPct val="100000"/>
-              <a:buFont typeface="+mj-lt"/>
-              <a:buAutoNum type="arabicPeriod" startAt="1"/>
-            </a:pPr>
-            <a:r>
-              <a:rPr lang="en-US" sz="4000" dirty="0">
-                <a:solidFill>
-                  <a:srgbClr val="111111"/>
-                </a:solidFill>
-                <a:latin typeface="Times New Roman" pitchFamily="34" charset="0"/>
-                <a:ea typeface="Times New Roman" pitchFamily="34" charset="-122"/>
-                <a:cs typeface="Times New Roman" pitchFamily="34" charset="-120"/>
-              </a:rPr>
-              <a:t>Real-life situation and action to take</a:t>
-            </a:r>
-            <a:endParaRPr lang="en-US" sz="4000" dirty="0"/>
-          </a:p>
-          <a:p>
-            <a:pPr algn="l" marL="342900" indent="-342900">
-              <a:spcAft>
-                <a:spcPts val="800"/>
-              </a:spcAft>
-              <a:buSzPct val="100000"/>
-              <a:buFont typeface="+mj-lt"/>
-              <a:buAutoNum type="arabicPeriod" startAt="1"/>
-            </a:pPr>
-            <a:r>
-              <a:rPr lang="en-US" sz="4000" dirty="0">
-                <a:solidFill>
-                  <a:srgbClr val="111111"/>
-                </a:solidFill>
-                <a:latin typeface="Times New Roman" pitchFamily="34" charset="0"/>
-                <a:ea typeface="Times New Roman" pitchFamily="34" charset="-122"/>
-                <a:cs typeface="Times New Roman" pitchFamily="34" charset="-120"/>
-              </a:rPr>
-              <a:t>Learning activities</a:t>
-            </a:r>
-            <a:endParaRPr lang="en-US" sz="4000" dirty="0"/>
-          </a:p>
-          <a:p>
-            <a:pPr algn="l" marL="342900" indent="-342900">
-              <a:spcAft>
-                <a:spcPts val="800"/>
-              </a:spcAft>
-              <a:buSzPct val="100000"/>
-              <a:buFont typeface="+mj-lt"/>
-              <a:buAutoNum type="arabicPeriod" startAt="1"/>
-            </a:pPr>
-            <a:r>
-              <a:rPr lang="en-US" sz="4000" dirty="0">
-                <a:solidFill>
-                  <a:srgbClr val="111111"/>
-                </a:solidFill>
-                <a:latin typeface="Times New Roman" pitchFamily="34" charset="0"/>
-                <a:ea typeface="Times New Roman" pitchFamily="34" charset="-122"/>
-                <a:cs typeface="Times New Roman" pitchFamily="34" charset="-120"/>
-              </a:rPr>
-              <a:t>Board summary</a:t>
-            </a:r>
-            <a:endParaRPr lang="en-US" sz="4000" dirty="0"/>
-          </a:p>
-          <a:p>
-            <a:pPr algn="l" marL="342900" indent="-342900">
-              <a:spcAft>
-                <a:spcPts val="800"/>
-              </a:spcAft>
-              <a:buSzPct val="100000"/>
-              <a:buFont typeface="+mj-lt"/>
-              <a:buAutoNum type="arabicPeriod" startAt="1"/>
-            </a:pPr>
-            <a:r>
-              <a:rPr lang="en-US" sz="4000" dirty="0">
-                <a:solidFill>
-                  <a:srgbClr val="111111"/>
-                </a:solidFill>
-                <a:latin typeface="Times New Roman" pitchFamily="34" charset="0"/>
-                <a:ea typeface="Times New Roman" pitchFamily="34" charset="-122"/>
-                <a:cs typeface="Times New Roman" pitchFamily="34" charset="-120"/>
-              </a:rPr>
-              <a:t>Evaluation, remediation and homework</a:t>
-            </a:r>
-            <a:endParaRPr lang="en-US" sz="4000" dirty="0"/>
-          </a:p>
-        </p:txBody>
-      </p:sp>
-      <p:sp>
-        <p:nvSpPr>
-          <p:cNvPr id="25" name="Slide Number Placeholder 0"/>
-          <p:cNvSpPr>
-            <a:spLocks noGrp="1"/>
-          </p:cNvSpPr>
-          <p:nvPr>
-            <p:ph type="sldNum" sz="quarter" idx="4294967295"/>
-          </p:nvPr>
-        </p:nvSpPr>
-        <p:spPr>
-          <a:xfrm>
-            <a:off x="27432" y="91440"/>
-            <a:ext cx="585216" cy="475488"/>
-          </a:xfrm>
-          <a:prstGeom prst="rect">
-            <a:avLst/>
-          </a:prstGeom>
-          <a:extLst>
-            <a:ext uri="{C572A759-6A51-4108-AA02-DFA0A04FC94B}">
-              <ma14:wrappingTextBoxFlag xmlns:ma14="http://schemas.microsoft.com/office/mac/drawingml/2011/main" val="0"/>
-            </a:ext>
-          </a:extLst>
-        </p:spPr>
-        <p:txBody>
-          <a:bodyPr/>
-          <a:lstStyle>
-            <a:lvl1pPr>
-              <a:defRPr sz="2000">
-                <a:solidFill>
-                  <a:srgbClr val="FFFFFF"/>
-                </a:solidFill>
-                <a:latin typeface="Calibri"/>
-                <a:ea typeface="Calibri"/>
-                <a:cs typeface="Calibri"/>
-              </a:defRPr>
-            </a:lvl1pPr>
-          </a:lstStyle>
-          <a:p>
-            <a:pPr algn="ctr"/>
-            <a:fld id="{F7021451-1387-4CA6-816F-3879F97B5CBC}" type="slidenum">
-              <a:rPr b="1" lang="en-US"/>
-              <a:t>6</a:t>
-            </a:fld>
-            <a:endParaRPr lang="en-US"/>
-          </a:p>
-        </p:txBody>
-      </p:sp>
-    </p:spTree>
-  </p:cSld>
-  <p:clrMapOvr>
-    <a:masterClrMapping/>
-  </p:clrMapOvr>
-</p:sld>
-</file>
-
-<file path=ppt/slides/slide60.xml><?xml version="1.0" encoding="utf-8"?>
-<p:sld xmlns:a="http://schemas.openxmlformats.org/drawingml/2006/main" xmlns:r="http://schemas.openxmlformats.org/officeDocument/2006/relationships" xmlns:p="http://schemas.openxmlformats.org/presentationml/2006/main">
-  <p:cSld name="Slide 60">
-    <p:spTree>
-      <p:nvGrpSpPr>
-        <p:cNvPr id="1" name=""/>
-        <p:cNvGrpSpPr/>
-        <p:nvPr/>
-      </p:nvGrpSpPr>
-      <p:grpSpPr>
-        <a:xfrm>
-          <a:off x="0" y="0"/>
-          <a:ext cx="0" cy="0"/>
-          <a:chOff x="0" y="0"/>
-          <a:chExt cx="0" cy="0"/>
-        </a:xfrm>
-      </p:grpSpPr>
-      <p:sp>
-        <p:nvSpPr>
-          <p:cNvPr id="2" name="Text 0"/>
-          <p:cNvSpPr/>
-          <p:nvPr/>
-        </p:nvSpPr>
-        <p:spPr>
-          <a:xfrm>
-            <a:off x="457200" y="713232"/>
-            <a:ext cx="11368735" cy="274320"/>
-          </a:xfrm>
-          <a:prstGeom prst="rect">
-            <a:avLst/>
-          </a:prstGeom>
-          <a:noFill/>
-          <a:ln/>
-        </p:spPr>
-        <p:txBody>
-          <a:bodyPr wrap="square" lIns="0" tIns="0" rIns="0" bIns="0" rtlCol="0" anchor="ctr"/>
-          <a:lstStyle/>
-          <a:p>
-            <a:pPr algn="r" indent="0" marL="0">
-              <a:buNone/>
-            </a:pPr>
-            <a:r>
-              <a:rPr lang="en-US" sz="1400" b="1" dirty="0">
-                <a:solidFill>
-                  <a:srgbClr val="1C3F6E"/>
-                </a:solidFill>
-                <a:latin typeface="Calibri" pitchFamily="34" charset="0"/>
-                <a:ea typeface="Calibri" pitchFamily="34" charset="-122"/>
-                <a:cs typeface="Calibri" pitchFamily="34" charset="-120"/>
-              </a:rPr>
-              <a:t>NEXT LESSON</a:t>
-            </a:r>
-            <a:endParaRPr lang="en-US" sz="1400" dirty="0"/>
-          </a:p>
-        </p:txBody>
-      </p:sp>
-      <p:pic>
-        <p:nvPicPr>
-          <p:cNvPr id="3" name="Image 0" descr="/home/claude/f4/img/minesec_sheet.png">    </p:cNvPr>
-          <p:cNvPicPr>
-            <a:picLocks noChangeAspect="1"/>
-          </p:cNvPicPr>
-          <p:nvPr/>
-        </p:nvPicPr>
-        <p:blipFill>
-          <a:blip r:embed="rId1"/>
-          <a:stretch>
-            <a:fillRect/>
-          </a:stretch>
-        </p:blipFill>
-        <p:spPr>
-          <a:xfrm>
-            <a:off x="0" y="658368"/>
-            <a:ext cx="5120640" cy="5833872"/>
-          </a:xfrm>
-          <a:prstGeom prst="rect">
-            <a:avLst/>
-          </a:prstGeom>
-        </p:spPr>
-      </p:pic>
-      <p:sp>
-        <p:nvSpPr>
-          <p:cNvPr id="4" name="Text 1"/>
-          <p:cNvSpPr/>
-          <p:nvPr/>
-        </p:nvSpPr>
-        <p:spPr>
-          <a:xfrm>
-            <a:off x="5349240" y="1005840"/>
-            <a:ext cx="6522415" cy="731520"/>
-          </a:xfrm>
-          <a:prstGeom prst="rect">
-            <a:avLst/>
-          </a:prstGeom>
-          <a:noFill/>
-          <a:ln/>
-        </p:spPr>
-        <p:txBody>
-          <a:bodyPr wrap="square" lIns="0" tIns="0" rIns="0" bIns="0" rtlCol="0" anchor="ctr">
-            <a:normAutofit/>
-          </a:bodyPr>
-          <a:lstStyle/>
-          <a:p>
-            <a:pPr algn="ctr" indent="0" marL="0">
-              <a:buNone/>
-            </a:pPr>
-            <a:r>
-              <a:rPr lang="en-US" sz="3600" b="1" dirty="0">
-                <a:solidFill>
-                  <a:srgbClr val="990011"/>
-                </a:solidFill>
-                <a:latin typeface="Times New Roman" pitchFamily="34" charset="0"/>
-                <a:ea typeface="Times New Roman" pitchFamily="34" charset="-122"/>
-                <a:cs typeface="Times New Roman" pitchFamily="34" charset="-120"/>
-              </a:rPr>
-              <a:t>Next Lesson</a:t>
-            </a:r>
-            <a:endParaRPr lang="en-US" sz="3600" dirty="0"/>
-          </a:p>
-        </p:txBody>
-      </p:sp>
-      <p:sp>
-        <p:nvSpPr>
-          <p:cNvPr id="5" name="Text 2"/>
-          <p:cNvSpPr/>
-          <p:nvPr/>
-        </p:nvSpPr>
-        <p:spPr>
-          <a:xfrm>
-            <a:off x="5349240" y="1783080"/>
-            <a:ext cx="6522415" cy="4663440"/>
-          </a:xfrm>
-          <a:prstGeom prst="rect">
-            <a:avLst/>
-          </a:prstGeom>
-          <a:noFill/>
-          <a:ln/>
-        </p:spPr>
-        <p:txBody>
-          <a:bodyPr wrap="square" lIns="0" tIns="0" rIns="0" bIns="0" rtlCol="0" anchor="ctr"/>
-          <a:lstStyle/>
-          <a:p>
-            <a:pPr algn="ctr" indent="0" marL="0">
-              <a:spcAft>
-                <a:spcPts val="800"/>
-              </a:spcAft>
-              <a:buNone/>
-            </a:pPr>
-            <a:r>
-              <a:rPr lang="en-US" sz="4000" b="1" dirty="0">
-                <a:solidFill>
-                  <a:srgbClr val="111111"/>
-                </a:solidFill>
-                <a:latin typeface="Times New Roman" pitchFamily="34" charset="0"/>
-                <a:ea typeface="Times New Roman" pitchFamily="34" charset="-122"/>
-                <a:cs typeface="Times New Roman" pitchFamily="34" charset="-120"/>
-              </a:rPr>
-              <a:t>Our next lesson will be on:</a:t>
-            </a:r>
-            <a:endParaRPr lang="en-US" sz="4000" dirty="0"/>
-          </a:p>
-          <a:p>
-            <a:pPr algn="ctr" indent="0" marL="0">
-              <a:spcAft>
-                <a:spcPts val="800"/>
-              </a:spcAft>
-              <a:buNone/>
-            </a:pPr>
-            <a:r>
-              <a:rPr lang="en-US" sz="4000" b="1" dirty="0">
-                <a:solidFill>
-                  <a:srgbClr val="990011"/>
-                </a:solidFill>
-                <a:latin typeface="Times New Roman" pitchFamily="34" charset="0"/>
-                <a:ea typeface="Times New Roman" pitchFamily="34" charset="-122"/>
-                <a:cs typeface="Times New Roman" pitchFamily="34" charset="-120"/>
-              </a:rPr>
-              <a:t>Lesson 11: The Modern Demographic Explosion and Population Policies</a:t>
-            </a:r>
-            <a:endParaRPr lang="en-US" sz="4000" dirty="0"/>
-          </a:p>
-        </p:txBody>
-      </p:sp>
-      <p:sp>
-        <p:nvSpPr>
-          <p:cNvPr id="25" name="Slide Number Placeholder 0"/>
-          <p:cNvSpPr>
-            <a:spLocks noGrp="1"/>
-          </p:cNvSpPr>
-          <p:nvPr>
-            <p:ph type="sldNum" sz="quarter" idx="4294967295"/>
-          </p:nvPr>
-        </p:nvSpPr>
-        <p:spPr>
-          <a:xfrm>
-            <a:off x="27432" y="91440"/>
-            <a:ext cx="585216" cy="475488"/>
-          </a:xfrm>
-          <a:prstGeom prst="rect">
-            <a:avLst/>
-          </a:prstGeom>
-          <a:extLst>
-            <a:ext uri="{C572A759-6A51-4108-AA02-DFA0A04FC94B}">
-              <ma14:wrappingTextBoxFlag xmlns:ma14="http://schemas.microsoft.com/office/mac/drawingml/2011/main" val="0"/>
-            </a:ext>
-          </a:extLst>
-        </p:spPr>
-        <p:txBody>
-          <a:bodyPr/>
-          <a:lstStyle>
-            <a:lvl1pPr>
-              <a:defRPr sz="2000">
-                <a:solidFill>
-                  <a:srgbClr val="FFFFFF"/>
-                </a:solidFill>
-                <a:latin typeface="Calibri"/>
-                <a:ea typeface="Calibri"/>
-                <a:cs typeface="Calibri"/>
-              </a:defRPr>
-            </a:lvl1pPr>
-          </a:lstStyle>
-          <a:p>
-            <a:pPr algn="ctr"/>
-            <a:fld id="{F7021451-1387-4CA6-816F-3879F97B5CBC}" type="slidenum">
-              <a:rPr b="1" lang="en-US"/>
-              <a:t>60</a:t>
-            </a:fld>
-            <a:endParaRPr lang="en-US"/>
-          </a:p>
-        </p:txBody>
-      </p:sp>
-    </p:spTree>
-  </p:cSld>
-  <p:clrMapOvr>
-    <a:masterClrMapping/>
-  </p:clrMapOvr>
-</p:sld>
-</file>
-
-<file path=ppt/slides/slide61.xml><?xml version="1.0" encoding="utf-8"?>
-<p:sld xmlns:a="http://schemas.openxmlformats.org/drawingml/2006/main" xmlns:r="http://schemas.openxmlformats.org/officeDocument/2006/relationships" xmlns:p="http://schemas.openxmlformats.org/presentationml/2006/main">
-  <p:cSld name="Slide 61">
-    <p:spTree>
-      <p:nvGrpSpPr>
-        <p:cNvPr id="1" name=""/>
-        <p:cNvGrpSpPr/>
-        <p:nvPr/>
-      </p:nvGrpSpPr>
-      <p:grpSpPr>
-        <a:xfrm>
-          <a:off x="0" y="0"/>
-          <a:ext cx="0" cy="0"/>
-          <a:chOff x="0" y="0"/>
-          <a:chExt cx="0" cy="0"/>
-        </a:xfrm>
-      </p:grpSpPr>
-      <p:sp>
-        <p:nvSpPr>
-          <p:cNvPr id="2" name="Text 0"/>
-          <p:cNvSpPr/>
-          <p:nvPr/>
-        </p:nvSpPr>
-        <p:spPr>
-          <a:xfrm>
-            <a:off x="457200" y="713232"/>
-            <a:ext cx="11368735" cy="274320"/>
-          </a:xfrm>
-          <a:prstGeom prst="rect">
-            <a:avLst/>
-          </a:prstGeom>
-          <a:noFill/>
-          <a:ln/>
-        </p:spPr>
-        <p:txBody>
-          <a:bodyPr wrap="square" lIns="0" tIns="0" rIns="0" bIns="0" rtlCol="0" anchor="ctr"/>
-          <a:lstStyle/>
-          <a:p>
-            <a:pPr algn="r" indent="0" marL="0">
-              <a:buNone/>
-            </a:pPr>
-            <a:r>
-              <a:rPr lang="en-US" sz="1400" b="1" dirty="0">
-                <a:solidFill>
-                  <a:srgbClr val="1C3F6E"/>
-                </a:solidFill>
-                <a:latin typeface="Calibri" pitchFamily="34" charset="0"/>
-                <a:ea typeface="Calibri" pitchFamily="34" charset="-122"/>
-                <a:cs typeface="Calibri" pitchFamily="34" charset="-120"/>
-              </a:rPr>
-              <a:t>BILINGUAL GAME</a:t>
-            </a:r>
-            <a:endParaRPr lang="en-US" sz="1400" dirty="0"/>
-          </a:p>
-        </p:txBody>
-      </p:sp>
-      <p:sp>
-        <p:nvSpPr>
-          <p:cNvPr id="3" name="Text 1"/>
-          <p:cNvSpPr/>
-          <p:nvPr/>
-        </p:nvSpPr>
-        <p:spPr>
-          <a:xfrm>
-            <a:off x="457200" y="1005840"/>
-            <a:ext cx="11277295" cy="731520"/>
-          </a:xfrm>
-          <a:prstGeom prst="rect">
-            <a:avLst/>
-          </a:prstGeom>
-          <a:noFill/>
-          <a:ln/>
-        </p:spPr>
-        <p:txBody>
-          <a:bodyPr wrap="square" lIns="0" tIns="0" rIns="0" bIns="0" rtlCol="0" anchor="ctr"/>
-          <a:lstStyle/>
-          <a:p>
-            <a:pPr algn="ctr" indent="0" marL="0">
-              <a:buNone/>
-            </a:pPr>
-            <a:r>
-              <a:rPr lang="en-US" sz="3600" b="1" dirty="0">
-                <a:solidFill>
-                  <a:srgbClr val="990011"/>
-                </a:solidFill>
-                <a:latin typeface="Times New Roman" pitchFamily="34" charset="0"/>
-                <a:ea typeface="Times New Roman" pitchFamily="34" charset="-122"/>
-                <a:cs typeface="Times New Roman" pitchFamily="34" charset="-120"/>
-              </a:rPr>
               <a:t>Bilingual Game (Jeu Bilingue)</a:t>
             </a:r>
             <a:endParaRPr lang="en-US" sz="3600" dirty="0"/>
@@ -22364,7 +20937,7 @@
       </p:sp>
       <p:graphicFrame>
         <p:nvGraphicFramePr>
-          <p:cNvPr id="62" name="Table 0"/>
+          <p:cNvPr id="59" name="Table 0"/>
           <p:cNvGraphicFramePr>
             <a:graphicFrameLocks noGrp="1"/>
           </p:cNvGraphicFramePr>
@@ -23400,7 +21973,7 @@
             <a:pPr algn="ctr"/>
             <a:fld id="{F7021451-1387-4CA6-816F-3879F97B5CBC}" type="slidenum">
               <a:rPr b="1" lang="en-US"/>
-              <a:t>61</a:t>
+              <a:t>58</a:t>
             </a:fld>
             <a:endParaRPr lang="en-US"/>
           </a:p>
@@ -23414,9 +21987,9 @@
 </p:sld>
 </file>
 
-<file path=ppt/slides/slide62.xml><?xml version="1.0" encoding="utf-8"?>
+<file path=ppt/slides/slide59.xml><?xml version="1.0" encoding="utf-8"?>
 <p:sld xmlns:a="http://schemas.openxmlformats.org/drawingml/2006/main" xmlns:r="http://schemas.openxmlformats.org/officeDocument/2006/relationships" xmlns:p="http://schemas.openxmlformats.org/presentationml/2006/main">
-  <p:cSld name="Slide 62">
+  <p:cSld name="Slide 59">
     <p:spTree>
       <p:nvGrpSpPr>
         <p:cNvPr id="1" name=""/>
@@ -23511,7 +22084,7 @@
       </p:sp>
       <p:graphicFrame>
         <p:nvGraphicFramePr>
-          <p:cNvPr id="63" name="Table 0"/>
+          <p:cNvPr id="60" name="Table 0"/>
           <p:cNvGraphicFramePr>
             <a:graphicFrameLocks noGrp="1"/>
           </p:cNvGraphicFramePr>
@@ -24133,7 +22706,7 @@
             <a:pPr algn="ctr"/>
             <a:fld id="{F7021451-1387-4CA6-816F-3879F97B5CBC}" type="slidenum">
               <a:rPr b="1" lang="en-US"/>
-              <a:t>62</a:t>
+              <a:t>59</a:t>
             </a:fld>
             <a:endParaRPr lang="en-US"/>
           </a:p>
@@ -24147,9 +22720,9 @@
 </p:sld>
 </file>
 
-<file path=ppt/slides/slide63.xml><?xml version="1.0" encoding="utf-8"?>
+<file path=ppt/slides/slide6.xml><?xml version="1.0" encoding="utf-8"?>
 <p:sld xmlns:a="http://schemas.openxmlformats.org/drawingml/2006/main" xmlns:r="http://schemas.openxmlformats.org/officeDocument/2006/relationships" xmlns:p="http://schemas.openxmlformats.org/presentationml/2006/main">
-  <p:cSld name="Slide 63">
+  <p:cSld name="Slide 6">
     <p:spTree>
       <p:nvGrpSpPr>
         <p:cNvPr id="1" name=""/>
@@ -24197,22 +22770,46 @@
                 <a:ea typeface="Calibri" pitchFamily="34" charset="-122"/>
                 <a:cs typeface="Calibri" pitchFamily="34" charset="-120"/>
               </a:rPr>
-              <a:t>LOGBOOK</a:t>
+              <a:t>LESSON PLAN</a:t>
             </a:r>
             <a:endParaRPr lang="en-US" sz="1400" dirty="0"/>
           </a:p>
         </p:txBody>
       </p:sp>
-      <p:sp>
-        <p:nvSpPr>
-          <p:cNvPr id="3" name="Text 1"/>
+      <p:pic>
+        <p:nvPicPr>
+          <p:cNvPr id="3" name="Image 0" descr="/home/claude/f4/img/minesec_sheet.png">    </p:cNvPr>
+          <p:cNvPicPr>
+            <a:picLocks noChangeAspect="1"/>
+          </p:cNvPicPr>
+          <p:nvPr/>
+        </p:nvPicPr>
+        <p:blipFill>
+          <a:blip r:embed="rId1"/>
+          <a:stretch>
+            <a:fillRect/>
+          </a:stretch>
+        </p:blipFill>
+        <p:spPr>
+          <a:xfrm>
+            <a:off x="0" y="658368"/>
+            <a:ext cx="2468880" cy="5833872"/>
+          </a:xfrm>
+          <a:prstGeom prst="rect">
+            <a:avLst/>
+          </a:prstGeom>
+        </p:spPr>
+      </p:pic>
+      <p:sp>
+        <p:nvSpPr>
+          <p:cNvPr id="4" name="Text 1"/>
           <p:cNvSpPr/>
           <p:nvPr/>
         </p:nvSpPr>
         <p:spPr>
           <a:xfrm>
-            <a:off x="457200" y="1005840"/>
-            <a:ext cx="11277295" cy="731520"/>
+            <a:off x="2697480" y="1005840"/>
+            <a:ext cx="9174175" cy="731520"/>
           </a:xfrm>
           <a:prstGeom prst="rect">
             <a:avLst/>
@@ -24221,7 +22818,9 @@
           <a:ln/>
         </p:spPr>
         <p:txBody>
-          <a:bodyPr wrap="square" lIns="0" tIns="0" rIns="0" bIns="0" rtlCol="0" anchor="ctr"/>
+          <a:bodyPr wrap="square" lIns="0" tIns="0" rIns="0" bIns="0" rtlCol="0" anchor="ctr">
+            <a:normAutofit/>
+          </a:bodyPr>
           <a:lstStyle/>
           <a:p>
             <a:pPr algn="ctr" indent="0" marL="0">
@@ -24236,6 +22835,311 @@
                 <a:ea typeface="Times New Roman" pitchFamily="34" charset="-122"/>
                 <a:cs typeface="Times New Roman" pitchFamily="34" charset="-120"/>
               </a:rPr>
+              <a:t>Lesson Plan</a:t>
+            </a:r>
+            <a:endParaRPr lang="en-US" sz="3600" dirty="0"/>
+          </a:p>
+        </p:txBody>
+      </p:sp>
+      <p:sp>
+        <p:nvSpPr>
+          <p:cNvPr id="5" name="Text 2"/>
+          <p:cNvSpPr/>
+          <p:nvPr/>
+        </p:nvSpPr>
+        <p:spPr>
+          <a:xfrm>
+            <a:off x="2697480" y="1783080"/>
+            <a:ext cx="9174175" cy="4663440"/>
+          </a:xfrm>
+          <a:prstGeom prst="rect">
+            <a:avLst/>
+          </a:prstGeom>
+          <a:noFill/>
+          <a:ln/>
+        </p:spPr>
+        <p:txBody>
+          <a:bodyPr wrap="square" lIns="0" tIns="0" rIns="0" bIns="0" rtlCol="0" anchor="t"/>
+          <a:lstStyle/>
+          <a:p>
+            <a:pPr algn="l" marL="342900" indent="-342900">
+              <a:spcAft>
+                <a:spcPts val="800"/>
+              </a:spcAft>
+              <a:buSzPct val="100000"/>
+              <a:buFont typeface="+mj-lt"/>
+              <a:buAutoNum type="arabicPeriod" startAt="1"/>
+            </a:pPr>
+            <a:r>
+              <a:rPr lang="en-US" sz="4000" dirty="0">
+                <a:solidFill>
+                  <a:srgbClr val="111111"/>
+                </a:solidFill>
+                <a:latin typeface="Times New Roman" pitchFamily="34" charset="0"/>
+                <a:ea typeface="Times New Roman" pitchFamily="34" charset="-122"/>
+                <a:cs typeface="Times New Roman" pitchFamily="34" charset="-120"/>
+              </a:rPr>
+              <a:t>Correction of the homework</a:t>
+            </a:r>
+            <a:endParaRPr lang="en-US" sz="4000" dirty="0"/>
+          </a:p>
+          <a:p>
+            <a:pPr algn="l" marL="342900" indent="-342900">
+              <a:spcAft>
+                <a:spcPts val="800"/>
+              </a:spcAft>
+              <a:buSzPct val="100000"/>
+              <a:buFont typeface="+mj-lt"/>
+              <a:buAutoNum type="arabicPeriod" startAt="1"/>
+            </a:pPr>
+            <a:r>
+              <a:rPr lang="en-US" sz="4000" dirty="0">
+                <a:solidFill>
+                  <a:srgbClr val="111111"/>
+                </a:solidFill>
+                <a:latin typeface="Times New Roman" pitchFamily="34" charset="0"/>
+                <a:ea typeface="Times New Roman" pitchFamily="34" charset="-122"/>
+                <a:cs typeface="Times New Roman" pitchFamily="34" charset="-120"/>
+              </a:rPr>
+              <a:t>Objectives and recall</a:t>
+            </a:r>
+            <a:endParaRPr lang="en-US" sz="4000" dirty="0"/>
+          </a:p>
+          <a:p>
+            <a:pPr algn="l" marL="342900" indent="-342900">
+              <a:spcAft>
+                <a:spcPts val="800"/>
+              </a:spcAft>
+              <a:buSzPct val="100000"/>
+              <a:buFont typeface="+mj-lt"/>
+              <a:buAutoNum type="arabicPeriod" startAt="1"/>
+            </a:pPr>
+            <a:r>
+              <a:rPr lang="en-US" sz="4000" dirty="0">
+                <a:solidFill>
+                  <a:srgbClr val="111111"/>
+                </a:solidFill>
+                <a:latin typeface="Times New Roman" pitchFamily="34" charset="0"/>
+                <a:ea typeface="Times New Roman" pitchFamily="34" charset="-122"/>
+                <a:cs typeface="Times New Roman" pitchFamily="34" charset="-120"/>
+              </a:rPr>
+              <a:t>Real-life situation and action to take</a:t>
+            </a:r>
+            <a:endParaRPr lang="en-US" sz="4000" dirty="0"/>
+          </a:p>
+          <a:p>
+            <a:pPr algn="l" marL="342900" indent="-342900">
+              <a:spcAft>
+                <a:spcPts val="800"/>
+              </a:spcAft>
+              <a:buSzPct val="100000"/>
+              <a:buFont typeface="+mj-lt"/>
+              <a:buAutoNum type="arabicPeriod" startAt="1"/>
+            </a:pPr>
+            <a:r>
+              <a:rPr lang="en-US" sz="4000" dirty="0">
+                <a:solidFill>
+                  <a:srgbClr val="111111"/>
+                </a:solidFill>
+                <a:latin typeface="Times New Roman" pitchFamily="34" charset="0"/>
+                <a:ea typeface="Times New Roman" pitchFamily="34" charset="-122"/>
+                <a:cs typeface="Times New Roman" pitchFamily="34" charset="-120"/>
+              </a:rPr>
+              <a:t>Learning activities</a:t>
+            </a:r>
+            <a:endParaRPr lang="en-US" sz="4000" dirty="0"/>
+          </a:p>
+          <a:p>
+            <a:pPr algn="l" marL="342900" indent="-342900">
+              <a:spcAft>
+                <a:spcPts val="800"/>
+              </a:spcAft>
+              <a:buSzPct val="100000"/>
+              <a:buFont typeface="+mj-lt"/>
+              <a:buAutoNum type="arabicPeriod" startAt="1"/>
+            </a:pPr>
+            <a:r>
+              <a:rPr lang="en-US" sz="4000" dirty="0">
+                <a:solidFill>
+                  <a:srgbClr val="111111"/>
+                </a:solidFill>
+                <a:latin typeface="Times New Roman" pitchFamily="34" charset="0"/>
+                <a:ea typeface="Times New Roman" pitchFamily="34" charset="-122"/>
+                <a:cs typeface="Times New Roman" pitchFamily="34" charset="-120"/>
+              </a:rPr>
+              <a:t>Board summary</a:t>
+            </a:r>
+            <a:endParaRPr lang="en-US" sz="4000" dirty="0"/>
+          </a:p>
+          <a:p>
+            <a:pPr algn="l" marL="342900" indent="-342900">
+              <a:spcAft>
+                <a:spcPts val="800"/>
+              </a:spcAft>
+              <a:buSzPct val="100000"/>
+              <a:buFont typeface="+mj-lt"/>
+              <a:buAutoNum type="arabicPeriod" startAt="1"/>
+            </a:pPr>
+            <a:r>
+              <a:rPr lang="en-US" sz="4000" dirty="0">
+                <a:solidFill>
+                  <a:srgbClr val="111111"/>
+                </a:solidFill>
+                <a:latin typeface="Times New Roman" pitchFamily="34" charset="0"/>
+                <a:ea typeface="Times New Roman" pitchFamily="34" charset="-122"/>
+                <a:cs typeface="Times New Roman" pitchFamily="34" charset="-120"/>
+              </a:rPr>
+              <a:t>Evaluation, remediation and homework</a:t>
+            </a:r>
+            <a:endParaRPr lang="en-US" sz="4000" dirty="0"/>
+          </a:p>
+        </p:txBody>
+      </p:sp>
+      <p:sp>
+        <p:nvSpPr>
+          <p:cNvPr id="25" name="Slide Number Placeholder 0"/>
+          <p:cNvSpPr>
+            <a:spLocks noGrp="1"/>
+          </p:cNvSpPr>
+          <p:nvPr>
+            <p:ph type="sldNum" sz="quarter" idx="4294967295"/>
+          </p:nvPr>
+        </p:nvSpPr>
+        <p:spPr>
+          <a:xfrm>
+            <a:off x="27432" y="91440"/>
+            <a:ext cx="585216" cy="475488"/>
+          </a:xfrm>
+          <a:prstGeom prst="rect">
+            <a:avLst/>
+          </a:prstGeom>
+          <a:extLst>
+            <a:ext uri="{C572A759-6A51-4108-AA02-DFA0A04FC94B}">
+              <ma14:wrappingTextBoxFlag xmlns:ma14="http://schemas.microsoft.com/office/mac/drawingml/2011/main" val="0"/>
+            </a:ext>
+          </a:extLst>
+        </p:spPr>
+        <p:txBody>
+          <a:bodyPr/>
+          <a:lstStyle>
+            <a:lvl1pPr>
+              <a:defRPr sz="2000">
+                <a:solidFill>
+                  <a:srgbClr val="FFFFFF"/>
+                </a:solidFill>
+                <a:latin typeface="Calibri"/>
+                <a:ea typeface="Calibri"/>
+                <a:cs typeface="Calibri"/>
+              </a:defRPr>
+            </a:lvl1pPr>
+          </a:lstStyle>
+          <a:p>
+            <a:pPr algn="ctr"/>
+            <a:fld id="{F7021451-1387-4CA6-816F-3879F97B5CBC}" type="slidenum">
+              <a:rPr b="1" lang="en-US"/>
+              <a:t>6</a:t>
+            </a:fld>
+            <a:endParaRPr lang="en-US"/>
+          </a:p>
+        </p:txBody>
+      </p:sp>
+    </p:spTree>
+  </p:cSld>
+  <p:clrMapOvr>
+    <a:masterClrMapping/>
+  </p:clrMapOvr>
+</p:sld>
+</file>
+
+<file path=ppt/slides/slide60.xml><?xml version="1.0" encoding="utf-8"?>
+<p:sld xmlns:a="http://schemas.openxmlformats.org/drawingml/2006/main" xmlns:r="http://schemas.openxmlformats.org/officeDocument/2006/relationships" xmlns:p="http://schemas.openxmlformats.org/presentationml/2006/main">
+  <p:cSld name="Slide 60">
+    <p:spTree>
+      <p:nvGrpSpPr>
+        <p:cNvPr id="1" name=""/>
+        <p:cNvGrpSpPr/>
+        <p:nvPr/>
+      </p:nvGrpSpPr>
+      <p:grpSpPr>
+        <a:xfrm>
+          <a:off x="0" y="0"/>
+          <a:ext cx="0" cy="0"/>
+          <a:chOff x="0" y="0"/>
+          <a:chExt cx="0" cy="0"/>
+        </a:xfrm>
+      </p:grpSpPr>
+      <p:sp>
+        <p:nvSpPr>
+          <p:cNvPr id="2" name="Text 0"/>
+          <p:cNvSpPr/>
+          <p:nvPr/>
+        </p:nvSpPr>
+        <p:spPr>
+          <a:xfrm>
+            <a:off x="457200" y="713232"/>
+            <a:ext cx="11368735" cy="274320"/>
+          </a:xfrm>
+          <a:prstGeom prst="rect">
+            <a:avLst/>
+          </a:prstGeom>
+          <a:noFill/>
+          <a:ln/>
+        </p:spPr>
+        <p:txBody>
+          <a:bodyPr wrap="square" lIns="0" tIns="0" rIns="0" bIns="0" rtlCol="0" anchor="ctr"/>
+          <a:lstStyle/>
+          <a:p>
+            <a:pPr algn="r" indent="0" marL="0">
+              <a:buNone/>
+            </a:pPr>
+            <a:r>
+              <a:rPr lang="en-US" sz="1400" b="1" dirty="0">
+                <a:solidFill>
+                  <a:srgbClr val="1C3F6E"/>
+                </a:solidFill>
+                <a:latin typeface="Calibri" pitchFamily="34" charset="0"/>
+                <a:ea typeface="Calibri" pitchFamily="34" charset="-122"/>
+                <a:cs typeface="Calibri" pitchFamily="34" charset="-120"/>
+              </a:rPr>
+              <a:t>LOGBOOK</a:t>
+            </a:r>
+            <a:endParaRPr lang="en-US" sz="1400" dirty="0"/>
+          </a:p>
+        </p:txBody>
+      </p:sp>
+      <p:sp>
+        <p:nvSpPr>
+          <p:cNvPr id="3" name="Text 1"/>
+          <p:cNvSpPr/>
+          <p:nvPr/>
+        </p:nvSpPr>
+        <p:spPr>
+          <a:xfrm>
+            <a:off x="457200" y="1005840"/>
+            <a:ext cx="11277295" cy="731520"/>
+          </a:xfrm>
+          <a:prstGeom prst="rect">
+            <a:avLst/>
+          </a:prstGeom>
+          <a:noFill/>
+          <a:ln/>
+        </p:spPr>
+        <p:txBody>
+          <a:bodyPr wrap="square" lIns="0" tIns="0" rIns="0" bIns="0" rtlCol="0" anchor="ctr"/>
+          <a:lstStyle/>
+          <a:p>
+            <a:pPr algn="ctr" indent="0" marL="0">
+              <a:buNone/>
+            </a:pPr>
+            <a:r>
+              <a:rPr lang="en-US" sz="3600" b="1" dirty="0">
+                <a:solidFill>
+                  <a:srgbClr val="990011"/>
+                </a:solidFill>
+                <a:latin typeface="Times New Roman" pitchFamily="34" charset="0"/>
+                <a:ea typeface="Times New Roman" pitchFamily="34" charset="-122"/>
+                <a:cs typeface="Times New Roman" pitchFamily="34" charset="-120"/>
+              </a:rPr>
               <a:t>Official Logbook (2/2)</a:t>
             </a:r>
             <a:endParaRPr lang="en-US" sz="3600" dirty="0"/>
@@ -24244,7 +23148,7 @@
       </p:sp>
       <p:graphicFrame>
         <p:nvGraphicFramePr>
-          <p:cNvPr id="64" name="Table 0"/>
+          <p:cNvPr id="61" name="Table 0"/>
           <p:cNvGraphicFramePr>
             <a:graphicFrameLocks noGrp="1"/>
           </p:cNvGraphicFramePr>
@@ -24354,7 +23258,7 @@
                           <a:ea typeface="Calibri" pitchFamily="34" charset="-122"/>
                           <a:cs typeface="Calibri" pitchFamily="34" charset="-120"/>
                         </a:rPr>
-                        <a:t>DEFINITIONS; Demographic Factors; Non-Demographic Factors; How the Factors Act in Various Regions.</a:t>
+                        <a:t>DEFINITIONS; Demographic Factors; Non-Demographic Factors; How the Factors Influence Growth in Various Regions.</a:t>
                       </a:r>
                       <a:endParaRPr lang="en-US" sz="1600" dirty="0">
                         <a:latin typeface="Calibri" charset="0"/>
@@ -25004,7 +23908,7 @@
             <a:pPr algn="ctr"/>
             <a:fld id="{F7021451-1387-4CA6-816F-3879F97B5CBC}" type="slidenum">
               <a:rPr b="1" lang="en-US"/>
-              <a:t>63</a:t>
+              <a:t>60</a:t>
             </a:fld>
             <a:endParaRPr lang="en-US"/>
           </a:p>
@@ -25018,9 +23922,9 @@
 </p:sld>
 </file>
 
-<file path=ppt/slides/slide64.xml><?xml version="1.0" encoding="utf-8"?>
+<file path=ppt/slides/slide61.xml><?xml version="1.0" encoding="utf-8"?>
 <p:sld xmlns:a="http://schemas.openxmlformats.org/drawingml/2006/main" xmlns:r="http://schemas.openxmlformats.org/officeDocument/2006/relationships" xmlns:p="http://schemas.openxmlformats.org/presentationml/2006/main">
-  <p:cSld name="Slide 64">
+  <p:cSld name="Slide 61">
     <p:spTree>
       <p:nvGrpSpPr>
         <p:cNvPr id="1" name=""/>
@@ -25329,7 +24233,7 @@
             <a:pPr algn="ctr"/>
             <a:fld id="{F7021451-1387-4CA6-816F-3879F97B5CBC}" type="slidenum">
               <a:rPr b="1" lang="en-US"/>
-              <a:t>64</a:t>
+              <a:t>61</a:t>
             </a:fld>
             <a:endParaRPr lang="en-US"/>
           </a:p>
@@ -25343,9 +24247,9 @@
 </p:sld>
 </file>
 
-<file path=ppt/slides/slide65.xml><?xml version="1.0" encoding="utf-8"?>
+<file path=ppt/slides/slide62.xml><?xml version="1.0" encoding="utf-8"?>
 <p:sld xmlns:a="http://schemas.openxmlformats.org/drawingml/2006/main" xmlns:r="http://schemas.openxmlformats.org/officeDocument/2006/relationships" xmlns:p="http://schemas.openxmlformats.org/presentationml/2006/main">
-  <p:cSld name="Slide 65">
+  <p:cSld name="Slide 62">
     <p:spTree>
       <p:nvGrpSpPr>
         <p:cNvPr id="1" name=""/>
@@ -25606,7 +24510,7 @@
                 <a:ea typeface="Calibri" pitchFamily="34" charset="-122"/>
                 <a:cs typeface="Calibri" pitchFamily="34" charset="-120"/>
               </a:rPr>
-              <a:t>Photo, board summary (Wars and conflicts): “Secretary-General Visits Refugee Camps in Chad” by United Nations Photo, CC BY-NC-ND 2.0, via Flickr (https://www.flickr.com/photos/35483578@N03/6140060599)</a:t>
+              <a:t>Photo, board summary (Wars and natural disasters): “Secretary-General Visits Refugee Camps in Chad” by United Nations Photo, CC BY-NC-ND 2.0, via Flickr (https://www.flickr.com/photos/35483578@N03/6140060599)</a:t>
             </a:r>
             <a:endParaRPr lang="en-US" sz="1800" dirty="0"/>
           </a:p>
@@ -25675,7 +24579,7 @@
             <a:pPr algn="ctr"/>
             <a:fld id="{F7021451-1387-4CA6-816F-3879F97B5CBC}" type="slidenum">
               <a:rPr b="1" lang="en-US"/>
-              <a:t>65</a:t>
+              <a:t>62</a:t>
             </a:fld>
             <a:endParaRPr lang="en-US"/>
           </a:p>

--- a/lecons/USA/Population Geography/14_USA_POP_L10_Factors_of_Population_Growth.pptx
+++ b/lecons/USA/Population Geography/14_USA_POP_L10_Factors_of_Population_Growth.pptx
@@ -67,9 +67,12 @@
     <p:sldId id="315" r:id="rId61"/>
     <p:sldId id="316" r:id="rId62"/>
     <p:sldId id="317" r:id="rId63"/>
+    <p:sldId id="318" r:id="rId64"/>
+    <p:sldId id="319" r:id="rId65"/>
+    <p:sldId id="320" r:id="rId66"/>
   </p:sldIdLst>
   <p:notesMasterIdLst>
-    <p:notesMasterId r:id="rId64"/>
+    <p:notesMasterId r:id="rId67"/>
   </p:notesMasterIdLst>
   <p:sldSz cx="12192000" cy="6858000"/>
   <p:notesSz cx="6858000" cy="12192000"/>
@@ -3731,7 +3734,7 @@
           <a:p>
             <a:r>
               <a:rPr lang="en-US" dirty="0"/>
-              <a:t>Copy the point on Structure and marital behaviour on the left, then draw the diagram on the right: youthful and ageing populations. Give it a title and label it clearly.</a:t>
+              <a:t>Copy the point on Age structure on the left, then draw the diagram on the right: youthful and ageing populations. Give it a title and label it clearly.</a:t>
             </a:r>
             <a:endParaRPr lang="en-US" dirty="0"/>
           </a:p>
@@ -3819,7 +3822,7 @@
           <a:p>
             <a:r>
               <a:rPr lang="en-US" dirty="0"/>
-              <a:t>Let us copy Non-Demographic Factors. Population growth is also influenced by the following non-demographic factors. Copy the point on Wars and natural disasters on the left, then draw the diagram on the right: refugees. Give it a title and label it clearly.</a:t>
+              <a:t>Let us copy Non-Demographic Factors: Social and Natural. Population growth is also influenced by the following social and natural factors. Copy the point on Marriage customs: write the key term first, then its explanation.</a:t>
             </a:r>
             <a:endParaRPr lang="en-US" dirty="0"/>
           </a:p>
@@ -3907,7 +3910,7 @@
           <a:p>
             <a:r>
               <a:rPr lang="en-US" dirty="0"/>
-              <a:t>We continue with Non-Demographic Factors. Copy the point on Epidemics and medical services: write the key term first, then its explanation.</a:t>
+              <a:t>Copy the point on Wars on the left, then draw the diagram on the right: refugees. Give it a title and label it clearly.</a:t>
             </a:r>
             <a:endParaRPr lang="en-US" dirty="0"/>
           </a:p>
@@ -3995,7 +3998,7 @@
           <a:p>
             <a:r>
               <a:rPr lang="en-US" dirty="0"/>
-              <a:t>Copy the point on Government policies on the left, then draw the diagram on the right: the one-child policy. Give it a title and label it clearly.</a:t>
+              <a:t>We continue with Non-Demographic Factors: Social and Natural. Copy the point on Natural disasters: write the key term first, then its explanation.</a:t>
             </a:r>
             <a:endParaRPr lang="en-US" dirty="0"/>
           </a:p>
@@ -4083,7 +4086,7 @@
           <a:p>
             <a:r>
               <a:rPr lang="en-US" dirty="0"/>
-              <a:t>We continue with Non-Demographic Factors. Copy the point on Economic conditions: write the key term first, then its explanation.</a:t>
+              <a:t>We continue with Non-Demographic Factors: Social and Natural. Copy the point on Epidemics: write the key term first, then its explanation.</a:t>
             </a:r>
             <a:endParaRPr lang="en-US" dirty="0"/>
           </a:p>
@@ -4171,7 +4174,7 @@
           <a:p>
             <a:r>
               <a:rPr lang="en-US" dirty="0"/>
-              <a:t>Let us copy How the Factors Influence Growth in Various Regions. The factors produce the following growth patterns in different regions. Copy the point on Developing regions on the left, then draw the diagram on the right: growth by region. Give it a title and label it clearly.</a:t>
+              <a:t>Let us copy Non-Demographic Factors: Economic and Political. Population growth is also influenced by the following economic and political factors. Copy the point on Medical services: write the key term first, then its explanation.</a:t>
             </a:r>
             <a:endParaRPr lang="en-US" dirty="0"/>
           </a:p>
@@ -4259,7 +4262,7 @@
           <a:p>
             <a:r>
               <a:rPr lang="en-US" dirty="0"/>
-              <a:t>We continue with How the Factors Influence Growth in Various Regions. Copy the point on Developed regions: write the key term first, then its explanation.</a:t>
+              <a:t>Copy the point on Government policies on the left, then draw the diagram on the right: the one-child policy. Give it a title and label it clearly.</a:t>
             </a:r>
             <a:endParaRPr lang="en-US" dirty="0"/>
           </a:p>
@@ -4347,7 +4350,7 @@
           <a:p>
             <a:r>
               <a:rPr lang="en-US" dirty="0"/>
-              <a:t>We continue with How the Factors Influence Growth in Various Regions. Copy the point on Emerging economies: write the key term first, then its explanation.</a:t>
+              <a:t>We continue with Non-Demographic Factors: Economic and Political. Copy the point on Economic conditions: write the key term first, then its explanation.</a:t>
             </a:r>
             <a:endParaRPr lang="en-US" dirty="0"/>
           </a:p>
@@ -4523,7 +4526,7 @@
           <a:p>
             <a:r>
               <a:rPr lang="en-US" dirty="0"/>
-              <a:t>We continue with How the Factors Influence Growth in Various Regions. Copy the point on Unstable regions: write the key term first, then its explanation.</a:t>
+              <a:t>Let us copy How the Factors Influence Growth in Various Regions. The factors produce the following growth patterns in different regions. Copy the point on Developing regions on the left, then draw the diagram on the right: growth by region. Give it a title and label it clearly.</a:t>
             </a:r>
             <a:endParaRPr lang="en-US" dirty="0"/>
           </a:p>
@@ -4611,7 +4614,7 @@
           <a:p>
             <a:r>
               <a:rPr lang="en-US" dirty="0"/>
-              <a:t>Now let us check what you have understood. Question 1: Distinguish between demographic and non-demographic factors with one example each. Answer in your exercise book.</a:t>
+              <a:t>We continue with How the Factors Influence Growth in Various Regions. Copy the point on Developed regions: write the key term first, then its explanation.</a:t>
             </a:r>
             <a:endParaRPr lang="en-US" dirty="0"/>
           </a:p>
@@ -4699,7 +4702,7 @@
           <a:p>
             <a:r>
               <a:rPr lang="en-US" dirty="0"/>
-              <a:t>The expected answer is: demographic factors belong to the population itself, e.g. the birth rate; non-demographic factors are external, e.g. wars. If you got it right, well done.</a:t>
+              <a:t>We continue with How the Factors Influence Growth in Various Regions. Copy the point on Emerging economies: write the key term first, then its explanation.</a:t>
             </a:r>
             <a:endParaRPr lang="en-US" dirty="0"/>
           </a:p>
@@ -4787,7 +4790,7 @@
           <a:p>
             <a:r>
               <a:rPr lang="en-US" dirty="0"/>
-              <a:t>Now let us check what you have understood. Question 2: Why do developed countries often depend on immigration? Answer in your exercise book.</a:t>
+              <a:t>We continue with How the Factors Influence Growth in Various Regions. Copy the point on Unstable regions: write the key term first, then its explanation.</a:t>
             </a:r>
             <a:endParaRPr lang="en-US" dirty="0"/>
           </a:p>
@@ -4875,7 +4878,7 @@
           <a:p>
             <a:r>
               <a:rPr lang="en-US" dirty="0"/>
-              <a:t>The expected answer is: their low birth rates and ageing populations cause shortages of workers. If you got it right, well done.</a:t>
+              <a:t>Now let us check what you have understood. Question 1: Distinguish between demographic and non-demographic factors with one example each. Answer in your exercise book.</a:t>
             </a:r>
             <a:endParaRPr lang="en-US" dirty="0"/>
           </a:p>
@@ -4963,7 +4966,7 @@
           <a:p>
             <a:r>
               <a:rPr lang="en-US" dirty="0"/>
-              <a:t>For those who need more practice, fill in the blanks in your exercise book. The answers are: number 1, non-demographic; number 2, anti; number 3, dividend.</a:t>
+              <a:t>The expected answer is: demographic factors belong to the population itself, e.g. the birth rate; non-demographic factors are external, e.g. wars. If you got it right, well done.</a:t>
             </a:r>
             <a:endParaRPr lang="en-US" dirty="0"/>
           </a:p>
@@ -5051,7 +5054,7 @@
           <a:p>
             <a:r>
               <a:rPr lang="en-US" dirty="0"/>
-              <a:t>For your homework: Define a pro-natalist policy. We shall correct it at the beginning of our next lesson.</a:t>
+              <a:t>Now let us check what you have understood. Question 2: Why do developed countries often depend on immigration? Answer in your exercise book.</a:t>
             </a:r>
             <a:endParaRPr lang="en-US" dirty="0"/>
           </a:p>
@@ -5139,7 +5142,7 @@
           <a:p>
             <a:r>
               <a:rPr lang="en-US" dirty="0"/>
-              <a:t>Our next lesson will be on Lesson 11: The Modern Demographic Explosion and Population Policies. Thank you for your attention, and see you next time.</a:t>
+              <a:t>The expected answer is: their low birth rates and ageing populations cause shortages of workers. If you got it right, well done.</a:t>
             </a:r>
             <a:endParaRPr lang="en-US" dirty="0"/>
           </a:p>
@@ -5227,7 +5230,7 @@
           <a:p>
             <a:r>
               <a:rPr lang="en-US" dirty="0"/>
-              <a:t>Let us play the bilingual game. I say a word in English, and you give me the French word. Then we do the reverse.</a:t>
+              <a:t>For those who need more practice, fill in the blanks in your exercise book. The answers are: number 1, non-demographic; number 2, anti; number 3, dividend.</a:t>
             </a:r>
             <a:endParaRPr lang="en-US" dirty="0"/>
           </a:p>
@@ -5315,7 +5318,7 @@
           <a:p>
             <a:r>
               <a:rPr lang="en-US" dirty="0"/>
-              <a:t>I record this information in the official logbook of the class after the lesson.</a:t>
+              <a:t>For your homework: Define a pro-natalist policy. We shall correct it at the beginning of our next lesson.</a:t>
             </a:r>
             <a:endParaRPr lang="en-US" dirty="0"/>
           </a:p>
@@ -5491,7 +5494,7 @@
           <a:p>
             <a:r>
               <a:rPr lang="en-US" dirty="0"/>
-              <a:t>I complete the second page of the logbook: the matter taught, the evaluation, the homework and the attendance.</a:t>
+              <a:t>Our next lesson will be on Lesson 11: The Modern Demographic Explosion and Population Policies. Thank you for your attention, and see you next time.</a:t>
             </a:r>
             <a:endParaRPr lang="en-US" dirty="0"/>
           </a:p>
@@ -5579,7 +5582,7 @@
           <a:p>
             <a:r>
               <a:rPr lang="en-US" dirty="0"/>
-              <a:t>This slide is for me, the teacher: it gives the timing of the lesson and what to do if the projector is not available.</a:t>
+              <a:t>Let us play the bilingual game. I say a word in English, and you give me the French word. Then we do the reverse.</a:t>
             </a:r>
             <a:endParaRPr lang="en-US" dirty="0"/>
           </a:p>
@@ -5667,7 +5670,7 @@
           <a:p>
             <a:r>
               <a:rPr lang="en-US" dirty="0"/>
-              <a:t>These are the references and picture credits used to prepare this lesson.</a:t>
+              <a:t>I record this information in the official logbook of the class after the lesson.</a:t>
             </a:r>
             <a:endParaRPr lang="en-US" dirty="0"/>
           </a:p>
@@ -5691,6 +5694,270 @@
             <a:fld id="{F7021451-1387-4CA6-816F-3879F97B5CBC}" type="slidenum">
               <a:rPr lang="en-US"/>
               <a:t>62</a:t>
+            </a:fld>
+            <a:endParaRPr lang="en-US"/>
+          </a:p>
+        </p:txBody>
+      </p:sp>
+    </p:spTree>
+    <p:extLst>
+      <p:ext uri="{BB962C8B-B14F-4D97-AF65-F5344CB8AC3E}">
+        <p14:creationId xmlns:p14="http://schemas.microsoft.com/office/powerpoint/2010/main" val="1024086991"/>
+      </p:ext>
+    </p:extLst>
+  </p:cSld>
+  <p:clrMapOvr>
+    <a:masterClrMapping/>
+  </p:clrMapOvr>
+</p:notes>
+</file>
+
+<file path=ppt/notesSlides/notesSlide63.xml><?xml version="1.0" encoding="utf-8"?>
+<p:notes xmlns:a="http://schemas.openxmlformats.org/drawingml/2006/main" xmlns:r="http://schemas.openxmlformats.org/officeDocument/2006/relationships" xmlns:p="http://schemas.openxmlformats.org/presentationml/2006/main">
+  <p:cSld>
+    <p:spTree>
+      <p:nvGrpSpPr>
+        <p:cNvPr id="1" name=""/>
+        <p:cNvGrpSpPr/>
+        <p:nvPr/>
+      </p:nvGrpSpPr>
+      <p:grpSpPr>
+        <a:xfrm>
+          <a:off x="0" y="0"/>
+          <a:ext cx="0" cy="0"/>
+          <a:chOff x="0" y="0"/>
+          <a:chExt cx="0" cy="0"/>
+        </a:xfrm>
+      </p:grpSpPr>
+      <p:sp>
+        <p:nvSpPr>
+          <p:cNvPr id="2" name="Slide Image Placeholder 1"/>
+          <p:cNvSpPr>
+            <a:spLocks noGrp="1" noRot="1" noChangeAspect="1"/>
+          </p:cNvSpPr>
+          <p:nvPr>
+            <p:ph type="sldImg"/>
+          </p:nvPr>
+        </p:nvSpPr>
+        <p:spPr/>
+      </p:sp>
+      <p:sp>
+        <p:nvSpPr>
+          <p:cNvPr id="3" name="Notes Placeholder 2"/>
+          <p:cNvSpPr>
+            <a:spLocks noGrp="1"/>
+          </p:cNvSpPr>
+          <p:nvPr>
+            <p:ph type="body" idx="1"/>
+          </p:nvPr>
+        </p:nvSpPr>
+        <p:spPr/>
+        <p:txBody>
+          <a:bodyPr/>
+          <a:lstStyle/>
+          <a:p>
+            <a:r>
+              <a:rPr lang="en-US" dirty="0"/>
+              <a:t>I complete the second page of the logbook: the matter taught, the evaluation, the homework and the attendance.</a:t>
+            </a:r>
+            <a:endParaRPr lang="en-US" dirty="0"/>
+          </a:p>
+        </p:txBody>
+      </p:sp>
+      <p:sp>
+        <p:nvSpPr>
+          <p:cNvPr id="4" name="Slide Number Placeholder 3"/>
+          <p:cNvSpPr>
+            <a:spLocks noGrp="1"/>
+          </p:cNvSpPr>
+          <p:nvPr>
+            <p:ph type="sldNum" sz="quarter" idx="10"/>
+          </p:nvPr>
+        </p:nvSpPr>
+        <p:spPr/>
+        <p:txBody>
+          <a:bodyPr/>
+          <a:lstStyle/>
+          <a:p>
+            <a:fld id="{F7021451-1387-4CA6-816F-3879F97B5CBC}" type="slidenum">
+              <a:rPr lang="en-US"/>
+              <a:t>63</a:t>
+            </a:fld>
+            <a:endParaRPr lang="en-US"/>
+          </a:p>
+        </p:txBody>
+      </p:sp>
+    </p:spTree>
+    <p:extLst>
+      <p:ext uri="{BB962C8B-B14F-4D97-AF65-F5344CB8AC3E}">
+        <p14:creationId xmlns:p14="http://schemas.microsoft.com/office/powerpoint/2010/main" val="1024086991"/>
+      </p:ext>
+    </p:extLst>
+  </p:cSld>
+  <p:clrMapOvr>
+    <a:masterClrMapping/>
+  </p:clrMapOvr>
+</p:notes>
+</file>
+
+<file path=ppt/notesSlides/notesSlide64.xml><?xml version="1.0" encoding="utf-8"?>
+<p:notes xmlns:a="http://schemas.openxmlformats.org/drawingml/2006/main" xmlns:r="http://schemas.openxmlformats.org/officeDocument/2006/relationships" xmlns:p="http://schemas.openxmlformats.org/presentationml/2006/main">
+  <p:cSld>
+    <p:spTree>
+      <p:nvGrpSpPr>
+        <p:cNvPr id="1" name=""/>
+        <p:cNvGrpSpPr/>
+        <p:nvPr/>
+      </p:nvGrpSpPr>
+      <p:grpSpPr>
+        <a:xfrm>
+          <a:off x="0" y="0"/>
+          <a:ext cx="0" cy="0"/>
+          <a:chOff x="0" y="0"/>
+          <a:chExt cx="0" cy="0"/>
+        </a:xfrm>
+      </p:grpSpPr>
+      <p:sp>
+        <p:nvSpPr>
+          <p:cNvPr id="2" name="Slide Image Placeholder 1"/>
+          <p:cNvSpPr>
+            <a:spLocks noGrp="1" noRot="1" noChangeAspect="1"/>
+          </p:cNvSpPr>
+          <p:nvPr>
+            <p:ph type="sldImg"/>
+          </p:nvPr>
+        </p:nvSpPr>
+        <p:spPr/>
+      </p:sp>
+      <p:sp>
+        <p:nvSpPr>
+          <p:cNvPr id="3" name="Notes Placeholder 2"/>
+          <p:cNvSpPr>
+            <a:spLocks noGrp="1"/>
+          </p:cNvSpPr>
+          <p:nvPr>
+            <p:ph type="body" idx="1"/>
+          </p:nvPr>
+        </p:nvSpPr>
+        <p:spPr/>
+        <p:txBody>
+          <a:bodyPr/>
+          <a:lstStyle/>
+          <a:p>
+            <a:r>
+              <a:rPr lang="en-US" dirty="0"/>
+              <a:t>This slide is for me, the teacher: it gives the timing of the lesson and what to do if the projector is not available.</a:t>
+            </a:r>
+            <a:endParaRPr lang="en-US" dirty="0"/>
+          </a:p>
+        </p:txBody>
+      </p:sp>
+      <p:sp>
+        <p:nvSpPr>
+          <p:cNvPr id="4" name="Slide Number Placeholder 3"/>
+          <p:cNvSpPr>
+            <a:spLocks noGrp="1"/>
+          </p:cNvSpPr>
+          <p:nvPr>
+            <p:ph type="sldNum" sz="quarter" idx="10"/>
+          </p:nvPr>
+        </p:nvSpPr>
+        <p:spPr/>
+        <p:txBody>
+          <a:bodyPr/>
+          <a:lstStyle/>
+          <a:p>
+            <a:fld id="{F7021451-1387-4CA6-816F-3879F97B5CBC}" type="slidenum">
+              <a:rPr lang="en-US"/>
+              <a:t>64</a:t>
+            </a:fld>
+            <a:endParaRPr lang="en-US"/>
+          </a:p>
+        </p:txBody>
+      </p:sp>
+    </p:spTree>
+    <p:extLst>
+      <p:ext uri="{BB962C8B-B14F-4D97-AF65-F5344CB8AC3E}">
+        <p14:creationId xmlns:p14="http://schemas.microsoft.com/office/powerpoint/2010/main" val="1024086991"/>
+      </p:ext>
+    </p:extLst>
+  </p:cSld>
+  <p:clrMapOvr>
+    <a:masterClrMapping/>
+  </p:clrMapOvr>
+</p:notes>
+</file>
+
+<file path=ppt/notesSlides/notesSlide65.xml><?xml version="1.0" encoding="utf-8"?>
+<p:notes xmlns:a="http://schemas.openxmlformats.org/drawingml/2006/main" xmlns:r="http://schemas.openxmlformats.org/officeDocument/2006/relationships" xmlns:p="http://schemas.openxmlformats.org/presentationml/2006/main">
+  <p:cSld>
+    <p:spTree>
+      <p:nvGrpSpPr>
+        <p:cNvPr id="1" name=""/>
+        <p:cNvGrpSpPr/>
+        <p:nvPr/>
+      </p:nvGrpSpPr>
+      <p:grpSpPr>
+        <a:xfrm>
+          <a:off x="0" y="0"/>
+          <a:ext cx="0" cy="0"/>
+          <a:chOff x="0" y="0"/>
+          <a:chExt cx="0" cy="0"/>
+        </a:xfrm>
+      </p:grpSpPr>
+      <p:sp>
+        <p:nvSpPr>
+          <p:cNvPr id="2" name="Slide Image Placeholder 1"/>
+          <p:cNvSpPr>
+            <a:spLocks noGrp="1" noRot="1" noChangeAspect="1"/>
+          </p:cNvSpPr>
+          <p:nvPr>
+            <p:ph type="sldImg"/>
+          </p:nvPr>
+        </p:nvSpPr>
+        <p:spPr/>
+      </p:sp>
+      <p:sp>
+        <p:nvSpPr>
+          <p:cNvPr id="3" name="Notes Placeholder 2"/>
+          <p:cNvSpPr>
+            <a:spLocks noGrp="1"/>
+          </p:cNvSpPr>
+          <p:nvPr>
+            <p:ph type="body" idx="1"/>
+          </p:nvPr>
+        </p:nvSpPr>
+        <p:spPr/>
+        <p:txBody>
+          <a:bodyPr/>
+          <a:lstStyle/>
+          <a:p>
+            <a:r>
+              <a:rPr lang="en-US" dirty="0"/>
+              <a:t>These are the references and picture credits used to prepare this lesson.</a:t>
+            </a:r>
+            <a:endParaRPr lang="en-US" dirty="0"/>
+          </a:p>
+        </p:txBody>
+      </p:sp>
+      <p:sp>
+        <p:nvSpPr>
+          <p:cNvPr id="4" name="Slide Number Placeholder 3"/>
+          <p:cNvSpPr>
+            <a:spLocks noGrp="1"/>
+          </p:cNvSpPr>
+          <p:nvPr>
+            <p:ph type="sldNum" sz="quarter" idx="10"/>
+          </p:nvPr>
+        </p:nvSpPr>
+        <p:spPr/>
+        <p:txBody>
+          <a:bodyPr/>
+          <a:lstStyle/>
+          <a:p>
+            <a:fld id="{F7021451-1387-4CA6-816F-3879F97B5CBC}" type="slidenum">
+              <a:rPr lang="en-US"/>
+              <a:t>65</a:t>
             </a:fld>
             <a:endParaRPr lang="en-US"/>
           </a:p>
@@ -16647,7 +16914,7 @@
               <a:buNone/>
             </a:pPr>
             <a:r>
-              <a:rPr lang="en-US" sz="3200" b="1" dirty="0">
+              <a:rPr lang="en-US" sz="3600" b="1" dirty="0">
                 <a:solidFill>
                   <a:srgbClr val="111111"/>
                 </a:solidFill>
@@ -16655,7 +16922,7 @@
                 <a:ea typeface="Times New Roman" pitchFamily="34" charset="-122"/>
                 <a:cs typeface="Times New Roman" pitchFamily="34" charset="-120"/>
               </a:rPr>
-              <a:t>Structure and marital behaviour: </a:t>
+              <a:t>Age structure: </a:t>
             </a:r>
             <a:pPr algn="l" indent="0" marL="0">
               <a:spcAft>
@@ -16664,7 +16931,7 @@
               <a:buNone/>
             </a:pPr>
             <a:r>
-              <a:rPr lang="en-US" sz="3200" dirty="0">
+              <a:rPr lang="en-US" sz="3600" dirty="0">
                 <a:solidFill>
                   <a:srgbClr val="111111"/>
                 </a:solidFill>
@@ -16672,9 +16939,9 @@
                 <a:ea typeface="Times New Roman" pitchFamily="34" charset="-122"/>
                 <a:cs typeface="Times New Roman" pitchFamily="34" charset="-120"/>
               </a:rPr>
-              <a:t>A youthful population grows quickly because many people are of child-bearing age, while an ageing population grows slowly or shrinks. Societies where people marry young and value large families have higher birth rates.</a:t>
-            </a:r>
-            <a:endParaRPr lang="en-US" sz="3200" dirty="0"/>
+              <a:t>A youthful population grows quickly because many people are of child-bearing age. An ageing population grows slowly or shrinks.</a:t>
+            </a:r>
+            <a:endParaRPr lang="en-US" sz="3600" dirty="0"/>
           </a:p>
         </p:txBody>
       </p:sp>
@@ -16853,170 +17120,9 @@
           </a:p>
         </p:txBody>
       </p:sp>
-      <p:sp>
-        <p:nvSpPr>
-          <p:cNvPr id="3" name="Text 1"/>
-          <p:cNvSpPr/>
-          <p:nvPr/>
-        </p:nvSpPr>
-        <p:spPr>
-          <a:xfrm>
-            <a:off x="365760" y="1005840"/>
-            <a:ext cx="11460175" cy="731520"/>
-          </a:xfrm>
-          <a:prstGeom prst="rect">
-            <a:avLst/>
-          </a:prstGeom>
-          <a:noFill/>
-          <a:ln/>
-        </p:spPr>
-        <p:txBody>
-          <a:bodyPr wrap="square" lIns="0" tIns="0" rIns="0" bIns="0" rtlCol="0" anchor="ctr">
-            <a:normAutofit/>
-          </a:bodyPr>
-          <a:lstStyle/>
-          <a:p>
-            <a:pPr algn="ctr" indent="0" marL="0">
-              <a:buNone/>
-            </a:pPr>
-            <a:r>
-              <a:rPr lang="en-US" sz="3600" b="1" dirty="0">
-                <a:solidFill>
-                  <a:srgbClr val="990011"/>
-                </a:solidFill>
-                <a:latin typeface="Times New Roman" pitchFamily="34" charset="0"/>
-                <a:ea typeface="Times New Roman" pitchFamily="34" charset="-122"/>
-                <a:cs typeface="Times New Roman" pitchFamily="34" charset="-120"/>
-              </a:rPr>
-              <a:t>1. The Factors of Population Growth</a:t>
-            </a:r>
-            <a:endParaRPr lang="en-US" sz="3600" dirty="0"/>
-          </a:p>
-        </p:txBody>
-      </p:sp>
-      <p:sp>
-        <p:nvSpPr>
-          <p:cNvPr id="4" name="Text 2"/>
-          <p:cNvSpPr/>
-          <p:nvPr/>
-        </p:nvSpPr>
-        <p:spPr>
-          <a:xfrm>
-            <a:off x="365760" y="1737360"/>
-            <a:ext cx="6035040" cy="457200"/>
-          </a:xfrm>
-          <a:prstGeom prst="rect">
-            <a:avLst/>
-          </a:prstGeom>
-          <a:noFill/>
-          <a:ln/>
-        </p:spPr>
-        <p:txBody>
-          <a:bodyPr wrap="square" lIns="0" tIns="0" rIns="0" bIns="0" rtlCol="0" anchor="ctr">
-            <a:normAutofit/>
-          </a:bodyPr>
-          <a:lstStyle/>
-          <a:p>
-            <a:pPr algn="l" indent="0" marL="0">
-              <a:buNone/>
-            </a:pPr>
-            <a:r>
-              <a:rPr lang="en-US" sz="3000" b="1" dirty="0">
-                <a:solidFill>
-                  <a:srgbClr val="990011"/>
-                </a:solidFill>
-                <a:latin typeface="Times New Roman" pitchFamily="34" charset="0"/>
-                <a:ea typeface="Times New Roman" pitchFamily="34" charset="-122"/>
-                <a:cs typeface="Times New Roman" pitchFamily="34" charset="-120"/>
-              </a:rPr>
-              <a:t>B) Non-Demographic Factors</a:t>
-            </a:r>
-            <a:endParaRPr lang="en-US" sz="3000" dirty="0"/>
-          </a:p>
-        </p:txBody>
-      </p:sp>
-      <p:sp>
-        <p:nvSpPr>
-          <p:cNvPr id="5" name="Text 3"/>
-          <p:cNvSpPr/>
-          <p:nvPr/>
-        </p:nvSpPr>
-        <p:spPr>
-          <a:xfrm>
-            <a:off x="365760" y="2240280"/>
-            <a:ext cx="6035040" cy="4160520"/>
-          </a:xfrm>
-          <a:prstGeom prst="rect">
-            <a:avLst/>
-          </a:prstGeom>
-          <a:noFill/>
-          <a:ln/>
-        </p:spPr>
-        <p:txBody>
-          <a:bodyPr wrap="square" lIns="0" tIns="0" rIns="0" bIns="0" rtlCol="0" anchor="t"/>
-          <a:lstStyle/>
-          <a:p>
-            <a:pPr algn="l" indent="0" marL="0">
-              <a:spcAft>
-                <a:spcPts val="800"/>
-              </a:spcAft>
-              <a:buNone/>
-            </a:pPr>
-            <a:r>
-              <a:rPr lang="en-US" sz="2800" i="1" dirty="0">
-                <a:solidFill>
-                  <a:srgbClr val="111111"/>
-                </a:solidFill>
-                <a:latin typeface="Times New Roman" pitchFamily="34" charset="0"/>
-                <a:ea typeface="Times New Roman" pitchFamily="34" charset="-122"/>
-                <a:cs typeface="Times New Roman" pitchFamily="34" charset="-120"/>
-              </a:rPr>
-              <a:t>Population growth is also influenced by the following non-demographic factors:</a:t>
-            </a:r>
-            <a:endParaRPr lang="en-US" sz="2800" dirty="0"/>
-          </a:p>
-          <a:p>
-            <a:pPr algn="l" indent="0" marL="0">
-              <a:spcAft>
-                <a:spcPts val="800"/>
-              </a:spcAft>
-              <a:buNone/>
-            </a:pPr>
-            <a:r>
-              <a:rPr lang="en-US" sz="2800" b="1" dirty="0">
-                <a:solidFill>
-                  <a:srgbClr val="111111"/>
-                </a:solidFill>
-                <a:latin typeface="Times New Roman" pitchFamily="34" charset="0"/>
-                <a:ea typeface="Times New Roman" pitchFamily="34" charset="-122"/>
-                <a:cs typeface="Times New Roman" pitchFamily="34" charset="-120"/>
-              </a:rPr>
-              <a:t>Wars and natural disasters: </a:t>
-            </a:r>
-            <a:pPr algn="l" indent="0" marL="0">
-              <a:spcAft>
-                <a:spcPts val="800"/>
-              </a:spcAft>
-              <a:buNone/>
-            </a:pPr>
-            <a:r>
-              <a:rPr lang="en-US" sz="2800" dirty="0">
-                <a:solidFill>
-                  <a:srgbClr val="111111"/>
-                </a:solidFill>
-                <a:latin typeface="Times New Roman" pitchFamily="34" charset="0"/>
-                <a:ea typeface="Times New Roman" pitchFamily="34" charset="-122"/>
-                <a:cs typeface="Times New Roman" pitchFamily="34" charset="-120"/>
-              </a:rPr>
-              <a:t>Wars raise death rates and force people to flee, which reduces the population. Floods of the Benue or droughts in the Sahel also cause deaths and displacement.</a:t>
-            </a:r>
-            <a:endParaRPr lang="en-US" sz="2800" dirty="0"/>
-          </a:p>
-        </p:txBody>
-      </p:sp>
       <p:pic>
         <p:nvPicPr>
-          <p:cNvPr id="6" name="Image 0" descr="/home/claude/f4/img/v2/usa_refugee.jpg">    </p:cNvPr>
+          <p:cNvPr id="3" name="Image 0" descr="/home/claude/f4/img/minesec_sheet.png">    </p:cNvPr>
           <p:cNvPicPr>
             <a:picLocks noChangeAspect="1"/>
           </p:cNvPicPr>
@@ -17030,8 +17136,8 @@
         </p:blipFill>
         <p:spPr>
           <a:xfrm>
-            <a:off x="6537960" y="2400897"/>
-            <a:ext cx="5470855" cy="3034615"/>
+            <a:off x="0" y="658368"/>
+            <a:ext cx="1463040" cy="5833872"/>
           </a:xfrm>
           <a:prstGeom prst="rect">
             <a:avLst/>
@@ -17040,14 +17146,14 @@
       </p:pic>
       <p:sp>
         <p:nvSpPr>
-          <p:cNvPr id="7" name="Text 4"/>
+          <p:cNvPr id="4" name="Text 1"/>
           <p:cNvSpPr/>
           <p:nvPr/>
         </p:nvSpPr>
         <p:spPr>
           <a:xfrm>
-            <a:off x="6537960" y="6089904"/>
-            <a:ext cx="5470855" cy="347472"/>
+            <a:off x="1691640" y="1005840"/>
+            <a:ext cx="10180015" cy="731520"/>
           </a:xfrm>
           <a:prstGeom prst="rect">
             <a:avLst/>
@@ -17056,24 +17162,144 @@
           <a:ln/>
         </p:spPr>
         <p:txBody>
-          <a:bodyPr wrap="square" lIns="0" tIns="0" rIns="0" bIns="0" rtlCol="0" anchor="ctr"/>
+          <a:bodyPr wrap="square" lIns="0" tIns="0" rIns="0" bIns="0" rtlCol="0" anchor="ctr">
+            <a:normAutofit/>
+          </a:bodyPr>
           <a:lstStyle/>
           <a:p>
             <a:pPr algn="ctr" indent="0" marL="0">
               <a:buNone/>
             </a:pPr>
             <a:r>
-              <a:rPr lang="en-US" sz="1600" i="1" dirty="0">
-                <a:solidFill>
-                  <a:srgbClr val="555555"/>
+              <a:rPr lang="en-US" sz="3600" b="1" dirty="0">
+                <a:solidFill>
+                  <a:srgbClr val="990011"/>
                 </a:solidFill>
                 <a:latin typeface="Times New Roman" pitchFamily="34" charset="0"/>
                 <a:ea typeface="Times New Roman" pitchFamily="34" charset="-122"/>
                 <a:cs typeface="Times New Roman" pitchFamily="34" charset="-120"/>
               </a:rPr>
-              <a:t>Illustration: refugees</a:t>
-            </a:r>
-            <a:endParaRPr lang="en-US" sz="1600" dirty="0"/>
+              <a:t>1. The Factors of Population Growth</a:t>
+            </a:r>
+            <a:endParaRPr lang="en-US" sz="3600" dirty="0"/>
+          </a:p>
+        </p:txBody>
+      </p:sp>
+      <p:sp>
+        <p:nvSpPr>
+          <p:cNvPr id="5" name="Text 2"/>
+          <p:cNvSpPr/>
+          <p:nvPr/>
+        </p:nvSpPr>
+        <p:spPr>
+          <a:xfrm>
+            <a:off x="1691640" y="1737360"/>
+            <a:ext cx="10180015" cy="457200"/>
+          </a:xfrm>
+          <a:prstGeom prst="rect">
+            <a:avLst/>
+          </a:prstGeom>
+          <a:noFill/>
+          <a:ln/>
+        </p:spPr>
+        <p:txBody>
+          <a:bodyPr wrap="square" lIns="0" tIns="0" rIns="0" bIns="0" rtlCol="0" anchor="ctr"/>
+          <a:lstStyle/>
+          <a:p>
+            <a:pPr algn="l" indent="0" marL="0">
+              <a:buNone/>
+            </a:pPr>
+            <a:r>
+              <a:rPr lang="en-US" sz="3200" b="1" dirty="0">
+                <a:solidFill>
+                  <a:srgbClr val="990011"/>
+                </a:solidFill>
+                <a:latin typeface="Times New Roman" pitchFamily="34" charset="0"/>
+                <a:ea typeface="Times New Roman" pitchFamily="34" charset="-122"/>
+                <a:cs typeface="Times New Roman" pitchFamily="34" charset="-120"/>
+              </a:rPr>
+              <a:t>B) Non-Demographic Factors: Social and Natural</a:t>
+            </a:r>
+            <a:endParaRPr lang="en-US" sz="3200" dirty="0"/>
+          </a:p>
+        </p:txBody>
+      </p:sp>
+      <p:sp>
+        <p:nvSpPr>
+          <p:cNvPr id="6" name="Text 3"/>
+          <p:cNvSpPr/>
+          <p:nvPr/>
+        </p:nvSpPr>
+        <p:spPr>
+          <a:xfrm>
+            <a:off x="1691640" y="2240280"/>
+            <a:ext cx="10180015" cy="4206240"/>
+          </a:xfrm>
+          <a:prstGeom prst="rect">
+            <a:avLst/>
+          </a:prstGeom>
+          <a:noFill/>
+          <a:ln/>
+        </p:spPr>
+        <p:txBody>
+          <a:bodyPr wrap="square" lIns="0" tIns="0" rIns="0" bIns="0" rtlCol="0" anchor="t"/>
+          <a:lstStyle/>
+          <a:p>
+            <a:pPr algn="l" indent="0" marL="0">
+              <a:spcAft>
+                <a:spcPts val="800"/>
+              </a:spcAft>
+              <a:buNone/>
+            </a:pPr>
+            <a:r>
+              <a:rPr lang="en-US" sz="4000" i="1" dirty="0">
+                <a:solidFill>
+                  <a:srgbClr val="111111"/>
+                </a:solidFill>
+                <a:latin typeface="Times New Roman" pitchFamily="34" charset="0"/>
+                <a:ea typeface="Times New Roman" pitchFamily="34" charset="-122"/>
+                <a:cs typeface="Times New Roman" pitchFamily="34" charset="-120"/>
+              </a:rPr>
+              <a:t>Population growth is also influenced by the following social and natural factors:</a:t>
+            </a:r>
+            <a:endParaRPr lang="en-US" sz="4000" dirty="0"/>
+          </a:p>
+          <a:p>
+            <a:pPr algn="l" indent="0" marL="0">
+              <a:spcAft>
+                <a:spcPts val="800"/>
+              </a:spcAft>
+              <a:buNone/>
+            </a:pPr>
+            <a:r>
+              <a:rPr lang="en-US" sz="4000" b="1" dirty="0">
+                <a:solidFill>
+                  <a:srgbClr val="111111"/>
+                </a:solidFill>
+                <a:latin typeface="Times New Roman" pitchFamily="34" charset="0"/>
+                <a:ea typeface="Times New Roman" pitchFamily="34" charset="-122"/>
+                <a:cs typeface="Times New Roman" pitchFamily="34" charset="-120"/>
+              </a:rPr>
+              <a:t>Marriage customs: </a:t>
+            </a:r>
+            <a:pPr algn="l" indent="0" marL="0">
+              <a:spcAft>
+                <a:spcPts val="800"/>
+              </a:spcAft>
+              <a:buNone/>
+            </a:pPr>
+            <a:r>
+              <a:rPr lang="en-US" sz="4000" dirty="0">
+                <a:solidFill>
+                  <a:srgbClr val="111111"/>
+                </a:solidFill>
+                <a:latin typeface="Times New Roman" pitchFamily="34" charset="0"/>
+                <a:ea typeface="Times New Roman" pitchFamily="34" charset="-122"/>
+                <a:cs typeface="Times New Roman" pitchFamily="34" charset="-120"/>
+              </a:rPr>
+              <a:t>Where people marry young and value large families, birth rates are high. Late marriage and small families slow growth down.</a:t>
+            </a:r>
+            <a:endParaRPr lang="en-US" sz="4000" dirty="0"/>
           </a:p>
         </p:txBody>
       </p:sp>
@@ -17189,9 +17415,150 @@
           </a:p>
         </p:txBody>
       </p:sp>
+      <p:sp>
+        <p:nvSpPr>
+          <p:cNvPr id="3" name="Text 1"/>
+          <p:cNvSpPr/>
+          <p:nvPr/>
+        </p:nvSpPr>
+        <p:spPr>
+          <a:xfrm>
+            <a:off x="365760" y="1005840"/>
+            <a:ext cx="11460175" cy="731520"/>
+          </a:xfrm>
+          <a:prstGeom prst="rect">
+            <a:avLst/>
+          </a:prstGeom>
+          <a:noFill/>
+          <a:ln/>
+        </p:spPr>
+        <p:txBody>
+          <a:bodyPr wrap="square" lIns="0" tIns="0" rIns="0" bIns="0" rtlCol="0" anchor="ctr">
+            <a:normAutofit/>
+          </a:bodyPr>
+          <a:lstStyle/>
+          <a:p>
+            <a:pPr algn="ctr" indent="0" marL="0">
+              <a:buNone/>
+            </a:pPr>
+            <a:r>
+              <a:rPr lang="en-US" sz="3600" b="1" dirty="0">
+                <a:solidFill>
+                  <a:srgbClr val="990011"/>
+                </a:solidFill>
+                <a:latin typeface="Times New Roman" pitchFamily="34" charset="0"/>
+                <a:ea typeface="Times New Roman" pitchFamily="34" charset="-122"/>
+                <a:cs typeface="Times New Roman" pitchFamily="34" charset="-120"/>
+              </a:rPr>
+              <a:t>1. The Factors of Population Growth</a:t>
+            </a:r>
+            <a:endParaRPr lang="en-US" sz="3600" dirty="0"/>
+          </a:p>
+        </p:txBody>
+      </p:sp>
+      <p:sp>
+        <p:nvSpPr>
+          <p:cNvPr id="4" name="Text 2"/>
+          <p:cNvSpPr/>
+          <p:nvPr/>
+        </p:nvSpPr>
+        <p:spPr>
+          <a:xfrm>
+            <a:off x="365760" y="1737360"/>
+            <a:ext cx="6035040" cy="457200"/>
+          </a:xfrm>
+          <a:prstGeom prst="rect">
+            <a:avLst/>
+          </a:prstGeom>
+          <a:noFill/>
+          <a:ln/>
+        </p:spPr>
+        <p:txBody>
+          <a:bodyPr wrap="square" lIns="0" tIns="0" rIns="0" bIns="0" rtlCol="0" anchor="ctr">
+            <a:normAutofit/>
+          </a:bodyPr>
+          <a:lstStyle/>
+          <a:p>
+            <a:pPr algn="l" indent="0" marL="0">
+              <a:buNone/>
+            </a:pPr>
+            <a:r>
+              <a:rPr lang="en-US" sz="3000" b="1" dirty="0">
+                <a:solidFill>
+                  <a:srgbClr val="990011"/>
+                </a:solidFill>
+                <a:latin typeface="Times New Roman" pitchFamily="34" charset="0"/>
+                <a:ea typeface="Times New Roman" pitchFamily="34" charset="-122"/>
+                <a:cs typeface="Times New Roman" pitchFamily="34" charset="-120"/>
+              </a:rPr>
+              <a:t>B) Non-Demographic Factors: Social and Natural</a:t>
+            </a:r>
+            <a:endParaRPr lang="en-US" sz="3000" dirty="0"/>
+          </a:p>
+        </p:txBody>
+      </p:sp>
+      <p:sp>
+        <p:nvSpPr>
+          <p:cNvPr id="5" name="Text 3"/>
+          <p:cNvSpPr/>
+          <p:nvPr/>
+        </p:nvSpPr>
+        <p:spPr>
+          <a:xfrm>
+            <a:off x="365760" y="2240280"/>
+            <a:ext cx="6035040" cy="4160520"/>
+          </a:xfrm>
+          <a:prstGeom prst="rect">
+            <a:avLst/>
+          </a:prstGeom>
+          <a:noFill/>
+          <a:ln/>
+        </p:spPr>
+        <p:txBody>
+          <a:bodyPr wrap="square" lIns="0" tIns="0" rIns="0" bIns="0" rtlCol="0" anchor="t"/>
+          <a:lstStyle/>
+          <a:p>
+            <a:pPr algn="l" indent="0" marL="0">
+              <a:spcAft>
+                <a:spcPts val="800"/>
+              </a:spcAft>
+              <a:buNone/>
+            </a:pPr>
+            <a:r>
+              <a:rPr lang="en-US" sz="3600" b="1" dirty="0">
+                <a:solidFill>
+                  <a:srgbClr val="111111"/>
+                </a:solidFill>
+                <a:latin typeface="Times New Roman" pitchFamily="34" charset="0"/>
+                <a:ea typeface="Times New Roman" pitchFamily="34" charset="-122"/>
+                <a:cs typeface="Times New Roman" pitchFamily="34" charset="-120"/>
+              </a:rPr>
+              <a:t>Wars: </a:t>
+            </a:r>
+            <a:pPr algn="l" indent="0" marL="0">
+              <a:spcAft>
+                <a:spcPts val="800"/>
+              </a:spcAft>
+              <a:buNone/>
+            </a:pPr>
+            <a:r>
+              <a:rPr lang="en-US" sz="3600" dirty="0">
+                <a:solidFill>
+                  <a:srgbClr val="111111"/>
+                </a:solidFill>
+                <a:latin typeface="Times New Roman" pitchFamily="34" charset="0"/>
+                <a:ea typeface="Times New Roman" pitchFamily="34" charset="-122"/>
+                <a:cs typeface="Times New Roman" pitchFamily="34" charset="-120"/>
+              </a:rPr>
+              <a:t>Wars raise death rates and force people to flee, which reduces the population. They also separate couples, so fewer children are born.</a:t>
+            </a:r>
+            <a:endParaRPr lang="en-US" sz="3600" dirty="0"/>
+          </a:p>
+        </p:txBody>
+      </p:sp>
       <p:pic>
         <p:nvPicPr>
-          <p:cNvPr id="3" name="Image 0" descr="/home/claude/f4/img/minesec_sheet.png">    </p:cNvPr>
+          <p:cNvPr id="6" name="Image 0" descr="/home/claude/f4/img/v2/usa_refugee.jpg">    </p:cNvPr>
           <p:cNvPicPr>
             <a:picLocks noChangeAspect="1"/>
           </p:cNvPicPr>
@@ -17205,8 +17572,8 @@
         </p:blipFill>
         <p:spPr>
           <a:xfrm>
-            <a:off x="0" y="658368"/>
-            <a:ext cx="3840480" cy="5833872"/>
+            <a:off x="6537960" y="2400897"/>
+            <a:ext cx="5470855" cy="3034615"/>
           </a:xfrm>
           <a:prstGeom prst="rect">
             <a:avLst/>
@@ -17215,14 +17582,14 @@
       </p:pic>
       <p:sp>
         <p:nvSpPr>
-          <p:cNvPr id="4" name="Text 1"/>
+          <p:cNvPr id="7" name="Text 4"/>
           <p:cNvSpPr/>
           <p:nvPr/>
         </p:nvSpPr>
         <p:spPr>
           <a:xfrm>
-            <a:off x="4069080" y="1005840"/>
-            <a:ext cx="7802575" cy="731520"/>
+            <a:off x="6537960" y="6089904"/>
+            <a:ext cx="5470855" cy="347472"/>
           </a:xfrm>
           <a:prstGeom prst="rect">
             <a:avLst/>
@@ -17231,124 +17598,24 @@
           <a:ln/>
         </p:spPr>
         <p:txBody>
-          <a:bodyPr wrap="square" lIns="0" tIns="0" rIns="0" bIns="0" rtlCol="0" anchor="ctr">
-            <a:normAutofit/>
-          </a:bodyPr>
+          <a:bodyPr wrap="square" lIns="0" tIns="0" rIns="0" bIns="0" rtlCol="0" anchor="ctr"/>
           <a:lstStyle/>
           <a:p>
             <a:pPr algn="ctr" indent="0" marL="0">
               <a:buNone/>
             </a:pPr>
             <a:r>
-              <a:rPr lang="en-US" sz="3600" b="1" dirty="0">
-                <a:solidFill>
-                  <a:srgbClr val="990011"/>
+              <a:rPr lang="en-US" sz="1600" i="1" dirty="0">
+                <a:solidFill>
+                  <a:srgbClr val="555555"/>
                 </a:solidFill>
                 <a:latin typeface="Times New Roman" pitchFamily="34" charset="0"/>
                 <a:ea typeface="Times New Roman" pitchFamily="34" charset="-122"/>
                 <a:cs typeface="Times New Roman" pitchFamily="34" charset="-120"/>
               </a:rPr>
-              <a:t>1. The Factors of Population Growth</a:t>
-            </a:r>
-            <a:endParaRPr lang="en-US" sz="3600" dirty="0"/>
-          </a:p>
-        </p:txBody>
-      </p:sp>
-      <p:sp>
-        <p:nvSpPr>
-          <p:cNvPr id="5" name="Text 2"/>
-          <p:cNvSpPr/>
-          <p:nvPr/>
-        </p:nvSpPr>
-        <p:spPr>
-          <a:xfrm>
-            <a:off x="4069080" y="1737360"/>
-            <a:ext cx="7802575" cy="457200"/>
-          </a:xfrm>
-          <a:prstGeom prst="rect">
-            <a:avLst/>
-          </a:prstGeom>
-          <a:noFill/>
-          <a:ln/>
-        </p:spPr>
-        <p:txBody>
-          <a:bodyPr wrap="square" lIns="0" tIns="0" rIns="0" bIns="0" rtlCol="0" anchor="ctr"/>
-          <a:lstStyle/>
-          <a:p>
-            <a:pPr algn="l" indent="0" marL="0">
-              <a:buNone/>
-            </a:pPr>
-            <a:r>
-              <a:rPr lang="en-US" sz="3200" b="1" dirty="0">
-                <a:solidFill>
-                  <a:srgbClr val="990011"/>
-                </a:solidFill>
-                <a:latin typeface="Times New Roman" pitchFamily="34" charset="0"/>
-                <a:ea typeface="Times New Roman" pitchFamily="34" charset="-122"/>
-                <a:cs typeface="Times New Roman" pitchFamily="34" charset="-120"/>
-              </a:rPr>
-              <a:t>B) Non-Demographic Factors</a:t>
-            </a:r>
-            <a:endParaRPr lang="en-US" sz="3200" dirty="0"/>
-          </a:p>
-        </p:txBody>
-      </p:sp>
-      <p:sp>
-        <p:nvSpPr>
-          <p:cNvPr id="6" name="Text 3"/>
-          <p:cNvSpPr/>
-          <p:nvPr/>
-        </p:nvSpPr>
-        <p:spPr>
-          <a:xfrm>
-            <a:off x="4069080" y="2240280"/>
-            <a:ext cx="7802575" cy="4206240"/>
-          </a:xfrm>
-          <a:prstGeom prst="rect">
-            <a:avLst/>
-          </a:prstGeom>
-          <a:noFill/>
-          <a:ln/>
-        </p:spPr>
-        <p:txBody>
-          <a:bodyPr wrap="square" lIns="0" tIns="0" rIns="0" bIns="0" rtlCol="0" anchor="t"/>
-          <a:lstStyle/>
-          <a:p>
-            <a:pPr algn="l" indent="0" marL="0">
-              <a:spcAft>
-                <a:spcPts val="800"/>
-              </a:spcAft>
-              <a:buNone/>
-            </a:pPr>
-            <a:r>
-              <a:rPr lang="en-US" sz="4000" b="1" dirty="0">
-                <a:solidFill>
-                  <a:srgbClr val="111111"/>
-                </a:solidFill>
-                <a:latin typeface="Times New Roman" pitchFamily="34" charset="0"/>
-                <a:ea typeface="Times New Roman" pitchFamily="34" charset="-122"/>
-                <a:cs typeface="Times New Roman" pitchFamily="34" charset="-120"/>
-              </a:rPr>
-              <a:t>Epidemics and medical services: </a:t>
-            </a:r>
-            <a:pPr algn="l" indent="0" marL="0">
-              <a:spcAft>
-                <a:spcPts val="800"/>
-              </a:spcAft>
-              <a:buNone/>
-            </a:pPr>
-            <a:r>
-              <a:rPr lang="en-US" sz="4000" dirty="0">
-                <a:solidFill>
-                  <a:srgbClr val="111111"/>
-                </a:solidFill>
-                <a:latin typeface="Times New Roman" pitchFamily="34" charset="0"/>
-                <a:ea typeface="Times New Roman" pitchFamily="34" charset="-122"/>
-                <a:cs typeface="Times New Roman" pitchFamily="34" charset="-120"/>
-              </a:rPr>
-              <a:t>Epidemics such as HIV/AIDS, Ebola and COVID-19 increase death rates. On the other hand, hospitals, clinics and vaccines lower death rates and raise life expectancy.</a:t>
-            </a:r>
-            <a:endParaRPr lang="en-US" sz="4000" dirty="0"/>
+              <a:t>Illustration: refugees</a:t>
+            </a:r>
+            <a:endParaRPr lang="en-US" sz="1600" dirty="0"/>
           </a:p>
         </p:txBody>
       </p:sp>
@@ -17464,150 +17731,9 @@
           </a:p>
         </p:txBody>
       </p:sp>
-      <p:sp>
-        <p:nvSpPr>
-          <p:cNvPr id="3" name="Text 1"/>
-          <p:cNvSpPr/>
-          <p:nvPr/>
-        </p:nvSpPr>
-        <p:spPr>
-          <a:xfrm>
-            <a:off x="365760" y="1005840"/>
-            <a:ext cx="11460175" cy="731520"/>
-          </a:xfrm>
-          <a:prstGeom prst="rect">
-            <a:avLst/>
-          </a:prstGeom>
-          <a:noFill/>
-          <a:ln/>
-        </p:spPr>
-        <p:txBody>
-          <a:bodyPr wrap="square" lIns="0" tIns="0" rIns="0" bIns="0" rtlCol="0" anchor="ctr">
-            <a:normAutofit/>
-          </a:bodyPr>
-          <a:lstStyle/>
-          <a:p>
-            <a:pPr algn="ctr" indent="0" marL="0">
-              <a:buNone/>
-            </a:pPr>
-            <a:r>
-              <a:rPr lang="en-US" sz="3600" b="1" dirty="0">
-                <a:solidFill>
-                  <a:srgbClr val="990011"/>
-                </a:solidFill>
-                <a:latin typeface="Times New Roman" pitchFamily="34" charset="0"/>
-                <a:ea typeface="Times New Roman" pitchFamily="34" charset="-122"/>
-                <a:cs typeface="Times New Roman" pitchFamily="34" charset="-120"/>
-              </a:rPr>
-              <a:t>1. The Factors of Population Growth</a:t>
-            </a:r>
-            <a:endParaRPr lang="en-US" sz="3600" dirty="0"/>
-          </a:p>
-        </p:txBody>
-      </p:sp>
-      <p:sp>
-        <p:nvSpPr>
-          <p:cNvPr id="4" name="Text 2"/>
-          <p:cNvSpPr/>
-          <p:nvPr/>
-        </p:nvSpPr>
-        <p:spPr>
-          <a:xfrm>
-            <a:off x="365760" y="1737360"/>
-            <a:ext cx="6035040" cy="457200"/>
-          </a:xfrm>
-          <a:prstGeom prst="rect">
-            <a:avLst/>
-          </a:prstGeom>
-          <a:noFill/>
-          <a:ln/>
-        </p:spPr>
-        <p:txBody>
-          <a:bodyPr wrap="square" lIns="0" tIns="0" rIns="0" bIns="0" rtlCol="0" anchor="ctr">
-            <a:normAutofit/>
-          </a:bodyPr>
-          <a:lstStyle/>
-          <a:p>
-            <a:pPr algn="l" indent="0" marL="0">
-              <a:buNone/>
-            </a:pPr>
-            <a:r>
-              <a:rPr lang="en-US" sz="3000" b="1" dirty="0">
-                <a:solidFill>
-                  <a:srgbClr val="990011"/>
-                </a:solidFill>
-                <a:latin typeface="Times New Roman" pitchFamily="34" charset="0"/>
-                <a:ea typeface="Times New Roman" pitchFamily="34" charset="-122"/>
-                <a:cs typeface="Times New Roman" pitchFamily="34" charset="-120"/>
-              </a:rPr>
-              <a:t>B) Non-Demographic Factors</a:t>
-            </a:r>
-            <a:endParaRPr lang="en-US" sz="3000" dirty="0"/>
-          </a:p>
-        </p:txBody>
-      </p:sp>
-      <p:sp>
-        <p:nvSpPr>
-          <p:cNvPr id="5" name="Text 3"/>
-          <p:cNvSpPr/>
-          <p:nvPr/>
-        </p:nvSpPr>
-        <p:spPr>
-          <a:xfrm>
-            <a:off x="365760" y="2240280"/>
-            <a:ext cx="6035040" cy="4160520"/>
-          </a:xfrm>
-          <a:prstGeom prst="rect">
-            <a:avLst/>
-          </a:prstGeom>
-          <a:noFill/>
-          <a:ln/>
-        </p:spPr>
-        <p:txBody>
-          <a:bodyPr wrap="square" lIns="0" tIns="0" rIns="0" bIns="0" rtlCol="0" anchor="t"/>
-          <a:lstStyle/>
-          <a:p>
-            <a:pPr algn="l" indent="0" marL="0">
-              <a:spcAft>
-                <a:spcPts val="800"/>
-              </a:spcAft>
-              <a:buNone/>
-            </a:pPr>
-            <a:r>
-              <a:rPr lang="en-US" sz="3600" b="1" dirty="0">
-                <a:solidFill>
-                  <a:srgbClr val="111111"/>
-                </a:solidFill>
-                <a:latin typeface="Times New Roman" pitchFamily="34" charset="0"/>
-                <a:ea typeface="Times New Roman" pitchFamily="34" charset="-122"/>
-                <a:cs typeface="Times New Roman" pitchFamily="34" charset="-120"/>
-              </a:rPr>
-              <a:t>Government policies: </a:t>
-            </a:r>
-            <a:pPr algn="l" indent="0" marL="0">
-              <a:spcAft>
-                <a:spcPts val="800"/>
-              </a:spcAft>
-              <a:buNone/>
-            </a:pPr>
-            <a:r>
-              <a:rPr lang="en-US" sz="3600" dirty="0">
-                <a:solidFill>
-                  <a:srgbClr val="111111"/>
-                </a:solidFill>
-                <a:latin typeface="Times New Roman" pitchFamily="34" charset="0"/>
-                <a:ea typeface="Times New Roman" pitchFamily="34" charset="-122"/>
-                <a:cs typeface="Times New Roman" pitchFamily="34" charset="-120"/>
-              </a:rPr>
-              <a:t>Pro-natalist policies encourage births with allowances and leave. Anti-natalist policies, like the former one-child policy of China, limit them.</a:t>
-            </a:r>
-            <a:endParaRPr lang="en-US" sz="3600" dirty="0"/>
-          </a:p>
-        </p:txBody>
-      </p:sp>
       <p:pic>
         <p:nvPicPr>
-          <p:cNvPr id="6" name="Image 0" descr="/home/claude/f4/img/v2/usa_onechild.jpg">    </p:cNvPr>
+          <p:cNvPr id="3" name="Image 0" descr="/home/claude/f4/img/minesec_sheet.png">    </p:cNvPr>
           <p:cNvPicPr>
             <a:picLocks noChangeAspect="1"/>
           </p:cNvPicPr>
@@ -17621,8 +17747,8 @@
         </p:blipFill>
         <p:spPr>
           <a:xfrm>
-            <a:off x="6537960" y="2400897"/>
-            <a:ext cx="5470855" cy="3034615"/>
+            <a:off x="0" y="658368"/>
+            <a:ext cx="5120640" cy="5833872"/>
           </a:xfrm>
           <a:prstGeom prst="rect">
             <a:avLst/>
@@ -17631,14 +17757,14 @@
       </p:pic>
       <p:sp>
         <p:nvSpPr>
-          <p:cNvPr id="7" name="Text 4"/>
+          <p:cNvPr id="4" name="Text 1"/>
           <p:cNvSpPr/>
           <p:nvPr/>
         </p:nvSpPr>
         <p:spPr>
           <a:xfrm>
-            <a:off x="6537960" y="6089904"/>
-            <a:ext cx="5470855" cy="347472"/>
+            <a:off x="5349240" y="1005840"/>
+            <a:ext cx="6522415" cy="731520"/>
           </a:xfrm>
           <a:prstGeom prst="rect">
             <a:avLst/>
@@ -17647,24 +17773,124 @@
           <a:ln/>
         </p:spPr>
         <p:txBody>
-          <a:bodyPr wrap="square" lIns="0" tIns="0" rIns="0" bIns="0" rtlCol="0" anchor="ctr"/>
+          <a:bodyPr wrap="square" lIns="0" tIns="0" rIns="0" bIns="0" rtlCol="0" anchor="ctr">
+            <a:normAutofit/>
+          </a:bodyPr>
           <a:lstStyle/>
           <a:p>
             <a:pPr algn="ctr" indent="0" marL="0">
               <a:buNone/>
             </a:pPr>
             <a:r>
-              <a:rPr lang="en-US" sz="1600" i="1" dirty="0">
-                <a:solidFill>
-                  <a:srgbClr val="555555"/>
+              <a:rPr lang="en-US" sz="3600" b="1" dirty="0">
+                <a:solidFill>
+                  <a:srgbClr val="990011"/>
                 </a:solidFill>
                 <a:latin typeface="Times New Roman" pitchFamily="34" charset="0"/>
                 <a:ea typeface="Times New Roman" pitchFamily="34" charset="-122"/>
                 <a:cs typeface="Times New Roman" pitchFamily="34" charset="-120"/>
               </a:rPr>
-              <a:t>Illustration: the one-child policy</a:t>
-            </a:r>
-            <a:endParaRPr lang="en-US" sz="1600" dirty="0"/>
+              <a:t>1. The Factors of Population Growth</a:t>
+            </a:r>
+            <a:endParaRPr lang="en-US" sz="3600" dirty="0"/>
+          </a:p>
+        </p:txBody>
+      </p:sp>
+      <p:sp>
+        <p:nvSpPr>
+          <p:cNvPr id="5" name="Text 2"/>
+          <p:cNvSpPr/>
+          <p:nvPr/>
+        </p:nvSpPr>
+        <p:spPr>
+          <a:xfrm>
+            <a:off x="5349240" y="1737360"/>
+            <a:ext cx="6522415" cy="457200"/>
+          </a:xfrm>
+          <a:prstGeom prst="rect">
+            <a:avLst/>
+          </a:prstGeom>
+          <a:noFill/>
+          <a:ln/>
+        </p:spPr>
+        <p:txBody>
+          <a:bodyPr wrap="square" lIns="0" tIns="0" rIns="0" bIns="0" rtlCol="0" anchor="ctr"/>
+          <a:lstStyle/>
+          <a:p>
+            <a:pPr algn="l" indent="0" marL="0">
+              <a:buNone/>
+            </a:pPr>
+            <a:r>
+              <a:rPr lang="en-US" sz="2200" b="1" dirty="0">
+                <a:solidFill>
+                  <a:srgbClr val="990011"/>
+                </a:solidFill>
+                <a:latin typeface="Times New Roman" pitchFamily="34" charset="0"/>
+                <a:ea typeface="Times New Roman" pitchFamily="34" charset="-122"/>
+                <a:cs typeface="Times New Roman" pitchFamily="34" charset="-120"/>
+              </a:rPr>
+              <a:t>B) Non-Demographic Factors: Social and Natural</a:t>
+            </a:r>
+            <a:endParaRPr lang="en-US" sz="2200" dirty="0"/>
+          </a:p>
+        </p:txBody>
+      </p:sp>
+      <p:sp>
+        <p:nvSpPr>
+          <p:cNvPr id="6" name="Text 3"/>
+          <p:cNvSpPr/>
+          <p:nvPr/>
+        </p:nvSpPr>
+        <p:spPr>
+          <a:xfrm>
+            <a:off x="5349240" y="2240280"/>
+            <a:ext cx="6522415" cy="4206240"/>
+          </a:xfrm>
+          <a:prstGeom prst="rect">
+            <a:avLst/>
+          </a:prstGeom>
+          <a:noFill/>
+          <a:ln/>
+        </p:spPr>
+        <p:txBody>
+          <a:bodyPr wrap="square" lIns="0" tIns="0" rIns="0" bIns="0" rtlCol="0" anchor="t"/>
+          <a:lstStyle/>
+          <a:p>
+            <a:pPr algn="l" indent="0" marL="0">
+              <a:spcAft>
+                <a:spcPts val="800"/>
+              </a:spcAft>
+              <a:buNone/>
+            </a:pPr>
+            <a:r>
+              <a:rPr lang="en-US" sz="4000" b="1" dirty="0">
+                <a:solidFill>
+                  <a:srgbClr val="111111"/>
+                </a:solidFill>
+                <a:latin typeface="Times New Roman" pitchFamily="34" charset="0"/>
+                <a:ea typeface="Times New Roman" pitchFamily="34" charset="-122"/>
+                <a:cs typeface="Times New Roman" pitchFamily="34" charset="-120"/>
+              </a:rPr>
+              <a:t>Natural disasters: </a:t>
+            </a:r>
+            <a:pPr algn="l" indent="0" marL="0">
+              <a:spcAft>
+                <a:spcPts val="800"/>
+              </a:spcAft>
+              <a:buNone/>
+            </a:pPr>
+            <a:r>
+              <a:rPr lang="en-US" sz="4000" dirty="0">
+                <a:solidFill>
+                  <a:srgbClr val="111111"/>
+                </a:solidFill>
+                <a:latin typeface="Times New Roman" pitchFamily="34" charset="0"/>
+                <a:ea typeface="Times New Roman" pitchFamily="34" charset="-122"/>
+                <a:cs typeface="Times New Roman" pitchFamily="34" charset="-120"/>
+              </a:rPr>
+              <a:t>Floods of the Benue or droughts in the Sahel cause deaths and displacement. Famines that follow droughts also raise death rates.</a:t>
+            </a:r>
+            <a:endParaRPr lang="en-US" sz="4000" dirty="0"/>
           </a:p>
         </p:txBody>
       </p:sp>
@@ -17797,7 +18023,7 @@
         <p:spPr>
           <a:xfrm>
             <a:off x="0" y="658368"/>
-            <a:ext cx="3840480" cy="5833872"/>
+            <a:ext cx="5120640" cy="5833872"/>
           </a:xfrm>
           <a:prstGeom prst="rect">
             <a:avLst/>
@@ -17812,8 +18038,8 @@
         </p:nvSpPr>
         <p:spPr>
           <a:xfrm>
-            <a:off x="4069080" y="1005840"/>
-            <a:ext cx="7802575" cy="731520"/>
+            <a:off x="5349240" y="1005840"/>
+            <a:ext cx="6522415" cy="731520"/>
           </a:xfrm>
           <a:prstGeom prst="rect">
             <a:avLst/>
@@ -17853,8 +18079,8 @@
         </p:nvSpPr>
         <p:spPr>
           <a:xfrm>
-            <a:off x="4069080" y="1737360"/>
-            <a:ext cx="7802575" cy="457200"/>
+            <a:off x="5349240" y="1737360"/>
+            <a:ext cx="6522415" cy="457200"/>
           </a:xfrm>
           <a:prstGeom prst="rect">
             <a:avLst/>
@@ -17870,7 +18096,7 @@
               <a:buNone/>
             </a:pPr>
             <a:r>
-              <a:rPr lang="en-US" sz="3200" b="1" dirty="0">
+              <a:rPr lang="en-US" sz="2200" b="1" dirty="0">
                 <a:solidFill>
                   <a:srgbClr val="990011"/>
                 </a:solidFill>
@@ -17878,9 +18104,9 @@
                 <a:ea typeface="Times New Roman" pitchFamily="34" charset="-122"/>
                 <a:cs typeface="Times New Roman" pitchFamily="34" charset="-120"/>
               </a:rPr>
-              <a:t>B) Non-Demographic Factors</a:t>
-            </a:r>
-            <a:endParaRPr lang="en-US" sz="3200" dirty="0"/>
+              <a:t>B) Non-Demographic Factors: Social and Natural</a:t>
+            </a:r>
+            <a:endParaRPr lang="en-US" sz="2200" dirty="0"/>
           </a:p>
         </p:txBody>
       </p:sp>
@@ -17892,8 +18118,8 @@
         </p:nvSpPr>
         <p:spPr>
           <a:xfrm>
-            <a:off x="4069080" y="2240280"/>
-            <a:ext cx="7802575" cy="4206240"/>
+            <a:off x="5349240" y="2240280"/>
+            <a:ext cx="6522415" cy="4206240"/>
           </a:xfrm>
           <a:prstGeom prst="rect">
             <a:avLst/>
@@ -17920,7 +18146,7 @@
                 <a:ea typeface="Times New Roman" pitchFamily="34" charset="-122"/>
                 <a:cs typeface="Times New Roman" pitchFamily="34" charset="-120"/>
               </a:rPr>
-              <a:t>Economic conditions: </a:t>
+              <a:t>Epidemics: </a:t>
             </a:r>
             <a:pPr algn="l" indent="0" marL="0">
               <a:spcAft>
@@ -17937,7 +18163,7 @@
                 <a:ea typeface="Times New Roman" pitchFamily="34" charset="-122"/>
                 <a:cs typeface="Times New Roman" pitchFamily="34" charset="-120"/>
               </a:rPr>
-              <a:t>In poor countries, better food and income first reduce deaths and increase growth. In rich countries, economic crises make people delay marriage and births.</a:t>
+              <a:t>Epidemics such as HIV/AIDS, Ebola and COVID-19 increase death rates. HIV/AIDS kills mainly young adults, which also reduces births.</a:t>
             </a:r>
             <a:endParaRPr lang="en-US" sz="4000" dirty="0"/>
           </a:p>
@@ -18055,129 +18281,9 @@
           </a:p>
         </p:txBody>
       </p:sp>
-      <p:sp>
-        <p:nvSpPr>
-          <p:cNvPr id="3" name="Text 1"/>
-          <p:cNvSpPr/>
-          <p:nvPr/>
-        </p:nvSpPr>
-        <p:spPr>
-          <a:xfrm>
-            <a:off x="365760" y="1005840"/>
-            <a:ext cx="11460175" cy="731520"/>
-          </a:xfrm>
-          <a:prstGeom prst="rect">
-            <a:avLst/>
-          </a:prstGeom>
-          <a:noFill/>
-          <a:ln/>
-        </p:spPr>
-        <p:txBody>
-          <a:bodyPr wrap="square" lIns="0" tIns="0" rIns="0" bIns="0" rtlCol="0" anchor="ctr">
-            <a:normAutofit/>
-          </a:bodyPr>
-          <a:lstStyle/>
-          <a:p>
-            <a:pPr algn="ctr" indent="0" marL="0">
-              <a:buNone/>
-            </a:pPr>
-            <a:r>
-              <a:rPr lang="en-US" sz="3600" b="1" dirty="0">
-                <a:solidFill>
-                  <a:srgbClr val="990011"/>
-                </a:solidFill>
-                <a:latin typeface="Times New Roman" pitchFamily="34" charset="0"/>
-                <a:ea typeface="Times New Roman" pitchFamily="34" charset="-122"/>
-                <a:cs typeface="Times New Roman" pitchFamily="34" charset="-120"/>
-              </a:rPr>
-              <a:t>2. How the Factors Influence Growth in Various Regions</a:t>
-            </a:r>
-            <a:endParaRPr lang="en-US" sz="3600" dirty="0"/>
-          </a:p>
-        </p:txBody>
-      </p:sp>
-      <p:sp>
-        <p:nvSpPr>
-          <p:cNvPr id="4" name="Text 2"/>
-          <p:cNvSpPr/>
-          <p:nvPr/>
-        </p:nvSpPr>
-        <p:spPr>
-          <a:xfrm>
-            <a:off x="365760" y="1783080"/>
-            <a:ext cx="6035040" cy="4617720"/>
-          </a:xfrm>
-          <a:prstGeom prst="rect">
-            <a:avLst/>
-          </a:prstGeom>
-          <a:noFill/>
-          <a:ln/>
-        </p:spPr>
-        <p:txBody>
-          <a:bodyPr wrap="square" lIns="0" tIns="0" rIns="0" bIns="0" rtlCol="0" anchor="t"/>
-          <a:lstStyle/>
-          <a:p>
-            <a:pPr algn="l" indent="0" marL="0">
-              <a:spcAft>
-                <a:spcPts val="800"/>
-              </a:spcAft>
-              <a:buNone/>
-            </a:pPr>
-            <a:r>
-              <a:rPr lang="en-US" sz="3000" i="1" dirty="0">
-                <a:solidFill>
-                  <a:srgbClr val="111111"/>
-                </a:solidFill>
-                <a:latin typeface="Times New Roman" pitchFamily="34" charset="0"/>
-                <a:ea typeface="Times New Roman" pitchFamily="34" charset="-122"/>
-                <a:cs typeface="Times New Roman" pitchFamily="34" charset="-120"/>
-              </a:rPr>
-              <a:t>The factors produce the following growth patterns in different regions:</a:t>
-            </a:r>
-            <a:endParaRPr lang="en-US" sz="3000" dirty="0"/>
-          </a:p>
-          <a:p>
-            <a:pPr algn="l" indent="0" marL="0">
-              <a:spcAft>
-                <a:spcPts val="800"/>
-              </a:spcAft>
-              <a:buNone/>
-            </a:pPr>
-            <a:r>
-              <a:rPr lang="en-US" sz="3000" b="1" dirty="0">
-                <a:solidFill>
-                  <a:srgbClr val="111111"/>
-                </a:solidFill>
-                <a:latin typeface="Times New Roman" pitchFamily="34" charset="0"/>
-                <a:ea typeface="Times New Roman" pitchFamily="34" charset="-122"/>
-                <a:cs typeface="Times New Roman" pitchFamily="34" charset="-120"/>
-              </a:rPr>
-              <a:t>Developing regions: </a:t>
-            </a:r>
-            <a:pPr algn="l" indent="0" marL="0">
-              <a:spcAft>
-                <a:spcPts val="800"/>
-              </a:spcAft>
-              <a:buNone/>
-            </a:pPr>
-            <a:r>
-              <a:rPr lang="en-US" sz="3000" dirty="0">
-                <a:solidFill>
-                  <a:srgbClr val="111111"/>
-                </a:solidFill>
-                <a:latin typeface="Times New Roman" pitchFamily="34" charset="0"/>
-                <a:ea typeface="Times New Roman" pitchFamily="34" charset="-122"/>
-                <a:cs typeface="Times New Roman" pitchFamily="34" charset="-120"/>
-              </a:rPr>
-              <a:t>In sub-Saharan Africa, high birth rates and falling death rates give rapid growth and a youthful population. Many young people also migrate from villages to towns.</a:t>
-            </a:r>
-            <a:endParaRPr lang="en-US" sz="3000" dirty="0"/>
-          </a:p>
-        </p:txBody>
-      </p:sp>
       <p:pic>
         <p:nvPicPr>
-          <p:cNvPr id="5" name="Image 0" descr="/home/claude/f4/img/v2/pop2_region_growth.png">    </p:cNvPr>
+          <p:cNvPr id="3" name="Image 0" descr="/home/claude/f4/img/minesec_sheet.png">    </p:cNvPr>
           <p:cNvPicPr>
             <a:picLocks noChangeAspect="1"/>
           </p:cNvPicPr>
@@ -18191,8 +18297,8 @@
         </p:blipFill>
         <p:spPr>
           <a:xfrm>
-            <a:off x="6537960" y="2849678"/>
-            <a:ext cx="5470855" cy="2137053"/>
+            <a:off x="0" y="658368"/>
+            <a:ext cx="1463040" cy="5833872"/>
           </a:xfrm>
           <a:prstGeom prst="rect">
             <a:avLst/>
@@ -18201,14 +18307,14 @@
       </p:pic>
       <p:sp>
         <p:nvSpPr>
-          <p:cNvPr id="6" name="Text 3"/>
+          <p:cNvPr id="4" name="Text 1"/>
           <p:cNvSpPr/>
           <p:nvPr/>
         </p:nvSpPr>
         <p:spPr>
           <a:xfrm>
-            <a:off x="6537960" y="6089904"/>
-            <a:ext cx="5470855" cy="347472"/>
+            <a:off x="1691640" y="1005840"/>
+            <a:ext cx="10180015" cy="731520"/>
           </a:xfrm>
           <a:prstGeom prst="rect">
             <a:avLst/>
@@ -18217,24 +18323,144 @@
           <a:ln/>
         </p:spPr>
         <p:txBody>
-          <a:bodyPr wrap="square" lIns="0" tIns="0" rIns="0" bIns="0" rtlCol="0" anchor="ctr"/>
+          <a:bodyPr wrap="square" lIns="0" tIns="0" rIns="0" bIns="0" rtlCol="0" anchor="ctr">
+            <a:normAutofit/>
+          </a:bodyPr>
           <a:lstStyle/>
           <a:p>
             <a:pPr algn="ctr" indent="0" marL="0">
               <a:buNone/>
             </a:pPr>
             <a:r>
-              <a:rPr lang="en-US" sz="1600" i="1" dirty="0">
-                <a:solidFill>
-                  <a:srgbClr val="555555"/>
+              <a:rPr lang="en-US" sz="3600" b="1" dirty="0">
+                <a:solidFill>
+                  <a:srgbClr val="990011"/>
                 </a:solidFill>
                 <a:latin typeface="Times New Roman" pitchFamily="34" charset="0"/>
                 <a:ea typeface="Times New Roman" pitchFamily="34" charset="-122"/>
                 <a:cs typeface="Times New Roman" pitchFamily="34" charset="-120"/>
               </a:rPr>
-              <a:t>Illustration: growth by region</a:t>
-            </a:r>
-            <a:endParaRPr lang="en-US" sz="1600" dirty="0"/>
+              <a:t>1. The Factors of Population Growth</a:t>
+            </a:r>
+            <a:endParaRPr lang="en-US" sz="3600" dirty="0"/>
+          </a:p>
+        </p:txBody>
+      </p:sp>
+      <p:sp>
+        <p:nvSpPr>
+          <p:cNvPr id="5" name="Text 2"/>
+          <p:cNvSpPr/>
+          <p:nvPr/>
+        </p:nvSpPr>
+        <p:spPr>
+          <a:xfrm>
+            <a:off x="1691640" y="1737360"/>
+            <a:ext cx="10180015" cy="457200"/>
+          </a:xfrm>
+          <a:prstGeom prst="rect">
+            <a:avLst/>
+          </a:prstGeom>
+          <a:noFill/>
+          <a:ln/>
+        </p:spPr>
+        <p:txBody>
+          <a:bodyPr wrap="square" lIns="0" tIns="0" rIns="0" bIns="0" rtlCol="0" anchor="ctr"/>
+          <a:lstStyle/>
+          <a:p>
+            <a:pPr algn="l" indent="0" marL="0">
+              <a:buNone/>
+            </a:pPr>
+            <a:r>
+              <a:rPr lang="en-US" sz="3200" b="1" dirty="0">
+                <a:solidFill>
+                  <a:srgbClr val="990011"/>
+                </a:solidFill>
+                <a:latin typeface="Times New Roman" pitchFamily="34" charset="0"/>
+                <a:ea typeface="Times New Roman" pitchFamily="34" charset="-122"/>
+                <a:cs typeface="Times New Roman" pitchFamily="34" charset="-120"/>
+              </a:rPr>
+              <a:t>C) Non-Demographic Factors: Economic and Political</a:t>
+            </a:r>
+            <a:endParaRPr lang="en-US" sz="3200" dirty="0"/>
+          </a:p>
+        </p:txBody>
+      </p:sp>
+      <p:sp>
+        <p:nvSpPr>
+          <p:cNvPr id="6" name="Text 3"/>
+          <p:cNvSpPr/>
+          <p:nvPr/>
+        </p:nvSpPr>
+        <p:spPr>
+          <a:xfrm>
+            <a:off x="1691640" y="2240280"/>
+            <a:ext cx="10180015" cy="4206240"/>
+          </a:xfrm>
+          <a:prstGeom prst="rect">
+            <a:avLst/>
+          </a:prstGeom>
+          <a:noFill/>
+          <a:ln/>
+        </p:spPr>
+        <p:txBody>
+          <a:bodyPr wrap="square" lIns="0" tIns="0" rIns="0" bIns="0" rtlCol="0" anchor="t"/>
+          <a:lstStyle/>
+          <a:p>
+            <a:pPr algn="l" indent="0" marL="0">
+              <a:spcAft>
+                <a:spcPts val="800"/>
+              </a:spcAft>
+              <a:buNone/>
+            </a:pPr>
+            <a:r>
+              <a:rPr lang="en-US" sz="4000" i="1" dirty="0">
+                <a:solidFill>
+                  <a:srgbClr val="111111"/>
+                </a:solidFill>
+                <a:latin typeface="Times New Roman" pitchFamily="34" charset="0"/>
+                <a:ea typeface="Times New Roman" pitchFamily="34" charset="-122"/>
+                <a:cs typeface="Times New Roman" pitchFamily="34" charset="-120"/>
+              </a:rPr>
+              <a:t>Population growth is also influenced by the following economic and political factors:</a:t>
+            </a:r>
+            <a:endParaRPr lang="en-US" sz="4000" dirty="0"/>
+          </a:p>
+          <a:p>
+            <a:pPr algn="l" indent="0" marL="0">
+              <a:spcAft>
+                <a:spcPts val="800"/>
+              </a:spcAft>
+              <a:buNone/>
+            </a:pPr>
+            <a:r>
+              <a:rPr lang="en-US" sz="4000" b="1" dirty="0">
+                <a:solidFill>
+                  <a:srgbClr val="111111"/>
+                </a:solidFill>
+                <a:latin typeface="Times New Roman" pitchFamily="34" charset="0"/>
+                <a:ea typeface="Times New Roman" pitchFamily="34" charset="-122"/>
+                <a:cs typeface="Times New Roman" pitchFamily="34" charset="-120"/>
+              </a:rPr>
+              <a:t>Medical services: </a:t>
+            </a:r>
+            <a:pPr algn="l" indent="0" marL="0">
+              <a:spcAft>
+                <a:spcPts val="800"/>
+              </a:spcAft>
+              <a:buNone/>
+            </a:pPr>
+            <a:r>
+              <a:rPr lang="en-US" sz="4000" dirty="0">
+                <a:solidFill>
+                  <a:srgbClr val="111111"/>
+                </a:solidFill>
+                <a:latin typeface="Times New Roman" pitchFamily="34" charset="0"/>
+                <a:ea typeface="Times New Roman" pitchFamily="34" charset="-122"/>
+                <a:cs typeface="Times New Roman" pitchFamily="34" charset="-120"/>
+              </a:rPr>
+              <a:t>Hospitals, clinics and vaccines lower death rates. They raise life expectancy and therefore increase growth.</a:t>
+            </a:r>
+            <a:endParaRPr lang="en-US" sz="4000" dirty="0"/>
           </a:p>
         </p:txBody>
       </p:sp>
@@ -18350,9 +18576,150 @@
           </a:p>
         </p:txBody>
       </p:sp>
+      <p:sp>
+        <p:nvSpPr>
+          <p:cNvPr id="3" name="Text 1"/>
+          <p:cNvSpPr/>
+          <p:nvPr/>
+        </p:nvSpPr>
+        <p:spPr>
+          <a:xfrm>
+            <a:off x="365760" y="1005840"/>
+            <a:ext cx="11460175" cy="731520"/>
+          </a:xfrm>
+          <a:prstGeom prst="rect">
+            <a:avLst/>
+          </a:prstGeom>
+          <a:noFill/>
+          <a:ln/>
+        </p:spPr>
+        <p:txBody>
+          <a:bodyPr wrap="square" lIns="0" tIns="0" rIns="0" bIns="0" rtlCol="0" anchor="ctr">
+            <a:normAutofit/>
+          </a:bodyPr>
+          <a:lstStyle/>
+          <a:p>
+            <a:pPr algn="ctr" indent="0" marL="0">
+              <a:buNone/>
+            </a:pPr>
+            <a:r>
+              <a:rPr lang="en-US" sz="3600" b="1" dirty="0">
+                <a:solidFill>
+                  <a:srgbClr val="990011"/>
+                </a:solidFill>
+                <a:latin typeface="Times New Roman" pitchFamily="34" charset="0"/>
+                <a:ea typeface="Times New Roman" pitchFamily="34" charset="-122"/>
+                <a:cs typeface="Times New Roman" pitchFamily="34" charset="-120"/>
+              </a:rPr>
+              <a:t>1. The Factors of Population Growth</a:t>
+            </a:r>
+            <a:endParaRPr lang="en-US" sz="3600" dirty="0"/>
+          </a:p>
+        </p:txBody>
+      </p:sp>
+      <p:sp>
+        <p:nvSpPr>
+          <p:cNvPr id="4" name="Text 2"/>
+          <p:cNvSpPr/>
+          <p:nvPr/>
+        </p:nvSpPr>
+        <p:spPr>
+          <a:xfrm>
+            <a:off x="365760" y="1737360"/>
+            <a:ext cx="6035040" cy="457200"/>
+          </a:xfrm>
+          <a:prstGeom prst="rect">
+            <a:avLst/>
+          </a:prstGeom>
+          <a:noFill/>
+          <a:ln/>
+        </p:spPr>
+        <p:txBody>
+          <a:bodyPr wrap="square" lIns="0" tIns="0" rIns="0" bIns="0" rtlCol="0" anchor="ctr">
+            <a:normAutofit/>
+          </a:bodyPr>
+          <a:lstStyle/>
+          <a:p>
+            <a:pPr algn="l" indent="0" marL="0">
+              <a:buNone/>
+            </a:pPr>
+            <a:r>
+              <a:rPr lang="en-US" sz="3000" b="1" dirty="0">
+                <a:solidFill>
+                  <a:srgbClr val="990011"/>
+                </a:solidFill>
+                <a:latin typeface="Times New Roman" pitchFamily="34" charset="0"/>
+                <a:ea typeface="Times New Roman" pitchFamily="34" charset="-122"/>
+                <a:cs typeface="Times New Roman" pitchFamily="34" charset="-120"/>
+              </a:rPr>
+              <a:t>C) Non-Demographic Factors: Economic and Political</a:t>
+            </a:r>
+            <a:endParaRPr lang="en-US" sz="3000" dirty="0"/>
+          </a:p>
+        </p:txBody>
+      </p:sp>
+      <p:sp>
+        <p:nvSpPr>
+          <p:cNvPr id="5" name="Text 3"/>
+          <p:cNvSpPr/>
+          <p:nvPr/>
+        </p:nvSpPr>
+        <p:spPr>
+          <a:xfrm>
+            <a:off x="365760" y="2240280"/>
+            <a:ext cx="6035040" cy="4160520"/>
+          </a:xfrm>
+          <a:prstGeom prst="rect">
+            <a:avLst/>
+          </a:prstGeom>
+          <a:noFill/>
+          <a:ln/>
+        </p:spPr>
+        <p:txBody>
+          <a:bodyPr wrap="square" lIns="0" tIns="0" rIns="0" bIns="0" rtlCol="0" anchor="t"/>
+          <a:lstStyle/>
+          <a:p>
+            <a:pPr algn="l" indent="0" marL="0">
+              <a:spcAft>
+                <a:spcPts val="800"/>
+              </a:spcAft>
+              <a:buNone/>
+            </a:pPr>
+            <a:r>
+              <a:rPr lang="en-US" sz="3600" b="1" dirty="0">
+                <a:solidFill>
+                  <a:srgbClr val="111111"/>
+                </a:solidFill>
+                <a:latin typeface="Times New Roman" pitchFamily="34" charset="0"/>
+                <a:ea typeface="Times New Roman" pitchFamily="34" charset="-122"/>
+                <a:cs typeface="Times New Roman" pitchFamily="34" charset="-120"/>
+              </a:rPr>
+              <a:t>Government policies: </a:t>
+            </a:r>
+            <a:pPr algn="l" indent="0" marL="0">
+              <a:spcAft>
+                <a:spcPts val="800"/>
+              </a:spcAft>
+              <a:buNone/>
+            </a:pPr>
+            <a:r>
+              <a:rPr lang="en-US" sz="3600" dirty="0">
+                <a:solidFill>
+                  <a:srgbClr val="111111"/>
+                </a:solidFill>
+                <a:latin typeface="Times New Roman" pitchFamily="34" charset="0"/>
+                <a:ea typeface="Times New Roman" pitchFamily="34" charset="-122"/>
+                <a:cs typeface="Times New Roman" pitchFamily="34" charset="-120"/>
+              </a:rPr>
+              <a:t>Pro-natalist policies encourage births with allowances and leave. Anti-natalist policies, like the former one-child policy of China, limit them.</a:t>
+            </a:r>
+            <a:endParaRPr lang="en-US" sz="3600" dirty="0"/>
+          </a:p>
+        </p:txBody>
+      </p:sp>
       <p:pic>
         <p:nvPicPr>
-          <p:cNvPr id="3" name="Image 0" descr="/home/claude/f4/img/minesec_sheet.png">    </p:cNvPr>
+          <p:cNvPr id="6" name="Image 0" descr="/home/claude/f4/img/v2/usa_onechild.jpg">    </p:cNvPr>
           <p:cNvPicPr>
             <a:picLocks noChangeAspect="1"/>
           </p:cNvPicPr>
@@ -18366,8 +18733,8 @@
         </p:blipFill>
         <p:spPr>
           <a:xfrm>
-            <a:off x="0" y="658368"/>
-            <a:ext cx="3840480" cy="5833872"/>
+            <a:off x="6537960" y="2400897"/>
+            <a:ext cx="5470855" cy="3034615"/>
           </a:xfrm>
           <a:prstGeom prst="rect">
             <a:avLst/>
@@ -18376,14 +18743,14 @@
       </p:pic>
       <p:sp>
         <p:nvSpPr>
-          <p:cNvPr id="4" name="Text 1"/>
+          <p:cNvPr id="7" name="Text 4"/>
           <p:cNvSpPr/>
           <p:nvPr/>
         </p:nvSpPr>
         <p:spPr>
           <a:xfrm>
-            <a:off x="4069080" y="1005840"/>
-            <a:ext cx="7802575" cy="731520"/>
+            <a:off x="6537960" y="6089904"/>
+            <a:ext cx="5470855" cy="347472"/>
           </a:xfrm>
           <a:prstGeom prst="rect">
             <a:avLst/>
@@ -18392,85 +18759,24 @@
           <a:ln/>
         </p:spPr>
         <p:txBody>
-          <a:bodyPr wrap="square" lIns="0" tIns="0" rIns="0" bIns="0" rtlCol="0" anchor="ctr">
-            <a:normAutofit/>
-          </a:bodyPr>
+          <a:bodyPr wrap="square" lIns="0" tIns="0" rIns="0" bIns="0" rtlCol="0" anchor="ctr"/>
           <a:lstStyle/>
           <a:p>
             <a:pPr algn="ctr" indent="0" marL="0">
               <a:buNone/>
             </a:pPr>
             <a:r>
-              <a:rPr lang="en-US" sz="3600" b="1" dirty="0">
-                <a:solidFill>
-                  <a:srgbClr val="990011"/>
+              <a:rPr lang="en-US" sz="1600" i="1" dirty="0">
+                <a:solidFill>
+                  <a:srgbClr val="555555"/>
                 </a:solidFill>
                 <a:latin typeface="Times New Roman" pitchFamily="34" charset="0"/>
                 <a:ea typeface="Times New Roman" pitchFamily="34" charset="-122"/>
                 <a:cs typeface="Times New Roman" pitchFamily="34" charset="-120"/>
               </a:rPr>
-              <a:t>2. How the Factors Influence Growth in Various Regions</a:t>
-            </a:r>
-            <a:endParaRPr lang="en-US" sz="3600" dirty="0"/>
-          </a:p>
-        </p:txBody>
-      </p:sp>
-      <p:sp>
-        <p:nvSpPr>
-          <p:cNvPr id="5" name="Text 2"/>
-          <p:cNvSpPr/>
-          <p:nvPr/>
-        </p:nvSpPr>
-        <p:spPr>
-          <a:xfrm>
-            <a:off x="4069080" y="1783080"/>
-            <a:ext cx="7802575" cy="4663440"/>
-          </a:xfrm>
-          <a:prstGeom prst="rect">
-            <a:avLst/>
-          </a:prstGeom>
-          <a:noFill/>
-          <a:ln/>
-        </p:spPr>
-        <p:txBody>
-          <a:bodyPr wrap="square" lIns="0" tIns="0" rIns="0" bIns="0" rtlCol="0" anchor="t"/>
-          <a:lstStyle/>
-          <a:p>
-            <a:pPr algn="l" indent="0" marL="0">
-              <a:spcAft>
-                <a:spcPts val="800"/>
-              </a:spcAft>
-              <a:buNone/>
-            </a:pPr>
-            <a:r>
-              <a:rPr lang="en-US" sz="4000" b="1" dirty="0">
-                <a:solidFill>
-                  <a:srgbClr val="111111"/>
-                </a:solidFill>
-                <a:latin typeface="Times New Roman" pitchFamily="34" charset="0"/>
-                <a:ea typeface="Times New Roman" pitchFamily="34" charset="-122"/>
-                <a:cs typeface="Times New Roman" pitchFamily="34" charset="-120"/>
-              </a:rPr>
-              <a:t>Developed regions: </a:t>
-            </a:r>
-            <a:pPr algn="l" indent="0" marL="0">
-              <a:spcAft>
-                <a:spcPts val="800"/>
-              </a:spcAft>
-              <a:buNone/>
-            </a:pPr>
-            <a:r>
-              <a:rPr lang="en-US" sz="4000" dirty="0">
-                <a:solidFill>
-                  <a:srgbClr val="111111"/>
-                </a:solidFill>
-                <a:latin typeface="Times New Roman" pitchFamily="34" charset="0"/>
-                <a:ea typeface="Times New Roman" pitchFamily="34" charset="-122"/>
-                <a:cs typeface="Times New Roman" pitchFamily="34" charset="-120"/>
-              </a:rPr>
-              <a:t>In Western Europe and Japan, low birth and death rates give slow or negative growth and an ageing population. These countries need immigrants to fill labour shortages.</a:t>
-            </a:r>
-            <a:endParaRPr lang="en-US" sz="4000" dirty="0"/>
+              <a:t>Illustration: the one-child policy</a:t>
+            </a:r>
+            <a:endParaRPr lang="en-US" sz="1600" dirty="0"/>
           </a:p>
         </p:txBody>
       </p:sp>
@@ -18603,7 +18909,7 @@
         <p:spPr>
           <a:xfrm>
             <a:off x="0" y="658368"/>
-            <a:ext cx="5120640" cy="5833872"/>
+            <a:ext cx="3840480" cy="5833872"/>
           </a:xfrm>
           <a:prstGeom prst="rect">
             <a:avLst/>
@@ -18618,8 +18924,8 @@
         </p:nvSpPr>
         <p:spPr>
           <a:xfrm>
-            <a:off x="5349240" y="1005840"/>
-            <a:ext cx="6522415" cy="731520"/>
+            <a:off x="4069080" y="1005840"/>
+            <a:ext cx="7802575" cy="731520"/>
           </a:xfrm>
           <a:prstGeom prst="rect">
             <a:avLst/>
@@ -18645,7 +18951,7 @@
                 <a:ea typeface="Times New Roman" pitchFamily="34" charset="-122"/>
                 <a:cs typeface="Times New Roman" pitchFamily="34" charset="-120"/>
               </a:rPr>
-              <a:t>2. How the Factors Influence Growth in Various Regions</a:t>
+              <a:t>1. The Factors of Population Growth</a:t>
             </a:r>
             <a:endParaRPr lang="en-US" sz="3600" dirty="0"/>
           </a:p>
@@ -18659,8 +18965,47 @@
         </p:nvSpPr>
         <p:spPr>
           <a:xfrm>
-            <a:off x="5349240" y="1783080"/>
-            <a:ext cx="6522415" cy="4663440"/>
+            <a:off x="4069080" y="1737360"/>
+            <a:ext cx="7802575" cy="457200"/>
+          </a:xfrm>
+          <a:prstGeom prst="rect">
+            <a:avLst/>
+          </a:prstGeom>
+          <a:noFill/>
+          <a:ln/>
+        </p:spPr>
+        <p:txBody>
+          <a:bodyPr wrap="square" lIns="0" tIns="0" rIns="0" bIns="0" rtlCol="0" anchor="ctr"/>
+          <a:lstStyle/>
+          <a:p>
+            <a:pPr algn="l" indent="0" marL="0">
+              <a:buNone/>
+            </a:pPr>
+            <a:r>
+              <a:rPr lang="en-US" sz="2400" b="1" dirty="0">
+                <a:solidFill>
+                  <a:srgbClr val="990011"/>
+                </a:solidFill>
+                <a:latin typeface="Times New Roman" pitchFamily="34" charset="0"/>
+                <a:ea typeface="Times New Roman" pitchFamily="34" charset="-122"/>
+                <a:cs typeface="Times New Roman" pitchFamily="34" charset="-120"/>
+              </a:rPr>
+              <a:t>C) Non-Demographic Factors: Economic and Political</a:t>
+            </a:r>
+            <a:endParaRPr lang="en-US" sz="2400" dirty="0"/>
+          </a:p>
+        </p:txBody>
+      </p:sp>
+      <p:sp>
+        <p:nvSpPr>
+          <p:cNvPr id="6" name="Text 3"/>
+          <p:cNvSpPr/>
+          <p:nvPr/>
+        </p:nvSpPr>
+        <p:spPr>
+          <a:xfrm>
+            <a:off x="4069080" y="2240280"/>
+            <a:ext cx="7802575" cy="4206240"/>
           </a:xfrm>
           <a:prstGeom prst="rect">
             <a:avLst/>
@@ -18687,7 +19032,7 @@
                 <a:ea typeface="Times New Roman" pitchFamily="34" charset="-122"/>
                 <a:cs typeface="Times New Roman" pitchFamily="34" charset="-120"/>
               </a:rPr>
-              <a:t>Emerging economies: </a:t>
+              <a:t>Economic conditions: </a:t>
             </a:r>
             <a:pPr algn="l" indent="0" marL="0">
               <a:spcAft>
@@ -18704,7 +19049,7 @@
                 <a:ea typeface="Times New Roman" pitchFamily="34" charset="-122"/>
                 <a:cs typeface="Times New Roman" pitchFamily="34" charset="-120"/>
               </a:rPr>
-              <a:t>Brazil and Mexico have falling births and low deaths, so their growth is moderate. Their large workforce can bring a demographic dividend.</a:t>
+              <a:t>In poor countries, better food and income first reduce deaths and increase growth. In rich countries, economic crises make people delay marriage and births.</a:t>
             </a:r>
             <a:endParaRPr lang="en-US" sz="4000" dirty="0"/>
           </a:p>
@@ -19041,9 +19386,129 @@
           </a:p>
         </p:txBody>
       </p:sp>
+      <p:sp>
+        <p:nvSpPr>
+          <p:cNvPr id="3" name="Text 1"/>
+          <p:cNvSpPr/>
+          <p:nvPr/>
+        </p:nvSpPr>
+        <p:spPr>
+          <a:xfrm>
+            <a:off x="365760" y="1005840"/>
+            <a:ext cx="11460175" cy="731520"/>
+          </a:xfrm>
+          <a:prstGeom prst="rect">
+            <a:avLst/>
+          </a:prstGeom>
+          <a:noFill/>
+          <a:ln/>
+        </p:spPr>
+        <p:txBody>
+          <a:bodyPr wrap="square" lIns="0" tIns="0" rIns="0" bIns="0" rtlCol="0" anchor="ctr">
+            <a:normAutofit/>
+          </a:bodyPr>
+          <a:lstStyle/>
+          <a:p>
+            <a:pPr algn="ctr" indent="0" marL="0">
+              <a:buNone/>
+            </a:pPr>
+            <a:r>
+              <a:rPr lang="en-US" sz="3600" b="1" dirty="0">
+                <a:solidFill>
+                  <a:srgbClr val="990011"/>
+                </a:solidFill>
+                <a:latin typeface="Times New Roman" pitchFamily="34" charset="0"/>
+                <a:ea typeface="Times New Roman" pitchFamily="34" charset="-122"/>
+                <a:cs typeface="Times New Roman" pitchFamily="34" charset="-120"/>
+              </a:rPr>
+              <a:t>2. How the Factors Influence Growth in Various Regions</a:t>
+            </a:r>
+            <a:endParaRPr lang="en-US" sz="3600" dirty="0"/>
+          </a:p>
+        </p:txBody>
+      </p:sp>
+      <p:sp>
+        <p:nvSpPr>
+          <p:cNvPr id="4" name="Text 2"/>
+          <p:cNvSpPr/>
+          <p:nvPr/>
+        </p:nvSpPr>
+        <p:spPr>
+          <a:xfrm>
+            <a:off x="365760" y="1783080"/>
+            <a:ext cx="6035040" cy="4617720"/>
+          </a:xfrm>
+          <a:prstGeom prst="rect">
+            <a:avLst/>
+          </a:prstGeom>
+          <a:noFill/>
+          <a:ln/>
+        </p:spPr>
+        <p:txBody>
+          <a:bodyPr wrap="square" lIns="0" tIns="0" rIns="0" bIns="0" rtlCol="0" anchor="t"/>
+          <a:lstStyle/>
+          <a:p>
+            <a:pPr algn="l" indent="0" marL="0">
+              <a:spcAft>
+                <a:spcPts val="800"/>
+              </a:spcAft>
+              <a:buNone/>
+            </a:pPr>
+            <a:r>
+              <a:rPr lang="en-US" sz="3000" i="1" dirty="0">
+                <a:solidFill>
+                  <a:srgbClr val="111111"/>
+                </a:solidFill>
+                <a:latin typeface="Times New Roman" pitchFamily="34" charset="0"/>
+                <a:ea typeface="Times New Roman" pitchFamily="34" charset="-122"/>
+                <a:cs typeface="Times New Roman" pitchFamily="34" charset="-120"/>
+              </a:rPr>
+              <a:t>The factors produce the following growth patterns in different regions:</a:t>
+            </a:r>
+            <a:endParaRPr lang="en-US" sz="3000" dirty="0"/>
+          </a:p>
+          <a:p>
+            <a:pPr algn="l" indent="0" marL="0">
+              <a:spcAft>
+                <a:spcPts val="800"/>
+              </a:spcAft>
+              <a:buNone/>
+            </a:pPr>
+            <a:r>
+              <a:rPr lang="en-US" sz="3000" b="1" dirty="0">
+                <a:solidFill>
+                  <a:srgbClr val="111111"/>
+                </a:solidFill>
+                <a:latin typeface="Times New Roman" pitchFamily="34" charset="0"/>
+                <a:ea typeface="Times New Roman" pitchFamily="34" charset="-122"/>
+                <a:cs typeface="Times New Roman" pitchFamily="34" charset="-120"/>
+              </a:rPr>
+              <a:t>Developing regions: </a:t>
+            </a:r>
+            <a:pPr algn="l" indent="0" marL="0">
+              <a:spcAft>
+                <a:spcPts val="800"/>
+              </a:spcAft>
+              <a:buNone/>
+            </a:pPr>
+            <a:r>
+              <a:rPr lang="en-US" sz="3000" dirty="0">
+                <a:solidFill>
+                  <a:srgbClr val="111111"/>
+                </a:solidFill>
+                <a:latin typeface="Times New Roman" pitchFamily="34" charset="0"/>
+                <a:ea typeface="Times New Roman" pitchFamily="34" charset="-122"/>
+                <a:cs typeface="Times New Roman" pitchFamily="34" charset="-120"/>
+              </a:rPr>
+              <a:t>In sub-Saharan Africa, high birth rates and falling death rates give rapid growth and a youthful population. Many young people also migrate from villages to towns.</a:t>
+            </a:r>
+            <a:endParaRPr lang="en-US" sz="3000" dirty="0"/>
+          </a:p>
+        </p:txBody>
+      </p:sp>
       <p:pic>
         <p:nvPicPr>
-          <p:cNvPr id="3" name="Image 0" descr="/home/claude/f4/img/minesec_sheet.png">    </p:cNvPr>
+          <p:cNvPr id="5" name="Image 0" descr="/home/claude/f4/img/v2/pop2_region_growth.png">    </p:cNvPr>
           <p:cNvPicPr>
             <a:picLocks noChangeAspect="1"/>
           </p:cNvPicPr>
@@ -19057,8 +19522,8 @@
         </p:blipFill>
         <p:spPr>
           <a:xfrm>
-            <a:off x="0" y="658368"/>
-            <a:ext cx="5120640" cy="5833872"/>
+            <a:off x="6537960" y="2849678"/>
+            <a:ext cx="5470855" cy="2137053"/>
           </a:xfrm>
           <a:prstGeom prst="rect">
             <a:avLst/>
@@ -19067,14 +19532,14 @@
       </p:pic>
       <p:sp>
         <p:nvSpPr>
-          <p:cNvPr id="4" name="Text 1"/>
+          <p:cNvPr id="6" name="Text 3"/>
           <p:cNvSpPr/>
           <p:nvPr/>
         </p:nvSpPr>
         <p:spPr>
           <a:xfrm>
-            <a:off x="5349240" y="1005840"/>
-            <a:ext cx="6522415" cy="731520"/>
+            <a:off x="6537960" y="6089904"/>
+            <a:ext cx="5470855" cy="347472"/>
           </a:xfrm>
           <a:prstGeom prst="rect">
             <a:avLst/>
@@ -19083,85 +19548,24 @@
           <a:ln/>
         </p:spPr>
         <p:txBody>
-          <a:bodyPr wrap="square" lIns="0" tIns="0" rIns="0" bIns="0" rtlCol="0" anchor="ctr">
-            <a:normAutofit/>
-          </a:bodyPr>
+          <a:bodyPr wrap="square" lIns="0" tIns="0" rIns="0" bIns="0" rtlCol="0" anchor="ctr"/>
           <a:lstStyle/>
           <a:p>
             <a:pPr algn="ctr" indent="0" marL="0">
               <a:buNone/>
             </a:pPr>
             <a:r>
-              <a:rPr lang="en-US" sz="3600" b="1" dirty="0">
-                <a:solidFill>
-                  <a:srgbClr val="990011"/>
+              <a:rPr lang="en-US" sz="1600" i="1" dirty="0">
+                <a:solidFill>
+                  <a:srgbClr val="555555"/>
                 </a:solidFill>
                 <a:latin typeface="Times New Roman" pitchFamily="34" charset="0"/>
                 <a:ea typeface="Times New Roman" pitchFamily="34" charset="-122"/>
                 <a:cs typeface="Times New Roman" pitchFamily="34" charset="-120"/>
               </a:rPr>
-              <a:t>2. How the Factors Influence Growth in Various Regions</a:t>
-            </a:r>
-            <a:endParaRPr lang="en-US" sz="3600" dirty="0"/>
-          </a:p>
-        </p:txBody>
-      </p:sp>
-      <p:sp>
-        <p:nvSpPr>
-          <p:cNvPr id="5" name="Text 2"/>
-          <p:cNvSpPr/>
-          <p:nvPr/>
-        </p:nvSpPr>
-        <p:spPr>
-          <a:xfrm>
-            <a:off x="5349240" y="1783080"/>
-            <a:ext cx="6522415" cy="4663440"/>
-          </a:xfrm>
-          <a:prstGeom prst="rect">
-            <a:avLst/>
-          </a:prstGeom>
-          <a:noFill/>
-          <a:ln/>
-        </p:spPr>
-        <p:txBody>
-          <a:bodyPr wrap="square" lIns="0" tIns="0" rIns="0" bIns="0" rtlCol="0" anchor="t"/>
-          <a:lstStyle/>
-          <a:p>
-            <a:pPr algn="l" indent="0" marL="0">
-              <a:spcAft>
-                <a:spcPts val="800"/>
-              </a:spcAft>
-              <a:buNone/>
-            </a:pPr>
-            <a:r>
-              <a:rPr lang="en-US" sz="4000" b="1" dirty="0">
-                <a:solidFill>
-                  <a:srgbClr val="111111"/>
-                </a:solidFill>
-                <a:latin typeface="Times New Roman" pitchFamily="34" charset="0"/>
-                <a:ea typeface="Times New Roman" pitchFamily="34" charset="-122"/>
-                <a:cs typeface="Times New Roman" pitchFamily="34" charset="-120"/>
-              </a:rPr>
-              <a:t>Unstable regions: </a:t>
-            </a:r>
-            <a:pPr algn="l" indent="0" marL="0">
-              <a:spcAft>
-                <a:spcPts val="800"/>
-              </a:spcAft>
-              <a:buNone/>
-            </a:pPr>
-            <a:r>
-              <a:rPr lang="en-US" sz="4000" dirty="0">
-                <a:solidFill>
-                  <a:srgbClr val="111111"/>
-                </a:solidFill>
-                <a:latin typeface="Times New Roman" pitchFamily="34" charset="0"/>
-                <a:ea typeface="Times New Roman" pitchFamily="34" charset="-122"/>
-                <a:cs typeface="Times New Roman" pitchFamily="34" charset="-120"/>
-              </a:rPr>
-              <a:t>In war zones, deaths rise suddenly and health services collapse. Waves of refugees move into neighbouring countries.</a:t>
-            </a:r>
-            <a:endParaRPr lang="en-US" sz="4000" dirty="0"/>
+              <a:t>Illustration: growth by region</a:t>
+            </a:r>
+            <a:endParaRPr lang="en-US" sz="1600" dirty="0"/>
           </a:p>
         </p:txBody>
       </p:sp>
@@ -19271,7 +19675,7 @@
                 <a:ea typeface="Calibri" pitchFamily="34" charset="-122"/>
                 <a:cs typeface="Calibri" pitchFamily="34" charset="-120"/>
               </a:rPr>
-              <a:t>FORMATIVE EVALUATION</a:t>
+              <a:t>BOARD SUMMARY</a:t>
             </a:r>
             <a:endParaRPr lang="en-US" sz="1400" dirty="0"/>
           </a:p>
@@ -19294,7 +19698,7 @@
         <p:spPr>
           <a:xfrm>
             <a:off x="0" y="658368"/>
-            <a:ext cx="5120640" cy="5833872"/>
+            <a:ext cx="3840480" cy="5833872"/>
           </a:xfrm>
           <a:prstGeom prst="rect">
             <a:avLst/>
@@ -19309,8 +19713,8 @@
         </p:nvSpPr>
         <p:spPr>
           <a:xfrm>
-            <a:off x="5349240" y="1005840"/>
-            <a:ext cx="6522415" cy="731520"/>
+            <a:off x="4069080" y="1005840"/>
+            <a:ext cx="7802575" cy="731520"/>
           </a:xfrm>
           <a:prstGeom prst="rect">
             <a:avLst/>
@@ -19336,7 +19740,7 @@
                 <a:ea typeface="Times New Roman" pitchFamily="34" charset="-122"/>
                 <a:cs typeface="Times New Roman" pitchFamily="34" charset="-120"/>
               </a:rPr>
-              <a:t>Evaluation 1</a:t>
+              <a:t>2. How the Factors Influence Growth in Various Regions</a:t>
             </a:r>
             <a:endParaRPr lang="en-US" sz="3600" dirty="0"/>
           </a:p>
@@ -19350,8 +19754,8 @@
         </p:nvSpPr>
         <p:spPr>
           <a:xfrm>
-            <a:off x="5349240" y="1783080"/>
-            <a:ext cx="6522415" cy="4663440"/>
+            <a:off x="4069080" y="1783080"/>
+            <a:ext cx="7802575" cy="4663440"/>
           </a:xfrm>
           <a:prstGeom prst="rect">
             <a:avLst/>
@@ -19370,7 +19774,7 @@
               <a:buNone/>
             </a:pPr>
             <a:r>
-              <a:rPr lang="en-US" sz="4000" dirty="0">
+              <a:rPr lang="en-US" sz="4000" b="1" dirty="0">
                 <a:solidFill>
                   <a:srgbClr val="111111"/>
                 </a:solidFill>
@@ -19378,7 +19782,24 @@
                 <a:ea typeface="Times New Roman" pitchFamily="34" charset="-122"/>
                 <a:cs typeface="Times New Roman" pitchFamily="34" charset="-120"/>
               </a:rPr>
-              <a:t>Distinguish between demographic and non-demographic factors with one example each.</a:t>
+              <a:t>Developed regions: </a:t>
+            </a:r>
+            <a:pPr algn="l" indent="0" marL="0">
+              <a:spcAft>
+                <a:spcPts val="800"/>
+              </a:spcAft>
+              <a:buNone/>
+            </a:pPr>
+            <a:r>
+              <a:rPr lang="en-US" sz="4000" dirty="0">
+                <a:solidFill>
+                  <a:srgbClr val="111111"/>
+                </a:solidFill>
+                <a:latin typeface="Times New Roman" pitchFamily="34" charset="0"/>
+                <a:ea typeface="Times New Roman" pitchFamily="34" charset="-122"/>
+                <a:cs typeface="Times New Roman" pitchFamily="34" charset="-120"/>
+              </a:rPr>
+              <a:t>In Western Europe and Japan, low birth and death rates give slow or negative growth and an ageing population. These countries need immigrants to fill labour shortages.</a:t>
             </a:r>
             <a:endParaRPr lang="en-US" sz="4000" dirty="0"/>
           </a:p>
@@ -19490,7 +19911,7 @@
                 <a:ea typeface="Calibri" pitchFamily="34" charset="-122"/>
                 <a:cs typeface="Calibri" pitchFamily="34" charset="-120"/>
               </a:rPr>
-              <a:t>FORMATIVE EVALUATION</a:t>
+              <a:t>BOARD SUMMARY</a:t>
             </a:r>
             <a:endParaRPr lang="en-US" sz="1400" dirty="0"/>
           </a:p>
@@ -19555,7 +19976,7 @@
                 <a:ea typeface="Times New Roman" pitchFamily="34" charset="-122"/>
                 <a:cs typeface="Times New Roman" pitchFamily="34" charset="-120"/>
               </a:rPr>
-              <a:t>Expected Answer</a:t>
+              <a:t>2. How the Factors Influence Growth in Various Regions</a:t>
             </a:r>
             <a:endParaRPr lang="en-US" sz="3600" dirty="0"/>
           </a:p>
@@ -19589,7 +20010,7 @@
               <a:buNone/>
             </a:pPr>
             <a:r>
-              <a:rPr lang="en-US" sz="4000" dirty="0">
+              <a:rPr lang="en-US" sz="4000" b="1" dirty="0">
                 <a:solidFill>
                   <a:srgbClr val="111111"/>
                 </a:solidFill>
@@ -19597,7 +20018,24 @@
                 <a:ea typeface="Times New Roman" pitchFamily="34" charset="-122"/>
                 <a:cs typeface="Times New Roman" pitchFamily="34" charset="-120"/>
               </a:rPr>
-              <a:t>Demographic factors belong to the population itself, e.g. the birth rate; non-demographic factors are external, e.g. wars.</a:t>
+              <a:t>Emerging economies: </a:t>
+            </a:r>
+            <a:pPr algn="l" indent="0" marL="0">
+              <a:spcAft>
+                <a:spcPts val="800"/>
+              </a:spcAft>
+              <a:buNone/>
+            </a:pPr>
+            <a:r>
+              <a:rPr lang="en-US" sz="4000" dirty="0">
+                <a:solidFill>
+                  <a:srgbClr val="111111"/>
+                </a:solidFill>
+                <a:latin typeface="Times New Roman" pitchFamily="34" charset="0"/>
+                <a:ea typeface="Times New Roman" pitchFamily="34" charset="-122"/>
+                <a:cs typeface="Times New Roman" pitchFamily="34" charset="-120"/>
+              </a:rPr>
+              <a:t>Brazil and Mexico have falling births and low deaths, so their growth is moderate. Their large workforce can bring a demographic dividend.</a:t>
             </a:r>
             <a:endParaRPr lang="en-US" sz="4000" dirty="0"/>
           </a:p>
@@ -19709,7 +20147,7 @@
                 <a:ea typeface="Calibri" pitchFamily="34" charset="-122"/>
                 <a:cs typeface="Calibri" pitchFamily="34" charset="-120"/>
               </a:rPr>
-              <a:t>FORMATIVE EVALUATION</a:t>
+              <a:t>BOARD SUMMARY</a:t>
             </a:r>
             <a:endParaRPr lang="en-US" sz="1400" dirty="0"/>
           </a:p>
@@ -19774,7 +20212,7 @@
                 <a:ea typeface="Times New Roman" pitchFamily="34" charset="-122"/>
                 <a:cs typeface="Times New Roman" pitchFamily="34" charset="-120"/>
               </a:rPr>
-              <a:t>Evaluation 2</a:t>
+              <a:t>2. How the Factors Influence Growth in Various Regions</a:t>
             </a:r>
             <a:endParaRPr lang="en-US" sz="3600" dirty="0"/>
           </a:p>
@@ -19808,7 +20246,7 @@
               <a:buNone/>
             </a:pPr>
             <a:r>
-              <a:rPr lang="en-US" sz="4000" dirty="0">
+              <a:rPr lang="en-US" sz="4000" b="1" dirty="0">
                 <a:solidFill>
                   <a:srgbClr val="111111"/>
                 </a:solidFill>
@@ -19816,7 +20254,24 @@
                 <a:ea typeface="Times New Roman" pitchFamily="34" charset="-122"/>
                 <a:cs typeface="Times New Roman" pitchFamily="34" charset="-120"/>
               </a:rPr>
-              <a:t>Why do developed countries often depend on immigration?</a:t>
+              <a:t>Unstable regions: </a:t>
+            </a:r>
+            <a:pPr algn="l" indent="0" marL="0">
+              <a:spcAft>
+                <a:spcPts val="800"/>
+              </a:spcAft>
+              <a:buNone/>
+            </a:pPr>
+            <a:r>
+              <a:rPr lang="en-US" sz="4000" dirty="0">
+                <a:solidFill>
+                  <a:srgbClr val="111111"/>
+                </a:solidFill>
+                <a:latin typeface="Times New Roman" pitchFamily="34" charset="0"/>
+                <a:ea typeface="Times New Roman" pitchFamily="34" charset="-122"/>
+                <a:cs typeface="Times New Roman" pitchFamily="34" charset="-120"/>
+              </a:rPr>
+              <a:t>In war zones, deaths rise suddenly and health services collapse. Waves of refugees move into neighbouring countries.</a:t>
             </a:r>
             <a:endParaRPr lang="en-US" sz="4000" dirty="0"/>
           </a:p>
@@ -19993,7 +20448,7 @@
                 <a:ea typeface="Times New Roman" pitchFamily="34" charset="-122"/>
                 <a:cs typeface="Times New Roman" pitchFamily="34" charset="-120"/>
               </a:rPr>
-              <a:t>Expected Answer</a:t>
+              <a:t>Evaluation 1</a:t>
             </a:r>
             <a:endParaRPr lang="en-US" sz="3600" dirty="0"/>
           </a:p>
@@ -20035,7 +20490,7 @@
                 <a:ea typeface="Times New Roman" pitchFamily="34" charset="-122"/>
                 <a:cs typeface="Times New Roman" pitchFamily="34" charset="-120"/>
               </a:rPr>
-              <a:t>Their low birth rates and ageing populations cause shortages of workers.</a:t>
+              <a:t>Distinguish between demographic and non-demographic factors with one example each.</a:t>
             </a:r>
             <a:endParaRPr lang="en-US" sz="4000" dirty="0"/>
           </a:p>
@@ -20147,7 +20602,7 @@
                 <a:ea typeface="Calibri" pitchFamily="34" charset="-122"/>
                 <a:cs typeface="Calibri" pitchFamily="34" charset="-120"/>
               </a:rPr>
-              <a:t>REMEDIATION</a:t>
+              <a:t>FORMATIVE EVALUATION</a:t>
             </a:r>
             <a:endParaRPr lang="en-US" sz="1400" dirty="0"/>
           </a:p>
@@ -20170,7 +20625,7 @@
         <p:spPr>
           <a:xfrm>
             <a:off x="0" y="658368"/>
-            <a:ext cx="2468880" cy="5833872"/>
+            <a:ext cx="5120640" cy="5833872"/>
           </a:xfrm>
           <a:prstGeom prst="rect">
             <a:avLst/>
@@ -20185,8 +20640,8 @@
         </p:nvSpPr>
         <p:spPr>
           <a:xfrm>
-            <a:off x="2697480" y="1005840"/>
-            <a:ext cx="9174175" cy="731520"/>
+            <a:off x="5349240" y="1005840"/>
+            <a:ext cx="6522415" cy="731520"/>
           </a:xfrm>
           <a:prstGeom prst="rect">
             <a:avLst/>
@@ -20212,7 +20667,7 @@
                 <a:ea typeface="Times New Roman" pitchFamily="34" charset="-122"/>
                 <a:cs typeface="Times New Roman" pitchFamily="34" charset="-120"/>
               </a:rPr>
-              <a:t>Remediation</a:t>
+              <a:t>Expected Answer</a:t>
             </a:r>
             <a:endParaRPr lang="en-US" sz="3600" dirty="0"/>
           </a:p>
@@ -20226,8 +20681,8 @@
         </p:nvSpPr>
         <p:spPr>
           <a:xfrm>
-            <a:off x="2697480" y="1783080"/>
-            <a:ext cx="9174175" cy="4663440"/>
+            <a:off x="5349240" y="1783080"/>
+            <a:ext cx="6522415" cy="4663440"/>
           </a:xfrm>
           <a:prstGeom prst="rect">
             <a:avLst/>
@@ -20246,7 +20701,7 @@
               <a:buNone/>
             </a:pPr>
             <a:r>
-              <a:rPr lang="en-US" sz="4000" b="1" dirty="0">
+              <a:rPr lang="en-US" sz="4000" dirty="0">
                 <a:solidFill>
                   <a:srgbClr val="111111"/>
                 </a:solidFill>
@@ -20254,73 +20709,7 @@
                 <a:ea typeface="Times New Roman" pitchFamily="34" charset="-122"/>
                 <a:cs typeface="Times New Roman" pitchFamily="34" charset="-120"/>
               </a:rPr>
-              <a:t>Fill in the blanks:</a:t>
-            </a:r>
-            <a:endParaRPr lang="en-US" sz="4000" dirty="0"/>
-          </a:p>
-          <a:p>
-            <a:pPr algn="l" marL="342900" indent="-342900">
-              <a:spcAft>
-                <a:spcPts val="800"/>
-              </a:spcAft>
-              <a:buSzPct val="100000"/>
-              <a:buFont typeface="+mj-lt"/>
-              <a:buAutoNum type="arabicPeriod" startAt="1"/>
-            </a:pPr>
-            <a:r>
-              <a:rPr lang="en-US" sz="4000" dirty="0">
-                <a:solidFill>
-                  <a:srgbClr val="111111"/>
-                </a:solidFill>
-                <a:latin typeface="Times New Roman" pitchFamily="34" charset="0"/>
-                <a:ea typeface="Times New Roman" pitchFamily="34" charset="-122"/>
-                <a:cs typeface="Times New Roman" pitchFamily="34" charset="-120"/>
-              </a:rPr>
-              <a:t>An epidemic is a ______ factor.</a:t>
-            </a:r>
-            <a:endParaRPr lang="en-US" sz="4000" dirty="0"/>
-          </a:p>
-          <a:p>
-            <a:pPr algn="l" marL="342900" indent="-342900">
-              <a:spcAft>
-                <a:spcPts val="800"/>
-              </a:spcAft>
-              <a:buSzPct val="100000"/>
-              <a:buFont typeface="+mj-lt"/>
-              <a:buAutoNum type="arabicPeriod" startAt="1"/>
-            </a:pPr>
-            <a:r>
-              <a:rPr lang="en-US" sz="4000" dirty="0">
-                <a:solidFill>
-                  <a:srgbClr val="111111"/>
-                </a:solidFill>
-                <a:latin typeface="Times New Roman" pitchFamily="34" charset="0"/>
-                <a:ea typeface="Times New Roman" pitchFamily="34" charset="-122"/>
-                <a:cs typeface="Times New Roman" pitchFamily="34" charset="-120"/>
-              </a:rPr>
-              <a:t>China's one-child policy was ______-natalist.</a:t>
-            </a:r>
-            <a:endParaRPr lang="en-US" sz="4000" dirty="0"/>
-          </a:p>
-          <a:p>
-            <a:pPr algn="l" marL="342900" indent="-342900">
-              <a:spcAft>
-                <a:spcPts val="800"/>
-              </a:spcAft>
-              <a:buSzPct val="100000"/>
-              <a:buFont typeface="+mj-lt"/>
-              <a:buAutoNum type="arabicPeriod" startAt="1"/>
-            </a:pPr>
-            <a:r>
-              <a:rPr lang="en-US" sz="4000" dirty="0">
-                <a:solidFill>
-                  <a:srgbClr val="111111"/>
-                </a:solidFill>
-                <a:latin typeface="Times New Roman" pitchFamily="34" charset="0"/>
-                <a:ea typeface="Times New Roman" pitchFamily="34" charset="-122"/>
-                <a:cs typeface="Times New Roman" pitchFamily="34" charset="-120"/>
-              </a:rPr>
-              <a:t>Growth brought by a large workforce is the demographic ______.</a:t>
+              <a:t>Demographic factors belong to the population itself, e.g. the birth rate; non-demographic factors are external, e.g. wars.</a:t>
             </a:r>
             <a:endParaRPr lang="en-US" sz="4000" dirty="0"/>
           </a:p>
@@ -20432,7 +20821,7 @@
                 <a:ea typeface="Calibri" pitchFamily="34" charset="-122"/>
                 <a:cs typeface="Calibri" pitchFamily="34" charset="-120"/>
               </a:rPr>
-              <a:t>HOMEWORK</a:t>
+              <a:t>FORMATIVE EVALUATION</a:t>
             </a:r>
             <a:endParaRPr lang="en-US" sz="1400" dirty="0"/>
           </a:p>
@@ -20497,7 +20886,7 @@
                 <a:ea typeface="Times New Roman" pitchFamily="34" charset="-122"/>
                 <a:cs typeface="Times New Roman" pitchFamily="34" charset="-120"/>
               </a:rPr>
-              <a:t>Homework</a:t>
+              <a:t>Evaluation 2</a:t>
             </a:r>
             <a:endParaRPr lang="en-US" sz="3600" dirty="0"/>
           </a:p>
@@ -20539,7 +20928,7 @@
                 <a:ea typeface="Times New Roman" pitchFamily="34" charset="-122"/>
                 <a:cs typeface="Times New Roman" pitchFamily="34" charset="-120"/>
               </a:rPr>
-              <a:t>Define a pro-natalist policy.</a:t>
+              <a:t>Why do developed countries often depend on immigration?</a:t>
             </a:r>
             <a:endParaRPr lang="en-US" sz="4000" dirty="0"/>
           </a:p>
@@ -20651,7 +21040,7 @@
                 <a:ea typeface="Calibri" pitchFamily="34" charset="-122"/>
                 <a:cs typeface="Calibri" pitchFamily="34" charset="-120"/>
               </a:rPr>
-              <a:t>NEXT LESSON</a:t>
+              <a:t>FORMATIVE EVALUATION</a:t>
             </a:r>
             <a:endParaRPr lang="en-US" sz="1400" dirty="0"/>
           </a:p>
@@ -20716,7 +21105,7 @@
                 <a:ea typeface="Times New Roman" pitchFamily="34" charset="-122"/>
                 <a:cs typeface="Times New Roman" pitchFamily="34" charset="-120"/>
               </a:rPr>
-              <a:t>Next Lesson</a:t>
+              <a:t>Expected Answer</a:t>
             </a:r>
             <a:endParaRPr lang="en-US" sz="3600" dirty="0"/>
           </a:p>
@@ -20740,17 +21129,17 @@
           <a:ln/>
         </p:spPr>
         <p:txBody>
-          <a:bodyPr wrap="square" lIns="0" tIns="0" rIns="0" bIns="0" rtlCol="0" anchor="ctr"/>
-          <a:lstStyle/>
-          <a:p>
-            <a:pPr algn="ctr" indent="0" marL="0">
+          <a:bodyPr wrap="square" lIns="0" tIns="0" rIns="0" bIns="0" rtlCol="0" anchor="t"/>
+          <a:lstStyle/>
+          <a:p>
+            <a:pPr algn="l" indent="0" marL="0">
               <a:spcAft>
                 <a:spcPts val="800"/>
               </a:spcAft>
               <a:buNone/>
             </a:pPr>
             <a:r>
-              <a:rPr lang="en-US" sz="4000" b="1" dirty="0">
+              <a:rPr lang="en-US" sz="4000" dirty="0">
                 <a:solidFill>
                   <a:srgbClr val="111111"/>
                 </a:solidFill>
@@ -20758,27 +21147,7 @@
                 <a:ea typeface="Times New Roman" pitchFamily="34" charset="-122"/>
                 <a:cs typeface="Times New Roman" pitchFamily="34" charset="-120"/>
               </a:rPr>
-              <a:t>Our next lesson will be on:</a:t>
-            </a:r>
-            <a:endParaRPr lang="en-US" sz="4000" dirty="0"/>
-          </a:p>
-          <a:p>
-            <a:pPr algn="ctr" indent="0" marL="0">
-              <a:spcAft>
-                <a:spcPts val="800"/>
-              </a:spcAft>
-              <a:buNone/>
-            </a:pPr>
-            <a:r>
-              <a:rPr lang="en-US" sz="4000" b="1" dirty="0">
-                <a:solidFill>
-                  <a:srgbClr val="990011"/>
-                </a:solidFill>
-                <a:latin typeface="Times New Roman" pitchFamily="34" charset="0"/>
-                <a:ea typeface="Times New Roman" pitchFamily="34" charset="-122"/>
-                <a:cs typeface="Times New Roman" pitchFamily="34" charset="-120"/>
-              </a:rPr>
-              <a:t>Lesson 11: The Modern Demographic Explosion and Population Policies</a:t>
+              <a:t>Their low birth rates and ageing populations cause shortages of workers.</a:t>
             </a:r>
             <a:endParaRPr lang="en-US" sz="4000" dirty="0"/>
           </a:p>
@@ -20890,22 +21259,46 @@
                 <a:ea typeface="Calibri" pitchFamily="34" charset="-122"/>
                 <a:cs typeface="Calibri" pitchFamily="34" charset="-120"/>
               </a:rPr>
-              <a:t>BILINGUAL GAME</a:t>
+              <a:t>REMEDIATION</a:t>
             </a:r>
             <a:endParaRPr lang="en-US" sz="1400" dirty="0"/>
           </a:p>
         </p:txBody>
       </p:sp>
-      <p:sp>
-        <p:nvSpPr>
-          <p:cNvPr id="3" name="Text 1"/>
+      <p:pic>
+        <p:nvPicPr>
+          <p:cNvPr id="3" name="Image 0" descr="/home/claude/f4/img/minesec_sheet.png">    </p:cNvPr>
+          <p:cNvPicPr>
+            <a:picLocks noChangeAspect="1"/>
+          </p:cNvPicPr>
+          <p:nvPr/>
+        </p:nvPicPr>
+        <p:blipFill>
+          <a:blip r:embed="rId1"/>
+          <a:stretch>
+            <a:fillRect/>
+          </a:stretch>
+        </p:blipFill>
+        <p:spPr>
+          <a:xfrm>
+            <a:off x="0" y="658368"/>
+            <a:ext cx="2468880" cy="5833872"/>
+          </a:xfrm>
+          <a:prstGeom prst="rect">
+            <a:avLst/>
+          </a:prstGeom>
+        </p:spPr>
+      </p:pic>
+      <p:sp>
+        <p:nvSpPr>
+          <p:cNvPr id="4" name="Text 1"/>
           <p:cNvSpPr/>
           <p:nvPr/>
         </p:nvSpPr>
         <p:spPr>
           <a:xfrm>
-            <a:off x="457200" y="1005840"/>
-            <a:ext cx="11277295" cy="731520"/>
+            <a:off x="2697480" y="1005840"/>
+            <a:ext cx="9174175" cy="731520"/>
           </a:xfrm>
           <a:prstGeom prst="rect">
             <a:avLst/>
@@ -20914,7 +21307,9 @@
           <a:ln/>
         </p:spPr>
         <p:txBody>
-          <a:bodyPr wrap="square" lIns="0" tIns="0" rIns="0" bIns="0" rtlCol="0" anchor="ctr"/>
+          <a:bodyPr wrap="square" lIns="0" tIns="0" rIns="0" bIns="0" rtlCol="0" anchor="ctr">
+            <a:normAutofit/>
+          </a:bodyPr>
           <a:lstStyle/>
           <a:p>
             <a:pPr algn="ctr" indent="0" marL="0">
@@ -20929,6 +21324,1054 @@
                 <a:ea typeface="Times New Roman" pitchFamily="34" charset="-122"/>
                 <a:cs typeface="Times New Roman" pitchFamily="34" charset="-120"/>
               </a:rPr>
+              <a:t>Remediation</a:t>
+            </a:r>
+            <a:endParaRPr lang="en-US" sz="3600" dirty="0"/>
+          </a:p>
+        </p:txBody>
+      </p:sp>
+      <p:sp>
+        <p:nvSpPr>
+          <p:cNvPr id="5" name="Text 2"/>
+          <p:cNvSpPr/>
+          <p:nvPr/>
+        </p:nvSpPr>
+        <p:spPr>
+          <a:xfrm>
+            <a:off x="2697480" y="1783080"/>
+            <a:ext cx="9174175" cy="4663440"/>
+          </a:xfrm>
+          <a:prstGeom prst="rect">
+            <a:avLst/>
+          </a:prstGeom>
+          <a:noFill/>
+          <a:ln/>
+        </p:spPr>
+        <p:txBody>
+          <a:bodyPr wrap="square" lIns="0" tIns="0" rIns="0" bIns="0" rtlCol="0" anchor="t"/>
+          <a:lstStyle/>
+          <a:p>
+            <a:pPr algn="l" indent="0" marL="0">
+              <a:spcAft>
+                <a:spcPts val="800"/>
+              </a:spcAft>
+              <a:buNone/>
+            </a:pPr>
+            <a:r>
+              <a:rPr lang="en-US" sz="4000" b="1" dirty="0">
+                <a:solidFill>
+                  <a:srgbClr val="111111"/>
+                </a:solidFill>
+                <a:latin typeface="Times New Roman" pitchFamily="34" charset="0"/>
+                <a:ea typeface="Times New Roman" pitchFamily="34" charset="-122"/>
+                <a:cs typeface="Times New Roman" pitchFamily="34" charset="-120"/>
+              </a:rPr>
+              <a:t>Fill in the blanks:</a:t>
+            </a:r>
+            <a:endParaRPr lang="en-US" sz="4000" dirty="0"/>
+          </a:p>
+          <a:p>
+            <a:pPr algn="l" marL="342900" indent="-342900">
+              <a:spcAft>
+                <a:spcPts val="800"/>
+              </a:spcAft>
+              <a:buSzPct val="100000"/>
+              <a:buFont typeface="+mj-lt"/>
+              <a:buAutoNum type="arabicPeriod" startAt="1"/>
+            </a:pPr>
+            <a:r>
+              <a:rPr lang="en-US" sz="4000" dirty="0">
+                <a:solidFill>
+                  <a:srgbClr val="111111"/>
+                </a:solidFill>
+                <a:latin typeface="Times New Roman" pitchFamily="34" charset="0"/>
+                <a:ea typeface="Times New Roman" pitchFamily="34" charset="-122"/>
+                <a:cs typeface="Times New Roman" pitchFamily="34" charset="-120"/>
+              </a:rPr>
+              <a:t>An epidemic is a ______ factor.</a:t>
+            </a:r>
+            <a:endParaRPr lang="en-US" sz="4000" dirty="0"/>
+          </a:p>
+          <a:p>
+            <a:pPr algn="l" marL="342900" indent="-342900">
+              <a:spcAft>
+                <a:spcPts val="800"/>
+              </a:spcAft>
+              <a:buSzPct val="100000"/>
+              <a:buFont typeface="+mj-lt"/>
+              <a:buAutoNum type="arabicPeriod" startAt="1"/>
+            </a:pPr>
+            <a:r>
+              <a:rPr lang="en-US" sz="4000" dirty="0">
+                <a:solidFill>
+                  <a:srgbClr val="111111"/>
+                </a:solidFill>
+                <a:latin typeface="Times New Roman" pitchFamily="34" charset="0"/>
+                <a:ea typeface="Times New Roman" pitchFamily="34" charset="-122"/>
+                <a:cs typeface="Times New Roman" pitchFamily="34" charset="-120"/>
+              </a:rPr>
+              <a:t>China's one-child policy was ______-natalist.</a:t>
+            </a:r>
+            <a:endParaRPr lang="en-US" sz="4000" dirty="0"/>
+          </a:p>
+          <a:p>
+            <a:pPr algn="l" marL="342900" indent="-342900">
+              <a:spcAft>
+                <a:spcPts val="800"/>
+              </a:spcAft>
+              <a:buSzPct val="100000"/>
+              <a:buFont typeface="+mj-lt"/>
+              <a:buAutoNum type="arabicPeriod" startAt="1"/>
+            </a:pPr>
+            <a:r>
+              <a:rPr lang="en-US" sz="4000" dirty="0">
+                <a:solidFill>
+                  <a:srgbClr val="111111"/>
+                </a:solidFill>
+                <a:latin typeface="Times New Roman" pitchFamily="34" charset="0"/>
+                <a:ea typeface="Times New Roman" pitchFamily="34" charset="-122"/>
+                <a:cs typeface="Times New Roman" pitchFamily="34" charset="-120"/>
+              </a:rPr>
+              <a:t>Growth brought by a large workforce is the demographic ______.</a:t>
+            </a:r>
+            <a:endParaRPr lang="en-US" sz="4000" dirty="0"/>
+          </a:p>
+        </p:txBody>
+      </p:sp>
+      <p:sp>
+        <p:nvSpPr>
+          <p:cNvPr id="25" name="Slide Number Placeholder 0"/>
+          <p:cNvSpPr>
+            <a:spLocks noGrp="1"/>
+          </p:cNvSpPr>
+          <p:nvPr>
+            <p:ph type="sldNum" sz="quarter" idx="4294967295"/>
+          </p:nvPr>
+        </p:nvSpPr>
+        <p:spPr>
+          <a:xfrm>
+            <a:off x="27432" y="91440"/>
+            <a:ext cx="585216" cy="475488"/>
+          </a:xfrm>
+          <a:prstGeom prst="rect">
+            <a:avLst/>
+          </a:prstGeom>
+          <a:extLst>
+            <a:ext uri="{C572A759-6A51-4108-AA02-DFA0A04FC94B}">
+              <ma14:wrappingTextBoxFlag xmlns:ma14="http://schemas.microsoft.com/office/mac/drawingml/2011/main" val="0"/>
+            </a:ext>
+          </a:extLst>
+        </p:spPr>
+        <p:txBody>
+          <a:bodyPr/>
+          <a:lstStyle>
+            <a:lvl1pPr>
+              <a:defRPr sz="2000">
+                <a:solidFill>
+                  <a:srgbClr val="FFFFFF"/>
+                </a:solidFill>
+                <a:latin typeface="Calibri"/>
+                <a:ea typeface="Calibri"/>
+                <a:cs typeface="Calibri"/>
+              </a:defRPr>
+            </a:lvl1pPr>
+          </a:lstStyle>
+          <a:p>
+            <a:pPr algn="ctr"/>
+            <a:fld id="{F7021451-1387-4CA6-816F-3879F97B5CBC}" type="slidenum">
+              <a:rPr b="1" lang="en-US"/>
+              <a:t>58</a:t>
+            </a:fld>
+            <a:endParaRPr lang="en-US"/>
+          </a:p>
+        </p:txBody>
+      </p:sp>
+    </p:spTree>
+  </p:cSld>
+  <p:clrMapOvr>
+    <a:masterClrMapping/>
+  </p:clrMapOvr>
+</p:sld>
+</file>
+
+<file path=ppt/slides/slide59.xml><?xml version="1.0" encoding="utf-8"?>
+<p:sld xmlns:a="http://schemas.openxmlformats.org/drawingml/2006/main" xmlns:r="http://schemas.openxmlformats.org/officeDocument/2006/relationships" xmlns:p="http://schemas.openxmlformats.org/presentationml/2006/main">
+  <p:cSld name="Slide 59">
+    <p:spTree>
+      <p:nvGrpSpPr>
+        <p:cNvPr id="1" name=""/>
+        <p:cNvGrpSpPr/>
+        <p:nvPr/>
+      </p:nvGrpSpPr>
+      <p:grpSpPr>
+        <a:xfrm>
+          <a:off x="0" y="0"/>
+          <a:ext cx="0" cy="0"/>
+          <a:chOff x="0" y="0"/>
+          <a:chExt cx="0" cy="0"/>
+        </a:xfrm>
+      </p:grpSpPr>
+      <p:sp>
+        <p:nvSpPr>
+          <p:cNvPr id="2" name="Text 0"/>
+          <p:cNvSpPr/>
+          <p:nvPr/>
+        </p:nvSpPr>
+        <p:spPr>
+          <a:xfrm>
+            <a:off x="457200" y="713232"/>
+            <a:ext cx="11368735" cy="274320"/>
+          </a:xfrm>
+          <a:prstGeom prst="rect">
+            <a:avLst/>
+          </a:prstGeom>
+          <a:noFill/>
+          <a:ln/>
+        </p:spPr>
+        <p:txBody>
+          <a:bodyPr wrap="square" lIns="0" tIns="0" rIns="0" bIns="0" rtlCol="0" anchor="ctr"/>
+          <a:lstStyle/>
+          <a:p>
+            <a:pPr algn="r" indent="0" marL="0">
+              <a:buNone/>
+            </a:pPr>
+            <a:r>
+              <a:rPr lang="en-US" sz="1400" b="1" dirty="0">
+                <a:solidFill>
+                  <a:srgbClr val="1C3F6E"/>
+                </a:solidFill>
+                <a:latin typeface="Calibri" pitchFamily="34" charset="0"/>
+                <a:ea typeface="Calibri" pitchFamily="34" charset="-122"/>
+                <a:cs typeface="Calibri" pitchFamily="34" charset="-120"/>
+              </a:rPr>
+              <a:t>HOMEWORK</a:t>
+            </a:r>
+            <a:endParaRPr lang="en-US" sz="1400" dirty="0"/>
+          </a:p>
+        </p:txBody>
+      </p:sp>
+      <p:pic>
+        <p:nvPicPr>
+          <p:cNvPr id="3" name="Image 0" descr="/home/claude/f4/img/minesec_sheet.png">    </p:cNvPr>
+          <p:cNvPicPr>
+            <a:picLocks noChangeAspect="1"/>
+          </p:cNvPicPr>
+          <p:nvPr/>
+        </p:nvPicPr>
+        <p:blipFill>
+          <a:blip r:embed="rId1"/>
+          <a:stretch>
+            <a:fillRect/>
+          </a:stretch>
+        </p:blipFill>
+        <p:spPr>
+          <a:xfrm>
+            <a:off x="0" y="658368"/>
+            <a:ext cx="5120640" cy="5833872"/>
+          </a:xfrm>
+          <a:prstGeom prst="rect">
+            <a:avLst/>
+          </a:prstGeom>
+        </p:spPr>
+      </p:pic>
+      <p:sp>
+        <p:nvSpPr>
+          <p:cNvPr id="4" name="Text 1"/>
+          <p:cNvSpPr/>
+          <p:nvPr/>
+        </p:nvSpPr>
+        <p:spPr>
+          <a:xfrm>
+            <a:off x="5349240" y="1005840"/>
+            <a:ext cx="6522415" cy="731520"/>
+          </a:xfrm>
+          <a:prstGeom prst="rect">
+            <a:avLst/>
+          </a:prstGeom>
+          <a:noFill/>
+          <a:ln/>
+        </p:spPr>
+        <p:txBody>
+          <a:bodyPr wrap="square" lIns="0" tIns="0" rIns="0" bIns="0" rtlCol="0" anchor="ctr">
+            <a:normAutofit/>
+          </a:bodyPr>
+          <a:lstStyle/>
+          <a:p>
+            <a:pPr algn="ctr" indent="0" marL="0">
+              <a:buNone/>
+            </a:pPr>
+            <a:r>
+              <a:rPr lang="en-US" sz="3600" b="1" dirty="0">
+                <a:solidFill>
+                  <a:srgbClr val="990011"/>
+                </a:solidFill>
+                <a:latin typeface="Times New Roman" pitchFamily="34" charset="0"/>
+                <a:ea typeface="Times New Roman" pitchFamily="34" charset="-122"/>
+                <a:cs typeface="Times New Roman" pitchFamily="34" charset="-120"/>
+              </a:rPr>
+              <a:t>Homework</a:t>
+            </a:r>
+            <a:endParaRPr lang="en-US" sz="3600" dirty="0"/>
+          </a:p>
+        </p:txBody>
+      </p:sp>
+      <p:sp>
+        <p:nvSpPr>
+          <p:cNvPr id="5" name="Text 2"/>
+          <p:cNvSpPr/>
+          <p:nvPr/>
+        </p:nvSpPr>
+        <p:spPr>
+          <a:xfrm>
+            <a:off x="5349240" y="1783080"/>
+            <a:ext cx="6522415" cy="4663440"/>
+          </a:xfrm>
+          <a:prstGeom prst="rect">
+            <a:avLst/>
+          </a:prstGeom>
+          <a:noFill/>
+          <a:ln/>
+        </p:spPr>
+        <p:txBody>
+          <a:bodyPr wrap="square" lIns="0" tIns="0" rIns="0" bIns="0" rtlCol="0" anchor="t"/>
+          <a:lstStyle/>
+          <a:p>
+            <a:pPr algn="l" indent="0" marL="0">
+              <a:spcAft>
+                <a:spcPts val="800"/>
+              </a:spcAft>
+              <a:buNone/>
+            </a:pPr>
+            <a:r>
+              <a:rPr lang="en-US" sz="4000" dirty="0">
+                <a:solidFill>
+                  <a:srgbClr val="111111"/>
+                </a:solidFill>
+                <a:latin typeface="Times New Roman" pitchFamily="34" charset="0"/>
+                <a:ea typeface="Times New Roman" pitchFamily="34" charset="-122"/>
+                <a:cs typeface="Times New Roman" pitchFamily="34" charset="-120"/>
+              </a:rPr>
+              <a:t>Define a pro-natalist policy.</a:t>
+            </a:r>
+            <a:endParaRPr lang="en-US" sz="4000" dirty="0"/>
+          </a:p>
+        </p:txBody>
+      </p:sp>
+      <p:sp>
+        <p:nvSpPr>
+          <p:cNvPr id="25" name="Slide Number Placeholder 0"/>
+          <p:cNvSpPr>
+            <a:spLocks noGrp="1"/>
+          </p:cNvSpPr>
+          <p:nvPr>
+            <p:ph type="sldNum" sz="quarter" idx="4294967295"/>
+          </p:nvPr>
+        </p:nvSpPr>
+        <p:spPr>
+          <a:xfrm>
+            <a:off x="27432" y="91440"/>
+            <a:ext cx="585216" cy="475488"/>
+          </a:xfrm>
+          <a:prstGeom prst="rect">
+            <a:avLst/>
+          </a:prstGeom>
+          <a:extLst>
+            <a:ext uri="{C572A759-6A51-4108-AA02-DFA0A04FC94B}">
+              <ma14:wrappingTextBoxFlag xmlns:ma14="http://schemas.microsoft.com/office/mac/drawingml/2011/main" val="0"/>
+            </a:ext>
+          </a:extLst>
+        </p:spPr>
+        <p:txBody>
+          <a:bodyPr/>
+          <a:lstStyle>
+            <a:lvl1pPr>
+              <a:defRPr sz="2000">
+                <a:solidFill>
+                  <a:srgbClr val="FFFFFF"/>
+                </a:solidFill>
+                <a:latin typeface="Calibri"/>
+                <a:ea typeface="Calibri"/>
+                <a:cs typeface="Calibri"/>
+              </a:defRPr>
+            </a:lvl1pPr>
+          </a:lstStyle>
+          <a:p>
+            <a:pPr algn="ctr"/>
+            <a:fld id="{F7021451-1387-4CA6-816F-3879F97B5CBC}" type="slidenum">
+              <a:rPr b="1" lang="en-US"/>
+              <a:t>59</a:t>
+            </a:fld>
+            <a:endParaRPr lang="en-US"/>
+          </a:p>
+        </p:txBody>
+      </p:sp>
+    </p:spTree>
+  </p:cSld>
+  <p:clrMapOvr>
+    <a:masterClrMapping/>
+  </p:clrMapOvr>
+</p:sld>
+</file>
+
+<file path=ppt/slides/slide6.xml><?xml version="1.0" encoding="utf-8"?>
+<p:sld xmlns:a="http://schemas.openxmlformats.org/drawingml/2006/main" xmlns:r="http://schemas.openxmlformats.org/officeDocument/2006/relationships" xmlns:p="http://schemas.openxmlformats.org/presentationml/2006/main">
+  <p:cSld name="Slide 6">
+    <p:spTree>
+      <p:nvGrpSpPr>
+        <p:cNvPr id="1" name=""/>
+        <p:cNvGrpSpPr/>
+        <p:nvPr/>
+      </p:nvGrpSpPr>
+      <p:grpSpPr>
+        <a:xfrm>
+          <a:off x="0" y="0"/>
+          <a:ext cx="0" cy="0"/>
+          <a:chOff x="0" y="0"/>
+          <a:chExt cx="0" cy="0"/>
+        </a:xfrm>
+      </p:grpSpPr>
+      <p:sp>
+        <p:nvSpPr>
+          <p:cNvPr id="2" name="Text 0"/>
+          <p:cNvSpPr/>
+          <p:nvPr/>
+        </p:nvSpPr>
+        <p:spPr>
+          <a:xfrm>
+            <a:off x="457200" y="713232"/>
+            <a:ext cx="11368735" cy="274320"/>
+          </a:xfrm>
+          <a:prstGeom prst="rect">
+            <a:avLst/>
+          </a:prstGeom>
+          <a:noFill/>
+          <a:ln/>
+        </p:spPr>
+        <p:txBody>
+          <a:bodyPr wrap="square" lIns="0" tIns="0" rIns="0" bIns="0" rtlCol="0" anchor="ctr"/>
+          <a:lstStyle/>
+          <a:p>
+            <a:pPr algn="r" indent="0" marL="0">
+              <a:buNone/>
+            </a:pPr>
+            <a:r>
+              <a:rPr lang="en-US" sz="1400" b="1" dirty="0">
+                <a:solidFill>
+                  <a:srgbClr val="1C3F6E"/>
+                </a:solidFill>
+                <a:latin typeface="Calibri" pitchFamily="34" charset="0"/>
+                <a:ea typeface="Calibri" pitchFamily="34" charset="-122"/>
+                <a:cs typeface="Calibri" pitchFamily="34" charset="-120"/>
+              </a:rPr>
+              <a:t>LESSON PLAN</a:t>
+            </a:r>
+            <a:endParaRPr lang="en-US" sz="1400" dirty="0"/>
+          </a:p>
+        </p:txBody>
+      </p:sp>
+      <p:pic>
+        <p:nvPicPr>
+          <p:cNvPr id="3" name="Image 0" descr="/home/claude/f4/img/minesec_sheet.png">    </p:cNvPr>
+          <p:cNvPicPr>
+            <a:picLocks noChangeAspect="1"/>
+          </p:cNvPicPr>
+          <p:nvPr/>
+        </p:nvPicPr>
+        <p:blipFill>
+          <a:blip r:embed="rId1"/>
+          <a:stretch>
+            <a:fillRect/>
+          </a:stretch>
+        </p:blipFill>
+        <p:spPr>
+          <a:xfrm>
+            <a:off x="0" y="658368"/>
+            <a:ext cx="2468880" cy="5833872"/>
+          </a:xfrm>
+          <a:prstGeom prst="rect">
+            <a:avLst/>
+          </a:prstGeom>
+        </p:spPr>
+      </p:pic>
+      <p:sp>
+        <p:nvSpPr>
+          <p:cNvPr id="4" name="Text 1"/>
+          <p:cNvSpPr/>
+          <p:nvPr/>
+        </p:nvSpPr>
+        <p:spPr>
+          <a:xfrm>
+            <a:off x="2697480" y="1005840"/>
+            <a:ext cx="9174175" cy="731520"/>
+          </a:xfrm>
+          <a:prstGeom prst="rect">
+            <a:avLst/>
+          </a:prstGeom>
+          <a:noFill/>
+          <a:ln/>
+        </p:spPr>
+        <p:txBody>
+          <a:bodyPr wrap="square" lIns="0" tIns="0" rIns="0" bIns="0" rtlCol="0" anchor="ctr">
+            <a:normAutofit/>
+          </a:bodyPr>
+          <a:lstStyle/>
+          <a:p>
+            <a:pPr algn="ctr" indent="0" marL="0">
+              <a:buNone/>
+            </a:pPr>
+            <a:r>
+              <a:rPr lang="en-US" sz="3600" b="1" dirty="0">
+                <a:solidFill>
+                  <a:srgbClr val="990011"/>
+                </a:solidFill>
+                <a:latin typeface="Times New Roman" pitchFamily="34" charset="0"/>
+                <a:ea typeface="Times New Roman" pitchFamily="34" charset="-122"/>
+                <a:cs typeface="Times New Roman" pitchFamily="34" charset="-120"/>
+              </a:rPr>
+              <a:t>Lesson Plan</a:t>
+            </a:r>
+            <a:endParaRPr lang="en-US" sz="3600" dirty="0"/>
+          </a:p>
+        </p:txBody>
+      </p:sp>
+      <p:sp>
+        <p:nvSpPr>
+          <p:cNvPr id="5" name="Text 2"/>
+          <p:cNvSpPr/>
+          <p:nvPr/>
+        </p:nvSpPr>
+        <p:spPr>
+          <a:xfrm>
+            <a:off x="2697480" y="1783080"/>
+            <a:ext cx="9174175" cy="4663440"/>
+          </a:xfrm>
+          <a:prstGeom prst="rect">
+            <a:avLst/>
+          </a:prstGeom>
+          <a:noFill/>
+          <a:ln/>
+        </p:spPr>
+        <p:txBody>
+          <a:bodyPr wrap="square" lIns="0" tIns="0" rIns="0" bIns="0" rtlCol="0" anchor="t"/>
+          <a:lstStyle/>
+          <a:p>
+            <a:pPr algn="l" marL="342900" indent="-342900">
+              <a:spcAft>
+                <a:spcPts val="800"/>
+              </a:spcAft>
+              <a:buSzPct val="100000"/>
+              <a:buFont typeface="+mj-lt"/>
+              <a:buAutoNum type="arabicPeriod" startAt="1"/>
+            </a:pPr>
+            <a:r>
+              <a:rPr lang="en-US" sz="4000" dirty="0">
+                <a:solidFill>
+                  <a:srgbClr val="111111"/>
+                </a:solidFill>
+                <a:latin typeface="Times New Roman" pitchFamily="34" charset="0"/>
+                <a:ea typeface="Times New Roman" pitchFamily="34" charset="-122"/>
+                <a:cs typeface="Times New Roman" pitchFamily="34" charset="-120"/>
+              </a:rPr>
+              <a:t>Correction of the homework</a:t>
+            </a:r>
+            <a:endParaRPr lang="en-US" sz="4000" dirty="0"/>
+          </a:p>
+          <a:p>
+            <a:pPr algn="l" marL="342900" indent="-342900">
+              <a:spcAft>
+                <a:spcPts val="800"/>
+              </a:spcAft>
+              <a:buSzPct val="100000"/>
+              <a:buFont typeface="+mj-lt"/>
+              <a:buAutoNum type="arabicPeriod" startAt="1"/>
+            </a:pPr>
+            <a:r>
+              <a:rPr lang="en-US" sz="4000" dirty="0">
+                <a:solidFill>
+                  <a:srgbClr val="111111"/>
+                </a:solidFill>
+                <a:latin typeface="Times New Roman" pitchFamily="34" charset="0"/>
+                <a:ea typeface="Times New Roman" pitchFamily="34" charset="-122"/>
+                <a:cs typeface="Times New Roman" pitchFamily="34" charset="-120"/>
+              </a:rPr>
+              <a:t>Objectives and recall</a:t>
+            </a:r>
+            <a:endParaRPr lang="en-US" sz="4000" dirty="0"/>
+          </a:p>
+          <a:p>
+            <a:pPr algn="l" marL="342900" indent="-342900">
+              <a:spcAft>
+                <a:spcPts val="800"/>
+              </a:spcAft>
+              <a:buSzPct val="100000"/>
+              <a:buFont typeface="+mj-lt"/>
+              <a:buAutoNum type="arabicPeriod" startAt="1"/>
+            </a:pPr>
+            <a:r>
+              <a:rPr lang="en-US" sz="4000" dirty="0">
+                <a:solidFill>
+                  <a:srgbClr val="111111"/>
+                </a:solidFill>
+                <a:latin typeface="Times New Roman" pitchFamily="34" charset="0"/>
+                <a:ea typeface="Times New Roman" pitchFamily="34" charset="-122"/>
+                <a:cs typeface="Times New Roman" pitchFamily="34" charset="-120"/>
+              </a:rPr>
+              <a:t>Real-life situation and action to take</a:t>
+            </a:r>
+            <a:endParaRPr lang="en-US" sz="4000" dirty="0"/>
+          </a:p>
+          <a:p>
+            <a:pPr algn="l" marL="342900" indent="-342900">
+              <a:spcAft>
+                <a:spcPts val="800"/>
+              </a:spcAft>
+              <a:buSzPct val="100000"/>
+              <a:buFont typeface="+mj-lt"/>
+              <a:buAutoNum type="arabicPeriod" startAt="1"/>
+            </a:pPr>
+            <a:r>
+              <a:rPr lang="en-US" sz="4000" dirty="0">
+                <a:solidFill>
+                  <a:srgbClr val="111111"/>
+                </a:solidFill>
+                <a:latin typeface="Times New Roman" pitchFamily="34" charset="0"/>
+                <a:ea typeface="Times New Roman" pitchFamily="34" charset="-122"/>
+                <a:cs typeface="Times New Roman" pitchFamily="34" charset="-120"/>
+              </a:rPr>
+              <a:t>Learning activities</a:t>
+            </a:r>
+            <a:endParaRPr lang="en-US" sz="4000" dirty="0"/>
+          </a:p>
+          <a:p>
+            <a:pPr algn="l" marL="342900" indent="-342900">
+              <a:spcAft>
+                <a:spcPts val="800"/>
+              </a:spcAft>
+              <a:buSzPct val="100000"/>
+              <a:buFont typeface="+mj-lt"/>
+              <a:buAutoNum type="arabicPeriod" startAt="1"/>
+            </a:pPr>
+            <a:r>
+              <a:rPr lang="en-US" sz="4000" dirty="0">
+                <a:solidFill>
+                  <a:srgbClr val="111111"/>
+                </a:solidFill>
+                <a:latin typeface="Times New Roman" pitchFamily="34" charset="0"/>
+                <a:ea typeface="Times New Roman" pitchFamily="34" charset="-122"/>
+                <a:cs typeface="Times New Roman" pitchFamily="34" charset="-120"/>
+              </a:rPr>
+              <a:t>Board summary</a:t>
+            </a:r>
+            <a:endParaRPr lang="en-US" sz="4000" dirty="0"/>
+          </a:p>
+          <a:p>
+            <a:pPr algn="l" marL="342900" indent="-342900">
+              <a:spcAft>
+                <a:spcPts val="800"/>
+              </a:spcAft>
+              <a:buSzPct val="100000"/>
+              <a:buFont typeface="+mj-lt"/>
+              <a:buAutoNum type="arabicPeriod" startAt="1"/>
+            </a:pPr>
+            <a:r>
+              <a:rPr lang="en-US" sz="4000" dirty="0">
+                <a:solidFill>
+                  <a:srgbClr val="111111"/>
+                </a:solidFill>
+                <a:latin typeface="Times New Roman" pitchFamily="34" charset="0"/>
+                <a:ea typeface="Times New Roman" pitchFamily="34" charset="-122"/>
+                <a:cs typeface="Times New Roman" pitchFamily="34" charset="-120"/>
+              </a:rPr>
+              <a:t>Evaluation, remediation and homework</a:t>
+            </a:r>
+            <a:endParaRPr lang="en-US" sz="4000" dirty="0"/>
+          </a:p>
+        </p:txBody>
+      </p:sp>
+      <p:sp>
+        <p:nvSpPr>
+          <p:cNvPr id="25" name="Slide Number Placeholder 0"/>
+          <p:cNvSpPr>
+            <a:spLocks noGrp="1"/>
+          </p:cNvSpPr>
+          <p:nvPr>
+            <p:ph type="sldNum" sz="quarter" idx="4294967295"/>
+          </p:nvPr>
+        </p:nvSpPr>
+        <p:spPr>
+          <a:xfrm>
+            <a:off x="27432" y="91440"/>
+            <a:ext cx="585216" cy="475488"/>
+          </a:xfrm>
+          <a:prstGeom prst="rect">
+            <a:avLst/>
+          </a:prstGeom>
+          <a:extLst>
+            <a:ext uri="{C572A759-6A51-4108-AA02-DFA0A04FC94B}">
+              <ma14:wrappingTextBoxFlag xmlns:ma14="http://schemas.microsoft.com/office/mac/drawingml/2011/main" val="0"/>
+            </a:ext>
+          </a:extLst>
+        </p:spPr>
+        <p:txBody>
+          <a:bodyPr/>
+          <a:lstStyle>
+            <a:lvl1pPr>
+              <a:defRPr sz="2000">
+                <a:solidFill>
+                  <a:srgbClr val="FFFFFF"/>
+                </a:solidFill>
+                <a:latin typeface="Calibri"/>
+                <a:ea typeface="Calibri"/>
+                <a:cs typeface="Calibri"/>
+              </a:defRPr>
+            </a:lvl1pPr>
+          </a:lstStyle>
+          <a:p>
+            <a:pPr algn="ctr"/>
+            <a:fld id="{F7021451-1387-4CA6-816F-3879F97B5CBC}" type="slidenum">
+              <a:rPr b="1" lang="en-US"/>
+              <a:t>6</a:t>
+            </a:fld>
+            <a:endParaRPr lang="en-US"/>
+          </a:p>
+        </p:txBody>
+      </p:sp>
+    </p:spTree>
+  </p:cSld>
+  <p:clrMapOvr>
+    <a:masterClrMapping/>
+  </p:clrMapOvr>
+</p:sld>
+</file>
+
+<file path=ppt/slides/slide60.xml><?xml version="1.0" encoding="utf-8"?>
+<p:sld xmlns:a="http://schemas.openxmlformats.org/drawingml/2006/main" xmlns:r="http://schemas.openxmlformats.org/officeDocument/2006/relationships" xmlns:p="http://schemas.openxmlformats.org/presentationml/2006/main">
+  <p:cSld name="Slide 60">
+    <p:spTree>
+      <p:nvGrpSpPr>
+        <p:cNvPr id="1" name=""/>
+        <p:cNvGrpSpPr/>
+        <p:nvPr/>
+      </p:nvGrpSpPr>
+      <p:grpSpPr>
+        <a:xfrm>
+          <a:off x="0" y="0"/>
+          <a:ext cx="0" cy="0"/>
+          <a:chOff x="0" y="0"/>
+          <a:chExt cx="0" cy="0"/>
+        </a:xfrm>
+      </p:grpSpPr>
+      <p:sp>
+        <p:nvSpPr>
+          <p:cNvPr id="2" name="Text 0"/>
+          <p:cNvSpPr/>
+          <p:nvPr/>
+        </p:nvSpPr>
+        <p:spPr>
+          <a:xfrm>
+            <a:off x="457200" y="713232"/>
+            <a:ext cx="11368735" cy="274320"/>
+          </a:xfrm>
+          <a:prstGeom prst="rect">
+            <a:avLst/>
+          </a:prstGeom>
+          <a:noFill/>
+          <a:ln/>
+        </p:spPr>
+        <p:txBody>
+          <a:bodyPr wrap="square" lIns="0" tIns="0" rIns="0" bIns="0" rtlCol="0" anchor="ctr"/>
+          <a:lstStyle/>
+          <a:p>
+            <a:pPr algn="r" indent="0" marL="0">
+              <a:buNone/>
+            </a:pPr>
+            <a:r>
+              <a:rPr lang="en-US" sz="1400" b="1" dirty="0">
+                <a:solidFill>
+                  <a:srgbClr val="1C3F6E"/>
+                </a:solidFill>
+                <a:latin typeface="Calibri" pitchFamily="34" charset="0"/>
+                <a:ea typeface="Calibri" pitchFamily="34" charset="-122"/>
+                <a:cs typeface="Calibri" pitchFamily="34" charset="-120"/>
+              </a:rPr>
+              <a:t>NEXT LESSON</a:t>
+            </a:r>
+            <a:endParaRPr lang="en-US" sz="1400" dirty="0"/>
+          </a:p>
+        </p:txBody>
+      </p:sp>
+      <p:pic>
+        <p:nvPicPr>
+          <p:cNvPr id="3" name="Image 0" descr="/home/claude/f4/img/minesec_sheet.png">    </p:cNvPr>
+          <p:cNvPicPr>
+            <a:picLocks noChangeAspect="1"/>
+          </p:cNvPicPr>
+          <p:nvPr/>
+        </p:nvPicPr>
+        <p:blipFill>
+          <a:blip r:embed="rId1"/>
+          <a:stretch>
+            <a:fillRect/>
+          </a:stretch>
+        </p:blipFill>
+        <p:spPr>
+          <a:xfrm>
+            <a:off x="0" y="658368"/>
+            <a:ext cx="5120640" cy="5833872"/>
+          </a:xfrm>
+          <a:prstGeom prst="rect">
+            <a:avLst/>
+          </a:prstGeom>
+        </p:spPr>
+      </p:pic>
+      <p:sp>
+        <p:nvSpPr>
+          <p:cNvPr id="4" name="Text 1"/>
+          <p:cNvSpPr/>
+          <p:nvPr/>
+        </p:nvSpPr>
+        <p:spPr>
+          <a:xfrm>
+            <a:off x="5349240" y="1005840"/>
+            <a:ext cx="6522415" cy="731520"/>
+          </a:xfrm>
+          <a:prstGeom prst="rect">
+            <a:avLst/>
+          </a:prstGeom>
+          <a:noFill/>
+          <a:ln/>
+        </p:spPr>
+        <p:txBody>
+          <a:bodyPr wrap="square" lIns="0" tIns="0" rIns="0" bIns="0" rtlCol="0" anchor="ctr">
+            <a:normAutofit/>
+          </a:bodyPr>
+          <a:lstStyle/>
+          <a:p>
+            <a:pPr algn="ctr" indent="0" marL="0">
+              <a:buNone/>
+            </a:pPr>
+            <a:r>
+              <a:rPr lang="en-US" sz="3600" b="1" dirty="0">
+                <a:solidFill>
+                  <a:srgbClr val="990011"/>
+                </a:solidFill>
+                <a:latin typeface="Times New Roman" pitchFamily="34" charset="0"/>
+                <a:ea typeface="Times New Roman" pitchFamily="34" charset="-122"/>
+                <a:cs typeface="Times New Roman" pitchFamily="34" charset="-120"/>
+              </a:rPr>
+              <a:t>Next Lesson</a:t>
+            </a:r>
+            <a:endParaRPr lang="en-US" sz="3600" dirty="0"/>
+          </a:p>
+        </p:txBody>
+      </p:sp>
+      <p:sp>
+        <p:nvSpPr>
+          <p:cNvPr id="5" name="Text 2"/>
+          <p:cNvSpPr/>
+          <p:nvPr/>
+        </p:nvSpPr>
+        <p:spPr>
+          <a:xfrm>
+            <a:off x="5349240" y="1783080"/>
+            <a:ext cx="6522415" cy="4663440"/>
+          </a:xfrm>
+          <a:prstGeom prst="rect">
+            <a:avLst/>
+          </a:prstGeom>
+          <a:noFill/>
+          <a:ln/>
+        </p:spPr>
+        <p:txBody>
+          <a:bodyPr wrap="square" lIns="0" tIns="0" rIns="0" bIns="0" rtlCol="0" anchor="ctr"/>
+          <a:lstStyle/>
+          <a:p>
+            <a:pPr algn="ctr" indent="0" marL="0">
+              <a:spcAft>
+                <a:spcPts val="800"/>
+              </a:spcAft>
+              <a:buNone/>
+            </a:pPr>
+            <a:r>
+              <a:rPr lang="en-US" sz="4000" b="1" dirty="0">
+                <a:solidFill>
+                  <a:srgbClr val="111111"/>
+                </a:solidFill>
+                <a:latin typeface="Times New Roman" pitchFamily="34" charset="0"/>
+                <a:ea typeface="Times New Roman" pitchFamily="34" charset="-122"/>
+                <a:cs typeface="Times New Roman" pitchFamily="34" charset="-120"/>
+              </a:rPr>
+              <a:t>Our next lesson will be on:</a:t>
+            </a:r>
+            <a:endParaRPr lang="en-US" sz="4000" dirty="0"/>
+          </a:p>
+          <a:p>
+            <a:pPr algn="ctr" indent="0" marL="0">
+              <a:spcAft>
+                <a:spcPts val="800"/>
+              </a:spcAft>
+              <a:buNone/>
+            </a:pPr>
+            <a:r>
+              <a:rPr lang="en-US" sz="4000" b="1" dirty="0">
+                <a:solidFill>
+                  <a:srgbClr val="990011"/>
+                </a:solidFill>
+                <a:latin typeface="Times New Roman" pitchFamily="34" charset="0"/>
+                <a:ea typeface="Times New Roman" pitchFamily="34" charset="-122"/>
+                <a:cs typeface="Times New Roman" pitchFamily="34" charset="-120"/>
+              </a:rPr>
+              <a:t>Lesson 11: The Modern Demographic Explosion and Population Policies</a:t>
+            </a:r>
+            <a:endParaRPr lang="en-US" sz="4000" dirty="0"/>
+          </a:p>
+        </p:txBody>
+      </p:sp>
+      <p:sp>
+        <p:nvSpPr>
+          <p:cNvPr id="25" name="Slide Number Placeholder 0"/>
+          <p:cNvSpPr>
+            <a:spLocks noGrp="1"/>
+          </p:cNvSpPr>
+          <p:nvPr>
+            <p:ph type="sldNum" sz="quarter" idx="4294967295"/>
+          </p:nvPr>
+        </p:nvSpPr>
+        <p:spPr>
+          <a:xfrm>
+            <a:off x="27432" y="91440"/>
+            <a:ext cx="585216" cy="475488"/>
+          </a:xfrm>
+          <a:prstGeom prst="rect">
+            <a:avLst/>
+          </a:prstGeom>
+          <a:extLst>
+            <a:ext uri="{C572A759-6A51-4108-AA02-DFA0A04FC94B}">
+              <ma14:wrappingTextBoxFlag xmlns:ma14="http://schemas.microsoft.com/office/mac/drawingml/2011/main" val="0"/>
+            </a:ext>
+          </a:extLst>
+        </p:spPr>
+        <p:txBody>
+          <a:bodyPr/>
+          <a:lstStyle>
+            <a:lvl1pPr>
+              <a:defRPr sz="2000">
+                <a:solidFill>
+                  <a:srgbClr val="FFFFFF"/>
+                </a:solidFill>
+                <a:latin typeface="Calibri"/>
+                <a:ea typeface="Calibri"/>
+                <a:cs typeface="Calibri"/>
+              </a:defRPr>
+            </a:lvl1pPr>
+          </a:lstStyle>
+          <a:p>
+            <a:pPr algn="ctr"/>
+            <a:fld id="{F7021451-1387-4CA6-816F-3879F97B5CBC}" type="slidenum">
+              <a:rPr b="1" lang="en-US"/>
+              <a:t>60</a:t>
+            </a:fld>
+            <a:endParaRPr lang="en-US"/>
+          </a:p>
+        </p:txBody>
+      </p:sp>
+    </p:spTree>
+  </p:cSld>
+  <p:clrMapOvr>
+    <a:masterClrMapping/>
+  </p:clrMapOvr>
+</p:sld>
+</file>
+
+<file path=ppt/slides/slide61.xml><?xml version="1.0" encoding="utf-8"?>
+<p:sld xmlns:a="http://schemas.openxmlformats.org/drawingml/2006/main" xmlns:r="http://schemas.openxmlformats.org/officeDocument/2006/relationships" xmlns:p="http://schemas.openxmlformats.org/presentationml/2006/main">
+  <p:cSld name="Slide 61">
+    <p:spTree>
+      <p:nvGrpSpPr>
+        <p:cNvPr id="1" name=""/>
+        <p:cNvGrpSpPr/>
+        <p:nvPr/>
+      </p:nvGrpSpPr>
+      <p:grpSpPr>
+        <a:xfrm>
+          <a:off x="0" y="0"/>
+          <a:ext cx="0" cy="0"/>
+          <a:chOff x="0" y="0"/>
+          <a:chExt cx="0" cy="0"/>
+        </a:xfrm>
+      </p:grpSpPr>
+      <p:sp>
+        <p:nvSpPr>
+          <p:cNvPr id="2" name="Text 0"/>
+          <p:cNvSpPr/>
+          <p:nvPr/>
+        </p:nvSpPr>
+        <p:spPr>
+          <a:xfrm>
+            <a:off x="457200" y="713232"/>
+            <a:ext cx="11368735" cy="274320"/>
+          </a:xfrm>
+          <a:prstGeom prst="rect">
+            <a:avLst/>
+          </a:prstGeom>
+          <a:noFill/>
+          <a:ln/>
+        </p:spPr>
+        <p:txBody>
+          <a:bodyPr wrap="square" lIns="0" tIns="0" rIns="0" bIns="0" rtlCol="0" anchor="ctr"/>
+          <a:lstStyle/>
+          <a:p>
+            <a:pPr algn="r" indent="0" marL="0">
+              <a:buNone/>
+            </a:pPr>
+            <a:r>
+              <a:rPr lang="en-US" sz="1400" b="1" dirty="0">
+                <a:solidFill>
+                  <a:srgbClr val="1C3F6E"/>
+                </a:solidFill>
+                <a:latin typeface="Calibri" pitchFamily="34" charset="0"/>
+                <a:ea typeface="Calibri" pitchFamily="34" charset="-122"/>
+                <a:cs typeface="Calibri" pitchFamily="34" charset="-120"/>
+              </a:rPr>
+              <a:t>BILINGUAL GAME</a:t>
+            </a:r>
+            <a:endParaRPr lang="en-US" sz="1400" dirty="0"/>
+          </a:p>
+        </p:txBody>
+      </p:sp>
+      <p:sp>
+        <p:nvSpPr>
+          <p:cNvPr id="3" name="Text 1"/>
+          <p:cNvSpPr/>
+          <p:nvPr/>
+        </p:nvSpPr>
+        <p:spPr>
+          <a:xfrm>
+            <a:off x="457200" y="1005840"/>
+            <a:ext cx="11277295" cy="731520"/>
+          </a:xfrm>
+          <a:prstGeom prst="rect">
+            <a:avLst/>
+          </a:prstGeom>
+          <a:noFill/>
+          <a:ln/>
+        </p:spPr>
+        <p:txBody>
+          <a:bodyPr wrap="square" lIns="0" tIns="0" rIns="0" bIns="0" rtlCol="0" anchor="ctr"/>
+          <a:lstStyle/>
+          <a:p>
+            <a:pPr algn="ctr" indent="0" marL="0">
+              <a:buNone/>
+            </a:pPr>
+            <a:r>
+              <a:rPr lang="en-US" sz="3600" b="1" dirty="0">
+                <a:solidFill>
+                  <a:srgbClr val="990011"/>
+                </a:solidFill>
+                <a:latin typeface="Times New Roman" pitchFamily="34" charset="0"/>
+                <a:ea typeface="Times New Roman" pitchFamily="34" charset="-122"/>
+                <a:cs typeface="Times New Roman" pitchFamily="34" charset="-120"/>
+              </a:rPr>
               <a:t>Bilingual Game (Jeu Bilingue)</a:t>
             </a:r>
             <a:endParaRPr lang="en-US" sz="3600" dirty="0"/>
@@ -20937,7 +22380,7 @@
       </p:sp>
       <p:graphicFrame>
         <p:nvGraphicFramePr>
-          <p:cNvPr id="59" name="Table 0"/>
+          <p:cNvPr id="62" name="Table 0"/>
           <p:cNvGraphicFramePr>
             <a:graphicFrameLocks noGrp="1"/>
           </p:cNvGraphicFramePr>
@@ -21973,7 +23416,7 @@
             <a:pPr algn="ctr"/>
             <a:fld id="{F7021451-1387-4CA6-816F-3879F97B5CBC}" type="slidenum">
               <a:rPr b="1" lang="en-US"/>
-              <a:t>58</a:t>
+              <a:t>61</a:t>
             </a:fld>
             <a:endParaRPr lang="en-US"/>
           </a:p>
@@ -21987,9 +23430,9 @@
 </p:sld>
 </file>
 
-<file path=ppt/slides/slide59.xml><?xml version="1.0" encoding="utf-8"?>
+<file path=ppt/slides/slide62.xml><?xml version="1.0" encoding="utf-8"?>
 <p:sld xmlns:a="http://schemas.openxmlformats.org/drawingml/2006/main" xmlns:r="http://schemas.openxmlformats.org/officeDocument/2006/relationships" xmlns:p="http://schemas.openxmlformats.org/presentationml/2006/main">
-  <p:cSld name="Slide 59">
+  <p:cSld name="Slide 62">
     <p:spTree>
       <p:nvGrpSpPr>
         <p:cNvPr id="1" name=""/>
@@ -22084,7 +23527,7 @@
       </p:sp>
       <p:graphicFrame>
         <p:nvGraphicFramePr>
-          <p:cNvPr id="60" name="Table 0"/>
+          <p:cNvPr id="63" name="Table 0"/>
           <p:cNvGraphicFramePr>
             <a:graphicFrameLocks noGrp="1"/>
           </p:cNvGraphicFramePr>
@@ -22706,7 +24149,7 @@
             <a:pPr algn="ctr"/>
             <a:fld id="{F7021451-1387-4CA6-816F-3879F97B5CBC}" type="slidenum">
               <a:rPr b="1" lang="en-US"/>
-              <a:t>59</a:t>
+              <a:t>62</a:t>
             </a:fld>
             <a:endParaRPr lang="en-US"/>
           </a:p>
@@ -22720,9 +24163,9 @@
 </p:sld>
 </file>
 
-<file path=ppt/slides/slide6.xml><?xml version="1.0" encoding="utf-8"?>
+<file path=ppt/slides/slide63.xml><?xml version="1.0" encoding="utf-8"?>
 <p:sld xmlns:a="http://schemas.openxmlformats.org/drawingml/2006/main" xmlns:r="http://schemas.openxmlformats.org/officeDocument/2006/relationships" xmlns:p="http://schemas.openxmlformats.org/presentationml/2006/main">
-  <p:cSld name="Slide 6">
+  <p:cSld name="Slide 63">
     <p:spTree>
       <p:nvGrpSpPr>
         <p:cNvPr id="1" name=""/>
@@ -22770,46 +24213,22 @@
                 <a:ea typeface="Calibri" pitchFamily="34" charset="-122"/>
                 <a:cs typeface="Calibri" pitchFamily="34" charset="-120"/>
               </a:rPr>
-              <a:t>LESSON PLAN</a:t>
+              <a:t>LOGBOOK</a:t>
             </a:r>
             <a:endParaRPr lang="en-US" sz="1400" dirty="0"/>
           </a:p>
         </p:txBody>
       </p:sp>
-      <p:pic>
-        <p:nvPicPr>
-          <p:cNvPr id="3" name="Image 0" descr="/home/claude/f4/img/minesec_sheet.png">    </p:cNvPr>
-          <p:cNvPicPr>
-            <a:picLocks noChangeAspect="1"/>
-          </p:cNvPicPr>
-          <p:nvPr/>
-        </p:nvPicPr>
-        <p:blipFill>
-          <a:blip r:embed="rId1"/>
-          <a:stretch>
-            <a:fillRect/>
-          </a:stretch>
-        </p:blipFill>
-        <p:spPr>
-          <a:xfrm>
-            <a:off x="0" y="658368"/>
-            <a:ext cx="2468880" cy="5833872"/>
-          </a:xfrm>
-          <a:prstGeom prst="rect">
-            <a:avLst/>
-          </a:prstGeom>
-        </p:spPr>
-      </p:pic>
-      <p:sp>
-        <p:nvSpPr>
-          <p:cNvPr id="4" name="Text 1"/>
+      <p:sp>
+        <p:nvSpPr>
+          <p:cNvPr id="3" name="Text 1"/>
           <p:cNvSpPr/>
           <p:nvPr/>
         </p:nvSpPr>
         <p:spPr>
           <a:xfrm>
-            <a:off x="2697480" y="1005840"/>
-            <a:ext cx="9174175" cy="731520"/>
+            <a:off x="457200" y="1005840"/>
+            <a:ext cx="11277295" cy="731520"/>
           </a:xfrm>
           <a:prstGeom prst="rect">
             <a:avLst/>
@@ -22818,9 +24237,7 @@
           <a:ln/>
         </p:spPr>
         <p:txBody>
-          <a:bodyPr wrap="square" lIns="0" tIns="0" rIns="0" bIns="0" rtlCol="0" anchor="ctr">
-            <a:normAutofit/>
-          </a:bodyPr>
+          <a:bodyPr wrap="square" lIns="0" tIns="0" rIns="0" bIns="0" rtlCol="0" anchor="ctr"/>
           <a:lstStyle/>
           <a:p>
             <a:pPr algn="ctr" indent="0" marL="0">
@@ -22835,311 +24252,6 @@
                 <a:ea typeface="Times New Roman" pitchFamily="34" charset="-122"/>
                 <a:cs typeface="Times New Roman" pitchFamily="34" charset="-120"/>
               </a:rPr>
-              <a:t>Lesson Plan</a:t>
-            </a:r>
-            <a:endParaRPr lang="en-US" sz="3600" dirty="0"/>
-          </a:p>
-        </p:txBody>
-      </p:sp>
-      <p:sp>
-        <p:nvSpPr>
-          <p:cNvPr id="5" name="Text 2"/>
-          <p:cNvSpPr/>
-          <p:nvPr/>
-        </p:nvSpPr>
-        <p:spPr>
-          <a:xfrm>
-            <a:off x="2697480" y="1783080"/>
-            <a:ext cx="9174175" cy="4663440"/>
-          </a:xfrm>
-          <a:prstGeom prst="rect">
-            <a:avLst/>
-          </a:prstGeom>
-          <a:noFill/>
-          <a:ln/>
-        </p:spPr>
-        <p:txBody>
-          <a:bodyPr wrap="square" lIns="0" tIns="0" rIns="0" bIns="0" rtlCol="0" anchor="t"/>
-          <a:lstStyle/>
-          <a:p>
-            <a:pPr algn="l" marL="342900" indent="-342900">
-              <a:spcAft>
-                <a:spcPts val="800"/>
-              </a:spcAft>
-              <a:buSzPct val="100000"/>
-              <a:buFont typeface="+mj-lt"/>
-              <a:buAutoNum type="arabicPeriod" startAt="1"/>
-            </a:pPr>
-            <a:r>
-              <a:rPr lang="en-US" sz="4000" dirty="0">
-                <a:solidFill>
-                  <a:srgbClr val="111111"/>
-                </a:solidFill>
-                <a:latin typeface="Times New Roman" pitchFamily="34" charset="0"/>
-                <a:ea typeface="Times New Roman" pitchFamily="34" charset="-122"/>
-                <a:cs typeface="Times New Roman" pitchFamily="34" charset="-120"/>
-              </a:rPr>
-              <a:t>Correction of the homework</a:t>
-            </a:r>
-            <a:endParaRPr lang="en-US" sz="4000" dirty="0"/>
-          </a:p>
-          <a:p>
-            <a:pPr algn="l" marL="342900" indent="-342900">
-              <a:spcAft>
-                <a:spcPts val="800"/>
-              </a:spcAft>
-              <a:buSzPct val="100000"/>
-              <a:buFont typeface="+mj-lt"/>
-              <a:buAutoNum type="arabicPeriod" startAt="1"/>
-            </a:pPr>
-            <a:r>
-              <a:rPr lang="en-US" sz="4000" dirty="0">
-                <a:solidFill>
-                  <a:srgbClr val="111111"/>
-                </a:solidFill>
-                <a:latin typeface="Times New Roman" pitchFamily="34" charset="0"/>
-                <a:ea typeface="Times New Roman" pitchFamily="34" charset="-122"/>
-                <a:cs typeface="Times New Roman" pitchFamily="34" charset="-120"/>
-              </a:rPr>
-              <a:t>Objectives and recall</a:t>
-            </a:r>
-            <a:endParaRPr lang="en-US" sz="4000" dirty="0"/>
-          </a:p>
-          <a:p>
-            <a:pPr algn="l" marL="342900" indent="-342900">
-              <a:spcAft>
-                <a:spcPts val="800"/>
-              </a:spcAft>
-              <a:buSzPct val="100000"/>
-              <a:buFont typeface="+mj-lt"/>
-              <a:buAutoNum type="arabicPeriod" startAt="1"/>
-            </a:pPr>
-            <a:r>
-              <a:rPr lang="en-US" sz="4000" dirty="0">
-                <a:solidFill>
-                  <a:srgbClr val="111111"/>
-                </a:solidFill>
-                <a:latin typeface="Times New Roman" pitchFamily="34" charset="0"/>
-                <a:ea typeface="Times New Roman" pitchFamily="34" charset="-122"/>
-                <a:cs typeface="Times New Roman" pitchFamily="34" charset="-120"/>
-              </a:rPr>
-              <a:t>Real-life situation and action to take</a:t>
-            </a:r>
-            <a:endParaRPr lang="en-US" sz="4000" dirty="0"/>
-          </a:p>
-          <a:p>
-            <a:pPr algn="l" marL="342900" indent="-342900">
-              <a:spcAft>
-                <a:spcPts val="800"/>
-              </a:spcAft>
-              <a:buSzPct val="100000"/>
-              <a:buFont typeface="+mj-lt"/>
-              <a:buAutoNum type="arabicPeriod" startAt="1"/>
-            </a:pPr>
-            <a:r>
-              <a:rPr lang="en-US" sz="4000" dirty="0">
-                <a:solidFill>
-                  <a:srgbClr val="111111"/>
-                </a:solidFill>
-                <a:latin typeface="Times New Roman" pitchFamily="34" charset="0"/>
-                <a:ea typeface="Times New Roman" pitchFamily="34" charset="-122"/>
-                <a:cs typeface="Times New Roman" pitchFamily="34" charset="-120"/>
-              </a:rPr>
-              <a:t>Learning activities</a:t>
-            </a:r>
-            <a:endParaRPr lang="en-US" sz="4000" dirty="0"/>
-          </a:p>
-          <a:p>
-            <a:pPr algn="l" marL="342900" indent="-342900">
-              <a:spcAft>
-                <a:spcPts val="800"/>
-              </a:spcAft>
-              <a:buSzPct val="100000"/>
-              <a:buFont typeface="+mj-lt"/>
-              <a:buAutoNum type="arabicPeriod" startAt="1"/>
-            </a:pPr>
-            <a:r>
-              <a:rPr lang="en-US" sz="4000" dirty="0">
-                <a:solidFill>
-                  <a:srgbClr val="111111"/>
-                </a:solidFill>
-                <a:latin typeface="Times New Roman" pitchFamily="34" charset="0"/>
-                <a:ea typeface="Times New Roman" pitchFamily="34" charset="-122"/>
-                <a:cs typeface="Times New Roman" pitchFamily="34" charset="-120"/>
-              </a:rPr>
-              <a:t>Board summary</a:t>
-            </a:r>
-            <a:endParaRPr lang="en-US" sz="4000" dirty="0"/>
-          </a:p>
-          <a:p>
-            <a:pPr algn="l" marL="342900" indent="-342900">
-              <a:spcAft>
-                <a:spcPts val="800"/>
-              </a:spcAft>
-              <a:buSzPct val="100000"/>
-              <a:buFont typeface="+mj-lt"/>
-              <a:buAutoNum type="arabicPeriod" startAt="1"/>
-            </a:pPr>
-            <a:r>
-              <a:rPr lang="en-US" sz="4000" dirty="0">
-                <a:solidFill>
-                  <a:srgbClr val="111111"/>
-                </a:solidFill>
-                <a:latin typeface="Times New Roman" pitchFamily="34" charset="0"/>
-                <a:ea typeface="Times New Roman" pitchFamily="34" charset="-122"/>
-                <a:cs typeface="Times New Roman" pitchFamily="34" charset="-120"/>
-              </a:rPr>
-              <a:t>Evaluation, remediation and homework</a:t>
-            </a:r>
-            <a:endParaRPr lang="en-US" sz="4000" dirty="0"/>
-          </a:p>
-        </p:txBody>
-      </p:sp>
-      <p:sp>
-        <p:nvSpPr>
-          <p:cNvPr id="25" name="Slide Number Placeholder 0"/>
-          <p:cNvSpPr>
-            <a:spLocks noGrp="1"/>
-          </p:cNvSpPr>
-          <p:nvPr>
-            <p:ph type="sldNum" sz="quarter" idx="4294967295"/>
-          </p:nvPr>
-        </p:nvSpPr>
-        <p:spPr>
-          <a:xfrm>
-            <a:off x="27432" y="91440"/>
-            <a:ext cx="585216" cy="475488"/>
-          </a:xfrm>
-          <a:prstGeom prst="rect">
-            <a:avLst/>
-          </a:prstGeom>
-          <a:extLst>
-            <a:ext uri="{C572A759-6A51-4108-AA02-DFA0A04FC94B}">
-              <ma14:wrappingTextBoxFlag xmlns:ma14="http://schemas.microsoft.com/office/mac/drawingml/2011/main" val="0"/>
-            </a:ext>
-          </a:extLst>
-        </p:spPr>
-        <p:txBody>
-          <a:bodyPr/>
-          <a:lstStyle>
-            <a:lvl1pPr>
-              <a:defRPr sz="2000">
-                <a:solidFill>
-                  <a:srgbClr val="FFFFFF"/>
-                </a:solidFill>
-                <a:latin typeface="Calibri"/>
-                <a:ea typeface="Calibri"/>
-                <a:cs typeface="Calibri"/>
-              </a:defRPr>
-            </a:lvl1pPr>
-          </a:lstStyle>
-          <a:p>
-            <a:pPr algn="ctr"/>
-            <a:fld id="{F7021451-1387-4CA6-816F-3879F97B5CBC}" type="slidenum">
-              <a:rPr b="1" lang="en-US"/>
-              <a:t>6</a:t>
-            </a:fld>
-            <a:endParaRPr lang="en-US"/>
-          </a:p>
-        </p:txBody>
-      </p:sp>
-    </p:spTree>
-  </p:cSld>
-  <p:clrMapOvr>
-    <a:masterClrMapping/>
-  </p:clrMapOvr>
-</p:sld>
-</file>
-
-<file path=ppt/slides/slide60.xml><?xml version="1.0" encoding="utf-8"?>
-<p:sld xmlns:a="http://schemas.openxmlformats.org/drawingml/2006/main" xmlns:r="http://schemas.openxmlformats.org/officeDocument/2006/relationships" xmlns:p="http://schemas.openxmlformats.org/presentationml/2006/main">
-  <p:cSld name="Slide 60">
-    <p:spTree>
-      <p:nvGrpSpPr>
-        <p:cNvPr id="1" name=""/>
-        <p:cNvGrpSpPr/>
-        <p:nvPr/>
-      </p:nvGrpSpPr>
-      <p:grpSpPr>
-        <a:xfrm>
-          <a:off x="0" y="0"/>
-          <a:ext cx="0" cy="0"/>
-          <a:chOff x="0" y="0"/>
-          <a:chExt cx="0" cy="0"/>
-        </a:xfrm>
-      </p:grpSpPr>
-      <p:sp>
-        <p:nvSpPr>
-          <p:cNvPr id="2" name="Text 0"/>
-          <p:cNvSpPr/>
-          <p:nvPr/>
-        </p:nvSpPr>
-        <p:spPr>
-          <a:xfrm>
-            <a:off x="457200" y="713232"/>
-            <a:ext cx="11368735" cy="274320"/>
-          </a:xfrm>
-          <a:prstGeom prst="rect">
-            <a:avLst/>
-          </a:prstGeom>
-          <a:noFill/>
-          <a:ln/>
-        </p:spPr>
-        <p:txBody>
-          <a:bodyPr wrap="square" lIns="0" tIns="0" rIns="0" bIns="0" rtlCol="0" anchor="ctr"/>
-          <a:lstStyle/>
-          <a:p>
-            <a:pPr algn="r" indent="0" marL="0">
-              <a:buNone/>
-            </a:pPr>
-            <a:r>
-              <a:rPr lang="en-US" sz="1400" b="1" dirty="0">
-                <a:solidFill>
-                  <a:srgbClr val="1C3F6E"/>
-                </a:solidFill>
-                <a:latin typeface="Calibri" pitchFamily="34" charset="0"/>
-                <a:ea typeface="Calibri" pitchFamily="34" charset="-122"/>
-                <a:cs typeface="Calibri" pitchFamily="34" charset="-120"/>
-              </a:rPr>
-              <a:t>LOGBOOK</a:t>
-            </a:r>
-            <a:endParaRPr lang="en-US" sz="1400" dirty="0"/>
-          </a:p>
-        </p:txBody>
-      </p:sp>
-      <p:sp>
-        <p:nvSpPr>
-          <p:cNvPr id="3" name="Text 1"/>
-          <p:cNvSpPr/>
-          <p:nvPr/>
-        </p:nvSpPr>
-        <p:spPr>
-          <a:xfrm>
-            <a:off x="457200" y="1005840"/>
-            <a:ext cx="11277295" cy="731520"/>
-          </a:xfrm>
-          <a:prstGeom prst="rect">
-            <a:avLst/>
-          </a:prstGeom>
-          <a:noFill/>
-          <a:ln/>
-        </p:spPr>
-        <p:txBody>
-          <a:bodyPr wrap="square" lIns="0" tIns="0" rIns="0" bIns="0" rtlCol="0" anchor="ctr"/>
-          <a:lstStyle/>
-          <a:p>
-            <a:pPr algn="ctr" indent="0" marL="0">
-              <a:buNone/>
-            </a:pPr>
-            <a:r>
-              <a:rPr lang="en-US" sz="3600" b="1" dirty="0">
-                <a:solidFill>
-                  <a:srgbClr val="990011"/>
-                </a:solidFill>
-                <a:latin typeface="Times New Roman" pitchFamily="34" charset="0"/>
-                <a:ea typeface="Times New Roman" pitchFamily="34" charset="-122"/>
-                <a:cs typeface="Times New Roman" pitchFamily="34" charset="-120"/>
-              </a:rPr>
               <a:t>Official Logbook (2/2)</a:t>
             </a:r>
             <a:endParaRPr lang="en-US" sz="3600" dirty="0"/>
@@ -23148,7 +24260,7 @@
       </p:sp>
       <p:graphicFrame>
         <p:nvGraphicFramePr>
-          <p:cNvPr id="61" name="Table 0"/>
+          <p:cNvPr id="64" name="Table 0"/>
           <p:cNvGraphicFramePr>
             <a:graphicFrameLocks noGrp="1"/>
           </p:cNvGraphicFramePr>
@@ -23258,7 +24370,7 @@
                           <a:ea typeface="Calibri" pitchFamily="34" charset="-122"/>
                           <a:cs typeface="Calibri" pitchFamily="34" charset="-120"/>
                         </a:rPr>
-                        <a:t>DEFINITIONS; Demographic Factors; Non-Demographic Factors; How the Factors Influence Growth in Various Regions.</a:t>
+                        <a:t>DEFINITIONS; Demographic Factors; Non-Demographic Factors: Social and Natural; Non-Demographic Factors: Economic and Political; How the Factors Influence Growth in Various Regions.</a:t>
                       </a:r>
                       <a:endParaRPr lang="en-US" sz="1600" dirty="0">
                         <a:latin typeface="Calibri" charset="0"/>
@@ -23908,7 +25020,7 @@
             <a:pPr algn="ctr"/>
             <a:fld id="{F7021451-1387-4CA6-816F-3879F97B5CBC}" type="slidenum">
               <a:rPr b="1" lang="en-US"/>
-              <a:t>60</a:t>
+              <a:t>63</a:t>
             </a:fld>
             <a:endParaRPr lang="en-US"/>
           </a:p>
@@ -23922,9 +25034,9 @@
 </p:sld>
 </file>
 
-<file path=ppt/slides/slide61.xml><?xml version="1.0" encoding="utf-8"?>
+<file path=ppt/slides/slide64.xml><?xml version="1.0" encoding="utf-8"?>
 <p:sld xmlns:a="http://schemas.openxmlformats.org/drawingml/2006/main" xmlns:r="http://schemas.openxmlformats.org/officeDocument/2006/relationships" xmlns:p="http://schemas.openxmlformats.org/presentationml/2006/main">
-  <p:cSld name="Slide 61">
+  <p:cSld name="Slide 64">
     <p:spTree>
       <p:nvGrpSpPr>
         <p:cNvPr id="1" name=""/>
@@ -24233,7 +25345,7 @@
             <a:pPr algn="ctr"/>
             <a:fld id="{F7021451-1387-4CA6-816F-3879F97B5CBC}" type="slidenum">
               <a:rPr b="1" lang="en-US"/>
-              <a:t>61</a:t>
+              <a:t>64</a:t>
             </a:fld>
             <a:endParaRPr lang="en-US"/>
           </a:p>
@@ -24247,9 +25359,9 @@
 </p:sld>
 </file>
 
-<file path=ppt/slides/slide62.xml><?xml version="1.0" encoding="utf-8"?>
+<file path=ppt/slides/slide65.xml><?xml version="1.0" encoding="utf-8"?>
 <p:sld xmlns:a="http://schemas.openxmlformats.org/drawingml/2006/main" xmlns:r="http://schemas.openxmlformats.org/officeDocument/2006/relationships" xmlns:p="http://schemas.openxmlformats.org/presentationml/2006/main">
-  <p:cSld name="Slide 62">
+  <p:cSld name="Slide 65">
     <p:spTree>
       <p:nvGrpSpPr>
         <p:cNvPr id="1" name=""/>
@@ -24510,7 +25622,7 @@
                 <a:ea typeface="Calibri" pitchFamily="34" charset="-122"/>
                 <a:cs typeface="Calibri" pitchFamily="34" charset="-120"/>
               </a:rPr>
-              <a:t>Photo, board summary (Wars and natural disasters): “Secretary-General Visits Refugee Camps in Chad” by United Nations Photo, CC BY-NC-ND 2.0, via Flickr (https://www.flickr.com/photos/35483578@N03/6140060599)</a:t>
+              <a:t>Photo, board summary (Wars): “Secretary-General Visits Refugee Camps in Chad” by United Nations Photo, CC BY-NC-ND 2.0, via Flickr (https://www.flickr.com/photos/35483578@N03/6140060599)</a:t>
             </a:r>
             <a:endParaRPr lang="en-US" sz="1800" dirty="0"/>
           </a:p>
@@ -24579,7 +25691,7 @@
             <a:pPr algn="ctr"/>
             <a:fld id="{F7021451-1387-4CA6-816F-3879F97B5CBC}" type="slidenum">
               <a:rPr b="1" lang="en-US"/>
-              <a:t>62</a:t>
+              <a:t>65</a:t>
             </a:fld>
             <a:endParaRPr lang="en-US"/>
           </a:p>
